--- a/Efficiency_calculator/SEM_lapTime_consumption.pptx
+++ b/Efficiency_calculator/SEM_lapTime_consumption.pptx
@@ -224,7 +224,7 @@
           <a:p>
             <a:fld id="{D96A055B-0E81-4EEF-A36B-666997CD7E14}" type="datetimeFigureOut">
               <a:rPr lang="en-GB" smtClean="0"/>
-              <a:t>08/10/2026</a:t>
+              <a:t>09/10/2026</a:t>
             </a:fld>
             <a:endParaRPr lang="en-GB"/>
           </a:p>
@@ -734,7 +734,7 @@
           <a:p>
             <a:fld id="{A962E2B5-AD3A-452B-996C-1D06A125B710}" type="datetime1">
               <a:rPr lang="en-GB" smtClean="0"/>
-              <a:t>08/10/2026</a:t>
+              <a:t>09/10/2026</a:t>
             </a:fld>
             <a:endParaRPr lang="en-GB"/>
           </a:p>
@@ -926,7 +926,7 @@
           <a:p>
             <a:fld id="{CA9A9924-1784-4044-A2E4-3606370E1BB6}" type="datetime1">
               <a:rPr lang="en-GB" smtClean="0"/>
-              <a:t>08/10/2026</a:t>
+              <a:t>09/10/2026</a:t>
             </a:fld>
             <a:endParaRPr lang="en-GB" dirty="0">
               <a:latin typeface="Segoe UI Symbol" panose="020B0502040204020203" pitchFamily="34" charset="0"/>
@@ -1175,7 +1175,7 @@
           <a:p>
             <a:fld id="{30058C10-7476-49B5-8355-BBAFE5754F9E}" type="datetime1">
               <a:rPr lang="en-GB" smtClean="0"/>
-              <a:t>08/10/2026</a:t>
+              <a:t>09/10/2026</a:t>
             </a:fld>
             <a:endParaRPr lang="en-GB" dirty="0">
               <a:latin typeface="Segoe UI Symbol" panose="020B0502040204020203" pitchFamily="34" charset="0"/>
@@ -1606,7 +1606,7 @@
           <a:p>
             <a:fld id="{61067CC1-09C0-4CA6-A28C-A624AFD2E92A}" type="datetime1">
               <a:rPr lang="fr-BE" noProof="0" smtClean="0"/>
-              <a:t>08/10/2026</a:t>
+              <a:t>09-10-26</a:t>
             </a:fld>
             <a:endParaRPr lang="fr-BE" noProof="0" dirty="0">
               <a:latin typeface="Segoe UI Symbol" panose="020B0502040204020203" pitchFamily="34" charset="0"/>
@@ -1911,7 +1911,7 @@
           <a:p>
             <a:fld id="{CA9A9924-1784-4044-A2E4-3606370E1BB6}" type="datetime1">
               <a:rPr lang="fr-BE" noProof="0" smtClean="0"/>
-              <a:t>08-10-26</a:t>
+              <a:t>09-10-26</a:t>
             </a:fld>
             <a:endParaRPr lang="fr-BE" noProof="0" dirty="0">
               <a:latin typeface="Segoe UI Symbol" panose="020B0502040204020203" pitchFamily="34" charset="0"/>
@@ -1957,8 +1957,8 @@
           </a:p>
         </p:txBody>
       </p:sp>
-      <mc:AlternateContent xmlns:mc="http://schemas.openxmlformats.org/markup-compatibility/2006">
-        <mc:Choice xmlns:a14="http://schemas.microsoft.com/office/drawing/2010/main" Requires="a14">
+      <mc:AlternateContent xmlns:mc="http://schemas.openxmlformats.org/markup-compatibility/2006" xmlns:a14="http://schemas.microsoft.com/office/drawing/2010/main">
+        <mc:Choice Requires="a14">
           <p:sp>
             <p:nvSpPr>
               <p:cNvPr id="5" name="Content Placeholder 4">
@@ -2078,7 +2078,7 @@
             </p:txBody>
           </p:sp>
         </mc:Choice>
-        <mc:Fallback>
+        <mc:Fallback xmlns="">
           <p:sp>
             <p:nvSpPr>
               <p:cNvPr id="5" name="Content Placeholder 4">
@@ -2122,8 +2122,8 @@
           </p:sp>
         </mc:Fallback>
       </mc:AlternateContent>
-      <mc:AlternateContent xmlns:mc="http://schemas.openxmlformats.org/markup-compatibility/2006">
-        <mc:Choice xmlns:a14="http://schemas.microsoft.com/office/drawing/2010/main" Requires="a14">
+      <mc:AlternateContent xmlns:mc="http://schemas.openxmlformats.org/markup-compatibility/2006" xmlns:a14="http://schemas.microsoft.com/office/drawing/2010/main">
+        <mc:Choice Requires="a14">
           <p:sp>
             <p:nvSpPr>
               <p:cNvPr id="6" name="TextBox 5">
@@ -2273,7 +2273,7 @@
             </p:txBody>
           </p:sp>
         </mc:Choice>
-        <mc:Fallback>
+        <mc:Fallback xmlns="">
           <p:sp>
             <p:nvSpPr>
               <p:cNvPr id="6" name="TextBox 5">
@@ -2520,8 +2520,8 @@
           </a:fontRef>
         </p:style>
       </p:cxnSp>
-      <mc:AlternateContent xmlns:mc="http://schemas.openxmlformats.org/markup-compatibility/2006">
-        <mc:Choice xmlns:a14="http://schemas.microsoft.com/office/drawing/2010/main" Requires="a14">
+      <mc:AlternateContent xmlns:mc="http://schemas.openxmlformats.org/markup-compatibility/2006" xmlns:a14="http://schemas.microsoft.com/office/drawing/2010/main">
+        <mc:Choice Requires="a14">
           <p:sp>
             <p:nvSpPr>
               <p:cNvPr id="13" name="Content Placeholder 4">
@@ -2923,7 +2923,7 @@
             </p:txBody>
           </p:sp>
         </mc:Choice>
-        <mc:Fallback>
+        <mc:Fallback xmlns="">
           <p:sp>
             <p:nvSpPr>
               <p:cNvPr id="13" name="Content Placeholder 4">
@@ -3167,7 +3167,7 @@
           <a:p>
             <a:fld id="{CA9A9924-1784-4044-A2E4-3606370E1BB6}" type="datetime1">
               <a:rPr lang="fr-BE" noProof="0" smtClean="0"/>
-              <a:t>08/10/2026</a:t>
+              <a:t>09-10-26</a:t>
             </a:fld>
             <a:endParaRPr lang="fr-BE" noProof="0" dirty="0">
               <a:latin typeface="Segoe UI Symbol" panose="020B0502040204020203" pitchFamily="34" charset="0"/>
@@ -3213,8 +3213,8 @@
           </a:p>
         </p:txBody>
       </p:sp>
-      <mc:AlternateContent xmlns:mc="http://schemas.openxmlformats.org/markup-compatibility/2006">
-        <mc:Choice xmlns:a14="http://schemas.microsoft.com/office/drawing/2010/main" Requires="a14">
+      <mc:AlternateContent xmlns:mc="http://schemas.openxmlformats.org/markup-compatibility/2006" xmlns:a14="http://schemas.microsoft.com/office/drawing/2010/main">
+        <mc:Choice Requires="a14">
           <p:sp>
             <p:nvSpPr>
               <p:cNvPr id="5" name="Content Placeholder 4">
@@ -3512,7 +3512,7 @@
             </p:txBody>
           </p:sp>
         </mc:Choice>
-        <mc:Fallback>
+        <mc:Fallback xmlns="">
           <p:sp>
             <p:nvSpPr>
               <p:cNvPr id="5" name="Content Placeholder 4">
@@ -5050,7 +5050,7 @@
           <a:p>
             <a:fld id="{CA9A9924-1784-4044-A2E4-3606370E1BB6}" type="datetime1">
               <a:rPr lang="fr-BE" noProof="0" smtClean="0"/>
-              <a:t>08-10-26</a:t>
+              <a:t>09-10-26</a:t>
             </a:fld>
             <a:endParaRPr lang="fr-BE" noProof="0" dirty="0">
               <a:latin typeface="Segoe UI Symbol" panose="020B0502040204020203" pitchFamily="34" charset="0"/>
@@ -5385,7 +5385,7 @@
           <a:p>
             <a:fld id="{CA9A9924-1784-4044-A2E4-3606370E1BB6}" type="datetime1">
               <a:rPr lang="fr-BE" noProof="0" smtClean="0"/>
-              <a:t>08/10/2026</a:t>
+              <a:t>09-10-26</a:t>
             </a:fld>
             <a:endParaRPr lang="fr-BE" noProof="0" dirty="0">
               <a:latin typeface="Segoe UI Symbol" panose="020B0502040204020203" pitchFamily="34" charset="0"/>
@@ -5431,8 +5431,8 @@
           </a:p>
         </p:txBody>
       </p:sp>
-      <mc:AlternateContent xmlns:mc="http://schemas.openxmlformats.org/markup-compatibility/2006">
-        <mc:Choice xmlns:a14="http://schemas.microsoft.com/office/drawing/2010/main" Requires="a14">
+      <mc:AlternateContent xmlns:mc="http://schemas.openxmlformats.org/markup-compatibility/2006" xmlns:a14="http://schemas.microsoft.com/office/drawing/2010/main">
+        <mc:Choice Requires="a14">
           <p:sp>
             <p:nvSpPr>
               <p:cNvPr id="5" name="Content Placeholder 4">
@@ -5807,7 +5807,7 @@
             </p:txBody>
           </p:sp>
         </mc:Choice>
-        <mc:Fallback>
+        <mc:Fallback xmlns="">
           <p:sp>
             <p:nvSpPr>
               <p:cNvPr id="5" name="Content Placeholder 4">
@@ -6073,7 +6073,7 @@
           <a:p>
             <a:fld id="{CA9A9924-1784-4044-A2E4-3606370E1BB6}" type="datetime1">
               <a:rPr lang="fr-BE" noProof="0" smtClean="0"/>
-              <a:t>08/10/2026</a:t>
+              <a:t>09-10-26</a:t>
             </a:fld>
             <a:endParaRPr lang="fr-BE" noProof="0" dirty="0">
               <a:latin typeface="Segoe UI Symbol" panose="020B0502040204020203" pitchFamily="34" charset="0"/>
@@ -6155,8 +6155,8 @@
           </a:prstGeom>
         </p:spPr>
       </p:pic>
-      <mc:AlternateContent xmlns:mc="http://schemas.openxmlformats.org/markup-compatibility/2006">
-        <mc:Choice xmlns:a14="http://schemas.microsoft.com/office/drawing/2010/main" Requires="a14">
+      <mc:AlternateContent xmlns:mc="http://schemas.openxmlformats.org/markup-compatibility/2006" xmlns:a14="http://schemas.microsoft.com/office/drawing/2010/main">
+        <mc:Choice Requires="a14">
           <p:sp>
             <p:nvSpPr>
               <p:cNvPr id="12" name="TextBox 11">
@@ -6185,6 +6185,7 @@
               </a:bodyPr>
               <a:lstStyle/>
               <a:p>
+                <a:pPr/>
                 <a14:m>
                   <m:oMathPara xmlns:m="http://schemas.openxmlformats.org/officeDocument/2006/math">
                     <m:oMath>
@@ -6227,6 +6228,7 @@
                 </a:endParaRPr>
               </a:p>
               <a:p>
+                <a:pPr/>
                 <a14:m>
                   <m:oMathPara xmlns:m="http://schemas.openxmlformats.org/officeDocument/2006/math">
                     <m:oMath>
@@ -6287,7 +6289,7 @@
             </p:txBody>
           </p:sp>
         </mc:Choice>
-        <mc:Fallback>
+        <mc:Fallback xmlns="">
           <p:sp>
             <p:nvSpPr>
               <p:cNvPr id="12" name="TextBox 11">
@@ -6332,8 +6334,8 @@
           </p:sp>
         </mc:Fallback>
       </mc:AlternateContent>
-      <mc:AlternateContent xmlns:mc="http://schemas.openxmlformats.org/markup-compatibility/2006">
-        <mc:Choice xmlns:a14="http://schemas.microsoft.com/office/drawing/2010/main" Requires="a14">
+      <mc:AlternateContent xmlns:mc="http://schemas.openxmlformats.org/markup-compatibility/2006" xmlns:a14="http://schemas.microsoft.com/office/drawing/2010/main">
+        <mc:Choice Requires="a14">
           <p:sp>
             <p:nvSpPr>
               <p:cNvPr id="6" name="TextBox 5">
@@ -6479,7 +6481,7 @@
             </p:txBody>
           </p:sp>
         </mc:Choice>
-        <mc:Fallback>
+        <mc:Fallback xmlns="">
           <p:sp>
             <p:nvSpPr>
               <p:cNvPr id="6" name="TextBox 5">
@@ -6621,7 +6623,7 @@
           <a:p>
             <a:fld id="{CA9A9924-1784-4044-A2E4-3606370E1BB6}" type="datetime1">
               <a:rPr lang="fr-BE" noProof="0" smtClean="0"/>
-              <a:t>08/10/2026</a:t>
+              <a:t>09-10-26</a:t>
             </a:fld>
             <a:endParaRPr lang="fr-BE" noProof="0" dirty="0">
               <a:latin typeface="Segoe UI Symbol" panose="020B0502040204020203" pitchFamily="34" charset="0"/>
@@ -7145,7 +7147,7 @@
           <a:p>
             <a:fld id="{CA9A9924-1784-4044-A2E4-3606370E1BB6}" type="datetime1">
               <a:rPr lang="fr-BE" noProof="0" smtClean="0"/>
-              <a:t>08/10/2026</a:t>
+              <a:t>09-10-26</a:t>
             </a:fld>
             <a:endParaRPr lang="fr-BE" noProof="0" dirty="0">
               <a:latin typeface="Segoe UI Symbol" panose="020B0502040204020203" pitchFamily="34" charset="0"/>
@@ -7418,7 +7420,7 @@
           <a:p>
             <a:fld id="{CA9A9924-1784-4044-A2E4-3606370E1BB6}" type="datetime1">
               <a:rPr lang="fr-BE" noProof="0" smtClean="0"/>
-              <a:t>08-10-26</a:t>
+              <a:t>09-10-26</a:t>
             </a:fld>
             <a:endParaRPr lang="fr-BE" noProof="0" dirty="0">
               <a:latin typeface="Segoe UI Symbol" panose="020B0502040204020203" pitchFamily="34" charset="0"/>
@@ -7772,7 +7774,7 @@
           <a:p>
             <a:fld id="{CA9A9924-1784-4044-A2E4-3606370E1BB6}" type="datetime1">
               <a:rPr lang="en-GB" smtClean="0"/>
-              <a:t>08/10/2026</a:t>
+              <a:t>09/10/2026</a:t>
             </a:fld>
             <a:endParaRPr lang="en-GB" dirty="0">
               <a:latin typeface="Segoe UI Symbol" panose="020B0502040204020203" pitchFamily="34" charset="0"/>
@@ -7928,8 +7930,8 @@
           </a:prstGeom>
         </p:spPr>
       </p:pic>
-      <mc:AlternateContent xmlns:mc="http://schemas.openxmlformats.org/markup-compatibility/2006">
-        <mc:Choice xmlns:a14="http://schemas.microsoft.com/office/drawing/2010/main" Requires="a14">
+      <mc:AlternateContent xmlns:mc="http://schemas.openxmlformats.org/markup-compatibility/2006" xmlns:a14="http://schemas.microsoft.com/office/drawing/2010/main">
+        <mc:Choice Requires="a14">
           <p:sp>
             <p:nvSpPr>
               <p:cNvPr id="23" name="TextBox 22">
@@ -8031,7 +8033,7 @@
             </p:txBody>
           </p:sp>
         </mc:Choice>
-        <mc:Fallback>
+        <mc:Fallback xmlns="">
           <p:sp>
             <p:nvSpPr>
               <p:cNvPr id="23" name="TextBox 22">
@@ -8301,7 +8303,7 @@
           <a:p>
             <a:fld id="{CA9A9924-1784-4044-A2E4-3606370E1BB6}" type="datetime1">
               <a:rPr lang="en-GB" smtClean="0"/>
-              <a:t>08/10/2026</a:t>
+              <a:t>09/10/2026</a:t>
             </a:fld>
             <a:endParaRPr lang="en-GB" dirty="0">
               <a:latin typeface="Segoe UI Symbol" panose="020B0502040204020203" pitchFamily="34" charset="0"/>
@@ -8347,8 +8349,8 @@
           </a:p>
         </p:txBody>
       </p:sp>
-      <mc:AlternateContent xmlns:mc="http://schemas.openxmlformats.org/markup-compatibility/2006">
-        <mc:Choice xmlns:a14="http://schemas.microsoft.com/office/drawing/2010/main" Requires="a14">
+      <mc:AlternateContent xmlns:mc="http://schemas.openxmlformats.org/markup-compatibility/2006" xmlns:a14="http://schemas.microsoft.com/office/drawing/2010/main">
+        <mc:Choice Requires="a14">
           <p:sp>
             <p:nvSpPr>
               <p:cNvPr id="23" name="TextBox 22">
@@ -8466,7 +8468,7 @@
             </p:txBody>
           </p:sp>
         </mc:Choice>
-        <mc:Fallback>
+        <mc:Fallback xmlns="">
           <p:sp>
             <p:nvSpPr>
               <p:cNvPr id="23" name="TextBox 22">
@@ -8925,7 +8927,7 @@
           <a:p>
             <a:fld id="{CA9A9924-1784-4044-A2E4-3606370E1BB6}" type="datetime1">
               <a:rPr lang="fr-BE" noProof="0" smtClean="0"/>
-              <a:t>08/10/2026</a:t>
+              <a:t>09-10-26</a:t>
             </a:fld>
             <a:endParaRPr lang="fr-BE" noProof="0" dirty="0">
               <a:latin typeface="Segoe UI Symbol" panose="020B0502040204020203" pitchFamily="34" charset="0"/>
@@ -9296,7 +9298,7 @@
           <a:p>
             <a:fld id="{CA9A9924-1784-4044-A2E4-3606370E1BB6}" type="datetime1">
               <a:rPr lang="en-GB" smtClean="0"/>
-              <a:t>08/10/2026</a:t>
+              <a:t>09/10/2026</a:t>
             </a:fld>
             <a:endParaRPr lang="en-GB" dirty="0">
               <a:latin typeface="Segoe UI Symbol" panose="020B0502040204020203" pitchFamily="34" charset="0"/>
@@ -9342,8 +9344,8 @@
           </a:p>
         </p:txBody>
       </p:sp>
-      <mc:AlternateContent xmlns:mc="http://schemas.openxmlformats.org/markup-compatibility/2006">
-        <mc:Choice xmlns:a14="http://schemas.microsoft.com/office/drawing/2010/main" Requires="a14">
+      <mc:AlternateContent xmlns:mc="http://schemas.openxmlformats.org/markup-compatibility/2006" xmlns:a14="http://schemas.microsoft.com/office/drawing/2010/main">
+        <mc:Choice Requires="a14">
           <p:sp>
             <p:nvSpPr>
               <p:cNvPr id="23" name="TextBox 22">
@@ -9461,7 +9463,7 @@
             </p:txBody>
           </p:sp>
         </mc:Choice>
-        <mc:Fallback>
+        <mc:Fallback xmlns="">
           <p:sp>
             <p:nvSpPr>
               <p:cNvPr id="23" name="TextBox 22">
@@ -9826,7 +9828,7 @@
           <a:p>
             <a:fld id="{CA9A9924-1784-4044-A2E4-3606370E1BB6}" type="datetime1">
               <a:rPr lang="fr-BE" noProof="0" smtClean="0"/>
-              <a:t>08-10-26</a:t>
+              <a:t>09-10-26</a:t>
             </a:fld>
             <a:endParaRPr lang="fr-BE" noProof="0" dirty="0">
               <a:latin typeface="Segoe UI Symbol" panose="020B0502040204020203" pitchFamily="34" charset="0"/>
@@ -10173,7 +10175,7 @@
           <a:p>
             <a:fld id="{CA9A9924-1784-4044-A2E4-3606370E1BB6}" type="datetime1">
               <a:rPr lang="fr-BE" noProof="0" smtClean="0"/>
-              <a:t>08/10/2026</a:t>
+              <a:t>09-10-26</a:t>
             </a:fld>
             <a:endParaRPr lang="fr-BE" noProof="0" dirty="0">
               <a:latin typeface="Segoe UI Symbol" panose="020B0502040204020203" pitchFamily="34" charset="0"/>
@@ -10601,7 +10603,7 @@
           <a:p>
             <a:fld id="{CA9A9924-1784-4044-A2E4-3606370E1BB6}" type="datetime1">
               <a:rPr lang="fr-BE" noProof="0" smtClean="0"/>
-              <a:t>08-10-26</a:t>
+              <a:t>09-10-26</a:t>
             </a:fld>
             <a:endParaRPr lang="fr-BE" noProof="0" dirty="0">
               <a:latin typeface="Segoe UI Symbol" panose="020B0502040204020203" pitchFamily="34" charset="0"/>
@@ -10952,7 +10954,7 @@
           <a:p>
             <a:fld id="{CA9A9924-1784-4044-A2E4-3606370E1BB6}" type="datetime1">
               <a:rPr lang="fr-BE" noProof="0" smtClean="0"/>
-              <a:t>08-10-26</a:t>
+              <a:t>09-10-26</a:t>
             </a:fld>
             <a:endParaRPr lang="fr-BE" noProof="0" dirty="0">
               <a:latin typeface="Segoe UI Symbol" panose="020B0502040204020203" pitchFamily="34" charset="0"/>
@@ -11249,8 +11251,8 @@
           </a:p>
         </p:txBody>
       </p:sp>
-      <mc:AlternateContent xmlns:mc="http://schemas.openxmlformats.org/markup-compatibility/2006">
-        <mc:Choice xmlns:a14="http://schemas.microsoft.com/office/drawing/2010/main" Requires="a14">
+      <mc:AlternateContent xmlns:mc="http://schemas.openxmlformats.org/markup-compatibility/2006" xmlns:a14="http://schemas.microsoft.com/office/drawing/2010/main">
+        <mc:Choice Requires="a14">
           <p:sp>
             <p:nvSpPr>
               <p:cNvPr id="15" name="TextBox 14">
@@ -11389,7 +11391,7 @@
             </p:txBody>
           </p:sp>
         </mc:Choice>
-        <mc:Fallback>
+        <mc:Fallback xmlns="">
           <p:sp>
             <p:nvSpPr>
               <p:cNvPr id="15" name="TextBox 14">
@@ -11522,7 +11524,7 @@
           <a:p>
             <a:fld id="{CA9A9924-1784-4044-A2E4-3606370E1BB6}" type="datetime1">
               <a:rPr lang="fr-BE" noProof="0" smtClean="0"/>
-              <a:t>08-10-26</a:t>
+              <a:t>09-10-26</a:t>
             </a:fld>
             <a:endParaRPr lang="fr-BE" noProof="0" dirty="0">
               <a:latin typeface="Segoe UI Symbol" panose="020B0502040204020203" pitchFamily="34" charset="0"/>
@@ -11869,7 +11871,7 @@
           <a:p>
             <a:fld id="{CA9A9924-1784-4044-A2E4-3606370E1BB6}" type="datetime1">
               <a:rPr lang="fr-BE" noProof="0" smtClean="0"/>
-              <a:t>08/10/2026</a:t>
+              <a:t>09-10-26</a:t>
             </a:fld>
             <a:endParaRPr lang="fr-BE" noProof="0" dirty="0">
               <a:latin typeface="Segoe UI Symbol" panose="020B0502040204020203" pitchFamily="34" charset="0"/>
@@ -11915,8 +11917,8 @@
           </a:p>
         </p:txBody>
       </p:sp>
-      <mc:AlternateContent xmlns:mc="http://schemas.openxmlformats.org/markup-compatibility/2006">
-        <mc:Choice xmlns:a14="http://schemas.microsoft.com/office/drawing/2010/main" Requires="a14">
+      <mc:AlternateContent xmlns:mc="http://schemas.openxmlformats.org/markup-compatibility/2006" xmlns:a14="http://schemas.microsoft.com/office/drawing/2010/main">
+        <mc:Choice Requires="a14">
           <p:sp>
             <p:nvSpPr>
               <p:cNvPr id="5" name="Content Placeholder 4">
@@ -12122,7 +12124,7 @@
             </p:txBody>
           </p:sp>
         </mc:Choice>
-        <mc:Fallback>
+        <mc:Fallback xmlns="">
           <p:sp>
             <p:nvSpPr>
               <p:cNvPr id="5" name="Content Placeholder 4">
@@ -12254,7 +12256,7 @@
           <a:p>
             <a:fld id="{CA9A9924-1784-4044-A2E4-3606370E1BB6}" type="datetime1">
               <a:rPr lang="fr-BE" noProof="0" smtClean="0"/>
-              <a:t>08-10-26</a:t>
+              <a:t>09-10-26</a:t>
             </a:fld>
             <a:endParaRPr lang="fr-BE" noProof="0" dirty="0">
               <a:latin typeface="Segoe UI Symbol" panose="020B0502040204020203" pitchFamily="34" charset="0"/>
@@ -12605,7 +12607,7 @@
           <a:p>
             <a:fld id="{CA9A9924-1784-4044-A2E4-3606370E1BB6}" type="datetime1">
               <a:rPr lang="en-GB" smtClean="0"/>
-              <a:t>08/10/2026</a:t>
+              <a:t>09/10/2026</a:t>
             </a:fld>
             <a:endParaRPr lang="en-GB" dirty="0">
               <a:latin typeface="Segoe UI Symbol" panose="020B0502040204020203" pitchFamily="34" charset="0"/>
@@ -13005,6 +13007,73 @@
               <a:rPr lang="en-GB" sz="2200" dirty="0"/>
               <a:t>)</a:t>
             </a:r>
+          </a:p>
+          <a:p>
+            <a:r>
+              <a:rPr lang="en-GB" sz="2200" dirty="0"/>
+              <a:t>Idée pour validation : utiliser </a:t>
+            </a:r>
+            <a:r>
+              <a:rPr lang="en-GB" sz="2200" dirty="0" err="1"/>
+              <a:t>mesures</a:t>
+            </a:r>
+            <a:r>
+              <a:rPr lang="en-GB" sz="2200" dirty="0"/>
+              <a:t> </a:t>
+            </a:r>
+            <a:r>
+              <a:rPr lang="en-GB" sz="2200" dirty="0" err="1"/>
+              <a:t>depuis</a:t>
+            </a:r>
+            <a:r>
+              <a:rPr lang="en-GB" sz="2200" dirty="0"/>
+              <a:t> </a:t>
+            </a:r>
+            <a:r>
+              <a:rPr lang="en-GB" sz="2200" dirty="0" err="1"/>
+              <a:t>accéléro</a:t>
+            </a:r>
+            <a:r>
+              <a:rPr lang="en-GB" sz="2200" dirty="0"/>
+              <a:t> / vel. Sensor pour </a:t>
+            </a:r>
+            <a:r>
+              <a:rPr lang="en-GB" sz="2200" dirty="0" err="1"/>
+              <a:t>reconstruire</a:t>
+            </a:r>
+            <a:r>
+              <a:rPr lang="en-GB" sz="2200" dirty="0"/>
+              <a:t> un </a:t>
+            </a:r>
+            <a:r>
+              <a:rPr lang="en-GB" sz="2200" dirty="0" err="1"/>
+              <a:t>profil</a:t>
+            </a:r>
+            <a:r>
+              <a:rPr lang="en-GB" sz="2200" dirty="0"/>
+              <a:t> de Vitesse &amp; </a:t>
+            </a:r>
+            <a:r>
+              <a:rPr lang="en-GB" sz="2200" dirty="0" err="1"/>
+              <a:t>mettre</a:t>
+            </a:r>
+            <a:r>
+              <a:rPr lang="en-GB" sz="2200" dirty="0"/>
+              <a:t> dans le </a:t>
+            </a:r>
+            <a:r>
+              <a:rPr lang="en-GB" sz="2200" dirty="0" err="1"/>
+              <a:t>calcul</a:t>
+            </a:r>
+            <a:r>
+              <a:rPr lang="en-GB" sz="2200" dirty="0"/>
+              <a:t> de consommation </a:t>
+            </a:r>
+            <a:r>
+              <a:rPr lang="en-GB" sz="2200"/>
+              <a:t>pour comparer</a:t>
+            </a:r>
+            <a:endParaRPr lang="en-GB" sz="2200" dirty="0"/>
           </a:p>
         </p:txBody>
       </p:sp>
@@ -13094,7 +13163,7 @@
           <a:p>
             <a:fld id="{CA9A9924-1784-4044-A2E4-3606370E1BB6}" type="datetime1">
               <a:rPr lang="fr-BE" noProof="0" smtClean="0"/>
-              <a:t>08/10/2026</a:t>
+              <a:t>09-10-26</a:t>
             </a:fld>
             <a:endParaRPr lang="fr-BE" noProof="0" dirty="0">
               <a:latin typeface="Segoe UI Symbol" panose="020B0502040204020203" pitchFamily="34" charset="0"/>
@@ -13336,7 +13405,7 @@
           <a:p>
             <a:fld id="{CA9A9924-1784-4044-A2E4-3606370E1BB6}" type="datetime1">
               <a:rPr lang="fr-BE" noProof="0" smtClean="0"/>
-              <a:t>08-10-26</a:t>
+              <a:t>09-10-26</a:t>
             </a:fld>
             <a:endParaRPr lang="fr-BE" noProof="0" dirty="0">
               <a:latin typeface="Segoe UI Symbol" panose="020B0502040204020203" pitchFamily="34" charset="0"/>
@@ -13680,7 +13749,7 @@
           <a:p>
             <a:fld id="{CA9A9924-1784-4044-A2E4-3606370E1BB6}" type="datetime1">
               <a:rPr lang="en-GB" smtClean="0"/>
-              <a:t>08/10/2026</a:t>
+              <a:t>09/10/2026</a:t>
             </a:fld>
             <a:endParaRPr lang="en-GB" dirty="0">
               <a:latin typeface="Segoe UI Symbol" panose="020B0502040204020203" pitchFamily="34" charset="0"/>
@@ -14327,7 +14396,7 @@
           <a:p>
             <a:fld id="{CA9A9924-1784-4044-A2E4-3606370E1BB6}" type="datetime1">
               <a:rPr lang="en-GB" smtClean="0"/>
-              <a:t>08/10/2026</a:t>
+              <a:t>09/10/2026</a:t>
             </a:fld>
             <a:endParaRPr lang="en-GB" dirty="0">
               <a:latin typeface="Segoe UI Symbol" panose="020B0502040204020203" pitchFamily="34" charset="0"/>
@@ -14373,8 +14442,8 @@
           </a:p>
         </p:txBody>
       </p:sp>
-      <mc:AlternateContent xmlns:mc="http://schemas.openxmlformats.org/markup-compatibility/2006">
-        <mc:Choice xmlns:a14="http://schemas.microsoft.com/office/drawing/2010/main" Requires="a14">
+      <mc:AlternateContent xmlns:mc="http://schemas.openxmlformats.org/markup-compatibility/2006" xmlns:a14="http://schemas.microsoft.com/office/drawing/2010/main">
+        <mc:Choice Requires="a14">
           <p:sp>
             <p:nvSpPr>
               <p:cNvPr id="8" name="Content Placeholder 7">
@@ -14898,7 +14967,7 @@
             </p:txBody>
           </p:sp>
         </mc:Choice>
-        <mc:Fallback>
+        <mc:Fallback xmlns="">
           <p:sp>
             <p:nvSpPr>
               <p:cNvPr id="8" name="Content Placeholder 7">
@@ -15002,8 +15071,8 @@
           </a:p>
         </p:txBody>
       </p:sp>
-      <mc:AlternateContent xmlns:mc="http://schemas.openxmlformats.org/markup-compatibility/2006">
-        <mc:Choice xmlns:a14="http://schemas.microsoft.com/office/drawing/2010/main" Requires="a14">
+      <mc:AlternateContent xmlns:mc="http://schemas.openxmlformats.org/markup-compatibility/2006" xmlns:a14="http://schemas.microsoft.com/office/drawing/2010/main">
+        <mc:Choice Requires="a14">
           <p:sp>
             <p:nvSpPr>
               <p:cNvPr id="13" name="TextBox 12">
@@ -15099,7 +15168,7 @@
             </p:txBody>
           </p:sp>
         </mc:Choice>
-        <mc:Fallback>
+        <mc:Fallback xmlns="">
           <p:sp>
             <p:nvSpPr>
               <p:cNvPr id="13" name="TextBox 12">
@@ -15144,8 +15213,8 @@
           </p:sp>
         </mc:Fallback>
       </mc:AlternateContent>
-      <mc:AlternateContent xmlns:mc="http://schemas.openxmlformats.org/markup-compatibility/2006">
-        <mc:Choice xmlns:a14="http://schemas.microsoft.com/office/drawing/2010/main" Requires="a14">
+      <mc:AlternateContent xmlns:mc="http://schemas.openxmlformats.org/markup-compatibility/2006" xmlns:a14="http://schemas.microsoft.com/office/drawing/2010/main">
+        <mc:Choice Requires="a14">
           <p:sp>
             <p:nvSpPr>
               <p:cNvPr id="15" name="TextBox 14">
@@ -15398,7 +15467,7 @@
             </p:txBody>
           </p:sp>
         </mc:Choice>
-        <mc:Fallback>
+        <mc:Fallback xmlns="">
           <p:sp>
             <p:nvSpPr>
               <p:cNvPr id="15" name="TextBox 14">
@@ -15496,8 +15565,8 @@
           </a:p>
         </p:txBody>
       </p:sp>
-      <mc:AlternateContent xmlns:mc="http://schemas.openxmlformats.org/markup-compatibility/2006">
-        <mc:Choice xmlns:a14="http://schemas.microsoft.com/office/drawing/2010/main" Requires="a14">
+      <mc:AlternateContent xmlns:mc="http://schemas.openxmlformats.org/markup-compatibility/2006" xmlns:a14="http://schemas.microsoft.com/office/drawing/2010/main">
+        <mc:Choice Requires="a14">
           <p:sp>
             <p:nvSpPr>
               <p:cNvPr id="21" name="TextBox 20">
@@ -15634,7 +15703,7 @@
             </p:txBody>
           </p:sp>
         </mc:Choice>
-        <mc:Fallback>
+        <mc:Fallback xmlns="">
           <p:sp>
             <p:nvSpPr>
               <p:cNvPr id="21" name="TextBox 20">
@@ -15780,7 +15849,7 @@
           <a:p>
             <a:fld id="{CA9A9924-1784-4044-A2E4-3606370E1BB6}" type="datetime1">
               <a:rPr lang="en-GB" smtClean="0"/>
-              <a:t>08/10/2026</a:t>
+              <a:t>09/10/2026</a:t>
             </a:fld>
             <a:endParaRPr lang="en-GB" dirty="0">
               <a:latin typeface="Segoe UI Symbol" panose="020B0502040204020203" pitchFamily="34" charset="0"/>
@@ -15826,8 +15895,8 @@
           </a:p>
         </p:txBody>
       </p:sp>
-      <mc:AlternateContent xmlns:mc="http://schemas.openxmlformats.org/markup-compatibility/2006">
-        <mc:Choice xmlns:a14="http://schemas.microsoft.com/office/drawing/2010/main" Requires="a14">
+      <mc:AlternateContent xmlns:mc="http://schemas.openxmlformats.org/markup-compatibility/2006" xmlns:a14="http://schemas.microsoft.com/office/drawing/2010/main">
+        <mc:Choice Requires="a14">
           <p:sp>
             <p:nvSpPr>
               <p:cNvPr id="6" name="Content Placeholder 5">
@@ -16449,7 +16518,7 @@
             </p:txBody>
           </p:sp>
         </mc:Choice>
-        <mc:Fallback>
+        <mc:Fallback xmlns="">
           <p:sp>
             <p:nvSpPr>
               <p:cNvPr id="6" name="Content Placeholder 5">
@@ -18159,8 +18228,8 @@
             </a:p>
           </p:txBody>
         </p:sp>
-        <mc:AlternateContent xmlns:mc="http://schemas.openxmlformats.org/markup-compatibility/2006">
-          <mc:Choice xmlns:a14="http://schemas.microsoft.com/office/drawing/2010/main" Requires="a14">
+        <mc:AlternateContent xmlns:mc="http://schemas.openxmlformats.org/markup-compatibility/2006" xmlns:a14="http://schemas.microsoft.com/office/drawing/2010/main">
+          <mc:Choice Requires="a14">
             <p:sp>
               <p:nvSpPr>
                 <p:cNvPr id="22" name="TextBox 21">
@@ -18189,6 +18258,7 @@
                 </a:bodyPr>
                 <a:lstStyle/>
                 <a:p>
+                  <a:pPr/>
                   <a14:m>
                     <m:oMathPara xmlns:m="http://schemas.openxmlformats.org/officeDocument/2006/math">
                       <m:oMath>
@@ -18312,7 +18382,7 @@
               </p:txBody>
             </p:sp>
           </mc:Choice>
-          <mc:Fallback>
+          <mc:Fallback xmlns="">
             <p:sp>
               <p:nvSpPr>
                 <p:cNvPr id="22" name="TextBox 21">
@@ -18572,7 +18642,7 @@
           <a:p>
             <a:fld id="{CA9A9924-1784-4044-A2E4-3606370E1BB6}" type="datetime1">
               <a:rPr lang="en-GB" smtClean="0"/>
-              <a:t>08/10/2026</a:t>
+              <a:t>09/10/2026</a:t>
             </a:fld>
             <a:endParaRPr lang="en-GB" dirty="0">
               <a:latin typeface="Segoe UI Symbol" panose="020B0502040204020203" pitchFamily="34" charset="0"/>
@@ -18903,8 +18973,8 @@
           </a:p>
         </p:txBody>
       </p:sp>
-      <mc:AlternateContent xmlns:mc="http://schemas.openxmlformats.org/markup-compatibility/2006">
-        <mc:Choice xmlns:a14="http://schemas.microsoft.com/office/drawing/2010/main" Requires="a14">
+      <mc:AlternateContent xmlns:mc="http://schemas.openxmlformats.org/markup-compatibility/2006" xmlns:a14="http://schemas.microsoft.com/office/drawing/2010/main">
+        <mc:Choice Requires="a14">
           <p:sp>
             <p:nvSpPr>
               <p:cNvPr id="7" name="TextBox 6">
@@ -19010,7 +19080,7 @@
             </p:txBody>
           </p:sp>
         </mc:Choice>
-        <mc:Fallback>
+        <mc:Fallback xmlns="">
           <p:sp>
             <p:nvSpPr>
               <p:cNvPr id="7" name="TextBox 6">
@@ -19236,8 +19306,8 @@
           </a:prstGeom>
         </p:spPr>
       </p:pic>
-      <mc:AlternateContent xmlns:mc="http://schemas.openxmlformats.org/markup-compatibility/2006">
-        <mc:Choice xmlns:a14="http://schemas.microsoft.com/office/drawing/2010/main" Requires="a14">
+      <mc:AlternateContent xmlns:mc="http://schemas.openxmlformats.org/markup-compatibility/2006" xmlns:a14="http://schemas.microsoft.com/office/drawing/2010/main">
+        <mc:Choice Requires="a14">
           <p:sp>
             <p:nvSpPr>
               <p:cNvPr id="30" name="TextBox 29">
@@ -19339,7 +19409,7 @@
             </p:txBody>
           </p:sp>
         </mc:Choice>
-        <mc:Fallback>
+        <mc:Fallback xmlns="">
           <p:sp>
             <p:nvSpPr>
               <p:cNvPr id="30" name="TextBox 29">
@@ -19529,7 +19599,7 @@
           <a:p>
             <a:fld id="{03B5460E-E22B-4565-90E6-E4027A0F32B5}" type="datetime1">
               <a:rPr lang="fr-BE" noProof="0" smtClean="0"/>
-              <a:t>08/10/2026</a:t>
+              <a:t>09-10-26</a:t>
             </a:fld>
             <a:endParaRPr lang="fr-BE" noProof="0" dirty="0">
               <a:latin typeface="Segoe UI Symbol" panose="020B0502040204020203" pitchFamily="34" charset="0"/>

--- a/Efficiency_calculator/SEM_lapTime_consumption.pptx
+++ b/Efficiency_calculator/SEM_lapTime_consumption.pptx
@@ -5,7 +5,7 @@
     <p:sldMasterId id="2147483660" r:id="rId1"/>
   </p:sldMasterIdLst>
   <p:notesMasterIdLst>
-    <p:notesMasterId r:id="rId30"/>
+    <p:notesMasterId r:id="rId31"/>
   </p:notesMasterIdLst>
   <p:sldIdLst>
     <p:sldId id="257" r:id="rId2"/>
@@ -22,20 +22,21 @@
     <p:sldId id="286" r:id="rId13"/>
     <p:sldId id="275" r:id="rId14"/>
     <p:sldId id="268" r:id="rId15"/>
-    <p:sldId id="269" r:id="rId16"/>
-    <p:sldId id="272" r:id="rId17"/>
-    <p:sldId id="290" r:id="rId18"/>
-    <p:sldId id="283" r:id="rId19"/>
-    <p:sldId id="293" r:id="rId20"/>
-    <p:sldId id="294" r:id="rId21"/>
-    <p:sldId id="287" r:id="rId22"/>
-    <p:sldId id="271" r:id="rId23"/>
-    <p:sldId id="288" r:id="rId24"/>
-    <p:sldId id="274" r:id="rId25"/>
-    <p:sldId id="289" r:id="rId26"/>
-    <p:sldId id="277" r:id="rId27"/>
-    <p:sldId id="291" r:id="rId28"/>
-    <p:sldId id="292" r:id="rId29"/>
+    <p:sldId id="272" r:id="rId16"/>
+    <p:sldId id="290" r:id="rId17"/>
+    <p:sldId id="293" r:id="rId18"/>
+    <p:sldId id="294" r:id="rId19"/>
+    <p:sldId id="287" r:id="rId20"/>
+    <p:sldId id="271" r:id="rId21"/>
+    <p:sldId id="288" r:id="rId22"/>
+    <p:sldId id="274" r:id="rId23"/>
+    <p:sldId id="289" r:id="rId24"/>
+    <p:sldId id="277" r:id="rId25"/>
+    <p:sldId id="291" r:id="rId26"/>
+    <p:sldId id="292" r:id="rId27"/>
+    <p:sldId id="295" r:id="rId28"/>
+    <p:sldId id="269" r:id="rId29"/>
+    <p:sldId id="283" r:id="rId30"/>
   </p:sldIdLst>
   <p:sldSz cx="9144000" cy="6858000" type="screen4x3"/>
   <p:notesSz cx="6858000" cy="9144000"/>
@@ -224,7 +225,7 @@
           <a:p>
             <a:fld id="{D96A055B-0E81-4EEF-A36B-666997CD7E14}" type="datetimeFigureOut">
               <a:rPr lang="en-GB" smtClean="0"/>
-              <a:t>09/10/2026</a:t>
+              <a:t>14/10/2026</a:t>
             </a:fld>
             <a:endParaRPr lang="en-GB"/>
           </a:p>
@@ -648,7 +649,7 @@
           <a:p>
             <a:fld id="{C4CDE39F-EA5B-4DFB-A5BD-31A68196C2CE}" type="slidenum">
               <a:rPr lang="en-GB" smtClean="0"/>
-              <a:t>15</a:t>
+              <a:t>28</a:t>
             </a:fld>
             <a:endParaRPr lang="en-GB"/>
           </a:p>
@@ -734,7 +735,7 @@
           <a:p>
             <a:fld id="{A962E2B5-AD3A-452B-996C-1D06A125B710}" type="datetime1">
               <a:rPr lang="en-GB" smtClean="0"/>
-              <a:t>09/10/2026</a:t>
+              <a:t>14/10/2026</a:t>
             </a:fld>
             <a:endParaRPr lang="en-GB"/>
           </a:p>
@@ -926,7 +927,7 @@
           <a:p>
             <a:fld id="{CA9A9924-1784-4044-A2E4-3606370E1BB6}" type="datetime1">
               <a:rPr lang="en-GB" smtClean="0"/>
-              <a:t>09/10/2026</a:t>
+              <a:t>14/10/2026</a:t>
             </a:fld>
             <a:endParaRPr lang="en-GB" dirty="0">
               <a:latin typeface="Segoe UI Symbol" panose="020B0502040204020203" pitchFamily="34" charset="0"/>
@@ -1175,7 +1176,7 @@
           <a:p>
             <a:fld id="{30058C10-7476-49B5-8355-BBAFE5754F9E}" type="datetime1">
               <a:rPr lang="en-GB" smtClean="0"/>
-              <a:t>09/10/2026</a:t>
+              <a:t>14/10/2026</a:t>
             </a:fld>
             <a:endParaRPr lang="en-GB" dirty="0">
               <a:latin typeface="Segoe UI Symbol" panose="020B0502040204020203" pitchFamily="34" charset="0"/>
@@ -1606,7 +1607,7 @@
           <a:p>
             <a:fld id="{61067CC1-09C0-4CA6-A28C-A624AFD2E92A}" type="datetime1">
               <a:rPr lang="fr-BE" noProof="0" smtClean="0"/>
-              <a:t>09-10-26</a:t>
+              <a:t>14-10-26</a:t>
             </a:fld>
             <a:endParaRPr lang="fr-BE" noProof="0" dirty="0">
               <a:latin typeface="Segoe UI Symbol" panose="020B0502040204020203" pitchFamily="34" charset="0"/>
@@ -1911,7 +1912,7 @@
           <a:p>
             <a:fld id="{CA9A9924-1784-4044-A2E4-3606370E1BB6}" type="datetime1">
               <a:rPr lang="fr-BE" noProof="0" smtClean="0"/>
-              <a:t>09-10-26</a:t>
+              <a:t>14-10-26</a:t>
             </a:fld>
             <a:endParaRPr lang="fr-BE" noProof="0" dirty="0">
               <a:latin typeface="Segoe UI Symbol" panose="020B0502040204020203" pitchFamily="34" charset="0"/>
@@ -3167,7 +3168,7 @@
           <a:p>
             <a:fld id="{CA9A9924-1784-4044-A2E4-3606370E1BB6}" type="datetime1">
               <a:rPr lang="fr-BE" noProof="0" smtClean="0"/>
-              <a:t>09-10-26</a:t>
+              <a:t>14-10-26</a:t>
             </a:fld>
             <a:endParaRPr lang="fr-BE" noProof="0" dirty="0">
               <a:latin typeface="Segoe UI Symbol" panose="020B0502040204020203" pitchFamily="34" charset="0"/>
@@ -5050,7 +5051,7 @@
           <a:p>
             <a:fld id="{CA9A9924-1784-4044-A2E4-3606370E1BB6}" type="datetime1">
               <a:rPr lang="fr-BE" noProof="0" smtClean="0"/>
-              <a:t>09-10-26</a:t>
+              <a:t>14-10-26</a:t>
             </a:fld>
             <a:endParaRPr lang="fr-BE" noProof="0" dirty="0">
               <a:latin typeface="Segoe UI Symbol" panose="020B0502040204020203" pitchFamily="34" charset="0"/>
@@ -5176,10 +5177,7 @@
               <a:rPr lang="fr-BE" sz="2800" dirty="0"/>
               <a:t>rendement mot. non cst</a:t>
             </a:r>
-            <a:r>
-              <a:rPr lang="fr-BE" sz="2800" noProof="0" dirty="0"/>
-              <a:t> (07/10/26) </a:t>
-            </a:r>
+            <a:endParaRPr lang="fr-BE" sz="2800" noProof="0" dirty="0"/>
           </a:p>
           <a:p>
             <a:r>
@@ -5190,7 +5188,7 @@
                   </a:schemeClr>
                 </a:solidFill>
               </a:rPr>
-              <a:t>Résultats rendement mot. cst (07/10/26) </a:t>
+              <a:t>Résultats rendement mot. cst</a:t>
             </a:r>
             <a:endParaRPr lang="fr-BE" sz="2800" noProof="0" dirty="0">
               <a:solidFill>
@@ -5385,7 +5383,7 @@
           <a:p>
             <a:fld id="{CA9A9924-1784-4044-A2E4-3606370E1BB6}" type="datetime1">
               <a:rPr lang="fr-BE" noProof="0" smtClean="0"/>
-              <a:t>09-10-26</a:t>
+              <a:t>14-10-26</a:t>
             </a:fld>
             <a:endParaRPr lang="fr-BE" noProof="0" dirty="0">
               <a:latin typeface="Segoe UI Symbol" panose="020B0502040204020203" pitchFamily="34" charset="0"/>
@@ -5431,8 +5429,8 @@
           </a:p>
         </p:txBody>
       </p:sp>
-      <mc:AlternateContent xmlns:mc="http://schemas.openxmlformats.org/markup-compatibility/2006" xmlns:a14="http://schemas.microsoft.com/office/drawing/2010/main">
-        <mc:Choice Requires="a14">
+      <mc:AlternateContent xmlns:mc="http://schemas.openxmlformats.org/markup-compatibility/2006">
+        <mc:Choice xmlns:a14="http://schemas.microsoft.com/office/drawing/2010/main" Requires="a14">
           <p:sp>
             <p:nvSpPr>
               <p:cNvPr id="5" name="Content Placeholder 4">
@@ -5649,7 +5647,15 @@
                 <a:pPr lvl="1"/>
                 <a:r>
                   <a:rPr lang="fr-BE" noProof="0" dirty="0"/>
-                  <a:t>Pas d’altimétrie utilisée (circuit plat)</a:t>
+                  <a:t>Altimétrie du </a:t>
+                </a:r>
+                <a:r>
+                  <a:rPr lang="fr-BE" noProof="0" dirty="0" err="1"/>
+                  <a:t>silesia</a:t>
+                </a:r>
+                <a:r>
+                  <a:rPr lang="fr-BE" noProof="0" dirty="0"/>
+                  <a:t> ring utilisée</a:t>
                 </a:r>
               </a:p>
               <a:p>
@@ -5807,7 +5813,7 @@
             </p:txBody>
           </p:sp>
         </mc:Choice>
-        <mc:Fallback xmlns="">
+        <mc:Fallback>
           <p:sp>
             <p:nvSpPr>
               <p:cNvPr id="5" name="Content Placeholder 4">
@@ -6073,7 +6079,7 @@
           <a:p>
             <a:fld id="{CA9A9924-1784-4044-A2E4-3606370E1BB6}" type="datetime1">
               <a:rPr lang="fr-BE" noProof="0" smtClean="0"/>
-              <a:t>09-10-26</a:t>
+              <a:t>14-10-26</a:t>
             </a:fld>
             <a:endParaRPr lang="fr-BE" noProof="0" dirty="0">
               <a:latin typeface="Segoe UI Symbol" panose="020B0502040204020203" pitchFamily="34" charset="0"/>
@@ -6544,533 +6550,6 @@
   <p:cSld>
     <p:spTree>
       <p:nvGrpSpPr>
-        <p:cNvPr id="1" name="">
-          <a:extLst>
-            <a:ext uri="{FF2B5EF4-FFF2-40B4-BE49-F238E27FC236}">
-              <a16:creationId xmlns:a16="http://schemas.microsoft.com/office/drawing/2014/main" id="{58D3793A-A8F3-29C2-516F-4DB008F7E7CD}"/>
-            </a:ext>
-          </a:extLst>
-        </p:cNvPr>
-        <p:cNvGrpSpPr/>
-        <p:nvPr/>
-      </p:nvGrpSpPr>
-      <p:grpSpPr>
-        <a:xfrm>
-          <a:off x="0" y="0"/>
-          <a:ext cx="0" cy="0"/>
-          <a:chOff x="0" y="0"/>
-          <a:chExt cx="0" cy="0"/>
-        </a:xfrm>
-      </p:grpSpPr>
-      <p:sp>
-        <p:nvSpPr>
-          <p:cNvPr id="2" name="Title 1">
-            <a:extLst>
-              <a:ext uri="{FF2B5EF4-FFF2-40B4-BE49-F238E27FC236}">
-                <a16:creationId xmlns:a16="http://schemas.microsoft.com/office/drawing/2014/main" id="{3AAC0FB9-A773-0A7B-15F9-806536A0A412}"/>
-              </a:ext>
-            </a:extLst>
-          </p:cNvPr>
-          <p:cNvSpPr>
-            <a:spLocks noGrp="1"/>
-          </p:cNvSpPr>
-          <p:nvPr>
-            <p:ph type="title"/>
-          </p:nvPr>
-        </p:nvSpPr>
-        <p:spPr>
-          <a:xfrm>
-            <a:off x="0" y="1"/>
-            <a:ext cx="6274904" cy="681036"/>
-          </a:xfrm>
-        </p:spPr>
-        <p:txBody>
-          <a:bodyPr/>
-          <a:lstStyle/>
-          <a:p>
-            <a:r>
-              <a:rPr lang="fr-BE" noProof="0" dirty="0"/>
-              <a:t>Résultats </a:t>
-            </a:r>
-            <a:r>
-              <a:rPr lang="fr-BE" dirty="0"/>
-              <a:t>: profils v &amp; F optimaux</a:t>
-            </a:r>
-            <a:endParaRPr lang="fr-BE" noProof="0" dirty="0"/>
-          </a:p>
-        </p:txBody>
-      </p:sp>
-      <p:sp>
-        <p:nvSpPr>
-          <p:cNvPr id="3" name="Date Placeholder 2">
-            <a:extLst>
-              <a:ext uri="{FF2B5EF4-FFF2-40B4-BE49-F238E27FC236}">
-                <a16:creationId xmlns:a16="http://schemas.microsoft.com/office/drawing/2014/main" id="{49FEF20F-6C70-93BF-D543-DAAFEDE7CD4E}"/>
-              </a:ext>
-            </a:extLst>
-          </p:cNvPr>
-          <p:cNvSpPr>
-            <a:spLocks noGrp="1"/>
-          </p:cNvSpPr>
-          <p:nvPr>
-            <p:ph type="dt" sz="half" idx="10"/>
-          </p:nvPr>
-        </p:nvSpPr>
-        <p:spPr/>
-        <p:txBody>
-          <a:bodyPr/>
-          <a:lstStyle/>
-          <a:p>
-            <a:fld id="{CA9A9924-1784-4044-A2E4-3606370E1BB6}" type="datetime1">
-              <a:rPr lang="fr-BE" noProof="0" smtClean="0"/>
-              <a:t>09-10-26</a:t>
-            </a:fld>
-            <a:endParaRPr lang="fr-BE" noProof="0" dirty="0">
-              <a:latin typeface="Segoe UI Symbol" panose="020B0502040204020203" pitchFamily="34" charset="0"/>
-              <a:ea typeface="Segoe UI Symbol" panose="020B0502040204020203" pitchFamily="34" charset="0"/>
-            </a:endParaRPr>
-          </a:p>
-        </p:txBody>
-      </p:sp>
-      <p:sp>
-        <p:nvSpPr>
-          <p:cNvPr id="4" name="Slide Number Placeholder 3">
-            <a:extLst>
-              <a:ext uri="{FF2B5EF4-FFF2-40B4-BE49-F238E27FC236}">
-                <a16:creationId xmlns:a16="http://schemas.microsoft.com/office/drawing/2014/main" id="{4EE42EE9-9DA2-C7A6-FA1C-C3A10ED0CEE6}"/>
-              </a:ext>
-            </a:extLst>
-          </p:cNvPr>
-          <p:cNvSpPr>
-            <a:spLocks noGrp="1"/>
-          </p:cNvSpPr>
-          <p:nvPr>
-            <p:ph type="sldNum" sz="quarter" idx="4"/>
-          </p:nvPr>
-        </p:nvSpPr>
-        <p:spPr/>
-        <p:txBody>
-          <a:bodyPr/>
-          <a:lstStyle/>
-          <a:p>
-            <a:fld id="{46899FAB-5005-482A-88F2-FE97823A1A33}" type="slidenum">
-              <a:rPr lang="fr-BE" noProof="0" smtClean="0"/>
-              <a:pPr/>
-              <a:t>15</a:t>
-            </a:fld>
-            <a:r>
-              <a:rPr lang="fr-BE" noProof="0" dirty="0"/>
-              <a:t>/x</a:t>
-            </a:r>
-            <a:endParaRPr lang="fr-BE" noProof="0" dirty="0">
-              <a:latin typeface="Segoe UI Symbol" panose="020B0502040204020203" pitchFamily="34" charset="0"/>
-              <a:ea typeface="Segoe UI Symbol" panose="020B0502040204020203" pitchFamily="34" charset="0"/>
-            </a:endParaRPr>
-          </a:p>
-        </p:txBody>
-      </p:sp>
-      <p:pic>
-        <p:nvPicPr>
-          <p:cNvPr id="9" name="Picture 8">
-            <a:extLst>
-              <a:ext uri="{FF2B5EF4-FFF2-40B4-BE49-F238E27FC236}">
-                <a16:creationId xmlns:a16="http://schemas.microsoft.com/office/drawing/2014/main" id="{EBD3574E-E674-F5B8-F1A3-CC38E48D822A}"/>
-              </a:ext>
-            </a:extLst>
-          </p:cNvPr>
-          <p:cNvPicPr>
-            <a:picLocks noChangeAspect="1"/>
-          </p:cNvPicPr>
-          <p:nvPr/>
-        </p:nvPicPr>
-        <p:blipFill>
-          <a:blip r:embed="rId3">
-            <a:extLst>
-              <a:ext uri="{28A0092B-C50C-407E-A947-70E740481C1C}">
-                <a14:useLocalDpi xmlns:a14="http://schemas.microsoft.com/office/drawing/2010/main" val="0"/>
-              </a:ext>
-            </a:extLst>
-          </a:blip>
-          <a:stretch>
-            <a:fillRect/>
-          </a:stretch>
-        </p:blipFill>
-        <p:spPr>
-          <a:xfrm>
-            <a:off x="4797286" y="1055158"/>
-            <a:ext cx="4224509" cy="3421503"/>
-          </a:xfrm>
-          <a:prstGeom prst="rect">
-            <a:avLst/>
-          </a:prstGeom>
-        </p:spPr>
-      </p:pic>
-      <p:pic>
-        <p:nvPicPr>
-          <p:cNvPr id="11" name="Picture 10">
-            <a:extLst>
-              <a:ext uri="{FF2B5EF4-FFF2-40B4-BE49-F238E27FC236}">
-                <a16:creationId xmlns:a16="http://schemas.microsoft.com/office/drawing/2014/main" id="{ACCC850F-7A3B-29B0-1815-9DB5777AB381}"/>
-              </a:ext>
-            </a:extLst>
-          </p:cNvPr>
-          <p:cNvPicPr>
-            <a:picLocks noChangeAspect="1"/>
-          </p:cNvPicPr>
-          <p:nvPr/>
-        </p:nvPicPr>
-        <p:blipFill>
-          <a:blip r:embed="rId4">
-            <a:extLst>
-              <a:ext uri="{28A0092B-C50C-407E-A947-70E740481C1C}">
-                <a14:useLocalDpi xmlns:a14="http://schemas.microsoft.com/office/drawing/2010/main" val="0"/>
-              </a:ext>
-            </a:extLst>
-          </a:blip>
-          <a:stretch>
-            <a:fillRect/>
-          </a:stretch>
-        </p:blipFill>
-        <p:spPr>
-          <a:xfrm>
-            <a:off x="199732" y="961333"/>
-            <a:ext cx="4438529" cy="3594842"/>
-          </a:xfrm>
-          <a:prstGeom prst="rect">
-            <a:avLst/>
-          </a:prstGeom>
-        </p:spPr>
-      </p:pic>
-      <p:cxnSp>
-        <p:nvCxnSpPr>
-          <p:cNvPr id="6" name="Straight Arrow Connector 5">
-            <a:extLst>
-              <a:ext uri="{FF2B5EF4-FFF2-40B4-BE49-F238E27FC236}">
-                <a16:creationId xmlns:a16="http://schemas.microsoft.com/office/drawing/2014/main" id="{61A0C97A-3491-BFD9-A363-F830D46E5ADE}"/>
-              </a:ext>
-            </a:extLst>
-          </p:cNvPr>
-          <p:cNvCxnSpPr>
-            <a:cxnSpLocks/>
-          </p:cNvCxnSpPr>
-          <p:nvPr/>
-        </p:nvCxnSpPr>
-        <p:spPr>
-          <a:xfrm flipV="1">
-            <a:off x="1762539" y="2743201"/>
-            <a:ext cx="583096" cy="1994451"/>
-          </a:xfrm>
-          <a:prstGeom prst="straightConnector1">
-            <a:avLst/>
-          </a:prstGeom>
-          <a:ln>
-            <a:tailEnd type="triangle"/>
-          </a:ln>
-        </p:spPr>
-        <p:style>
-          <a:lnRef idx="2">
-            <a:schemeClr val="accent1"/>
-          </a:lnRef>
-          <a:fillRef idx="0">
-            <a:schemeClr val="accent1"/>
-          </a:fillRef>
-          <a:effectRef idx="1">
-            <a:schemeClr val="accent1"/>
-          </a:effectRef>
-          <a:fontRef idx="minor">
-            <a:schemeClr val="tx1"/>
-          </a:fontRef>
-        </p:style>
-      </p:cxnSp>
-      <p:sp>
-        <p:nvSpPr>
-          <p:cNvPr id="8" name="Oval 7">
-            <a:extLst>
-              <a:ext uri="{FF2B5EF4-FFF2-40B4-BE49-F238E27FC236}">
-                <a16:creationId xmlns:a16="http://schemas.microsoft.com/office/drawing/2014/main" id="{D447DE7F-3F7A-E704-4E4F-537DBC07486F}"/>
-              </a:ext>
-            </a:extLst>
-          </p:cNvPr>
-          <p:cNvSpPr/>
-          <p:nvPr/>
-        </p:nvSpPr>
-        <p:spPr>
-          <a:xfrm>
-            <a:off x="2120349" y="1311966"/>
-            <a:ext cx="887896" cy="1537252"/>
-          </a:xfrm>
-          <a:prstGeom prst="ellipse">
-            <a:avLst/>
-          </a:prstGeom>
-          <a:noFill/>
-          <a:ln>
-            <a:solidFill>
-              <a:srgbClr val="C00000"/>
-            </a:solidFill>
-          </a:ln>
-        </p:spPr>
-        <p:style>
-          <a:lnRef idx="2">
-            <a:schemeClr val="accent1">
-              <a:shade val="15000"/>
-            </a:schemeClr>
-          </a:lnRef>
-          <a:fillRef idx="1">
-            <a:schemeClr val="accent1"/>
-          </a:fillRef>
-          <a:effectRef idx="0">
-            <a:schemeClr val="accent1"/>
-          </a:effectRef>
-          <a:fontRef idx="minor">
-            <a:schemeClr val="lt1"/>
-          </a:fontRef>
-        </p:style>
-        <p:txBody>
-          <a:bodyPr rtlCol="0" anchor="ctr"/>
-          <a:lstStyle/>
-          <a:p>
-            <a:pPr algn="ctr"/>
-            <a:endParaRPr lang="fr-BE" noProof="0" dirty="0"/>
-          </a:p>
-        </p:txBody>
-      </p:sp>
-      <p:sp>
-        <p:nvSpPr>
-          <p:cNvPr id="14" name="TextBox 13">
-            <a:extLst>
-              <a:ext uri="{FF2B5EF4-FFF2-40B4-BE49-F238E27FC236}">
-                <a16:creationId xmlns:a16="http://schemas.microsoft.com/office/drawing/2014/main" id="{344EB829-B111-B17A-1179-FCA2083D0C2B}"/>
-              </a:ext>
-            </a:extLst>
-          </p:cNvPr>
-          <p:cNvSpPr txBox="1"/>
-          <p:nvPr/>
-        </p:nvSpPr>
-        <p:spPr>
-          <a:xfrm>
-            <a:off x="543339" y="5003717"/>
-            <a:ext cx="5797997" cy="923330"/>
-          </a:xfrm>
-          <a:prstGeom prst="rect">
-            <a:avLst/>
-          </a:prstGeom>
-          <a:noFill/>
-        </p:spPr>
-        <p:txBody>
-          <a:bodyPr wrap="none" rtlCol="0">
-            <a:spAutoFit/>
-          </a:bodyPr>
-          <a:lstStyle/>
-          <a:p>
-            <a:r>
-              <a:rPr lang="fr-BE" noProof="0" dirty="0"/>
-              <a:t>Dents de scie (on-off, </a:t>
-            </a:r>
-            <a:r>
-              <a:rPr lang="fr-BE" noProof="0" dirty="0" err="1"/>
-              <a:t>accel</a:t>
-            </a:r>
-            <a:r>
-              <a:rPr lang="fr-BE" noProof="0" dirty="0"/>
-              <a:t> &amp; </a:t>
-            </a:r>
-            <a:r>
-              <a:rPr lang="fr-BE" noProof="0" dirty="0" err="1"/>
-              <a:t>coast</a:t>
-            </a:r>
-            <a:r>
-              <a:rPr lang="fr-BE" noProof="0" dirty="0"/>
-              <a:t>):</a:t>
-            </a:r>
-          </a:p>
-          <a:p>
-            <a:r>
-              <a:rPr lang="fr-BE" noProof="0" dirty="0"/>
-              <a:t>Le moteur est sollicité dans sa plage optimale (pour η), </a:t>
-            </a:r>
-          </a:p>
-          <a:p>
-            <a:r>
-              <a:rPr lang="fr-BE" noProof="0" dirty="0" err="1"/>
-              <a:t>accérération</a:t>
-            </a:r>
-            <a:r>
-              <a:rPr lang="fr-BE" noProof="0" dirty="0"/>
-              <a:t>, puis </a:t>
-            </a:r>
-            <a:r>
-              <a:rPr lang="fr-BE" noProof="0" dirty="0" err="1"/>
-              <a:t>coast</a:t>
-            </a:r>
-            <a:r>
-              <a:rPr lang="fr-BE" noProof="0" dirty="0"/>
-              <a:t>,  </a:t>
-            </a:r>
-            <a:r>
-              <a:rPr lang="fr-BE" noProof="0" dirty="0" err="1"/>
-              <a:t>accel</a:t>
-            </a:r>
-            <a:r>
-              <a:rPr lang="fr-BE" noProof="0" dirty="0"/>
-              <a:t> …</a:t>
-            </a:r>
-          </a:p>
-        </p:txBody>
-      </p:sp>
-      <p:sp>
-        <p:nvSpPr>
-          <p:cNvPr id="16" name="Oval 15">
-            <a:extLst>
-              <a:ext uri="{FF2B5EF4-FFF2-40B4-BE49-F238E27FC236}">
-                <a16:creationId xmlns:a16="http://schemas.microsoft.com/office/drawing/2014/main" id="{8AD6C9C3-22DA-7B77-407F-986A6930E998}"/>
-              </a:ext>
-            </a:extLst>
-          </p:cNvPr>
-          <p:cNvSpPr/>
-          <p:nvPr/>
-        </p:nvSpPr>
-        <p:spPr>
-          <a:xfrm>
-            <a:off x="6135756" y="1205948"/>
-            <a:ext cx="887896" cy="3061251"/>
-          </a:xfrm>
-          <a:prstGeom prst="ellipse">
-            <a:avLst/>
-          </a:prstGeom>
-          <a:noFill/>
-          <a:ln>
-            <a:solidFill>
-              <a:srgbClr val="C00000"/>
-            </a:solidFill>
-          </a:ln>
-        </p:spPr>
-        <p:style>
-          <a:lnRef idx="2">
-            <a:schemeClr val="accent1">
-              <a:shade val="15000"/>
-            </a:schemeClr>
-          </a:lnRef>
-          <a:fillRef idx="1">
-            <a:schemeClr val="accent1"/>
-          </a:fillRef>
-          <a:effectRef idx="0">
-            <a:schemeClr val="accent1"/>
-          </a:effectRef>
-          <a:fontRef idx="minor">
-            <a:schemeClr val="lt1"/>
-          </a:fontRef>
-        </p:style>
-        <p:txBody>
-          <a:bodyPr rtlCol="0" anchor="ctr"/>
-          <a:lstStyle/>
-          <a:p>
-            <a:pPr algn="ctr"/>
-            <a:endParaRPr lang="fr-BE" noProof="0" dirty="0"/>
-          </a:p>
-        </p:txBody>
-      </p:sp>
-      <p:cxnSp>
-        <p:nvCxnSpPr>
-          <p:cNvPr id="17" name="Straight Arrow Connector 16">
-            <a:extLst>
-              <a:ext uri="{FF2B5EF4-FFF2-40B4-BE49-F238E27FC236}">
-                <a16:creationId xmlns:a16="http://schemas.microsoft.com/office/drawing/2014/main" id="{34B3CC25-4BAB-6D40-6766-4CA62A04F447}"/>
-              </a:ext>
-            </a:extLst>
-          </p:cNvPr>
-          <p:cNvCxnSpPr>
-            <a:cxnSpLocks/>
-          </p:cNvCxnSpPr>
-          <p:nvPr/>
-        </p:nvCxnSpPr>
-        <p:spPr>
-          <a:xfrm flipV="1">
-            <a:off x="2385392" y="4267199"/>
-            <a:ext cx="3889512" cy="736518"/>
-          </a:xfrm>
-          <a:prstGeom prst="straightConnector1">
-            <a:avLst/>
-          </a:prstGeom>
-          <a:ln>
-            <a:tailEnd type="triangle"/>
-          </a:ln>
-        </p:spPr>
-        <p:style>
-          <a:lnRef idx="2">
-            <a:schemeClr val="accent1"/>
-          </a:lnRef>
-          <a:fillRef idx="0">
-            <a:schemeClr val="accent1"/>
-          </a:fillRef>
-          <a:effectRef idx="1">
-            <a:schemeClr val="accent1"/>
-          </a:effectRef>
-          <a:fontRef idx="minor">
-            <a:schemeClr val="tx1"/>
-          </a:fontRef>
-        </p:style>
-      </p:cxnSp>
-      <p:sp>
-        <p:nvSpPr>
-          <p:cNvPr id="20" name="TextBox 19">
-            <a:extLst>
-              <a:ext uri="{FF2B5EF4-FFF2-40B4-BE49-F238E27FC236}">
-                <a16:creationId xmlns:a16="http://schemas.microsoft.com/office/drawing/2014/main" id="{26D7C21A-4ABC-F8CB-060A-AEC9DF9CA7AE}"/>
-              </a:ext>
-            </a:extLst>
-          </p:cNvPr>
-          <p:cNvSpPr txBox="1"/>
-          <p:nvPr/>
-        </p:nvSpPr>
-        <p:spPr>
-          <a:xfrm>
-            <a:off x="5974589" y="4885901"/>
-            <a:ext cx="3047206" cy="369332"/>
-          </a:xfrm>
-          <a:prstGeom prst="rect">
-            <a:avLst/>
-          </a:prstGeom>
-          <a:noFill/>
-        </p:spPr>
-        <p:txBody>
-          <a:bodyPr wrap="square">
-            <a:spAutoFit/>
-          </a:bodyPr>
-          <a:lstStyle/>
-          <a:p>
-            <a:r>
-              <a:rPr lang="fr-BE" noProof="0" dirty="0"/>
-              <a:t>Efficacité = </a:t>
-            </a:r>
-            <a:r>
-              <a:rPr lang="fr-BE" b="1" noProof="0" dirty="0"/>
-              <a:t>328.52</a:t>
-            </a:r>
-            <a:r>
-              <a:rPr lang="fr-BE" noProof="0" dirty="0"/>
-              <a:t> km/kWh</a:t>
-            </a:r>
-          </a:p>
-        </p:txBody>
-      </p:sp>
-    </p:spTree>
-    <p:extLst>
-      <p:ext uri="{BB962C8B-B14F-4D97-AF65-F5344CB8AC3E}">
-        <p14:creationId xmlns:p14="http://schemas.microsoft.com/office/powerpoint/2010/main" val="1168840488"/>
-      </p:ext>
-    </p:extLst>
-  </p:cSld>
-  <p:clrMapOvr>
-    <a:masterClrMapping/>
-  </p:clrMapOvr>
-</p:sld>
-</file>
-
-<file path=ppt/slides/slide16.xml><?xml version="1.0" encoding="utf-8"?>
-<p:sld xmlns:a="http://schemas.openxmlformats.org/drawingml/2006/main" xmlns:r="http://schemas.openxmlformats.org/officeDocument/2006/relationships" xmlns:p="http://schemas.openxmlformats.org/presentationml/2006/main">
-  <p:cSld>
-    <p:spTree>
-      <p:nvGrpSpPr>
         <p:cNvPr id="1" name=""/>
         <p:cNvGrpSpPr/>
         <p:nvPr/>
@@ -7147,7 +6626,7 @@
           <a:p>
             <a:fld id="{CA9A9924-1784-4044-A2E4-3606370E1BB6}" type="datetime1">
               <a:rPr lang="fr-BE" noProof="0" smtClean="0"/>
-              <a:t>09-10-26</a:t>
+              <a:t>14-10-26</a:t>
             </a:fld>
             <a:endParaRPr lang="fr-BE" noProof="0" dirty="0">
               <a:latin typeface="Segoe UI Symbol" panose="020B0502040204020203" pitchFamily="34" charset="0"/>
@@ -7180,7 +6659,7 @@
             <a:fld id="{46899FAB-5005-482A-88F2-FE97823A1A33}" type="slidenum">
               <a:rPr lang="fr-BE" noProof="0" smtClean="0"/>
               <a:pPr/>
-              <a:t>16</a:t>
+              <a:t>15</a:t>
             </a:fld>
             <a:r>
               <a:rPr lang="fr-BE" noProof="0" dirty="0"/>
@@ -7345,7 +6824,7 @@
 </p:sld>
 </file>
 
-<file path=ppt/slides/slide17.xml><?xml version="1.0" encoding="utf-8"?>
+<file path=ppt/slides/slide16.xml><?xml version="1.0" encoding="utf-8"?>
 <p:sld xmlns:a="http://schemas.openxmlformats.org/drawingml/2006/main" xmlns:r="http://schemas.openxmlformats.org/officeDocument/2006/relationships" xmlns:p="http://schemas.openxmlformats.org/presentationml/2006/main">
   <p:cSld>
     <p:spTree>
@@ -7420,7 +6899,7 @@
           <a:p>
             <a:fld id="{CA9A9924-1784-4044-A2E4-3606370E1BB6}" type="datetime1">
               <a:rPr lang="fr-BE" noProof="0" smtClean="0"/>
-              <a:t>09-10-26</a:t>
+              <a:t>14-10-26</a:t>
             </a:fld>
             <a:endParaRPr lang="fr-BE" noProof="0" dirty="0">
               <a:latin typeface="Segoe UI Symbol" panose="020B0502040204020203" pitchFamily="34" charset="0"/>
@@ -7453,7 +6932,7 @@
             <a:fld id="{46899FAB-5005-482A-88F2-FE97823A1A33}" type="slidenum">
               <a:rPr lang="fr-BE" noProof="0" smtClean="0"/>
               <a:pPr/>
-              <a:t>17</a:t>
+              <a:t>16</a:t>
             </a:fld>
             <a:r>
               <a:rPr lang="fr-BE" noProof="0" dirty="0"/>
@@ -7693,530 +7172,7 @@
 </p:sld>
 </file>
 
-<file path=ppt/slides/slide18.xml><?xml version="1.0" encoding="utf-8"?>
-<p:sld xmlns:a="http://schemas.openxmlformats.org/drawingml/2006/main" xmlns:r="http://schemas.openxmlformats.org/officeDocument/2006/relationships" xmlns:p="http://schemas.openxmlformats.org/presentationml/2006/main">
-  <p:cSld>
-    <p:spTree>
-      <p:nvGrpSpPr>
-        <p:cNvPr id="1" name=""/>
-        <p:cNvGrpSpPr/>
-        <p:nvPr/>
-      </p:nvGrpSpPr>
-      <p:grpSpPr>
-        <a:xfrm>
-          <a:off x="0" y="0"/>
-          <a:ext cx="0" cy="0"/>
-          <a:chOff x="0" y="0"/>
-          <a:chExt cx="0" cy="0"/>
-        </a:xfrm>
-      </p:grpSpPr>
-      <p:sp>
-        <p:nvSpPr>
-          <p:cNvPr id="2" name="Title 1">
-            <a:extLst>
-              <a:ext uri="{FF2B5EF4-FFF2-40B4-BE49-F238E27FC236}">
-                <a16:creationId xmlns:a16="http://schemas.microsoft.com/office/drawing/2014/main" id="{E09F9A8F-80C3-873F-1872-68518C6343CF}"/>
-              </a:ext>
-            </a:extLst>
-          </p:cNvPr>
-          <p:cNvSpPr>
-            <a:spLocks noGrp="1"/>
-          </p:cNvSpPr>
-          <p:nvPr>
-            <p:ph type="title"/>
-          </p:nvPr>
-        </p:nvSpPr>
-        <p:spPr>
-          <a:xfrm>
-            <a:off x="0" y="1"/>
-            <a:ext cx="7772400" cy="681036"/>
-          </a:xfrm>
-        </p:spPr>
-        <p:txBody>
-          <a:bodyPr/>
-          <a:lstStyle/>
-          <a:p>
-            <a:r>
-              <a:rPr lang="en-GB" dirty="0"/>
-              <a:t>Simulation 2 : </a:t>
-            </a:r>
-            <a:r>
-              <a:rPr lang="en-GB" dirty="0" err="1"/>
-              <a:t>rendement</a:t>
-            </a:r>
-            <a:r>
-              <a:rPr lang="en-GB" dirty="0"/>
-              <a:t> mot. constant</a:t>
-            </a:r>
-          </a:p>
-        </p:txBody>
-      </p:sp>
-      <p:sp>
-        <p:nvSpPr>
-          <p:cNvPr id="3" name="Date Placeholder 2">
-            <a:extLst>
-              <a:ext uri="{FF2B5EF4-FFF2-40B4-BE49-F238E27FC236}">
-                <a16:creationId xmlns:a16="http://schemas.microsoft.com/office/drawing/2014/main" id="{E58ED2A5-A32F-AA89-E5D9-117CF897AC8A}"/>
-              </a:ext>
-            </a:extLst>
-          </p:cNvPr>
-          <p:cNvSpPr>
-            <a:spLocks noGrp="1"/>
-          </p:cNvSpPr>
-          <p:nvPr>
-            <p:ph type="dt" sz="half" idx="10"/>
-          </p:nvPr>
-        </p:nvSpPr>
-        <p:spPr/>
-        <p:txBody>
-          <a:bodyPr/>
-          <a:lstStyle/>
-          <a:p>
-            <a:fld id="{CA9A9924-1784-4044-A2E4-3606370E1BB6}" type="datetime1">
-              <a:rPr lang="en-GB" smtClean="0"/>
-              <a:t>09/10/2026</a:t>
-            </a:fld>
-            <a:endParaRPr lang="en-GB" dirty="0">
-              <a:latin typeface="Segoe UI Symbol" panose="020B0502040204020203" pitchFamily="34" charset="0"/>
-              <a:ea typeface="Segoe UI Symbol" panose="020B0502040204020203" pitchFamily="34" charset="0"/>
-            </a:endParaRPr>
-          </a:p>
-        </p:txBody>
-      </p:sp>
-      <p:sp>
-        <p:nvSpPr>
-          <p:cNvPr id="4" name="Slide Number Placeholder 3">
-            <a:extLst>
-              <a:ext uri="{FF2B5EF4-FFF2-40B4-BE49-F238E27FC236}">
-                <a16:creationId xmlns:a16="http://schemas.microsoft.com/office/drawing/2014/main" id="{D5CD84A4-478B-AE19-FC4F-D6DDF05879E2}"/>
-              </a:ext>
-            </a:extLst>
-          </p:cNvPr>
-          <p:cNvSpPr>
-            <a:spLocks noGrp="1"/>
-          </p:cNvSpPr>
-          <p:nvPr>
-            <p:ph type="sldNum" sz="quarter" idx="4"/>
-          </p:nvPr>
-        </p:nvSpPr>
-        <p:spPr/>
-        <p:txBody>
-          <a:bodyPr/>
-          <a:lstStyle/>
-          <a:p>
-            <a:fld id="{46899FAB-5005-482A-88F2-FE97823A1A33}" type="slidenum">
-              <a:rPr lang="en-GB" smtClean="0"/>
-              <a:pPr/>
-              <a:t>18</a:t>
-            </a:fld>
-            <a:r>
-              <a:rPr lang="en-GB"/>
-              <a:t>/x</a:t>
-            </a:r>
-            <a:endParaRPr lang="en-GB" dirty="0">
-              <a:latin typeface="Segoe UI Symbol" panose="020B0502040204020203" pitchFamily="34" charset="0"/>
-              <a:ea typeface="Segoe UI Symbol" panose="020B0502040204020203" pitchFamily="34" charset="0"/>
-            </a:endParaRPr>
-          </a:p>
-        </p:txBody>
-      </p:sp>
-      <p:pic>
-        <p:nvPicPr>
-          <p:cNvPr id="7" name="Content Placeholder 6">
-            <a:extLst>
-              <a:ext uri="{FF2B5EF4-FFF2-40B4-BE49-F238E27FC236}">
-                <a16:creationId xmlns:a16="http://schemas.microsoft.com/office/drawing/2014/main" id="{2C650685-1DE3-048B-8BD3-0661FE2B64B4}"/>
-              </a:ext>
-            </a:extLst>
-          </p:cNvPr>
-          <p:cNvPicPr>
-            <a:picLocks noGrp="1" noChangeAspect="1"/>
-          </p:cNvPicPr>
-          <p:nvPr>
-            <p:ph idx="1"/>
-          </p:nvPr>
-        </p:nvPicPr>
-        <p:blipFill>
-          <a:blip r:embed="rId2">
-            <a:extLst>
-              <a:ext uri="{28A0092B-C50C-407E-A947-70E740481C1C}">
-                <a14:useLocalDpi xmlns:a14="http://schemas.microsoft.com/office/drawing/2010/main" val="0"/>
-              </a:ext>
-            </a:extLst>
-          </a:blip>
-          <a:stretch>
-            <a:fillRect/>
-          </a:stretch>
-        </p:blipFill>
-        <p:spPr>
-          <a:xfrm>
-            <a:off x="304801" y="681037"/>
-            <a:ext cx="3066299" cy="2397411"/>
-          </a:xfrm>
-          <a:prstGeom prst="rect">
-            <a:avLst/>
-          </a:prstGeom>
-        </p:spPr>
-      </p:pic>
-      <p:pic>
-        <p:nvPicPr>
-          <p:cNvPr id="17" name="Picture 16">
-            <a:extLst>
-              <a:ext uri="{FF2B5EF4-FFF2-40B4-BE49-F238E27FC236}">
-                <a16:creationId xmlns:a16="http://schemas.microsoft.com/office/drawing/2014/main" id="{D030DCC2-C649-6033-9283-36DC4E9D726A}"/>
-              </a:ext>
-            </a:extLst>
-          </p:cNvPr>
-          <p:cNvPicPr>
-            <a:picLocks noChangeAspect="1"/>
-          </p:cNvPicPr>
-          <p:nvPr/>
-        </p:nvPicPr>
-        <p:blipFill>
-          <a:blip r:embed="rId3">
-            <a:extLst>
-              <a:ext uri="{28A0092B-C50C-407E-A947-70E740481C1C}">
-                <a14:useLocalDpi xmlns:a14="http://schemas.microsoft.com/office/drawing/2010/main" val="0"/>
-              </a:ext>
-            </a:extLst>
-          </a:blip>
-          <a:stretch>
-            <a:fillRect/>
-          </a:stretch>
-        </p:blipFill>
-        <p:spPr>
-          <a:xfrm>
-            <a:off x="1127150" y="3526929"/>
-            <a:ext cx="3498779" cy="2833722"/>
-          </a:xfrm>
-          <a:prstGeom prst="rect">
-            <a:avLst/>
-          </a:prstGeom>
-        </p:spPr>
-      </p:pic>
-      <p:pic>
-        <p:nvPicPr>
-          <p:cNvPr id="19" name="Picture 18">
-            <a:extLst>
-              <a:ext uri="{FF2B5EF4-FFF2-40B4-BE49-F238E27FC236}">
-                <a16:creationId xmlns:a16="http://schemas.microsoft.com/office/drawing/2014/main" id="{00D3E467-BE73-C79E-EAC9-FC51EB998A41}"/>
-              </a:ext>
-            </a:extLst>
-          </p:cNvPr>
-          <p:cNvPicPr>
-            <a:picLocks noChangeAspect="1"/>
-          </p:cNvPicPr>
-          <p:nvPr/>
-        </p:nvPicPr>
-        <p:blipFill>
-          <a:blip r:embed="rId4">
-            <a:extLst>
-              <a:ext uri="{28A0092B-C50C-407E-A947-70E740481C1C}">
-                <a14:useLocalDpi xmlns:a14="http://schemas.microsoft.com/office/drawing/2010/main" val="0"/>
-              </a:ext>
-            </a:extLst>
-          </a:blip>
-          <a:stretch>
-            <a:fillRect/>
-          </a:stretch>
-        </p:blipFill>
-        <p:spPr>
-          <a:xfrm>
-            <a:off x="4904574" y="3526929"/>
-            <a:ext cx="3470800" cy="2854880"/>
-          </a:xfrm>
-          <a:prstGeom prst="rect">
-            <a:avLst/>
-          </a:prstGeom>
-        </p:spPr>
-      </p:pic>
-      <mc:AlternateContent xmlns:mc="http://schemas.openxmlformats.org/markup-compatibility/2006" xmlns:a14="http://schemas.microsoft.com/office/drawing/2010/main">
-        <mc:Choice Requires="a14">
-          <p:sp>
-            <p:nvSpPr>
-              <p:cNvPr id="23" name="TextBox 22">
-                <a:extLst>
-                  <a:ext uri="{FF2B5EF4-FFF2-40B4-BE49-F238E27FC236}">
-                    <a16:creationId xmlns:a16="http://schemas.microsoft.com/office/drawing/2014/main" id="{AD133105-996E-B203-3414-20B0A2EBE360}"/>
-                  </a:ext>
-                </a:extLst>
-              </p:cNvPr>
-              <p:cNvSpPr txBox="1"/>
-              <p:nvPr/>
-            </p:nvSpPr>
-            <p:spPr>
-              <a:xfrm>
-                <a:off x="3675901" y="837130"/>
-                <a:ext cx="3650974" cy="584775"/>
-              </a:xfrm>
-              <a:prstGeom prst="rect">
-                <a:avLst/>
-              </a:prstGeom>
-              <a:noFill/>
-            </p:spPr>
-            <p:txBody>
-              <a:bodyPr wrap="square">
-                <a:spAutoFit/>
-              </a:bodyPr>
-              <a:lstStyle/>
-              <a:p>
-                <a:pPr marL="285750" indent="-285750">
-                  <a:buFont typeface="Arial" panose="020B0604020202020204" pitchFamily="34" charset="0"/>
-                  <a:buChar char="•"/>
-                </a:pPr>
-                <a:r>
-                  <a:rPr lang="fr-BE" sz="1600" dirty="0"/>
-                  <a:t>Discrétisation :  </a:t>
-                </a:r>
-                <a14:m>
-                  <m:oMath xmlns:m="http://schemas.openxmlformats.org/officeDocument/2006/math">
-                    <m:r>
-                      <m:rPr>
-                        <m:sty m:val="p"/>
-                      </m:rPr>
-                      <a:rPr lang="fr-BE" sz="1600" i="1" dirty="0">
-                        <a:latin typeface="Cambria Math" panose="02040503050406030204" pitchFamily="18" charset="0"/>
-                      </a:rPr>
-                      <m:t>Δ</m:t>
-                    </m:r>
-                    <m:r>
-                      <a:rPr lang="fr-BE" sz="1600" i="1" dirty="0">
-                        <a:latin typeface="Cambria Math" panose="02040503050406030204" pitchFamily="18" charset="0"/>
-                      </a:rPr>
-                      <m:t>𝑥</m:t>
-                    </m:r>
-                    <m:r>
-                      <a:rPr lang="fr-BE" sz="1600" dirty="0">
-                        <a:latin typeface="Cambria Math" panose="02040503050406030204" pitchFamily="18" charset="0"/>
-                      </a:rPr>
-                      <m:t> = </m:t>
-                    </m:r>
-                    <m:r>
-                      <a:rPr lang="fr-BE" sz="1600" b="0" i="0" dirty="0" smtClean="0">
-                        <a:latin typeface="Cambria Math" panose="02040503050406030204" pitchFamily="18" charset="0"/>
-                      </a:rPr>
-                      <m:t>20</m:t>
-                    </m:r>
-                    <m:r>
-                      <a:rPr lang="fr-BE" sz="1600" dirty="0">
-                        <a:latin typeface="Cambria Math" panose="02040503050406030204" pitchFamily="18" charset="0"/>
-                      </a:rPr>
-                      <m:t>0</m:t>
-                    </m:r>
-                    <m:r>
-                      <m:rPr>
-                        <m:sty m:val="p"/>
-                      </m:rPr>
-                      <a:rPr lang="fr-BE" sz="1600" dirty="0">
-                        <a:latin typeface="Cambria Math" panose="02040503050406030204" pitchFamily="18" charset="0"/>
-                      </a:rPr>
-                      <m:t>m</m:t>
-                    </m:r>
-                  </m:oMath>
-                </a14:m>
-                <a:r>
-                  <a:rPr lang="fr-BE" sz="1600" dirty="0"/>
-                  <a:t> cst</a:t>
-                </a:r>
-              </a:p>
-              <a:p>
-                <a:pPr marL="285750" indent="-285750">
-                  <a:buFont typeface="Arial" panose="020B0604020202020204" pitchFamily="34" charset="0"/>
-                  <a:buChar char="•"/>
-                </a:pPr>
-                <a:r>
-                  <a:rPr lang="fr-BE" sz="1600" dirty="0"/>
-                  <a:t>Pénalisation w=1</a:t>
-                </a:r>
-                <a:endParaRPr lang="fr-BE" sz="1600" noProof="0" dirty="0"/>
-              </a:p>
-            </p:txBody>
-          </p:sp>
-        </mc:Choice>
-        <mc:Fallback xmlns="">
-          <p:sp>
-            <p:nvSpPr>
-              <p:cNvPr id="23" name="TextBox 22">
-                <a:extLst>
-                  <a:ext uri="{FF2B5EF4-FFF2-40B4-BE49-F238E27FC236}">
-                    <a16:creationId xmlns:a16="http://schemas.microsoft.com/office/drawing/2014/main" id="{AD133105-996E-B203-3414-20B0A2EBE360}"/>
-                  </a:ext>
-                </a:extLst>
-              </p:cNvPr>
-              <p:cNvSpPr txBox="1">
-                <a:spLocks noRot="1" noChangeAspect="1" noMove="1" noResize="1" noEditPoints="1" noAdjustHandles="1" noChangeArrowheads="1" noChangeShapeType="1" noTextEdit="1"/>
-              </p:cNvSpPr>
-              <p:nvPr/>
-            </p:nvSpPr>
-            <p:spPr>
-              <a:xfrm>
-                <a:off x="3675901" y="837130"/>
-                <a:ext cx="3650974" cy="584775"/>
-              </a:xfrm>
-              <a:prstGeom prst="rect">
-                <a:avLst/>
-              </a:prstGeom>
-              <a:blipFill>
-                <a:blip r:embed="rId5"/>
-                <a:stretch>
-                  <a:fillRect l="-668" t="-4167" b="-11458"/>
-                </a:stretch>
-              </a:blipFill>
-            </p:spPr>
-            <p:txBody>
-              <a:bodyPr/>
-              <a:lstStyle/>
-              <a:p>
-                <a:r>
-                  <a:rPr lang="en-GB">
-                    <a:noFill/>
-                  </a:rPr>
-                  <a:t> </a:t>
-                </a:r>
-              </a:p>
-            </p:txBody>
-          </p:sp>
-        </mc:Fallback>
-      </mc:AlternateContent>
-      <p:sp>
-        <p:nvSpPr>
-          <p:cNvPr id="25" name="TextBox 24">
-            <a:extLst>
-              <a:ext uri="{FF2B5EF4-FFF2-40B4-BE49-F238E27FC236}">
-                <a16:creationId xmlns:a16="http://schemas.microsoft.com/office/drawing/2014/main" id="{A76CF49E-6913-B420-97E0-55E57310B1C0}"/>
-              </a:ext>
-            </a:extLst>
-          </p:cNvPr>
-          <p:cNvSpPr txBox="1"/>
-          <p:nvPr/>
-        </p:nvSpPr>
-        <p:spPr>
-          <a:xfrm>
-            <a:off x="304801" y="3090446"/>
-            <a:ext cx="2982731" cy="338554"/>
-          </a:xfrm>
-          <a:prstGeom prst="rect">
-            <a:avLst/>
-          </a:prstGeom>
-          <a:noFill/>
-        </p:spPr>
-        <p:txBody>
-          <a:bodyPr wrap="square">
-            <a:spAutoFit/>
-          </a:bodyPr>
-          <a:lstStyle/>
-          <a:p>
-            <a:r>
-              <a:rPr lang="en-GB" sz="1600" dirty="0">
-                <a:latin typeface="+mj-lt"/>
-              </a:rPr>
-              <a:t>Efficiency: 353.29 km/kWh</a:t>
-            </a:r>
-            <a:endParaRPr lang="en-GB" sz="1600" b="1" dirty="0">
-              <a:latin typeface="+mj-lt"/>
-            </a:endParaRPr>
-          </a:p>
-        </p:txBody>
-      </p:sp>
-      <p:sp>
-        <p:nvSpPr>
-          <p:cNvPr id="26" name="TextBox 25">
-            <a:extLst>
-              <a:ext uri="{FF2B5EF4-FFF2-40B4-BE49-F238E27FC236}">
-                <a16:creationId xmlns:a16="http://schemas.microsoft.com/office/drawing/2014/main" id="{847E96D1-6F4B-8007-56C6-635B7C8D8389}"/>
-              </a:ext>
-            </a:extLst>
-          </p:cNvPr>
-          <p:cNvSpPr txBox="1"/>
-          <p:nvPr/>
-        </p:nvSpPr>
-        <p:spPr>
-          <a:xfrm>
-            <a:off x="3793954" y="2105085"/>
-            <a:ext cx="4402515" cy="830997"/>
-          </a:xfrm>
-          <a:prstGeom prst="rect">
-            <a:avLst/>
-          </a:prstGeom>
-          <a:noFill/>
-        </p:spPr>
-        <p:txBody>
-          <a:bodyPr wrap="square" rtlCol="0">
-            <a:spAutoFit/>
-          </a:bodyPr>
-          <a:lstStyle/>
-          <a:p>
-            <a:pPr algn="ctr"/>
-            <a:r>
-              <a:rPr lang="en-GB" sz="1600" dirty="0"/>
-              <a:t>On </a:t>
-            </a:r>
-            <a:r>
-              <a:rPr lang="en-GB" sz="1600" dirty="0" err="1"/>
-              <a:t>retrouve</a:t>
-            </a:r>
-            <a:r>
-              <a:rPr lang="en-GB" sz="1600" dirty="0"/>
-              <a:t> bien accel -&gt; plateau -&gt; coast</a:t>
-            </a:r>
-          </a:p>
-          <a:p>
-            <a:pPr algn="ctr"/>
-            <a:r>
-              <a:rPr lang="en-GB" sz="1600" dirty="0" err="1"/>
-              <a:t>Plutot</a:t>
-            </a:r>
-            <a:r>
-              <a:rPr lang="en-GB" sz="1600" dirty="0"/>
-              <a:t> bon </a:t>
-            </a:r>
-            <a:r>
-              <a:rPr lang="en-GB" sz="1600" dirty="0" err="1"/>
-              <a:t>signe</a:t>
-            </a:r>
-            <a:r>
-              <a:rPr lang="en-GB" sz="1600" dirty="0"/>
-              <a:t> </a:t>
-            </a:r>
-            <a:r>
-              <a:rPr lang="en-GB" sz="1600" dirty="0">
-                <a:sym typeface="Wingdings" panose="05000000000000000000" pitchFamily="2" charset="2"/>
-              </a:rPr>
-              <a:t></a:t>
-            </a:r>
-          </a:p>
-          <a:p>
-            <a:pPr algn="ctr"/>
-            <a:r>
-              <a:rPr lang="en-GB" sz="1600" dirty="0">
-                <a:sym typeface="Wingdings" panose="05000000000000000000" pitchFamily="2" charset="2"/>
-              </a:rPr>
-              <a:t>Plateau pas parfait, ca montre les </a:t>
-            </a:r>
-            <a:r>
-              <a:rPr lang="en-GB" sz="1600" dirty="0" err="1">
-                <a:sym typeface="Wingdings" panose="05000000000000000000" pitchFamily="2" charset="2"/>
-              </a:rPr>
-              <a:t>limites</a:t>
-            </a:r>
-            <a:endParaRPr lang="en-GB" sz="1600" dirty="0"/>
-          </a:p>
-        </p:txBody>
-      </p:sp>
-    </p:spTree>
-    <p:extLst>
-      <p:ext uri="{BB962C8B-B14F-4D97-AF65-F5344CB8AC3E}">
-        <p14:creationId xmlns:p14="http://schemas.microsoft.com/office/powerpoint/2010/main" val="3709495557"/>
-      </p:ext>
-    </p:extLst>
-  </p:cSld>
-  <p:clrMapOvr>
-    <a:masterClrMapping/>
-  </p:clrMapOvr>
-</p:sld>
-</file>
-
-<file path=ppt/slides/slide19.xml><?xml version="1.0" encoding="utf-8"?>
+<file path=ppt/slides/slide17.xml><?xml version="1.0" encoding="utf-8"?>
 <p:sld xmlns:a="http://schemas.openxmlformats.org/drawingml/2006/main" xmlns:r="http://schemas.openxmlformats.org/officeDocument/2006/relationships" xmlns:p="http://schemas.openxmlformats.org/presentationml/2006/main">
   <p:cSld>
     <p:spTree>
@@ -8267,7 +7223,7 @@
           <a:p>
             <a:r>
               <a:rPr lang="en-GB" dirty="0"/>
-              <a:t>Simulation 3 : </a:t>
+              <a:t>Simulation 2 : </a:t>
             </a:r>
             <a:r>
               <a:rPr lang="en-GB" dirty="0" err="1"/>
@@ -8303,7 +7259,7 @@
           <a:p>
             <a:fld id="{CA9A9924-1784-4044-A2E4-3606370E1BB6}" type="datetime1">
               <a:rPr lang="en-GB" smtClean="0"/>
-              <a:t>09/10/2026</a:t>
+              <a:t>14/10/2026</a:t>
             </a:fld>
             <a:endParaRPr lang="en-GB" dirty="0">
               <a:latin typeface="Segoe UI Symbol" panose="020B0502040204020203" pitchFamily="34" charset="0"/>
@@ -8336,7 +7292,7 @@
             <a:fld id="{46899FAB-5005-482A-88F2-FE97823A1A33}" type="slidenum">
               <a:rPr lang="en-GB" smtClean="0"/>
               <a:pPr/>
-              <a:t>19</a:t>
+              <a:t>17</a:t>
             </a:fld>
             <a:r>
               <a:rPr lang="en-GB"/>
@@ -8852,361 +7808,7 @@
 </p:sld>
 </file>
 
-<file path=ppt/slides/slide2.xml><?xml version="1.0" encoding="utf-8"?>
-<p:sld xmlns:a="http://schemas.openxmlformats.org/drawingml/2006/main" xmlns:r="http://schemas.openxmlformats.org/officeDocument/2006/relationships" xmlns:p="http://schemas.openxmlformats.org/presentationml/2006/main">
-  <p:cSld>
-    <p:spTree>
-      <p:nvGrpSpPr>
-        <p:cNvPr id="1" name="">
-          <a:extLst>
-            <a:ext uri="{FF2B5EF4-FFF2-40B4-BE49-F238E27FC236}">
-              <a16:creationId xmlns:a16="http://schemas.microsoft.com/office/drawing/2014/main" id="{2ED717AA-12B0-B2A8-5C03-FFD618B583FC}"/>
-            </a:ext>
-          </a:extLst>
-        </p:cNvPr>
-        <p:cNvGrpSpPr/>
-        <p:nvPr/>
-      </p:nvGrpSpPr>
-      <p:grpSpPr>
-        <a:xfrm>
-          <a:off x="0" y="0"/>
-          <a:ext cx="0" cy="0"/>
-          <a:chOff x="0" y="0"/>
-          <a:chExt cx="0" cy="0"/>
-        </a:xfrm>
-      </p:grpSpPr>
-      <p:sp>
-        <p:nvSpPr>
-          <p:cNvPr id="2" name="Title 1">
-            <a:extLst>
-              <a:ext uri="{FF2B5EF4-FFF2-40B4-BE49-F238E27FC236}">
-                <a16:creationId xmlns:a16="http://schemas.microsoft.com/office/drawing/2014/main" id="{1B44EA55-65FC-0908-E193-A4A4A38F2CFF}"/>
-              </a:ext>
-            </a:extLst>
-          </p:cNvPr>
-          <p:cNvSpPr>
-            <a:spLocks noGrp="1"/>
-          </p:cNvSpPr>
-          <p:nvPr>
-            <p:ph type="title"/>
-          </p:nvPr>
-        </p:nvSpPr>
-        <p:spPr/>
-        <p:txBody>
-          <a:bodyPr/>
-          <a:lstStyle/>
-          <a:p>
-            <a:r>
-              <a:rPr lang="fr-BE" noProof="0" dirty="0" err="1"/>
-              <a:t>Outline</a:t>
-            </a:r>
-            <a:endParaRPr lang="fr-BE" noProof="0" dirty="0"/>
-          </a:p>
-        </p:txBody>
-      </p:sp>
-      <p:sp>
-        <p:nvSpPr>
-          <p:cNvPr id="3" name="Date Placeholder 2">
-            <a:extLst>
-              <a:ext uri="{FF2B5EF4-FFF2-40B4-BE49-F238E27FC236}">
-                <a16:creationId xmlns:a16="http://schemas.microsoft.com/office/drawing/2014/main" id="{ECEA5E42-9678-898E-B414-5E855B1DDC14}"/>
-              </a:ext>
-            </a:extLst>
-          </p:cNvPr>
-          <p:cNvSpPr>
-            <a:spLocks noGrp="1"/>
-          </p:cNvSpPr>
-          <p:nvPr>
-            <p:ph type="dt" sz="half" idx="10"/>
-          </p:nvPr>
-        </p:nvSpPr>
-        <p:spPr/>
-        <p:txBody>
-          <a:bodyPr/>
-          <a:lstStyle/>
-          <a:p>
-            <a:fld id="{CA9A9924-1784-4044-A2E4-3606370E1BB6}" type="datetime1">
-              <a:rPr lang="fr-BE" noProof="0" smtClean="0"/>
-              <a:t>09-10-26</a:t>
-            </a:fld>
-            <a:endParaRPr lang="fr-BE" noProof="0" dirty="0">
-              <a:latin typeface="Segoe UI Symbol" panose="020B0502040204020203" pitchFamily="34" charset="0"/>
-              <a:ea typeface="Segoe UI Symbol" panose="020B0502040204020203" pitchFamily="34" charset="0"/>
-            </a:endParaRPr>
-          </a:p>
-        </p:txBody>
-      </p:sp>
-      <p:sp>
-        <p:nvSpPr>
-          <p:cNvPr id="4" name="Slide Number Placeholder 3">
-            <a:extLst>
-              <a:ext uri="{FF2B5EF4-FFF2-40B4-BE49-F238E27FC236}">
-                <a16:creationId xmlns:a16="http://schemas.microsoft.com/office/drawing/2014/main" id="{0E1E4BD9-1240-D9C5-A9D9-0D049D56BB9C}"/>
-              </a:ext>
-            </a:extLst>
-          </p:cNvPr>
-          <p:cNvSpPr>
-            <a:spLocks noGrp="1"/>
-          </p:cNvSpPr>
-          <p:nvPr>
-            <p:ph type="sldNum" sz="quarter" idx="4"/>
-          </p:nvPr>
-        </p:nvSpPr>
-        <p:spPr/>
-        <p:txBody>
-          <a:bodyPr/>
-          <a:lstStyle/>
-          <a:p>
-            <a:fld id="{46899FAB-5005-482A-88F2-FE97823A1A33}" type="slidenum">
-              <a:rPr lang="fr-BE" noProof="0" smtClean="0"/>
-              <a:pPr/>
-              <a:t>2</a:t>
-            </a:fld>
-            <a:r>
-              <a:rPr lang="fr-BE" noProof="0" dirty="0"/>
-              <a:t>/x</a:t>
-            </a:r>
-            <a:endParaRPr lang="fr-BE" noProof="0" dirty="0">
-              <a:latin typeface="Segoe UI Symbol" panose="020B0502040204020203" pitchFamily="34" charset="0"/>
-              <a:ea typeface="Segoe UI Symbol" panose="020B0502040204020203" pitchFamily="34" charset="0"/>
-            </a:endParaRPr>
-          </a:p>
-        </p:txBody>
-      </p:sp>
-      <p:sp>
-        <p:nvSpPr>
-          <p:cNvPr id="5" name="Content Placeholder 4">
-            <a:extLst>
-              <a:ext uri="{FF2B5EF4-FFF2-40B4-BE49-F238E27FC236}">
-                <a16:creationId xmlns:a16="http://schemas.microsoft.com/office/drawing/2014/main" id="{F522C2CF-473C-209B-C15A-D6CDE4E23E51}"/>
-              </a:ext>
-            </a:extLst>
-          </p:cNvPr>
-          <p:cNvSpPr>
-            <a:spLocks noGrp="1"/>
-          </p:cNvSpPr>
-          <p:nvPr>
-            <p:ph idx="1"/>
-          </p:nvPr>
-        </p:nvSpPr>
-        <p:spPr>
-          <a:xfrm>
-            <a:off x="584809" y="1851545"/>
-            <a:ext cx="7552026" cy="3816482"/>
-          </a:xfrm>
-        </p:spPr>
-        <p:txBody>
-          <a:bodyPr>
-            <a:normAutofit/>
-          </a:bodyPr>
-          <a:lstStyle/>
-          <a:p>
-            <a:r>
-              <a:rPr lang="fr-BE" sz="2800" noProof="0" dirty="0"/>
-              <a:t>Pourquoi ?</a:t>
-            </a:r>
-          </a:p>
-          <a:p>
-            <a:r>
-              <a:rPr lang="en-GB" sz="2800" dirty="0">
-                <a:solidFill>
-                  <a:schemeClr val="bg2">
-                    <a:lumMod val="75000"/>
-                  </a:schemeClr>
-                </a:solidFill>
-              </a:rPr>
-              <a:t>How it works ?</a:t>
-            </a:r>
-            <a:r>
-              <a:rPr lang="en-GB" sz="2800" dirty="0" err="1">
-                <a:solidFill>
-                  <a:schemeClr val="bg2">
-                    <a:lumMod val="75000"/>
-                  </a:schemeClr>
-                </a:solidFill>
-              </a:rPr>
-              <a:t>Calculateur</a:t>
-            </a:r>
-            <a:r>
-              <a:rPr lang="en-GB" sz="2800" dirty="0">
-                <a:solidFill>
-                  <a:schemeClr val="bg2">
-                    <a:lumMod val="75000"/>
-                  </a:schemeClr>
-                </a:solidFill>
-              </a:rPr>
-              <a:t> de consommation </a:t>
-            </a:r>
-          </a:p>
-          <a:p>
-            <a:r>
-              <a:rPr lang="fr-BE" sz="2800" noProof="0" dirty="0">
-                <a:solidFill>
-                  <a:schemeClr val="bg2">
-                    <a:lumMod val="75000"/>
-                  </a:schemeClr>
-                </a:solidFill>
-              </a:rPr>
-              <a:t>Résultats </a:t>
-            </a:r>
-            <a:r>
-              <a:rPr lang="fr-BE" sz="2800" dirty="0">
-                <a:solidFill>
-                  <a:schemeClr val="bg2">
-                    <a:lumMod val="75000"/>
-                  </a:schemeClr>
-                </a:solidFill>
-              </a:rPr>
-              <a:t>rendement mot. non cst</a:t>
-            </a:r>
-            <a:r>
-              <a:rPr lang="fr-BE" sz="2800" noProof="0" dirty="0">
-                <a:solidFill>
-                  <a:schemeClr val="bg2">
-                    <a:lumMod val="75000"/>
-                  </a:schemeClr>
-                </a:solidFill>
-              </a:rPr>
-              <a:t> (07/10/26) </a:t>
-            </a:r>
-          </a:p>
-          <a:p>
-            <a:r>
-              <a:rPr lang="fr-BE" sz="2800" dirty="0">
-                <a:solidFill>
-                  <a:schemeClr val="bg2">
-                    <a:lumMod val="75000"/>
-                  </a:schemeClr>
-                </a:solidFill>
-              </a:rPr>
-              <a:t>Résultats rendement mot. cst (07/10/26) </a:t>
-            </a:r>
-            <a:endParaRPr lang="fr-BE" sz="2800" noProof="0" dirty="0">
-              <a:solidFill>
-                <a:schemeClr val="bg2">
-                  <a:lumMod val="75000"/>
-                </a:schemeClr>
-              </a:solidFill>
-            </a:endParaRPr>
-          </a:p>
-          <a:p>
-            <a:r>
-              <a:rPr lang="fr-BE" sz="2800" noProof="0" dirty="0">
-                <a:solidFill>
-                  <a:schemeClr val="bg2">
-                    <a:lumMod val="75000"/>
-                  </a:schemeClr>
-                </a:solidFill>
-              </a:rPr>
-              <a:t>Calcul de </a:t>
-            </a:r>
-            <a:r>
-              <a:rPr lang="fr-BE" sz="2800" noProof="0" dirty="0" err="1">
-                <a:solidFill>
-                  <a:schemeClr val="bg2">
-                    <a:lumMod val="75000"/>
-                  </a:schemeClr>
-                </a:solidFill>
-              </a:rPr>
-              <a:t>sensitivities</a:t>
-            </a:r>
-            <a:endParaRPr lang="fr-BE" sz="2800" noProof="0" dirty="0">
-              <a:solidFill>
-                <a:schemeClr val="bg2">
-                  <a:lumMod val="75000"/>
-                </a:schemeClr>
-              </a:solidFill>
-            </a:endParaRPr>
-          </a:p>
-          <a:p>
-            <a:r>
-              <a:rPr lang="fr-BE" sz="2800" noProof="0" dirty="0">
-                <a:solidFill>
-                  <a:schemeClr val="bg2">
-                    <a:lumMod val="75000"/>
-                  </a:schemeClr>
-                </a:solidFill>
-              </a:rPr>
-              <a:t>Mass vs </a:t>
-            </a:r>
-            <a:r>
-              <a:rPr lang="fr-BE" sz="2800" noProof="0" dirty="0" err="1">
-                <a:solidFill>
-                  <a:schemeClr val="bg2">
-                    <a:lumMod val="75000"/>
-                  </a:schemeClr>
-                </a:solidFill>
-              </a:rPr>
-              <a:t>SCx</a:t>
-            </a:r>
-            <a:r>
-              <a:rPr lang="fr-BE" sz="2800" noProof="0" dirty="0">
-                <a:solidFill>
-                  <a:schemeClr val="bg2">
-                    <a:lumMod val="75000"/>
-                  </a:schemeClr>
-                </a:solidFill>
-              </a:rPr>
-              <a:t> </a:t>
-            </a:r>
-            <a:r>
-              <a:rPr lang="fr-BE" sz="2800" noProof="0" dirty="0" err="1">
-                <a:solidFill>
-                  <a:schemeClr val="bg2">
-                    <a:lumMod val="75000"/>
-                  </a:schemeClr>
-                </a:solidFill>
-              </a:rPr>
-              <a:t>tradeoff</a:t>
-            </a:r>
-            <a:r>
-              <a:rPr lang="fr-BE" sz="2800" noProof="0" dirty="0">
-                <a:solidFill>
-                  <a:schemeClr val="bg2">
-                    <a:lumMod val="75000"/>
-                  </a:schemeClr>
-                </a:solidFill>
-              </a:rPr>
-              <a:t> </a:t>
-            </a:r>
-          </a:p>
-          <a:p>
-            <a:r>
-              <a:rPr lang="fr-BE" sz="2800" dirty="0">
-                <a:solidFill>
-                  <a:schemeClr val="bg2">
-                    <a:lumMod val="75000"/>
-                  </a:schemeClr>
-                </a:solidFill>
-              </a:rPr>
-              <a:t>Conclusions : directions de développement</a:t>
-            </a:r>
-          </a:p>
-          <a:p>
-            <a:endParaRPr lang="fr-BE" sz="2800" noProof="0" dirty="0">
-              <a:solidFill>
-                <a:schemeClr val="bg2">
-                  <a:lumMod val="75000"/>
-                </a:schemeClr>
-              </a:solidFill>
-            </a:endParaRPr>
-          </a:p>
-        </p:txBody>
-      </p:sp>
-    </p:spTree>
-    <p:extLst>
-      <p:ext uri="{BB962C8B-B14F-4D97-AF65-F5344CB8AC3E}">
-        <p14:creationId xmlns:p14="http://schemas.microsoft.com/office/powerpoint/2010/main" val="2366368580"/>
-      </p:ext>
-    </p:extLst>
-  </p:cSld>
-  <p:clrMapOvr>
-    <a:masterClrMapping/>
-  </p:clrMapOvr>
-</p:sld>
-</file>
-
-<file path=ppt/slides/slide20.xml><?xml version="1.0" encoding="utf-8"?>
+<file path=ppt/slides/slide18.xml><?xml version="1.0" encoding="utf-8"?>
 <p:sld xmlns:a="http://schemas.openxmlformats.org/drawingml/2006/main" xmlns:r="http://schemas.openxmlformats.org/officeDocument/2006/relationships" xmlns:p="http://schemas.openxmlformats.org/presentationml/2006/main">
   <p:cSld>
     <p:spTree>
@@ -9257,7 +7859,7 @@
           <a:p>
             <a:r>
               <a:rPr lang="en-GB" dirty="0"/>
-              <a:t>Simulation 3 : Silesia Ring </a:t>
+              <a:t>Simulation 2 : Silesia Ring </a:t>
             </a:r>
             <a:r>
               <a:rPr lang="en-GB" dirty="0" err="1"/>
@@ -9298,7 +7900,7 @@
           <a:p>
             <a:fld id="{CA9A9924-1784-4044-A2E4-3606370E1BB6}" type="datetime1">
               <a:rPr lang="en-GB" smtClean="0"/>
-              <a:t>09/10/2026</a:t>
+              <a:t>14/10/2026</a:t>
             </a:fld>
             <a:endParaRPr lang="en-GB" dirty="0">
               <a:latin typeface="Segoe UI Symbol" panose="020B0502040204020203" pitchFamily="34" charset="0"/>
@@ -9331,7 +7933,7 @@
             <a:fld id="{46899FAB-5005-482A-88F2-FE97823A1A33}" type="slidenum">
               <a:rPr lang="en-GB" smtClean="0"/>
               <a:pPr/>
-              <a:t>20</a:t>
+              <a:t>18</a:t>
             </a:fld>
             <a:r>
               <a:rPr lang="en-GB"/>
@@ -9740,6 +8342,174 @@
           </a:p>
         </p:txBody>
       </p:sp>
+      <p:pic>
+        <p:nvPicPr>
+          <p:cNvPr id="7" name="Picture 6">
+            <a:extLst>
+              <a:ext uri="{FF2B5EF4-FFF2-40B4-BE49-F238E27FC236}">
+                <a16:creationId xmlns:a16="http://schemas.microsoft.com/office/drawing/2014/main" id="{85FD8A5B-7B6A-91D2-7A1F-2AFE6A3C5FD5}"/>
+              </a:ext>
+            </a:extLst>
+          </p:cNvPr>
+          <p:cNvPicPr>
+            <a:picLocks noChangeAspect="1"/>
+          </p:cNvPicPr>
+          <p:nvPr/>
+        </p:nvPicPr>
+        <p:blipFill>
+          <a:blip r:embed="rId7"/>
+          <a:stretch>
+            <a:fillRect/>
+          </a:stretch>
+        </p:blipFill>
+        <p:spPr>
+          <a:xfrm>
+            <a:off x="131355" y="3679560"/>
+            <a:ext cx="3300155" cy="1632225"/>
+          </a:xfrm>
+          <a:prstGeom prst="rect">
+            <a:avLst/>
+          </a:prstGeom>
+        </p:spPr>
+      </p:pic>
+      <p:sp>
+        <p:nvSpPr>
+          <p:cNvPr id="9" name="Rectangle 8">
+            <a:extLst>
+              <a:ext uri="{FF2B5EF4-FFF2-40B4-BE49-F238E27FC236}">
+                <a16:creationId xmlns:a16="http://schemas.microsoft.com/office/drawing/2014/main" id="{84D3EB68-038A-6676-0A04-D1BEF8D0F034}"/>
+              </a:ext>
+            </a:extLst>
+          </p:cNvPr>
+          <p:cNvSpPr/>
+          <p:nvPr/>
+        </p:nvSpPr>
+        <p:spPr>
+          <a:xfrm>
+            <a:off x="2498034" y="4582388"/>
+            <a:ext cx="45719" cy="265043"/>
+          </a:xfrm>
+          <a:prstGeom prst="rect">
+            <a:avLst/>
+          </a:prstGeom>
+          <a:solidFill>
+            <a:schemeClr val="tx1"/>
+          </a:solidFill>
+          <a:ln>
+            <a:solidFill>
+              <a:schemeClr val="tx1"/>
+            </a:solidFill>
+          </a:ln>
+        </p:spPr>
+        <p:style>
+          <a:lnRef idx="2">
+            <a:schemeClr val="accent1">
+              <a:shade val="15000"/>
+            </a:schemeClr>
+          </a:lnRef>
+          <a:fillRef idx="1">
+            <a:schemeClr val="accent1"/>
+          </a:fillRef>
+          <a:effectRef idx="0">
+            <a:schemeClr val="accent1"/>
+          </a:effectRef>
+          <a:fontRef idx="minor">
+            <a:schemeClr val="lt1"/>
+          </a:fontRef>
+        </p:style>
+        <p:txBody>
+          <a:bodyPr rtlCol="0" anchor="ctr"/>
+          <a:lstStyle/>
+          <a:p>
+            <a:pPr algn="ctr"/>
+            <a:endParaRPr lang="en-GB"/>
+          </a:p>
+        </p:txBody>
+      </p:sp>
+      <p:sp>
+        <p:nvSpPr>
+          <p:cNvPr id="10" name="TextBox 9">
+            <a:extLst>
+              <a:ext uri="{FF2B5EF4-FFF2-40B4-BE49-F238E27FC236}">
+                <a16:creationId xmlns:a16="http://schemas.microsoft.com/office/drawing/2014/main" id="{7053529F-A819-BF68-02BA-E1DD0BBCE822}"/>
+              </a:ext>
+            </a:extLst>
+          </p:cNvPr>
+          <p:cNvSpPr txBox="1"/>
+          <p:nvPr/>
+        </p:nvSpPr>
+        <p:spPr>
+          <a:xfrm>
+            <a:off x="1066392" y="5455318"/>
+            <a:ext cx="2909001" cy="369332"/>
+          </a:xfrm>
+          <a:prstGeom prst="rect">
+            <a:avLst/>
+          </a:prstGeom>
+          <a:noFill/>
+        </p:spPr>
+        <p:txBody>
+          <a:bodyPr wrap="none" rtlCol="0">
+            <a:spAutoFit/>
+          </a:bodyPr>
+          <a:lstStyle/>
+          <a:p>
+            <a:r>
+              <a:rPr lang="en-GB" dirty="0"/>
+              <a:t>Start/Finish (dans </a:t>
+            </a:r>
+            <a:r>
+              <a:rPr lang="en-GB" dirty="0" err="1"/>
+              <a:t>mes</a:t>
+            </a:r>
+            <a:r>
+              <a:rPr lang="en-GB" dirty="0"/>
+              <a:t> sim)</a:t>
+            </a:r>
+          </a:p>
+        </p:txBody>
+      </p:sp>
+      <p:cxnSp>
+        <p:nvCxnSpPr>
+          <p:cNvPr id="14" name="Straight Arrow Connector 13">
+            <a:extLst>
+              <a:ext uri="{FF2B5EF4-FFF2-40B4-BE49-F238E27FC236}">
+                <a16:creationId xmlns:a16="http://schemas.microsoft.com/office/drawing/2014/main" id="{FFCF33BF-96E7-94C7-E207-CBCC9FE9CBEF}"/>
+              </a:ext>
+            </a:extLst>
+          </p:cNvPr>
+          <p:cNvCxnSpPr>
+            <a:stCxn id="10" idx="0"/>
+          </p:cNvCxnSpPr>
+          <p:nvPr/>
+        </p:nvCxnSpPr>
+        <p:spPr>
+          <a:xfrm flipV="1">
+            <a:off x="2520893" y="4930140"/>
+            <a:ext cx="22860" cy="525178"/>
+          </a:xfrm>
+          <a:prstGeom prst="straightConnector1">
+            <a:avLst/>
+          </a:prstGeom>
+          <a:ln>
+            <a:tailEnd type="triangle"/>
+          </a:ln>
+        </p:spPr>
+        <p:style>
+          <a:lnRef idx="2">
+            <a:schemeClr val="accent1"/>
+          </a:lnRef>
+          <a:fillRef idx="0">
+            <a:schemeClr val="accent1"/>
+          </a:fillRef>
+          <a:effectRef idx="1">
+            <a:schemeClr val="accent1"/>
+          </a:effectRef>
+          <a:fontRef idx="minor">
+            <a:schemeClr val="tx1"/>
+          </a:fontRef>
+        </p:style>
+      </p:cxnSp>
     </p:spTree>
     <p:extLst>
       <p:ext uri="{BB962C8B-B14F-4D97-AF65-F5344CB8AC3E}">
@@ -9753,7 +8523,7 @@
 </p:sld>
 </file>
 
-<file path=ppt/slides/slide21.xml><?xml version="1.0" encoding="utf-8"?>
+<file path=ppt/slides/slide19.xml><?xml version="1.0" encoding="utf-8"?>
 <p:sld xmlns:a="http://schemas.openxmlformats.org/drawingml/2006/main" xmlns:r="http://schemas.openxmlformats.org/officeDocument/2006/relationships" xmlns:p="http://schemas.openxmlformats.org/presentationml/2006/main">
   <p:cSld>
     <p:spTree>
@@ -9828,7 +8598,7 @@
           <a:p>
             <a:fld id="{CA9A9924-1784-4044-A2E4-3606370E1BB6}" type="datetime1">
               <a:rPr lang="fr-BE" noProof="0" smtClean="0"/>
-              <a:t>09-10-26</a:t>
+              <a:t>14-10-26</a:t>
             </a:fld>
             <a:endParaRPr lang="fr-BE" noProof="0" dirty="0">
               <a:latin typeface="Segoe UI Symbol" panose="020B0502040204020203" pitchFamily="34" charset="0"/>
@@ -9861,7 +8631,7 @@
             <a:fld id="{46899FAB-5005-482A-88F2-FE97823A1A33}" type="slidenum">
               <a:rPr lang="fr-BE" noProof="0" smtClean="0"/>
               <a:pPr/>
-              <a:t>21</a:t>
+              <a:t>19</a:t>
             </a:fld>
             <a:r>
               <a:rPr lang="fr-BE" noProof="0" dirty="0"/>
@@ -10095,7 +8865,361 @@
 </p:sld>
 </file>
 
-<file path=ppt/slides/slide22.xml><?xml version="1.0" encoding="utf-8"?>
+<file path=ppt/slides/slide2.xml><?xml version="1.0" encoding="utf-8"?>
+<p:sld xmlns:a="http://schemas.openxmlformats.org/drawingml/2006/main" xmlns:r="http://schemas.openxmlformats.org/officeDocument/2006/relationships" xmlns:p="http://schemas.openxmlformats.org/presentationml/2006/main">
+  <p:cSld>
+    <p:spTree>
+      <p:nvGrpSpPr>
+        <p:cNvPr id="1" name="">
+          <a:extLst>
+            <a:ext uri="{FF2B5EF4-FFF2-40B4-BE49-F238E27FC236}">
+              <a16:creationId xmlns:a16="http://schemas.microsoft.com/office/drawing/2014/main" id="{2ED717AA-12B0-B2A8-5C03-FFD618B583FC}"/>
+            </a:ext>
+          </a:extLst>
+        </p:cNvPr>
+        <p:cNvGrpSpPr/>
+        <p:nvPr/>
+      </p:nvGrpSpPr>
+      <p:grpSpPr>
+        <a:xfrm>
+          <a:off x="0" y="0"/>
+          <a:ext cx="0" cy="0"/>
+          <a:chOff x="0" y="0"/>
+          <a:chExt cx="0" cy="0"/>
+        </a:xfrm>
+      </p:grpSpPr>
+      <p:sp>
+        <p:nvSpPr>
+          <p:cNvPr id="2" name="Title 1">
+            <a:extLst>
+              <a:ext uri="{FF2B5EF4-FFF2-40B4-BE49-F238E27FC236}">
+                <a16:creationId xmlns:a16="http://schemas.microsoft.com/office/drawing/2014/main" id="{1B44EA55-65FC-0908-E193-A4A4A38F2CFF}"/>
+              </a:ext>
+            </a:extLst>
+          </p:cNvPr>
+          <p:cNvSpPr>
+            <a:spLocks noGrp="1"/>
+          </p:cNvSpPr>
+          <p:nvPr>
+            <p:ph type="title"/>
+          </p:nvPr>
+        </p:nvSpPr>
+        <p:spPr/>
+        <p:txBody>
+          <a:bodyPr/>
+          <a:lstStyle/>
+          <a:p>
+            <a:r>
+              <a:rPr lang="fr-BE" noProof="0" dirty="0" err="1"/>
+              <a:t>Outline</a:t>
+            </a:r>
+            <a:endParaRPr lang="fr-BE" noProof="0" dirty="0"/>
+          </a:p>
+        </p:txBody>
+      </p:sp>
+      <p:sp>
+        <p:nvSpPr>
+          <p:cNvPr id="3" name="Date Placeholder 2">
+            <a:extLst>
+              <a:ext uri="{FF2B5EF4-FFF2-40B4-BE49-F238E27FC236}">
+                <a16:creationId xmlns:a16="http://schemas.microsoft.com/office/drawing/2014/main" id="{ECEA5E42-9678-898E-B414-5E855B1DDC14}"/>
+              </a:ext>
+            </a:extLst>
+          </p:cNvPr>
+          <p:cNvSpPr>
+            <a:spLocks noGrp="1"/>
+          </p:cNvSpPr>
+          <p:nvPr>
+            <p:ph type="dt" sz="half" idx="10"/>
+          </p:nvPr>
+        </p:nvSpPr>
+        <p:spPr/>
+        <p:txBody>
+          <a:bodyPr/>
+          <a:lstStyle/>
+          <a:p>
+            <a:fld id="{CA9A9924-1784-4044-A2E4-3606370E1BB6}" type="datetime1">
+              <a:rPr lang="fr-BE" noProof="0" smtClean="0"/>
+              <a:t>14-10-26</a:t>
+            </a:fld>
+            <a:endParaRPr lang="fr-BE" noProof="0" dirty="0">
+              <a:latin typeface="Segoe UI Symbol" panose="020B0502040204020203" pitchFamily="34" charset="0"/>
+              <a:ea typeface="Segoe UI Symbol" panose="020B0502040204020203" pitchFamily="34" charset="0"/>
+            </a:endParaRPr>
+          </a:p>
+        </p:txBody>
+      </p:sp>
+      <p:sp>
+        <p:nvSpPr>
+          <p:cNvPr id="4" name="Slide Number Placeholder 3">
+            <a:extLst>
+              <a:ext uri="{FF2B5EF4-FFF2-40B4-BE49-F238E27FC236}">
+                <a16:creationId xmlns:a16="http://schemas.microsoft.com/office/drawing/2014/main" id="{0E1E4BD9-1240-D9C5-A9D9-0D049D56BB9C}"/>
+              </a:ext>
+            </a:extLst>
+          </p:cNvPr>
+          <p:cNvSpPr>
+            <a:spLocks noGrp="1"/>
+          </p:cNvSpPr>
+          <p:nvPr>
+            <p:ph type="sldNum" sz="quarter" idx="4"/>
+          </p:nvPr>
+        </p:nvSpPr>
+        <p:spPr/>
+        <p:txBody>
+          <a:bodyPr/>
+          <a:lstStyle/>
+          <a:p>
+            <a:fld id="{46899FAB-5005-482A-88F2-FE97823A1A33}" type="slidenum">
+              <a:rPr lang="fr-BE" noProof="0" smtClean="0"/>
+              <a:pPr/>
+              <a:t>2</a:t>
+            </a:fld>
+            <a:r>
+              <a:rPr lang="fr-BE" noProof="0" dirty="0"/>
+              <a:t>/x</a:t>
+            </a:r>
+            <a:endParaRPr lang="fr-BE" noProof="0" dirty="0">
+              <a:latin typeface="Segoe UI Symbol" panose="020B0502040204020203" pitchFamily="34" charset="0"/>
+              <a:ea typeface="Segoe UI Symbol" panose="020B0502040204020203" pitchFamily="34" charset="0"/>
+            </a:endParaRPr>
+          </a:p>
+        </p:txBody>
+      </p:sp>
+      <p:sp>
+        <p:nvSpPr>
+          <p:cNvPr id="5" name="Content Placeholder 4">
+            <a:extLst>
+              <a:ext uri="{FF2B5EF4-FFF2-40B4-BE49-F238E27FC236}">
+                <a16:creationId xmlns:a16="http://schemas.microsoft.com/office/drawing/2014/main" id="{F522C2CF-473C-209B-C15A-D6CDE4E23E51}"/>
+              </a:ext>
+            </a:extLst>
+          </p:cNvPr>
+          <p:cNvSpPr>
+            <a:spLocks noGrp="1"/>
+          </p:cNvSpPr>
+          <p:nvPr>
+            <p:ph idx="1"/>
+          </p:nvPr>
+        </p:nvSpPr>
+        <p:spPr>
+          <a:xfrm>
+            <a:off x="584809" y="1851545"/>
+            <a:ext cx="7552026" cy="3816482"/>
+          </a:xfrm>
+        </p:spPr>
+        <p:txBody>
+          <a:bodyPr>
+            <a:normAutofit/>
+          </a:bodyPr>
+          <a:lstStyle/>
+          <a:p>
+            <a:r>
+              <a:rPr lang="fr-BE" sz="2800" noProof="0" dirty="0"/>
+              <a:t>Pourquoi ?</a:t>
+            </a:r>
+          </a:p>
+          <a:p>
+            <a:r>
+              <a:rPr lang="en-GB" sz="2800" dirty="0">
+                <a:solidFill>
+                  <a:schemeClr val="bg2">
+                    <a:lumMod val="75000"/>
+                  </a:schemeClr>
+                </a:solidFill>
+              </a:rPr>
+              <a:t>How it works ?</a:t>
+            </a:r>
+            <a:r>
+              <a:rPr lang="en-GB" sz="2800" dirty="0" err="1">
+                <a:solidFill>
+                  <a:schemeClr val="bg2">
+                    <a:lumMod val="75000"/>
+                  </a:schemeClr>
+                </a:solidFill>
+              </a:rPr>
+              <a:t>Calculateur</a:t>
+            </a:r>
+            <a:r>
+              <a:rPr lang="en-GB" sz="2800" dirty="0">
+                <a:solidFill>
+                  <a:schemeClr val="bg2">
+                    <a:lumMod val="75000"/>
+                  </a:schemeClr>
+                </a:solidFill>
+              </a:rPr>
+              <a:t> de consommation </a:t>
+            </a:r>
+          </a:p>
+          <a:p>
+            <a:r>
+              <a:rPr lang="fr-BE" sz="2800" noProof="0" dirty="0">
+                <a:solidFill>
+                  <a:schemeClr val="bg2">
+                    <a:lumMod val="75000"/>
+                  </a:schemeClr>
+                </a:solidFill>
+              </a:rPr>
+              <a:t>Résultats </a:t>
+            </a:r>
+            <a:r>
+              <a:rPr lang="fr-BE" sz="2800" dirty="0">
+                <a:solidFill>
+                  <a:schemeClr val="bg2">
+                    <a:lumMod val="75000"/>
+                  </a:schemeClr>
+                </a:solidFill>
+              </a:rPr>
+              <a:t>rendement mot. non cst</a:t>
+            </a:r>
+            <a:r>
+              <a:rPr lang="fr-BE" sz="2800" noProof="0" dirty="0">
+                <a:solidFill>
+                  <a:schemeClr val="bg2">
+                    <a:lumMod val="75000"/>
+                  </a:schemeClr>
+                </a:solidFill>
+              </a:rPr>
+              <a:t> (07/10/26) </a:t>
+            </a:r>
+          </a:p>
+          <a:p>
+            <a:r>
+              <a:rPr lang="fr-BE" sz="2800" dirty="0">
+                <a:solidFill>
+                  <a:schemeClr val="bg2">
+                    <a:lumMod val="75000"/>
+                  </a:schemeClr>
+                </a:solidFill>
+              </a:rPr>
+              <a:t>Résultats rendement mot. cst (07/10/26) </a:t>
+            </a:r>
+            <a:endParaRPr lang="fr-BE" sz="2800" noProof="0" dirty="0">
+              <a:solidFill>
+                <a:schemeClr val="bg2">
+                  <a:lumMod val="75000"/>
+                </a:schemeClr>
+              </a:solidFill>
+            </a:endParaRPr>
+          </a:p>
+          <a:p>
+            <a:r>
+              <a:rPr lang="fr-BE" sz="2800" noProof="0" dirty="0">
+                <a:solidFill>
+                  <a:schemeClr val="bg2">
+                    <a:lumMod val="75000"/>
+                  </a:schemeClr>
+                </a:solidFill>
+              </a:rPr>
+              <a:t>Calcul de </a:t>
+            </a:r>
+            <a:r>
+              <a:rPr lang="fr-BE" sz="2800" noProof="0" dirty="0" err="1">
+                <a:solidFill>
+                  <a:schemeClr val="bg2">
+                    <a:lumMod val="75000"/>
+                  </a:schemeClr>
+                </a:solidFill>
+              </a:rPr>
+              <a:t>sensitivities</a:t>
+            </a:r>
+            <a:endParaRPr lang="fr-BE" sz="2800" noProof="0" dirty="0">
+              <a:solidFill>
+                <a:schemeClr val="bg2">
+                  <a:lumMod val="75000"/>
+                </a:schemeClr>
+              </a:solidFill>
+            </a:endParaRPr>
+          </a:p>
+          <a:p>
+            <a:r>
+              <a:rPr lang="fr-BE" sz="2800" noProof="0" dirty="0">
+                <a:solidFill>
+                  <a:schemeClr val="bg2">
+                    <a:lumMod val="75000"/>
+                  </a:schemeClr>
+                </a:solidFill>
+              </a:rPr>
+              <a:t>Mass vs </a:t>
+            </a:r>
+            <a:r>
+              <a:rPr lang="fr-BE" sz="2800" noProof="0" dirty="0" err="1">
+                <a:solidFill>
+                  <a:schemeClr val="bg2">
+                    <a:lumMod val="75000"/>
+                  </a:schemeClr>
+                </a:solidFill>
+              </a:rPr>
+              <a:t>SCx</a:t>
+            </a:r>
+            <a:r>
+              <a:rPr lang="fr-BE" sz="2800" noProof="0" dirty="0">
+                <a:solidFill>
+                  <a:schemeClr val="bg2">
+                    <a:lumMod val="75000"/>
+                  </a:schemeClr>
+                </a:solidFill>
+              </a:rPr>
+              <a:t> </a:t>
+            </a:r>
+            <a:r>
+              <a:rPr lang="fr-BE" sz="2800" noProof="0" dirty="0" err="1">
+                <a:solidFill>
+                  <a:schemeClr val="bg2">
+                    <a:lumMod val="75000"/>
+                  </a:schemeClr>
+                </a:solidFill>
+              </a:rPr>
+              <a:t>tradeoff</a:t>
+            </a:r>
+            <a:r>
+              <a:rPr lang="fr-BE" sz="2800" noProof="0" dirty="0">
+                <a:solidFill>
+                  <a:schemeClr val="bg2">
+                    <a:lumMod val="75000"/>
+                  </a:schemeClr>
+                </a:solidFill>
+              </a:rPr>
+              <a:t> </a:t>
+            </a:r>
+          </a:p>
+          <a:p>
+            <a:r>
+              <a:rPr lang="fr-BE" sz="2800" dirty="0">
+                <a:solidFill>
+                  <a:schemeClr val="bg2">
+                    <a:lumMod val="75000"/>
+                  </a:schemeClr>
+                </a:solidFill>
+              </a:rPr>
+              <a:t>Conclusions : directions de développement</a:t>
+            </a:r>
+          </a:p>
+          <a:p>
+            <a:endParaRPr lang="fr-BE" sz="2800" noProof="0" dirty="0">
+              <a:solidFill>
+                <a:schemeClr val="bg2">
+                  <a:lumMod val="75000"/>
+                </a:schemeClr>
+              </a:solidFill>
+            </a:endParaRPr>
+          </a:p>
+        </p:txBody>
+      </p:sp>
+    </p:spTree>
+    <p:extLst>
+      <p:ext uri="{BB962C8B-B14F-4D97-AF65-F5344CB8AC3E}">
+        <p14:creationId xmlns:p14="http://schemas.microsoft.com/office/powerpoint/2010/main" val="2366368580"/>
+      </p:ext>
+    </p:extLst>
+  </p:cSld>
+  <p:clrMapOvr>
+    <a:masterClrMapping/>
+  </p:clrMapOvr>
+</p:sld>
+</file>
+
+<file path=ppt/slides/slide20.xml><?xml version="1.0" encoding="utf-8"?>
 <p:sld xmlns:a="http://schemas.openxmlformats.org/drawingml/2006/main" xmlns:r="http://schemas.openxmlformats.org/officeDocument/2006/relationships" xmlns:p="http://schemas.openxmlformats.org/presentationml/2006/main">
   <p:cSld>
     <p:spTree>
@@ -10175,7 +9299,7 @@
           <a:p>
             <a:fld id="{CA9A9924-1784-4044-A2E4-3606370E1BB6}" type="datetime1">
               <a:rPr lang="fr-BE" noProof="0" smtClean="0"/>
-              <a:t>09-10-26</a:t>
+              <a:t>14-10-26</a:t>
             </a:fld>
             <a:endParaRPr lang="fr-BE" noProof="0" dirty="0">
               <a:latin typeface="Segoe UI Symbol" panose="020B0502040204020203" pitchFamily="34" charset="0"/>
@@ -10208,7 +9332,7 @@
             <a:fld id="{46899FAB-5005-482A-88F2-FE97823A1A33}" type="slidenum">
               <a:rPr lang="fr-BE" noProof="0" smtClean="0"/>
               <a:pPr/>
-              <a:t>22</a:t>
+              <a:t>20</a:t>
             </a:fld>
             <a:r>
               <a:rPr lang="fr-BE" noProof="0" dirty="0"/>
@@ -10528,7 +9652,7 @@
 </p:sld>
 </file>
 
-<file path=ppt/slides/slide23.xml><?xml version="1.0" encoding="utf-8"?>
+<file path=ppt/slides/slide21.xml><?xml version="1.0" encoding="utf-8"?>
 <p:sld xmlns:a="http://schemas.openxmlformats.org/drawingml/2006/main" xmlns:r="http://schemas.openxmlformats.org/officeDocument/2006/relationships" xmlns:p="http://schemas.openxmlformats.org/presentationml/2006/main">
   <p:cSld>
     <p:spTree>
@@ -10603,7 +9727,7 @@
           <a:p>
             <a:fld id="{CA9A9924-1784-4044-A2E4-3606370E1BB6}" type="datetime1">
               <a:rPr lang="fr-BE" noProof="0" smtClean="0"/>
-              <a:t>09-10-26</a:t>
+              <a:t>14-10-26</a:t>
             </a:fld>
             <a:endParaRPr lang="fr-BE" noProof="0" dirty="0">
               <a:latin typeface="Segoe UI Symbol" panose="020B0502040204020203" pitchFamily="34" charset="0"/>
@@ -10636,7 +9760,7 @@
             <a:fld id="{46899FAB-5005-482A-88F2-FE97823A1A33}" type="slidenum">
               <a:rPr lang="fr-BE" noProof="0" smtClean="0"/>
               <a:pPr/>
-              <a:t>23</a:t>
+              <a:t>21</a:t>
             </a:fld>
             <a:r>
               <a:rPr lang="fr-BE" noProof="0" dirty="0"/>
@@ -10858,7 +9982,7 @@
 </p:sld>
 </file>
 
-<file path=ppt/slides/slide24.xml><?xml version="1.0" encoding="utf-8"?>
+<file path=ppt/slides/slide22.xml><?xml version="1.0" encoding="utf-8"?>
 <p:sld xmlns:a="http://schemas.openxmlformats.org/drawingml/2006/main" xmlns:r="http://schemas.openxmlformats.org/officeDocument/2006/relationships" xmlns:p="http://schemas.openxmlformats.org/presentationml/2006/main">
   <p:cSld>
     <p:spTree>
@@ -10954,7 +10078,7 @@
           <a:p>
             <a:fld id="{CA9A9924-1784-4044-A2E4-3606370E1BB6}" type="datetime1">
               <a:rPr lang="fr-BE" noProof="0" smtClean="0"/>
-              <a:t>09-10-26</a:t>
+              <a:t>14-10-26</a:t>
             </a:fld>
             <a:endParaRPr lang="fr-BE" noProof="0" dirty="0">
               <a:latin typeface="Segoe UI Symbol" panose="020B0502040204020203" pitchFamily="34" charset="0"/>
@@ -10987,7 +10111,7 @@
             <a:fld id="{46899FAB-5005-482A-88F2-FE97823A1A33}" type="slidenum">
               <a:rPr lang="fr-BE" noProof="0" smtClean="0"/>
               <a:pPr/>
-              <a:t>24</a:t>
+              <a:t>22</a:t>
             </a:fld>
             <a:r>
               <a:rPr lang="fr-BE" noProof="0" dirty="0"/>
@@ -11449,7 +10573,7 @@
 </p:sld>
 </file>
 
-<file path=ppt/slides/slide25.xml><?xml version="1.0" encoding="utf-8"?>
+<file path=ppt/slides/slide23.xml><?xml version="1.0" encoding="utf-8"?>
 <p:sld xmlns:a="http://schemas.openxmlformats.org/drawingml/2006/main" xmlns:r="http://schemas.openxmlformats.org/officeDocument/2006/relationships" xmlns:p="http://schemas.openxmlformats.org/presentationml/2006/main">
   <p:cSld>
     <p:spTree>
@@ -11524,7 +10648,7 @@
           <a:p>
             <a:fld id="{CA9A9924-1784-4044-A2E4-3606370E1BB6}" type="datetime1">
               <a:rPr lang="fr-BE" noProof="0" smtClean="0"/>
-              <a:t>09-10-26</a:t>
+              <a:t>14-10-26</a:t>
             </a:fld>
             <a:endParaRPr lang="fr-BE" noProof="0" dirty="0">
               <a:latin typeface="Segoe UI Symbol" panose="020B0502040204020203" pitchFamily="34" charset="0"/>
@@ -11557,7 +10681,7 @@
             <a:fld id="{46899FAB-5005-482A-88F2-FE97823A1A33}" type="slidenum">
               <a:rPr lang="fr-BE" noProof="0" smtClean="0"/>
               <a:pPr/>
-              <a:t>25</a:t>
+              <a:t>23</a:t>
             </a:fld>
             <a:r>
               <a:rPr lang="fr-BE" noProof="0" dirty="0"/>
@@ -11803,7 +10927,7 @@
 </p:sld>
 </file>
 
-<file path=ppt/slides/slide26.xml><?xml version="1.0" encoding="utf-8"?>
+<file path=ppt/slides/slide24.xml><?xml version="1.0" encoding="utf-8"?>
 <p:sld xmlns:a="http://schemas.openxmlformats.org/drawingml/2006/main" xmlns:r="http://schemas.openxmlformats.org/officeDocument/2006/relationships" xmlns:p="http://schemas.openxmlformats.org/presentationml/2006/main">
   <p:cSld>
     <p:spTree>
@@ -11871,7 +10995,7 @@
           <a:p>
             <a:fld id="{CA9A9924-1784-4044-A2E4-3606370E1BB6}" type="datetime1">
               <a:rPr lang="fr-BE" noProof="0" smtClean="0"/>
-              <a:t>09-10-26</a:t>
+              <a:t>14-10-26</a:t>
             </a:fld>
             <a:endParaRPr lang="fr-BE" noProof="0" dirty="0">
               <a:latin typeface="Segoe UI Symbol" panose="020B0502040204020203" pitchFamily="34" charset="0"/>
@@ -11904,7 +11028,7 @@
             <a:fld id="{46899FAB-5005-482A-88F2-FE97823A1A33}" type="slidenum">
               <a:rPr lang="fr-BE" noProof="0" smtClean="0"/>
               <a:pPr/>
-              <a:t>26</a:t>
+              <a:t>24</a:t>
             </a:fld>
             <a:r>
               <a:rPr lang="fr-BE" noProof="0" dirty="0"/>
@@ -12181,7 +11305,7 @@
 </p:sld>
 </file>
 
-<file path=ppt/slides/slide27.xml><?xml version="1.0" encoding="utf-8"?>
+<file path=ppt/slides/slide25.xml><?xml version="1.0" encoding="utf-8"?>
 <p:sld xmlns:a="http://schemas.openxmlformats.org/drawingml/2006/main" xmlns:r="http://schemas.openxmlformats.org/officeDocument/2006/relationships" xmlns:p="http://schemas.openxmlformats.org/presentationml/2006/main">
   <p:cSld>
     <p:spTree>
@@ -12256,7 +11380,7 @@
           <a:p>
             <a:fld id="{CA9A9924-1784-4044-A2E4-3606370E1BB6}" type="datetime1">
               <a:rPr lang="fr-BE" noProof="0" smtClean="0"/>
-              <a:t>09-10-26</a:t>
+              <a:t>14-10-26</a:t>
             </a:fld>
             <a:endParaRPr lang="fr-BE" noProof="0" dirty="0">
               <a:latin typeface="Segoe UI Symbol" panose="020B0502040204020203" pitchFamily="34" charset="0"/>
@@ -12289,7 +11413,7 @@
             <a:fld id="{46899FAB-5005-482A-88F2-FE97823A1A33}" type="slidenum">
               <a:rPr lang="fr-BE" noProof="0" smtClean="0"/>
               <a:pPr/>
-              <a:t>27</a:t>
+              <a:t>25</a:t>
             </a:fld>
             <a:r>
               <a:rPr lang="fr-BE" noProof="0" dirty="0"/>
@@ -12538,7 +11662,7 @@
 </p:sld>
 </file>
 
-<file path=ppt/slides/slide28.xml><?xml version="1.0" encoding="utf-8"?>
+<file path=ppt/slides/slide26.xml><?xml version="1.0" encoding="utf-8"?>
 <p:sld xmlns:a="http://schemas.openxmlformats.org/drawingml/2006/main" xmlns:r="http://schemas.openxmlformats.org/officeDocument/2006/relationships" xmlns:p="http://schemas.openxmlformats.org/presentationml/2006/main">
   <p:cSld>
     <p:spTree>
@@ -12607,7 +11731,7 @@
           <a:p>
             <a:fld id="{CA9A9924-1784-4044-A2E4-3606370E1BB6}" type="datetime1">
               <a:rPr lang="en-GB" smtClean="0"/>
-              <a:t>09/10/2026</a:t>
+              <a:t>14/10/2026</a:t>
             </a:fld>
             <a:endParaRPr lang="en-GB" dirty="0">
               <a:latin typeface="Segoe UI Symbol" panose="020B0502040204020203" pitchFamily="34" charset="0"/>
@@ -12640,7 +11764,7 @@
             <a:fld id="{46899FAB-5005-482A-88F2-FE97823A1A33}" type="slidenum">
               <a:rPr lang="en-GB" smtClean="0"/>
               <a:pPr/>
-              <a:t>28</a:t>
+              <a:t>26</a:t>
             </a:fld>
             <a:r>
               <a:rPr lang="en-GB"/>
@@ -13081,6 +12205,1198 @@
     <p:extLst>
       <p:ext uri="{BB962C8B-B14F-4D97-AF65-F5344CB8AC3E}">
         <p14:creationId xmlns:p14="http://schemas.microsoft.com/office/powerpoint/2010/main" val="1848214915"/>
+      </p:ext>
+    </p:extLst>
+  </p:cSld>
+  <p:clrMapOvr>
+    <a:masterClrMapping/>
+  </p:clrMapOvr>
+</p:sld>
+</file>
+
+<file path=ppt/slides/slide27.xml><?xml version="1.0" encoding="utf-8"?>
+<p:sld xmlns:a="http://schemas.openxmlformats.org/drawingml/2006/main" xmlns:r="http://schemas.openxmlformats.org/officeDocument/2006/relationships" xmlns:p="http://schemas.openxmlformats.org/presentationml/2006/main" show="0">
+  <p:cSld>
+    <p:spTree>
+      <p:nvGrpSpPr>
+        <p:cNvPr id="1" name=""/>
+        <p:cNvGrpSpPr/>
+        <p:nvPr/>
+      </p:nvGrpSpPr>
+      <p:grpSpPr>
+        <a:xfrm>
+          <a:off x="0" y="0"/>
+          <a:ext cx="0" cy="0"/>
+          <a:chOff x="0" y="0"/>
+          <a:chExt cx="0" cy="0"/>
+        </a:xfrm>
+      </p:grpSpPr>
+      <p:sp>
+        <p:nvSpPr>
+          <p:cNvPr id="2" name="Title 1">
+            <a:extLst>
+              <a:ext uri="{FF2B5EF4-FFF2-40B4-BE49-F238E27FC236}">
+                <a16:creationId xmlns:a16="http://schemas.microsoft.com/office/drawing/2014/main" id="{D410F31E-138A-70A4-A7DE-B6D237AA6298}"/>
+              </a:ext>
+            </a:extLst>
+          </p:cNvPr>
+          <p:cNvSpPr>
+            <a:spLocks noGrp="1"/>
+          </p:cNvSpPr>
+          <p:nvPr>
+            <p:ph type="title"/>
+          </p:nvPr>
+        </p:nvSpPr>
+        <p:spPr>
+          <a:xfrm>
+            <a:off x="1759907" y="1189973"/>
+            <a:ext cx="5624186" cy="681036"/>
+          </a:xfrm>
+        </p:spPr>
+        <p:txBody>
+          <a:bodyPr/>
+          <a:lstStyle/>
+          <a:p>
+            <a:pPr algn="ctr"/>
+            <a:r>
+              <a:rPr lang="en-GB" dirty="0"/>
+              <a:t>ANNEXE</a:t>
+            </a:r>
+          </a:p>
+        </p:txBody>
+      </p:sp>
+      <p:sp>
+        <p:nvSpPr>
+          <p:cNvPr id="3" name="Date Placeholder 2">
+            <a:extLst>
+              <a:ext uri="{FF2B5EF4-FFF2-40B4-BE49-F238E27FC236}">
+                <a16:creationId xmlns:a16="http://schemas.microsoft.com/office/drawing/2014/main" id="{B499184F-F2F7-AC54-4A61-6EB23618E7A4}"/>
+              </a:ext>
+            </a:extLst>
+          </p:cNvPr>
+          <p:cNvSpPr>
+            <a:spLocks noGrp="1"/>
+          </p:cNvSpPr>
+          <p:nvPr>
+            <p:ph type="dt" sz="half" idx="10"/>
+          </p:nvPr>
+        </p:nvSpPr>
+        <p:spPr/>
+        <p:txBody>
+          <a:bodyPr/>
+          <a:lstStyle/>
+          <a:p>
+            <a:fld id="{CA9A9924-1784-4044-A2E4-3606370E1BB6}" type="datetime1">
+              <a:rPr lang="en-GB" smtClean="0"/>
+              <a:t>14/10/2026</a:t>
+            </a:fld>
+            <a:endParaRPr lang="en-GB" dirty="0">
+              <a:latin typeface="Segoe UI Symbol" panose="020B0502040204020203" pitchFamily="34" charset="0"/>
+              <a:ea typeface="Segoe UI Symbol" panose="020B0502040204020203" pitchFamily="34" charset="0"/>
+            </a:endParaRPr>
+          </a:p>
+        </p:txBody>
+      </p:sp>
+      <p:sp>
+        <p:nvSpPr>
+          <p:cNvPr id="4" name="Slide Number Placeholder 3">
+            <a:extLst>
+              <a:ext uri="{FF2B5EF4-FFF2-40B4-BE49-F238E27FC236}">
+                <a16:creationId xmlns:a16="http://schemas.microsoft.com/office/drawing/2014/main" id="{CF319A3D-4DB7-1106-AAA4-1463B4D7551C}"/>
+              </a:ext>
+            </a:extLst>
+          </p:cNvPr>
+          <p:cNvSpPr>
+            <a:spLocks noGrp="1"/>
+          </p:cNvSpPr>
+          <p:nvPr>
+            <p:ph type="sldNum" sz="quarter" idx="4"/>
+          </p:nvPr>
+        </p:nvSpPr>
+        <p:spPr/>
+        <p:txBody>
+          <a:bodyPr/>
+          <a:lstStyle/>
+          <a:p>
+            <a:fld id="{46899FAB-5005-482A-88F2-FE97823A1A33}" type="slidenum">
+              <a:rPr lang="en-GB" smtClean="0"/>
+              <a:pPr/>
+              <a:t>27</a:t>
+            </a:fld>
+            <a:r>
+              <a:rPr lang="en-GB"/>
+              <a:t>/x</a:t>
+            </a:r>
+            <a:endParaRPr lang="en-GB" dirty="0">
+              <a:latin typeface="Segoe UI Symbol" panose="020B0502040204020203" pitchFamily="34" charset="0"/>
+              <a:ea typeface="Segoe UI Symbol" panose="020B0502040204020203" pitchFamily="34" charset="0"/>
+            </a:endParaRPr>
+          </a:p>
+        </p:txBody>
+      </p:sp>
+    </p:spTree>
+    <p:extLst>
+      <p:ext uri="{BB962C8B-B14F-4D97-AF65-F5344CB8AC3E}">
+        <p14:creationId xmlns:p14="http://schemas.microsoft.com/office/powerpoint/2010/main" val="102566416"/>
+      </p:ext>
+    </p:extLst>
+  </p:cSld>
+  <p:clrMapOvr>
+    <a:masterClrMapping/>
+  </p:clrMapOvr>
+</p:sld>
+</file>
+
+<file path=ppt/slides/slide28.xml><?xml version="1.0" encoding="utf-8"?>
+<p:sld xmlns:a="http://schemas.openxmlformats.org/drawingml/2006/main" xmlns:r="http://schemas.openxmlformats.org/officeDocument/2006/relationships" xmlns:p="http://schemas.openxmlformats.org/presentationml/2006/main" show="0">
+  <p:cSld>
+    <p:spTree>
+      <p:nvGrpSpPr>
+        <p:cNvPr id="1" name="">
+          <a:extLst>
+            <a:ext uri="{FF2B5EF4-FFF2-40B4-BE49-F238E27FC236}">
+              <a16:creationId xmlns:a16="http://schemas.microsoft.com/office/drawing/2014/main" id="{58D3793A-A8F3-29C2-516F-4DB008F7E7CD}"/>
+            </a:ext>
+          </a:extLst>
+        </p:cNvPr>
+        <p:cNvGrpSpPr/>
+        <p:nvPr/>
+      </p:nvGrpSpPr>
+      <p:grpSpPr>
+        <a:xfrm>
+          <a:off x="0" y="0"/>
+          <a:ext cx="0" cy="0"/>
+          <a:chOff x="0" y="0"/>
+          <a:chExt cx="0" cy="0"/>
+        </a:xfrm>
+      </p:grpSpPr>
+      <p:sp>
+        <p:nvSpPr>
+          <p:cNvPr id="2" name="Title 1">
+            <a:extLst>
+              <a:ext uri="{FF2B5EF4-FFF2-40B4-BE49-F238E27FC236}">
+                <a16:creationId xmlns:a16="http://schemas.microsoft.com/office/drawing/2014/main" id="{3AAC0FB9-A773-0A7B-15F9-806536A0A412}"/>
+              </a:ext>
+            </a:extLst>
+          </p:cNvPr>
+          <p:cNvSpPr>
+            <a:spLocks noGrp="1"/>
+          </p:cNvSpPr>
+          <p:nvPr>
+            <p:ph type="title"/>
+          </p:nvPr>
+        </p:nvSpPr>
+        <p:spPr>
+          <a:xfrm>
+            <a:off x="0" y="1"/>
+            <a:ext cx="9144000" cy="681036"/>
+          </a:xfrm>
+        </p:spPr>
+        <p:txBody>
+          <a:bodyPr/>
+          <a:lstStyle/>
+          <a:p>
+            <a:r>
+              <a:rPr lang="fr-BE" noProof="0" dirty="0"/>
+              <a:t>Illustration (tracé plat) </a:t>
+            </a:r>
+            <a:r>
+              <a:rPr lang="fr-BE" dirty="0"/>
+              <a:t>: profils v &amp; F optimaux</a:t>
+            </a:r>
+            <a:endParaRPr lang="fr-BE" noProof="0" dirty="0"/>
+          </a:p>
+        </p:txBody>
+      </p:sp>
+      <p:sp>
+        <p:nvSpPr>
+          <p:cNvPr id="3" name="Date Placeholder 2">
+            <a:extLst>
+              <a:ext uri="{FF2B5EF4-FFF2-40B4-BE49-F238E27FC236}">
+                <a16:creationId xmlns:a16="http://schemas.microsoft.com/office/drawing/2014/main" id="{49FEF20F-6C70-93BF-D543-DAAFEDE7CD4E}"/>
+              </a:ext>
+            </a:extLst>
+          </p:cNvPr>
+          <p:cNvSpPr>
+            <a:spLocks noGrp="1"/>
+          </p:cNvSpPr>
+          <p:nvPr>
+            <p:ph type="dt" sz="half" idx="10"/>
+          </p:nvPr>
+        </p:nvSpPr>
+        <p:spPr/>
+        <p:txBody>
+          <a:bodyPr/>
+          <a:lstStyle/>
+          <a:p>
+            <a:fld id="{CA9A9924-1784-4044-A2E4-3606370E1BB6}" type="datetime1">
+              <a:rPr lang="fr-BE" noProof="0" smtClean="0"/>
+              <a:t>14-10-26</a:t>
+            </a:fld>
+            <a:endParaRPr lang="fr-BE" noProof="0" dirty="0">
+              <a:latin typeface="Segoe UI Symbol" panose="020B0502040204020203" pitchFamily="34" charset="0"/>
+              <a:ea typeface="Segoe UI Symbol" panose="020B0502040204020203" pitchFamily="34" charset="0"/>
+            </a:endParaRPr>
+          </a:p>
+        </p:txBody>
+      </p:sp>
+      <p:sp>
+        <p:nvSpPr>
+          <p:cNvPr id="4" name="Slide Number Placeholder 3">
+            <a:extLst>
+              <a:ext uri="{FF2B5EF4-FFF2-40B4-BE49-F238E27FC236}">
+                <a16:creationId xmlns:a16="http://schemas.microsoft.com/office/drawing/2014/main" id="{4EE42EE9-9DA2-C7A6-FA1C-C3A10ED0CEE6}"/>
+              </a:ext>
+            </a:extLst>
+          </p:cNvPr>
+          <p:cNvSpPr>
+            <a:spLocks noGrp="1"/>
+          </p:cNvSpPr>
+          <p:nvPr>
+            <p:ph type="sldNum" sz="quarter" idx="4"/>
+          </p:nvPr>
+        </p:nvSpPr>
+        <p:spPr/>
+        <p:txBody>
+          <a:bodyPr/>
+          <a:lstStyle/>
+          <a:p>
+            <a:fld id="{46899FAB-5005-482A-88F2-FE97823A1A33}" type="slidenum">
+              <a:rPr lang="fr-BE" noProof="0" smtClean="0"/>
+              <a:pPr/>
+              <a:t>28</a:t>
+            </a:fld>
+            <a:r>
+              <a:rPr lang="fr-BE" noProof="0" dirty="0"/>
+              <a:t>/x</a:t>
+            </a:r>
+            <a:endParaRPr lang="fr-BE" noProof="0" dirty="0">
+              <a:latin typeface="Segoe UI Symbol" panose="020B0502040204020203" pitchFamily="34" charset="0"/>
+              <a:ea typeface="Segoe UI Symbol" panose="020B0502040204020203" pitchFamily="34" charset="0"/>
+            </a:endParaRPr>
+          </a:p>
+        </p:txBody>
+      </p:sp>
+      <p:pic>
+        <p:nvPicPr>
+          <p:cNvPr id="9" name="Picture 8">
+            <a:extLst>
+              <a:ext uri="{FF2B5EF4-FFF2-40B4-BE49-F238E27FC236}">
+                <a16:creationId xmlns:a16="http://schemas.microsoft.com/office/drawing/2014/main" id="{EBD3574E-E674-F5B8-F1A3-CC38E48D822A}"/>
+              </a:ext>
+            </a:extLst>
+          </p:cNvPr>
+          <p:cNvPicPr>
+            <a:picLocks noChangeAspect="1"/>
+          </p:cNvPicPr>
+          <p:nvPr/>
+        </p:nvPicPr>
+        <p:blipFill>
+          <a:blip r:embed="rId3">
+            <a:extLst>
+              <a:ext uri="{28A0092B-C50C-407E-A947-70E740481C1C}">
+                <a14:useLocalDpi xmlns:a14="http://schemas.microsoft.com/office/drawing/2010/main" val="0"/>
+              </a:ext>
+            </a:extLst>
+          </a:blip>
+          <a:stretch>
+            <a:fillRect/>
+          </a:stretch>
+        </p:blipFill>
+        <p:spPr>
+          <a:xfrm>
+            <a:off x="4797286" y="1055158"/>
+            <a:ext cx="4224509" cy="3421503"/>
+          </a:xfrm>
+          <a:prstGeom prst="rect">
+            <a:avLst/>
+          </a:prstGeom>
+        </p:spPr>
+      </p:pic>
+      <p:pic>
+        <p:nvPicPr>
+          <p:cNvPr id="11" name="Picture 10">
+            <a:extLst>
+              <a:ext uri="{FF2B5EF4-FFF2-40B4-BE49-F238E27FC236}">
+                <a16:creationId xmlns:a16="http://schemas.microsoft.com/office/drawing/2014/main" id="{ACCC850F-7A3B-29B0-1815-9DB5777AB381}"/>
+              </a:ext>
+            </a:extLst>
+          </p:cNvPr>
+          <p:cNvPicPr>
+            <a:picLocks noChangeAspect="1"/>
+          </p:cNvPicPr>
+          <p:nvPr/>
+        </p:nvPicPr>
+        <p:blipFill>
+          <a:blip r:embed="rId4">
+            <a:extLst>
+              <a:ext uri="{28A0092B-C50C-407E-A947-70E740481C1C}">
+                <a14:useLocalDpi xmlns:a14="http://schemas.microsoft.com/office/drawing/2010/main" val="0"/>
+              </a:ext>
+            </a:extLst>
+          </a:blip>
+          <a:stretch>
+            <a:fillRect/>
+          </a:stretch>
+        </p:blipFill>
+        <p:spPr>
+          <a:xfrm>
+            <a:off x="199732" y="961333"/>
+            <a:ext cx="4438529" cy="3594842"/>
+          </a:xfrm>
+          <a:prstGeom prst="rect">
+            <a:avLst/>
+          </a:prstGeom>
+        </p:spPr>
+      </p:pic>
+      <p:cxnSp>
+        <p:nvCxnSpPr>
+          <p:cNvPr id="6" name="Straight Arrow Connector 5">
+            <a:extLst>
+              <a:ext uri="{FF2B5EF4-FFF2-40B4-BE49-F238E27FC236}">
+                <a16:creationId xmlns:a16="http://schemas.microsoft.com/office/drawing/2014/main" id="{61A0C97A-3491-BFD9-A363-F830D46E5ADE}"/>
+              </a:ext>
+            </a:extLst>
+          </p:cNvPr>
+          <p:cNvCxnSpPr>
+            <a:cxnSpLocks/>
+          </p:cNvCxnSpPr>
+          <p:nvPr/>
+        </p:nvCxnSpPr>
+        <p:spPr>
+          <a:xfrm flipV="1">
+            <a:off x="1762539" y="2743201"/>
+            <a:ext cx="583096" cy="1994451"/>
+          </a:xfrm>
+          <a:prstGeom prst="straightConnector1">
+            <a:avLst/>
+          </a:prstGeom>
+          <a:ln>
+            <a:tailEnd type="triangle"/>
+          </a:ln>
+        </p:spPr>
+        <p:style>
+          <a:lnRef idx="2">
+            <a:schemeClr val="accent1"/>
+          </a:lnRef>
+          <a:fillRef idx="0">
+            <a:schemeClr val="accent1"/>
+          </a:fillRef>
+          <a:effectRef idx="1">
+            <a:schemeClr val="accent1"/>
+          </a:effectRef>
+          <a:fontRef idx="minor">
+            <a:schemeClr val="tx1"/>
+          </a:fontRef>
+        </p:style>
+      </p:cxnSp>
+      <p:sp>
+        <p:nvSpPr>
+          <p:cNvPr id="8" name="Oval 7">
+            <a:extLst>
+              <a:ext uri="{FF2B5EF4-FFF2-40B4-BE49-F238E27FC236}">
+                <a16:creationId xmlns:a16="http://schemas.microsoft.com/office/drawing/2014/main" id="{D447DE7F-3F7A-E704-4E4F-537DBC07486F}"/>
+              </a:ext>
+            </a:extLst>
+          </p:cNvPr>
+          <p:cNvSpPr/>
+          <p:nvPr/>
+        </p:nvSpPr>
+        <p:spPr>
+          <a:xfrm>
+            <a:off x="2120349" y="1311966"/>
+            <a:ext cx="887896" cy="1537252"/>
+          </a:xfrm>
+          <a:prstGeom prst="ellipse">
+            <a:avLst/>
+          </a:prstGeom>
+          <a:noFill/>
+          <a:ln>
+            <a:solidFill>
+              <a:srgbClr val="C00000"/>
+            </a:solidFill>
+          </a:ln>
+        </p:spPr>
+        <p:style>
+          <a:lnRef idx="2">
+            <a:schemeClr val="accent1">
+              <a:shade val="15000"/>
+            </a:schemeClr>
+          </a:lnRef>
+          <a:fillRef idx="1">
+            <a:schemeClr val="accent1"/>
+          </a:fillRef>
+          <a:effectRef idx="0">
+            <a:schemeClr val="accent1"/>
+          </a:effectRef>
+          <a:fontRef idx="minor">
+            <a:schemeClr val="lt1"/>
+          </a:fontRef>
+        </p:style>
+        <p:txBody>
+          <a:bodyPr rtlCol="0" anchor="ctr"/>
+          <a:lstStyle/>
+          <a:p>
+            <a:pPr algn="ctr"/>
+            <a:endParaRPr lang="fr-BE" noProof="0" dirty="0"/>
+          </a:p>
+        </p:txBody>
+      </p:sp>
+      <p:sp>
+        <p:nvSpPr>
+          <p:cNvPr id="14" name="TextBox 13">
+            <a:extLst>
+              <a:ext uri="{FF2B5EF4-FFF2-40B4-BE49-F238E27FC236}">
+                <a16:creationId xmlns:a16="http://schemas.microsoft.com/office/drawing/2014/main" id="{344EB829-B111-B17A-1179-FCA2083D0C2B}"/>
+              </a:ext>
+            </a:extLst>
+          </p:cNvPr>
+          <p:cNvSpPr txBox="1"/>
+          <p:nvPr/>
+        </p:nvSpPr>
+        <p:spPr>
+          <a:xfrm>
+            <a:off x="543339" y="5003717"/>
+            <a:ext cx="5797997" cy="923330"/>
+          </a:xfrm>
+          <a:prstGeom prst="rect">
+            <a:avLst/>
+          </a:prstGeom>
+          <a:noFill/>
+        </p:spPr>
+        <p:txBody>
+          <a:bodyPr wrap="none" rtlCol="0">
+            <a:spAutoFit/>
+          </a:bodyPr>
+          <a:lstStyle/>
+          <a:p>
+            <a:r>
+              <a:rPr lang="fr-BE" noProof="0" dirty="0"/>
+              <a:t>Dents de scie (on-off, </a:t>
+            </a:r>
+            <a:r>
+              <a:rPr lang="fr-BE" noProof="0" dirty="0" err="1"/>
+              <a:t>accel</a:t>
+            </a:r>
+            <a:r>
+              <a:rPr lang="fr-BE" noProof="0" dirty="0"/>
+              <a:t> &amp; </a:t>
+            </a:r>
+            <a:r>
+              <a:rPr lang="fr-BE" noProof="0" dirty="0" err="1"/>
+              <a:t>coast</a:t>
+            </a:r>
+            <a:r>
+              <a:rPr lang="fr-BE" noProof="0" dirty="0"/>
+              <a:t>):</a:t>
+            </a:r>
+          </a:p>
+          <a:p>
+            <a:r>
+              <a:rPr lang="fr-BE" noProof="0" dirty="0"/>
+              <a:t>Le moteur est sollicité dans sa plage optimale (pour η), </a:t>
+            </a:r>
+          </a:p>
+          <a:p>
+            <a:r>
+              <a:rPr lang="fr-BE" noProof="0" dirty="0" err="1"/>
+              <a:t>accérération</a:t>
+            </a:r>
+            <a:r>
+              <a:rPr lang="fr-BE" noProof="0" dirty="0"/>
+              <a:t>, puis </a:t>
+            </a:r>
+            <a:r>
+              <a:rPr lang="fr-BE" noProof="0" dirty="0" err="1"/>
+              <a:t>coast</a:t>
+            </a:r>
+            <a:r>
+              <a:rPr lang="fr-BE" noProof="0" dirty="0"/>
+              <a:t>,  </a:t>
+            </a:r>
+            <a:r>
+              <a:rPr lang="fr-BE" noProof="0" dirty="0" err="1"/>
+              <a:t>accel</a:t>
+            </a:r>
+            <a:r>
+              <a:rPr lang="fr-BE" noProof="0" dirty="0"/>
+              <a:t> …</a:t>
+            </a:r>
+          </a:p>
+        </p:txBody>
+      </p:sp>
+      <p:sp>
+        <p:nvSpPr>
+          <p:cNvPr id="16" name="Oval 15">
+            <a:extLst>
+              <a:ext uri="{FF2B5EF4-FFF2-40B4-BE49-F238E27FC236}">
+                <a16:creationId xmlns:a16="http://schemas.microsoft.com/office/drawing/2014/main" id="{8AD6C9C3-22DA-7B77-407F-986A6930E998}"/>
+              </a:ext>
+            </a:extLst>
+          </p:cNvPr>
+          <p:cNvSpPr/>
+          <p:nvPr/>
+        </p:nvSpPr>
+        <p:spPr>
+          <a:xfrm>
+            <a:off x="6135756" y="1205948"/>
+            <a:ext cx="887896" cy="3061251"/>
+          </a:xfrm>
+          <a:prstGeom prst="ellipse">
+            <a:avLst/>
+          </a:prstGeom>
+          <a:noFill/>
+          <a:ln>
+            <a:solidFill>
+              <a:srgbClr val="C00000"/>
+            </a:solidFill>
+          </a:ln>
+        </p:spPr>
+        <p:style>
+          <a:lnRef idx="2">
+            <a:schemeClr val="accent1">
+              <a:shade val="15000"/>
+            </a:schemeClr>
+          </a:lnRef>
+          <a:fillRef idx="1">
+            <a:schemeClr val="accent1"/>
+          </a:fillRef>
+          <a:effectRef idx="0">
+            <a:schemeClr val="accent1"/>
+          </a:effectRef>
+          <a:fontRef idx="minor">
+            <a:schemeClr val="lt1"/>
+          </a:fontRef>
+        </p:style>
+        <p:txBody>
+          <a:bodyPr rtlCol="0" anchor="ctr"/>
+          <a:lstStyle/>
+          <a:p>
+            <a:pPr algn="ctr"/>
+            <a:endParaRPr lang="fr-BE" noProof="0" dirty="0"/>
+          </a:p>
+        </p:txBody>
+      </p:sp>
+      <p:cxnSp>
+        <p:nvCxnSpPr>
+          <p:cNvPr id="17" name="Straight Arrow Connector 16">
+            <a:extLst>
+              <a:ext uri="{FF2B5EF4-FFF2-40B4-BE49-F238E27FC236}">
+                <a16:creationId xmlns:a16="http://schemas.microsoft.com/office/drawing/2014/main" id="{34B3CC25-4BAB-6D40-6766-4CA62A04F447}"/>
+              </a:ext>
+            </a:extLst>
+          </p:cNvPr>
+          <p:cNvCxnSpPr>
+            <a:cxnSpLocks/>
+          </p:cNvCxnSpPr>
+          <p:nvPr/>
+        </p:nvCxnSpPr>
+        <p:spPr>
+          <a:xfrm flipV="1">
+            <a:off x="2385392" y="4267199"/>
+            <a:ext cx="3889512" cy="736518"/>
+          </a:xfrm>
+          <a:prstGeom prst="straightConnector1">
+            <a:avLst/>
+          </a:prstGeom>
+          <a:ln>
+            <a:tailEnd type="triangle"/>
+          </a:ln>
+        </p:spPr>
+        <p:style>
+          <a:lnRef idx="2">
+            <a:schemeClr val="accent1"/>
+          </a:lnRef>
+          <a:fillRef idx="0">
+            <a:schemeClr val="accent1"/>
+          </a:fillRef>
+          <a:effectRef idx="1">
+            <a:schemeClr val="accent1"/>
+          </a:effectRef>
+          <a:fontRef idx="minor">
+            <a:schemeClr val="tx1"/>
+          </a:fontRef>
+        </p:style>
+      </p:cxnSp>
+      <p:sp>
+        <p:nvSpPr>
+          <p:cNvPr id="20" name="TextBox 19">
+            <a:extLst>
+              <a:ext uri="{FF2B5EF4-FFF2-40B4-BE49-F238E27FC236}">
+                <a16:creationId xmlns:a16="http://schemas.microsoft.com/office/drawing/2014/main" id="{26D7C21A-4ABC-F8CB-060A-AEC9DF9CA7AE}"/>
+              </a:ext>
+            </a:extLst>
+          </p:cNvPr>
+          <p:cNvSpPr txBox="1"/>
+          <p:nvPr/>
+        </p:nvSpPr>
+        <p:spPr>
+          <a:xfrm>
+            <a:off x="5974589" y="4885901"/>
+            <a:ext cx="3047206" cy="369332"/>
+          </a:xfrm>
+          <a:prstGeom prst="rect">
+            <a:avLst/>
+          </a:prstGeom>
+          <a:noFill/>
+        </p:spPr>
+        <p:txBody>
+          <a:bodyPr wrap="square">
+            <a:spAutoFit/>
+          </a:bodyPr>
+          <a:lstStyle/>
+          <a:p>
+            <a:r>
+              <a:rPr lang="fr-BE" noProof="0" dirty="0"/>
+              <a:t>Efficacité = </a:t>
+            </a:r>
+            <a:r>
+              <a:rPr lang="fr-BE" b="1" noProof="0" dirty="0"/>
+              <a:t>328.52</a:t>
+            </a:r>
+            <a:r>
+              <a:rPr lang="fr-BE" noProof="0" dirty="0"/>
+              <a:t> km/kWh</a:t>
+            </a:r>
+          </a:p>
+        </p:txBody>
+      </p:sp>
+    </p:spTree>
+    <p:extLst>
+      <p:ext uri="{BB962C8B-B14F-4D97-AF65-F5344CB8AC3E}">
+        <p14:creationId xmlns:p14="http://schemas.microsoft.com/office/powerpoint/2010/main" val="1168840488"/>
+      </p:ext>
+    </p:extLst>
+  </p:cSld>
+  <p:clrMapOvr>
+    <a:masterClrMapping/>
+  </p:clrMapOvr>
+</p:sld>
+</file>
+
+<file path=ppt/slides/slide29.xml><?xml version="1.0" encoding="utf-8"?>
+<p:sld xmlns:a="http://schemas.openxmlformats.org/drawingml/2006/main" xmlns:r="http://schemas.openxmlformats.org/officeDocument/2006/relationships" xmlns:p="http://schemas.openxmlformats.org/presentationml/2006/main" show="0">
+  <p:cSld>
+    <p:spTree>
+      <p:nvGrpSpPr>
+        <p:cNvPr id="1" name=""/>
+        <p:cNvGrpSpPr/>
+        <p:nvPr/>
+      </p:nvGrpSpPr>
+      <p:grpSpPr>
+        <a:xfrm>
+          <a:off x="0" y="0"/>
+          <a:ext cx="0" cy="0"/>
+          <a:chOff x="0" y="0"/>
+          <a:chExt cx="0" cy="0"/>
+        </a:xfrm>
+      </p:grpSpPr>
+      <p:sp>
+        <p:nvSpPr>
+          <p:cNvPr id="2" name="Title 1">
+            <a:extLst>
+              <a:ext uri="{FF2B5EF4-FFF2-40B4-BE49-F238E27FC236}">
+                <a16:creationId xmlns:a16="http://schemas.microsoft.com/office/drawing/2014/main" id="{E09F9A8F-80C3-873F-1872-68518C6343CF}"/>
+              </a:ext>
+            </a:extLst>
+          </p:cNvPr>
+          <p:cNvSpPr>
+            <a:spLocks noGrp="1"/>
+          </p:cNvSpPr>
+          <p:nvPr>
+            <p:ph type="title"/>
+          </p:nvPr>
+        </p:nvSpPr>
+        <p:spPr>
+          <a:xfrm>
+            <a:off x="0" y="1"/>
+            <a:ext cx="9144000" cy="681036"/>
+          </a:xfrm>
+        </p:spPr>
+        <p:txBody>
+          <a:bodyPr/>
+          <a:lstStyle/>
+          <a:p>
+            <a:r>
+              <a:rPr lang="en-GB" dirty="0"/>
+              <a:t>Simulation : </a:t>
+            </a:r>
+            <a:r>
+              <a:rPr lang="en-GB" dirty="0" err="1"/>
+              <a:t>rendement</a:t>
+            </a:r>
+            <a:r>
+              <a:rPr lang="en-GB" dirty="0"/>
+              <a:t> mot. constant &amp; sur plat</a:t>
+            </a:r>
+          </a:p>
+        </p:txBody>
+      </p:sp>
+      <p:sp>
+        <p:nvSpPr>
+          <p:cNvPr id="3" name="Date Placeholder 2">
+            <a:extLst>
+              <a:ext uri="{FF2B5EF4-FFF2-40B4-BE49-F238E27FC236}">
+                <a16:creationId xmlns:a16="http://schemas.microsoft.com/office/drawing/2014/main" id="{E58ED2A5-A32F-AA89-E5D9-117CF897AC8A}"/>
+              </a:ext>
+            </a:extLst>
+          </p:cNvPr>
+          <p:cNvSpPr>
+            <a:spLocks noGrp="1"/>
+          </p:cNvSpPr>
+          <p:nvPr>
+            <p:ph type="dt" sz="half" idx="10"/>
+          </p:nvPr>
+        </p:nvSpPr>
+        <p:spPr/>
+        <p:txBody>
+          <a:bodyPr/>
+          <a:lstStyle/>
+          <a:p>
+            <a:fld id="{CA9A9924-1784-4044-A2E4-3606370E1BB6}" type="datetime1">
+              <a:rPr lang="en-GB" smtClean="0"/>
+              <a:t>14/10/2026</a:t>
+            </a:fld>
+            <a:endParaRPr lang="en-GB" dirty="0">
+              <a:latin typeface="Segoe UI Symbol" panose="020B0502040204020203" pitchFamily="34" charset="0"/>
+              <a:ea typeface="Segoe UI Symbol" panose="020B0502040204020203" pitchFamily="34" charset="0"/>
+            </a:endParaRPr>
+          </a:p>
+        </p:txBody>
+      </p:sp>
+      <p:sp>
+        <p:nvSpPr>
+          <p:cNvPr id="4" name="Slide Number Placeholder 3">
+            <a:extLst>
+              <a:ext uri="{FF2B5EF4-FFF2-40B4-BE49-F238E27FC236}">
+                <a16:creationId xmlns:a16="http://schemas.microsoft.com/office/drawing/2014/main" id="{D5CD84A4-478B-AE19-FC4F-D6DDF05879E2}"/>
+              </a:ext>
+            </a:extLst>
+          </p:cNvPr>
+          <p:cNvSpPr>
+            <a:spLocks noGrp="1"/>
+          </p:cNvSpPr>
+          <p:nvPr>
+            <p:ph type="sldNum" sz="quarter" idx="4"/>
+          </p:nvPr>
+        </p:nvSpPr>
+        <p:spPr/>
+        <p:txBody>
+          <a:bodyPr/>
+          <a:lstStyle/>
+          <a:p>
+            <a:fld id="{46899FAB-5005-482A-88F2-FE97823A1A33}" type="slidenum">
+              <a:rPr lang="en-GB" smtClean="0"/>
+              <a:pPr/>
+              <a:t>29</a:t>
+            </a:fld>
+            <a:r>
+              <a:rPr lang="en-GB"/>
+              <a:t>/x</a:t>
+            </a:r>
+            <a:endParaRPr lang="en-GB" dirty="0">
+              <a:latin typeface="Segoe UI Symbol" panose="020B0502040204020203" pitchFamily="34" charset="0"/>
+              <a:ea typeface="Segoe UI Symbol" panose="020B0502040204020203" pitchFamily="34" charset="0"/>
+            </a:endParaRPr>
+          </a:p>
+        </p:txBody>
+      </p:sp>
+      <p:pic>
+        <p:nvPicPr>
+          <p:cNvPr id="7" name="Content Placeholder 6">
+            <a:extLst>
+              <a:ext uri="{FF2B5EF4-FFF2-40B4-BE49-F238E27FC236}">
+                <a16:creationId xmlns:a16="http://schemas.microsoft.com/office/drawing/2014/main" id="{2C650685-1DE3-048B-8BD3-0661FE2B64B4}"/>
+              </a:ext>
+            </a:extLst>
+          </p:cNvPr>
+          <p:cNvPicPr>
+            <a:picLocks noGrp="1" noChangeAspect="1"/>
+          </p:cNvPicPr>
+          <p:nvPr>
+            <p:ph idx="1"/>
+          </p:nvPr>
+        </p:nvPicPr>
+        <p:blipFill>
+          <a:blip r:embed="rId2">
+            <a:extLst>
+              <a:ext uri="{28A0092B-C50C-407E-A947-70E740481C1C}">
+                <a14:useLocalDpi xmlns:a14="http://schemas.microsoft.com/office/drawing/2010/main" val="0"/>
+              </a:ext>
+            </a:extLst>
+          </a:blip>
+          <a:stretch>
+            <a:fillRect/>
+          </a:stretch>
+        </p:blipFill>
+        <p:spPr>
+          <a:xfrm>
+            <a:off x="304801" y="681037"/>
+            <a:ext cx="3066299" cy="2397411"/>
+          </a:xfrm>
+          <a:prstGeom prst="rect">
+            <a:avLst/>
+          </a:prstGeom>
+        </p:spPr>
+      </p:pic>
+      <p:pic>
+        <p:nvPicPr>
+          <p:cNvPr id="17" name="Picture 16">
+            <a:extLst>
+              <a:ext uri="{FF2B5EF4-FFF2-40B4-BE49-F238E27FC236}">
+                <a16:creationId xmlns:a16="http://schemas.microsoft.com/office/drawing/2014/main" id="{D030DCC2-C649-6033-9283-36DC4E9D726A}"/>
+              </a:ext>
+            </a:extLst>
+          </p:cNvPr>
+          <p:cNvPicPr>
+            <a:picLocks noChangeAspect="1"/>
+          </p:cNvPicPr>
+          <p:nvPr/>
+        </p:nvPicPr>
+        <p:blipFill>
+          <a:blip r:embed="rId3">
+            <a:extLst>
+              <a:ext uri="{28A0092B-C50C-407E-A947-70E740481C1C}">
+                <a14:useLocalDpi xmlns:a14="http://schemas.microsoft.com/office/drawing/2010/main" val="0"/>
+              </a:ext>
+            </a:extLst>
+          </a:blip>
+          <a:stretch>
+            <a:fillRect/>
+          </a:stretch>
+        </p:blipFill>
+        <p:spPr>
+          <a:xfrm>
+            <a:off x="1127150" y="3526929"/>
+            <a:ext cx="3498779" cy="2833722"/>
+          </a:xfrm>
+          <a:prstGeom prst="rect">
+            <a:avLst/>
+          </a:prstGeom>
+        </p:spPr>
+      </p:pic>
+      <p:pic>
+        <p:nvPicPr>
+          <p:cNvPr id="19" name="Picture 18">
+            <a:extLst>
+              <a:ext uri="{FF2B5EF4-FFF2-40B4-BE49-F238E27FC236}">
+                <a16:creationId xmlns:a16="http://schemas.microsoft.com/office/drawing/2014/main" id="{00D3E467-BE73-C79E-EAC9-FC51EB998A41}"/>
+              </a:ext>
+            </a:extLst>
+          </p:cNvPr>
+          <p:cNvPicPr>
+            <a:picLocks noChangeAspect="1"/>
+          </p:cNvPicPr>
+          <p:nvPr/>
+        </p:nvPicPr>
+        <p:blipFill>
+          <a:blip r:embed="rId4">
+            <a:extLst>
+              <a:ext uri="{28A0092B-C50C-407E-A947-70E740481C1C}">
+                <a14:useLocalDpi xmlns:a14="http://schemas.microsoft.com/office/drawing/2010/main" val="0"/>
+              </a:ext>
+            </a:extLst>
+          </a:blip>
+          <a:stretch>
+            <a:fillRect/>
+          </a:stretch>
+        </p:blipFill>
+        <p:spPr>
+          <a:xfrm>
+            <a:off x="4904574" y="3526929"/>
+            <a:ext cx="3470800" cy="2854880"/>
+          </a:xfrm>
+          <a:prstGeom prst="rect">
+            <a:avLst/>
+          </a:prstGeom>
+        </p:spPr>
+      </p:pic>
+      <mc:AlternateContent xmlns:mc="http://schemas.openxmlformats.org/markup-compatibility/2006">
+        <mc:Choice xmlns:a14="http://schemas.microsoft.com/office/drawing/2010/main" Requires="a14">
+          <p:sp>
+            <p:nvSpPr>
+              <p:cNvPr id="23" name="TextBox 22">
+                <a:extLst>
+                  <a:ext uri="{FF2B5EF4-FFF2-40B4-BE49-F238E27FC236}">
+                    <a16:creationId xmlns:a16="http://schemas.microsoft.com/office/drawing/2014/main" id="{AD133105-996E-B203-3414-20B0A2EBE360}"/>
+                  </a:ext>
+                </a:extLst>
+              </p:cNvPr>
+              <p:cNvSpPr txBox="1"/>
+              <p:nvPr/>
+            </p:nvSpPr>
+            <p:spPr>
+              <a:xfrm>
+                <a:off x="3675901" y="837130"/>
+                <a:ext cx="3650974" cy="830997"/>
+              </a:xfrm>
+              <a:prstGeom prst="rect">
+                <a:avLst/>
+              </a:prstGeom>
+              <a:noFill/>
+            </p:spPr>
+            <p:txBody>
+              <a:bodyPr wrap="square">
+                <a:spAutoFit/>
+              </a:bodyPr>
+              <a:lstStyle/>
+              <a:p>
+                <a:pPr marL="285750" indent="-285750">
+                  <a:buFont typeface="Arial" panose="020B0604020202020204" pitchFamily="34" charset="0"/>
+                  <a:buChar char="•"/>
+                </a:pPr>
+                <a:r>
+                  <a:rPr lang="fr-BE" sz="1600" dirty="0"/>
+                  <a:t>Discrétisation :  </a:t>
+                </a:r>
+                <a14:m>
+                  <m:oMath xmlns:m="http://schemas.openxmlformats.org/officeDocument/2006/math">
+                    <m:r>
+                      <m:rPr>
+                        <m:sty m:val="p"/>
+                      </m:rPr>
+                      <a:rPr lang="fr-BE" sz="1600" i="1" dirty="0">
+                        <a:latin typeface="Cambria Math" panose="02040503050406030204" pitchFamily="18" charset="0"/>
+                      </a:rPr>
+                      <m:t>Δ</m:t>
+                    </m:r>
+                    <m:r>
+                      <a:rPr lang="fr-BE" sz="1600" i="1" dirty="0">
+                        <a:latin typeface="Cambria Math" panose="02040503050406030204" pitchFamily="18" charset="0"/>
+                      </a:rPr>
+                      <m:t>𝑥</m:t>
+                    </m:r>
+                    <m:r>
+                      <a:rPr lang="fr-BE" sz="1600" dirty="0">
+                        <a:latin typeface="Cambria Math" panose="02040503050406030204" pitchFamily="18" charset="0"/>
+                      </a:rPr>
+                      <m:t> = </m:t>
+                    </m:r>
+                    <m:r>
+                      <a:rPr lang="fr-BE" sz="1600" b="0" i="0" dirty="0" smtClean="0">
+                        <a:latin typeface="Cambria Math" panose="02040503050406030204" pitchFamily="18" charset="0"/>
+                      </a:rPr>
+                      <m:t>20</m:t>
+                    </m:r>
+                    <m:r>
+                      <a:rPr lang="fr-BE" sz="1600" dirty="0">
+                        <a:latin typeface="Cambria Math" panose="02040503050406030204" pitchFamily="18" charset="0"/>
+                      </a:rPr>
+                      <m:t>0</m:t>
+                    </m:r>
+                    <m:r>
+                      <m:rPr>
+                        <m:sty m:val="p"/>
+                      </m:rPr>
+                      <a:rPr lang="fr-BE" sz="1600" dirty="0">
+                        <a:latin typeface="Cambria Math" panose="02040503050406030204" pitchFamily="18" charset="0"/>
+                      </a:rPr>
+                      <m:t>m</m:t>
+                    </m:r>
+                  </m:oMath>
+                </a14:m>
+                <a:r>
+                  <a:rPr lang="fr-BE" sz="1600" dirty="0"/>
+                  <a:t> cst</a:t>
+                </a:r>
+              </a:p>
+              <a:p>
+                <a:pPr marL="285750" indent="-285750">
+                  <a:buFont typeface="Arial" panose="020B0604020202020204" pitchFamily="34" charset="0"/>
+                  <a:buChar char="•"/>
+                </a:pPr>
+                <a:r>
+                  <a:rPr lang="fr-BE" sz="1600" dirty="0"/>
+                  <a:t>Pénalisation w=1</a:t>
+                </a:r>
+              </a:p>
+              <a:p>
+                <a:pPr marL="285750" indent="-285750">
+                  <a:buFont typeface="Arial" panose="020B0604020202020204" pitchFamily="34" charset="0"/>
+                  <a:buChar char="•"/>
+                </a:pPr>
+                <a:r>
+                  <a:rPr lang="fr-BE" sz="1600" b="1" noProof="0" dirty="0"/>
+                  <a:t>Tracé plat</a:t>
+                </a:r>
+              </a:p>
+            </p:txBody>
+          </p:sp>
+        </mc:Choice>
+        <mc:Fallback>
+          <p:sp>
+            <p:nvSpPr>
+              <p:cNvPr id="23" name="TextBox 22">
+                <a:extLst>
+                  <a:ext uri="{FF2B5EF4-FFF2-40B4-BE49-F238E27FC236}">
+                    <a16:creationId xmlns:a16="http://schemas.microsoft.com/office/drawing/2014/main" id="{AD133105-996E-B203-3414-20B0A2EBE360}"/>
+                  </a:ext>
+                </a:extLst>
+              </p:cNvPr>
+              <p:cNvSpPr txBox="1">
+                <a:spLocks noRot="1" noChangeAspect="1" noMove="1" noResize="1" noEditPoints="1" noAdjustHandles="1" noChangeArrowheads="1" noChangeShapeType="1" noTextEdit="1"/>
+              </p:cNvSpPr>
+              <p:nvPr/>
+            </p:nvSpPr>
+            <p:spPr>
+              <a:xfrm>
+                <a:off x="3675901" y="837130"/>
+                <a:ext cx="3650974" cy="830997"/>
+              </a:xfrm>
+              <a:prstGeom prst="rect">
+                <a:avLst/>
+              </a:prstGeom>
+              <a:blipFill>
+                <a:blip r:embed="rId5"/>
+                <a:stretch>
+                  <a:fillRect l="-668" t="-2920" b="-7299"/>
+                </a:stretch>
+              </a:blipFill>
+            </p:spPr>
+            <p:txBody>
+              <a:bodyPr/>
+              <a:lstStyle/>
+              <a:p>
+                <a:r>
+                  <a:rPr lang="en-GB">
+                    <a:noFill/>
+                  </a:rPr>
+                  <a:t> </a:t>
+                </a:r>
+              </a:p>
+            </p:txBody>
+          </p:sp>
+        </mc:Fallback>
+      </mc:AlternateContent>
+      <p:sp>
+        <p:nvSpPr>
+          <p:cNvPr id="25" name="TextBox 24">
+            <a:extLst>
+              <a:ext uri="{FF2B5EF4-FFF2-40B4-BE49-F238E27FC236}">
+                <a16:creationId xmlns:a16="http://schemas.microsoft.com/office/drawing/2014/main" id="{A76CF49E-6913-B420-97E0-55E57310B1C0}"/>
+              </a:ext>
+            </a:extLst>
+          </p:cNvPr>
+          <p:cNvSpPr txBox="1"/>
+          <p:nvPr/>
+        </p:nvSpPr>
+        <p:spPr>
+          <a:xfrm>
+            <a:off x="304801" y="3090446"/>
+            <a:ext cx="2982731" cy="338554"/>
+          </a:xfrm>
+          <a:prstGeom prst="rect">
+            <a:avLst/>
+          </a:prstGeom>
+          <a:noFill/>
+        </p:spPr>
+        <p:txBody>
+          <a:bodyPr wrap="square">
+            <a:spAutoFit/>
+          </a:bodyPr>
+          <a:lstStyle/>
+          <a:p>
+            <a:r>
+              <a:rPr lang="en-GB" sz="1600" dirty="0">
+                <a:latin typeface="+mj-lt"/>
+              </a:rPr>
+              <a:t>Efficiency: 353.29 km/kWh</a:t>
+            </a:r>
+            <a:endParaRPr lang="en-GB" sz="1600" b="1" dirty="0">
+              <a:latin typeface="+mj-lt"/>
+            </a:endParaRPr>
+          </a:p>
+        </p:txBody>
+      </p:sp>
+      <p:sp>
+        <p:nvSpPr>
+          <p:cNvPr id="26" name="TextBox 25">
+            <a:extLst>
+              <a:ext uri="{FF2B5EF4-FFF2-40B4-BE49-F238E27FC236}">
+                <a16:creationId xmlns:a16="http://schemas.microsoft.com/office/drawing/2014/main" id="{847E96D1-6F4B-8007-56C6-635B7C8D8389}"/>
+              </a:ext>
+            </a:extLst>
+          </p:cNvPr>
+          <p:cNvSpPr txBox="1"/>
+          <p:nvPr/>
+        </p:nvSpPr>
+        <p:spPr>
+          <a:xfrm>
+            <a:off x="3793954" y="2105085"/>
+            <a:ext cx="4402515" cy="830997"/>
+          </a:xfrm>
+          <a:prstGeom prst="rect">
+            <a:avLst/>
+          </a:prstGeom>
+          <a:noFill/>
+        </p:spPr>
+        <p:txBody>
+          <a:bodyPr wrap="square" rtlCol="0">
+            <a:spAutoFit/>
+          </a:bodyPr>
+          <a:lstStyle/>
+          <a:p>
+            <a:pPr algn="ctr"/>
+            <a:r>
+              <a:rPr lang="en-GB" sz="1600" dirty="0"/>
+              <a:t>On </a:t>
+            </a:r>
+            <a:r>
+              <a:rPr lang="en-GB" sz="1600" dirty="0" err="1"/>
+              <a:t>retrouve</a:t>
+            </a:r>
+            <a:r>
+              <a:rPr lang="en-GB" sz="1600" dirty="0"/>
+              <a:t> bien accel -&gt; plateau -&gt; coast</a:t>
+            </a:r>
+          </a:p>
+          <a:p>
+            <a:pPr algn="ctr"/>
+            <a:r>
+              <a:rPr lang="en-GB" sz="1600" dirty="0" err="1"/>
+              <a:t>Plutot</a:t>
+            </a:r>
+            <a:r>
+              <a:rPr lang="en-GB" sz="1600" dirty="0"/>
+              <a:t> bon </a:t>
+            </a:r>
+            <a:r>
+              <a:rPr lang="en-GB" sz="1600" dirty="0" err="1"/>
+              <a:t>signe</a:t>
+            </a:r>
+            <a:r>
+              <a:rPr lang="en-GB" sz="1600" dirty="0"/>
+              <a:t> </a:t>
+            </a:r>
+            <a:r>
+              <a:rPr lang="en-GB" sz="1600" dirty="0">
+                <a:sym typeface="Wingdings" panose="05000000000000000000" pitchFamily="2" charset="2"/>
+              </a:rPr>
+              <a:t></a:t>
+            </a:r>
+          </a:p>
+          <a:p>
+            <a:pPr algn="ctr"/>
+            <a:r>
+              <a:rPr lang="en-GB" sz="1600" dirty="0">
+                <a:sym typeface="Wingdings" panose="05000000000000000000" pitchFamily="2" charset="2"/>
+              </a:rPr>
+              <a:t>Plateau pas parfait, ca montre les </a:t>
+            </a:r>
+            <a:r>
+              <a:rPr lang="en-GB" sz="1600" dirty="0" err="1">
+                <a:sym typeface="Wingdings" panose="05000000000000000000" pitchFamily="2" charset="2"/>
+              </a:rPr>
+              <a:t>limites</a:t>
+            </a:r>
+            <a:endParaRPr lang="en-GB" sz="1600" dirty="0"/>
+          </a:p>
+        </p:txBody>
+      </p:sp>
+    </p:spTree>
+    <p:extLst>
+      <p:ext uri="{BB962C8B-B14F-4D97-AF65-F5344CB8AC3E}">
+        <p14:creationId xmlns:p14="http://schemas.microsoft.com/office/powerpoint/2010/main" val="3709495557"/>
       </p:ext>
     </p:extLst>
   </p:cSld>
@@ -13163,7 +13479,7 @@
           <a:p>
             <a:fld id="{CA9A9924-1784-4044-A2E4-3606370E1BB6}" type="datetime1">
               <a:rPr lang="fr-BE" noProof="0" smtClean="0"/>
-              <a:t>09-10-26</a:t>
+              <a:t>14-10-26</a:t>
             </a:fld>
             <a:endParaRPr lang="fr-BE" noProof="0" dirty="0">
               <a:latin typeface="Segoe UI Symbol" panose="020B0502040204020203" pitchFamily="34" charset="0"/>
@@ -13304,6 +13620,14 @@
               <a:rPr lang="fr-BE" noProof="0" dirty="0"/>
               <a:t> ratio optimal pour utiliser le moteur dans sa plage d’efficience max.</a:t>
             </a:r>
+          </a:p>
+          <a:p>
+            <a:pPr marL="1143000" lvl="1" indent="-457200"/>
+            <a:r>
+              <a:rPr lang="fr-BE" dirty="0"/>
+              <a:t>…</a:t>
+            </a:r>
+            <a:endParaRPr lang="fr-BE" noProof="0" dirty="0"/>
           </a:p>
           <a:p>
             <a:pPr marL="457200" indent="-457200">
@@ -13405,7 +13729,7 @@
           <a:p>
             <a:fld id="{CA9A9924-1784-4044-A2E4-3606370E1BB6}" type="datetime1">
               <a:rPr lang="fr-BE" noProof="0" smtClean="0"/>
-              <a:t>09-10-26</a:t>
+              <a:t>14-10-26</a:t>
             </a:fld>
             <a:endParaRPr lang="fr-BE" noProof="0" dirty="0">
               <a:latin typeface="Segoe UI Symbol" panose="020B0502040204020203" pitchFamily="34" charset="0"/>
@@ -13749,7 +14073,7 @@
           <a:p>
             <a:fld id="{CA9A9924-1784-4044-A2E4-3606370E1BB6}" type="datetime1">
               <a:rPr lang="en-GB" smtClean="0"/>
-              <a:t>09/10/2026</a:t>
+              <a:t>14/10/2026</a:t>
             </a:fld>
             <a:endParaRPr lang="en-GB" dirty="0">
               <a:latin typeface="Segoe UI Symbol" panose="020B0502040204020203" pitchFamily="34" charset="0"/>
@@ -14396,7 +14720,7 @@
           <a:p>
             <a:fld id="{CA9A9924-1784-4044-A2E4-3606370E1BB6}" type="datetime1">
               <a:rPr lang="en-GB" smtClean="0"/>
-              <a:t>09/10/2026</a:t>
+              <a:t>14/10/2026</a:t>
             </a:fld>
             <a:endParaRPr lang="en-GB" dirty="0">
               <a:latin typeface="Segoe UI Symbol" panose="020B0502040204020203" pitchFamily="34" charset="0"/>
@@ -15849,7 +16173,7 @@
           <a:p>
             <a:fld id="{CA9A9924-1784-4044-A2E4-3606370E1BB6}" type="datetime1">
               <a:rPr lang="en-GB" smtClean="0"/>
-              <a:t>09/10/2026</a:t>
+              <a:t>14/10/2026</a:t>
             </a:fld>
             <a:endParaRPr lang="en-GB" dirty="0">
               <a:latin typeface="Segoe UI Symbol" panose="020B0502040204020203" pitchFamily="34" charset="0"/>
@@ -18642,7 +18966,7 @@
           <a:p>
             <a:fld id="{CA9A9924-1784-4044-A2E4-3606370E1BB6}" type="datetime1">
               <a:rPr lang="en-GB" smtClean="0"/>
-              <a:t>09/10/2026</a:t>
+              <a:t>14/10/2026</a:t>
             </a:fld>
             <a:endParaRPr lang="en-GB" dirty="0">
               <a:latin typeface="Segoe UI Symbol" panose="020B0502040204020203" pitchFamily="34" charset="0"/>
@@ -19599,7 +19923,7 @@
           <a:p>
             <a:fld id="{03B5460E-E22B-4565-90E6-E4027A0F32B5}" type="datetime1">
               <a:rPr lang="fr-BE" noProof="0" smtClean="0"/>
-              <a:t>09-10-26</a:t>
+              <a:t>14-10-26</a:t>
             </a:fld>
             <a:endParaRPr lang="fr-BE" noProof="0" dirty="0">
               <a:latin typeface="Segoe UI Symbol" panose="020B0502040204020203" pitchFamily="34" charset="0"/>

--- a/Efficiency_calculator/SEM_lapTime_consumption.pptx
+++ b/Efficiency_calculator/SEM_lapTime_consumption.pptx
@@ -5,7 +5,7 @@
     <p:sldMasterId id="2147483660" r:id="rId1"/>
   </p:sldMasterIdLst>
   <p:notesMasterIdLst>
-    <p:notesMasterId r:id="rId31"/>
+    <p:notesMasterId r:id="rId32"/>
   </p:notesMasterIdLst>
   <p:sldIdLst>
     <p:sldId id="257" r:id="rId2"/>
@@ -21,22 +21,23 @@
     <p:sldId id="260" r:id="rId12"/>
     <p:sldId id="286" r:id="rId13"/>
     <p:sldId id="275" r:id="rId14"/>
-    <p:sldId id="268" r:id="rId15"/>
-    <p:sldId id="272" r:id="rId16"/>
-    <p:sldId id="290" r:id="rId17"/>
-    <p:sldId id="293" r:id="rId18"/>
-    <p:sldId id="294" r:id="rId19"/>
-    <p:sldId id="287" r:id="rId20"/>
-    <p:sldId id="271" r:id="rId21"/>
-    <p:sldId id="288" r:id="rId22"/>
-    <p:sldId id="274" r:id="rId23"/>
-    <p:sldId id="289" r:id="rId24"/>
-    <p:sldId id="277" r:id="rId25"/>
-    <p:sldId id="291" r:id="rId26"/>
-    <p:sldId id="292" r:id="rId27"/>
-    <p:sldId id="295" r:id="rId28"/>
-    <p:sldId id="269" r:id="rId29"/>
-    <p:sldId id="283" r:id="rId30"/>
+    <p:sldId id="293" r:id="rId15"/>
+    <p:sldId id="294" r:id="rId16"/>
+    <p:sldId id="272" r:id="rId17"/>
+    <p:sldId id="290" r:id="rId18"/>
+    <p:sldId id="268" r:id="rId19"/>
+    <p:sldId id="296" r:id="rId20"/>
+    <p:sldId id="287" r:id="rId21"/>
+    <p:sldId id="271" r:id="rId22"/>
+    <p:sldId id="288" r:id="rId23"/>
+    <p:sldId id="274" r:id="rId24"/>
+    <p:sldId id="289" r:id="rId25"/>
+    <p:sldId id="277" r:id="rId26"/>
+    <p:sldId id="291" r:id="rId27"/>
+    <p:sldId id="292" r:id="rId28"/>
+    <p:sldId id="295" r:id="rId29"/>
+    <p:sldId id="269" r:id="rId30"/>
+    <p:sldId id="283" r:id="rId31"/>
   </p:sldIdLst>
   <p:sldSz cx="9144000" cy="6858000" type="screen4x3"/>
   <p:notesSz cx="6858000" cy="9144000"/>
@@ -649,7 +650,7 @@
           <a:p>
             <a:fld id="{C4CDE39F-EA5B-4DFB-A5BD-31A68196C2CE}" type="slidenum">
               <a:rPr lang="en-GB" smtClean="0"/>
-              <a:t>28</a:t>
+              <a:t>29</a:t>
             </a:fld>
             <a:endParaRPr lang="en-GB"/>
           </a:p>
@@ -1804,8 +1805,8 @@
         </p:nvSpPr>
         <p:spPr>
           <a:xfrm>
-            <a:off x="3936216" y="6533704"/>
-            <a:ext cx="1271567" cy="338554"/>
+            <a:off x="3238654" y="6472609"/>
+            <a:ext cx="2666692" cy="338554"/>
           </a:xfrm>
           <a:prstGeom prst="rect">
             <a:avLst/>
@@ -1826,7 +1827,7 @@
                   </a:schemeClr>
                 </a:solidFill>
               </a:rPr>
-              <a:t>Tom Beauve</a:t>
+              <a:t>Tom Beauve | Octobre 2026</a:t>
             </a:r>
           </a:p>
         </p:txBody>
@@ -5175,7 +5176,7 @@
             </a:r>
             <a:r>
               <a:rPr lang="fr-BE" sz="2800" dirty="0"/>
-              <a:t>rendement mot. non cst</a:t>
+              <a:t>rendement mot. cst</a:t>
             </a:r>
             <a:endParaRPr lang="fr-BE" sz="2800" noProof="0" dirty="0"/>
           </a:p>
@@ -5188,7 +5189,7 @@
                   </a:schemeClr>
                 </a:solidFill>
               </a:rPr>
-              <a:t>Résultats rendement mot. cst</a:t>
+              <a:t>Résultats rendement mot. non cst</a:t>
             </a:r>
             <a:endParaRPr lang="fr-BE" sz="2800" noProof="0" dirty="0">
               <a:solidFill>
@@ -5540,7 +5541,15 @@
                 </a:r>
                 <a:r>
                   <a:rPr lang="fr-BE" sz="2000" noProof="0" dirty="0"/>
-                  <a:t>(????)</a:t>
+                  <a:t>(</a:t>
+                </a:r>
+                <a:r>
+                  <a:rPr lang="fr-BE" sz="2000" dirty="0"/>
+                  <a:t>0,00724 @4,1bar sur *</a:t>
+                </a:r>
+                <a:r>
+                  <a:rPr lang="fr-BE" sz="2000" noProof="0" dirty="0"/>
+                  <a:t>)</a:t>
                 </a:r>
               </a:p>
               <a:p>
@@ -5628,7 +5637,7 @@
               <a:p>
                 <a:r>
                   <a:rPr lang="fr-BE" noProof="0" dirty="0"/>
-                  <a:t>Tracé = 7*1200m </a:t>
+                  <a:t>Tracé = 7*1280m </a:t>
                 </a:r>
                 <a:r>
                   <a:rPr lang="fr-BE" sz="2000" noProof="0" dirty="0"/>
@@ -5931,14 +5940,15 @@
             </a:extLst>
           </p:cNvPr>
           <p:cNvCxnSpPr>
+            <a:cxnSpLocks/>
             <a:stCxn id="6" idx="1"/>
           </p:cNvCxnSpPr>
           <p:nvPr/>
         </p:nvCxnSpPr>
         <p:spPr>
           <a:xfrm flipH="1" flipV="1">
-            <a:off x="3299791" y="1861930"/>
-            <a:ext cx="2576186" cy="181665"/>
+            <a:off x="5241235" y="1868557"/>
+            <a:ext cx="634742" cy="175038"/>
           </a:xfrm>
           <a:prstGeom prst="straightConnector1">
             <a:avLst/>
@@ -5965,6 +5975,83 @@
           </a:fontRef>
         </p:style>
       </p:cxnSp>
+      <p:sp>
+        <p:nvSpPr>
+          <p:cNvPr id="9" name="TextBox 8">
+            <a:extLst>
+              <a:ext uri="{FF2B5EF4-FFF2-40B4-BE49-F238E27FC236}">
+                <a16:creationId xmlns:a16="http://schemas.microsoft.com/office/drawing/2014/main" id="{FEDCFD89-BD07-161F-F585-8822CD231E89}"/>
+              </a:ext>
+            </a:extLst>
+          </p:cNvPr>
+          <p:cNvSpPr txBox="1"/>
+          <p:nvPr/>
+        </p:nvSpPr>
+        <p:spPr>
+          <a:xfrm>
+            <a:off x="743779" y="5718313"/>
+            <a:ext cx="4654826" cy="523220"/>
+          </a:xfrm>
+          <a:prstGeom prst="rect">
+            <a:avLst/>
+          </a:prstGeom>
+          <a:noFill/>
+        </p:spPr>
+        <p:txBody>
+          <a:bodyPr wrap="square">
+            <a:spAutoFit/>
+          </a:bodyPr>
+          <a:lstStyle/>
+          <a:p>
+            <a:r>
+              <a:rPr lang="fr-BE" sz="1400" dirty="0">
+                <a:hlinkClick r:id="rId4"/>
+              </a:rPr>
+              <a:t>https://www.bicyclerollingresistance.com/tour-reviews/schwalbe-kojak-2017#rr</a:t>
+            </a:r>
+            <a:r>
+              <a:rPr lang="fr-BE" sz="1400" dirty="0"/>
+              <a:t> </a:t>
+            </a:r>
+            <a:endParaRPr lang="en-GB" sz="1400" dirty="0"/>
+          </a:p>
+        </p:txBody>
+      </p:sp>
+      <p:sp>
+        <p:nvSpPr>
+          <p:cNvPr id="10" name="TextBox 9">
+            <a:extLst>
+              <a:ext uri="{FF2B5EF4-FFF2-40B4-BE49-F238E27FC236}">
+                <a16:creationId xmlns:a16="http://schemas.microsoft.com/office/drawing/2014/main" id="{66892F33-E5C8-4CF9-3F50-CE82D3E40C57}"/>
+              </a:ext>
+            </a:extLst>
+          </p:cNvPr>
+          <p:cNvSpPr txBox="1"/>
+          <p:nvPr/>
+        </p:nvSpPr>
+        <p:spPr>
+          <a:xfrm>
+            <a:off x="612971" y="5704551"/>
+            <a:ext cx="280846" cy="369332"/>
+          </a:xfrm>
+          <a:prstGeom prst="rect">
+            <a:avLst/>
+          </a:prstGeom>
+          <a:noFill/>
+        </p:spPr>
+        <p:txBody>
+          <a:bodyPr wrap="none" rtlCol="0">
+            <a:spAutoFit/>
+          </a:bodyPr>
+          <a:lstStyle/>
+          <a:p>
+            <a:r>
+              <a:rPr lang="en-GB" dirty="0"/>
+              <a:t>*</a:t>
+            </a:r>
+          </a:p>
+        </p:txBody>
+      </p:sp>
     </p:spTree>
     <p:extLst>
       <p:ext uri="{BB962C8B-B14F-4D97-AF65-F5344CB8AC3E}">
@@ -5979,6 +6066,1357 @@
 </file>
 
 <file path=ppt/slides/slide14.xml><?xml version="1.0" encoding="utf-8"?>
+<p:sld xmlns:a="http://schemas.openxmlformats.org/drawingml/2006/main" xmlns:r="http://schemas.openxmlformats.org/officeDocument/2006/relationships" xmlns:p="http://schemas.openxmlformats.org/presentationml/2006/main">
+  <p:cSld>
+    <p:spTree>
+      <p:nvGrpSpPr>
+        <p:cNvPr id="1" name="">
+          <a:extLst>
+            <a:ext uri="{FF2B5EF4-FFF2-40B4-BE49-F238E27FC236}">
+              <a16:creationId xmlns:a16="http://schemas.microsoft.com/office/drawing/2014/main" id="{74397233-9C1B-9359-DE3B-F7AFC63DD56B}"/>
+            </a:ext>
+          </a:extLst>
+        </p:cNvPr>
+        <p:cNvGrpSpPr/>
+        <p:nvPr/>
+      </p:nvGrpSpPr>
+      <p:grpSpPr>
+        <a:xfrm>
+          <a:off x="0" y="0"/>
+          <a:ext cx="0" cy="0"/>
+          <a:chOff x="0" y="0"/>
+          <a:chExt cx="0" cy="0"/>
+        </a:xfrm>
+      </p:grpSpPr>
+      <p:sp>
+        <p:nvSpPr>
+          <p:cNvPr id="2" name="Title 1">
+            <a:extLst>
+              <a:ext uri="{FF2B5EF4-FFF2-40B4-BE49-F238E27FC236}">
+                <a16:creationId xmlns:a16="http://schemas.microsoft.com/office/drawing/2014/main" id="{0FD018E5-57BA-0905-4F7D-D1447C55304E}"/>
+              </a:ext>
+            </a:extLst>
+          </p:cNvPr>
+          <p:cNvSpPr>
+            <a:spLocks noGrp="1"/>
+          </p:cNvSpPr>
+          <p:nvPr>
+            <p:ph type="title"/>
+          </p:nvPr>
+        </p:nvSpPr>
+        <p:spPr>
+          <a:xfrm>
+            <a:off x="0" y="1"/>
+            <a:ext cx="7772400" cy="681036"/>
+          </a:xfrm>
+        </p:spPr>
+        <p:txBody>
+          <a:bodyPr/>
+          <a:lstStyle/>
+          <a:p>
+            <a:r>
+              <a:rPr lang="en-GB" dirty="0"/>
+              <a:t>Simulation 2 : </a:t>
+            </a:r>
+            <a:r>
+              <a:rPr lang="en-GB" dirty="0" err="1"/>
+              <a:t>altimétrie</a:t>
+            </a:r>
+            <a:r>
+              <a:rPr lang="en-GB" dirty="0"/>
+              <a:t> Silesia ring</a:t>
+            </a:r>
+          </a:p>
+        </p:txBody>
+      </p:sp>
+      <p:sp>
+        <p:nvSpPr>
+          <p:cNvPr id="3" name="Date Placeholder 2">
+            <a:extLst>
+              <a:ext uri="{FF2B5EF4-FFF2-40B4-BE49-F238E27FC236}">
+                <a16:creationId xmlns:a16="http://schemas.microsoft.com/office/drawing/2014/main" id="{379DBBE6-B9D4-AACB-F06C-4DA2977D6459}"/>
+              </a:ext>
+            </a:extLst>
+          </p:cNvPr>
+          <p:cNvSpPr>
+            <a:spLocks noGrp="1"/>
+          </p:cNvSpPr>
+          <p:nvPr>
+            <p:ph type="dt" sz="half" idx="10"/>
+          </p:nvPr>
+        </p:nvSpPr>
+        <p:spPr/>
+        <p:txBody>
+          <a:bodyPr/>
+          <a:lstStyle/>
+          <a:p>
+            <a:fld id="{CA9A9924-1784-4044-A2E4-3606370E1BB6}" type="datetime1">
+              <a:rPr lang="en-GB" smtClean="0"/>
+              <a:t>14/10/2026</a:t>
+            </a:fld>
+            <a:endParaRPr lang="en-GB" dirty="0">
+              <a:latin typeface="Segoe UI Symbol" panose="020B0502040204020203" pitchFamily="34" charset="0"/>
+              <a:ea typeface="Segoe UI Symbol" panose="020B0502040204020203" pitchFamily="34" charset="0"/>
+            </a:endParaRPr>
+          </a:p>
+        </p:txBody>
+      </p:sp>
+      <p:sp>
+        <p:nvSpPr>
+          <p:cNvPr id="4" name="Slide Number Placeholder 3">
+            <a:extLst>
+              <a:ext uri="{FF2B5EF4-FFF2-40B4-BE49-F238E27FC236}">
+                <a16:creationId xmlns:a16="http://schemas.microsoft.com/office/drawing/2014/main" id="{9A930B7E-3BA7-6416-A361-71B06A33B78A}"/>
+              </a:ext>
+            </a:extLst>
+          </p:cNvPr>
+          <p:cNvSpPr>
+            <a:spLocks noGrp="1"/>
+          </p:cNvSpPr>
+          <p:nvPr>
+            <p:ph type="sldNum" sz="quarter" idx="4"/>
+          </p:nvPr>
+        </p:nvSpPr>
+        <p:spPr/>
+        <p:txBody>
+          <a:bodyPr/>
+          <a:lstStyle/>
+          <a:p>
+            <a:fld id="{46899FAB-5005-482A-88F2-FE97823A1A33}" type="slidenum">
+              <a:rPr lang="en-GB" smtClean="0"/>
+              <a:pPr/>
+              <a:t>14</a:t>
+            </a:fld>
+            <a:r>
+              <a:rPr lang="en-GB"/>
+              <a:t>/x</a:t>
+            </a:r>
+            <a:endParaRPr lang="en-GB" dirty="0">
+              <a:latin typeface="Segoe UI Symbol" panose="020B0502040204020203" pitchFamily="34" charset="0"/>
+              <a:ea typeface="Segoe UI Symbol" panose="020B0502040204020203" pitchFamily="34" charset="0"/>
+            </a:endParaRPr>
+          </a:p>
+        </p:txBody>
+      </p:sp>
+      <mc:AlternateContent xmlns:mc="http://schemas.openxmlformats.org/markup-compatibility/2006" xmlns:a14="http://schemas.microsoft.com/office/drawing/2010/main">
+        <mc:Choice Requires="a14">
+          <p:sp>
+            <p:nvSpPr>
+              <p:cNvPr id="23" name="TextBox 22">
+                <a:extLst>
+                  <a:ext uri="{FF2B5EF4-FFF2-40B4-BE49-F238E27FC236}">
+                    <a16:creationId xmlns:a16="http://schemas.microsoft.com/office/drawing/2014/main" id="{084E8625-68A2-59BE-C8AD-F71116465A21}"/>
+                  </a:ext>
+                </a:extLst>
+              </p:cNvPr>
+              <p:cNvSpPr txBox="1"/>
+              <p:nvPr/>
+            </p:nvSpPr>
+            <p:spPr>
+              <a:xfrm>
+                <a:off x="4187686" y="749057"/>
+                <a:ext cx="3650974" cy="830997"/>
+              </a:xfrm>
+              <a:prstGeom prst="rect">
+                <a:avLst/>
+              </a:prstGeom>
+              <a:noFill/>
+            </p:spPr>
+            <p:txBody>
+              <a:bodyPr wrap="square">
+                <a:spAutoFit/>
+              </a:bodyPr>
+              <a:lstStyle/>
+              <a:p>
+                <a:pPr marL="285750" indent="-285750">
+                  <a:buFont typeface="Arial" panose="020B0604020202020204" pitchFamily="34" charset="0"/>
+                  <a:buChar char="•"/>
+                </a:pPr>
+                <a:r>
+                  <a:rPr lang="fr-BE" sz="1600" dirty="0"/>
+                  <a:t>Discrétisation :  </a:t>
+                </a:r>
+                <a14:m>
+                  <m:oMath xmlns:m="http://schemas.openxmlformats.org/officeDocument/2006/math">
+                    <m:r>
+                      <m:rPr>
+                        <m:sty m:val="p"/>
+                      </m:rPr>
+                      <a:rPr lang="fr-BE" sz="1600" i="1" dirty="0">
+                        <a:latin typeface="Cambria Math" panose="02040503050406030204" pitchFamily="18" charset="0"/>
+                      </a:rPr>
+                      <m:t>Δ</m:t>
+                    </m:r>
+                    <m:r>
+                      <a:rPr lang="fr-BE" sz="1600" i="1" dirty="0">
+                        <a:latin typeface="Cambria Math" panose="02040503050406030204" pitchFamily="18" charset="0"/>
+                      </a:rPr>
+                      <m:t>𝑥</m:t>
+                    </m:r>
+                    <m:r>
+                      <a:rPr lang="fr-BE" sz="1600" dirty="0">
+                        <a:latin typeface="Cambria Math" panose="02040503050406030204" pitchFamily="18" charset="0"/>
+                      </a:rPr>
+                      <m:t> = </m:t>
+                    </m:r>
+                    <m:r>
+                      <a:rPr lang="fr-BE" sz="1600" b="0" i="1" dirty="0" smtClean="0">
+                        <a:latin typeface="Cambria Math" panose="02040503050406030204" pitchFamily="18" charset="0"/>
+                      </a:rPr>
+                      <m:t>50</m:t>
+                    </m:r>
+                    <m:r>
+                      <m:rPr>
+                        <m:sty m:val="p"/>
+                      </m:rPr>
+                      <a:rPr lang="fr-BE" sz="1600" b="0" i="1" dirty="0" smtClean="0">
+                        <a:latin typeface="Cambria Math" panose="02040503050406030204" pitchFamily="18" charset="0"/>
+                      </a:rPr>
+                      <m:t>m</m:t>
+                    </m:r>
+                  </m:oMath>
+                </a14:m>
+                <a:r>
+                  <a:rPr lang="fr-BE" sz="1600" dirty="0"/>
+                  <a:t> cst</a:t>
+                </a:r>
+              </a:p>
+              <a:p>
+                <a:pPr marL="285750" indent="-285750">
+                  <a:buFont typeface="Arial" panose="020B0604020202020204" pitchFamily="34" charset="0"/>
+                  <a:buChar char="•"/>
+                </a:pPr>
+                <a:r>
+                  <a:rPr lang="fr-BE" sz="1600" dirty="0"/>
+                  <a:t>Pas de pénalisation</a:t>
+                </a:r>
+              </a:p>
+              <a:p>
+                <a:pPr marL="285750" indent="-285750">
+                  <a:buFont typeface="Arial" panose="020B0604020202020204" pitchFamily="34" charset="0"/>
+                  <a:buChar char="•"/>
+                </a:pPr>
+                <a:r>
+                  <a:rPr lang="fr-BE" sz="1600" noProof="0" dirty="0" err="1"/>
+                  <a:t>Altimé</a:t>
+                </a:r>
+                <a:r>
+                  <a:rPr lang="fr-BE" sz="1600" dirty="0"/>
+                  <a:t>trie interpolée du </a:t>
+                </a:r>
+                <a:r>
+                  <a:rPr lang="fr-BE" sz="1600" dirty="0" err="1"/>
+                  <a:t>silesa</a:t>
+                </a:r>
+                <a:r>
+                  <a:rPr lang="fr-BE" sz="1600" dirty="0"/>
+                  <a:t> ring</a:t>
+                </a:r>
+                <a:endParaRPr lang="fr-BE" sz="1600" noProof="0" dirty="0"/>
+              </a:p>
+            </p:txBody>
+          </p:sp>
+        </mc:Choice>
+        <mc:Fallback xmlns="">
+          <p:sp>
+            <p:nvSpPr>
+              <p:cNvPr id="23" name="TextBox 22">
+                <a:extLst>
+                  <a:ext uri="{FF2B5EF4-FFF2-40B4-BE49-F238E27FC236}">
+                    <a16:creationId xmlns:a16="http://schemas.microsoft.com/office/drawing/2014/main" id="{084E8625-68A2-59BE-C8AD-F71116465A21}"/>
+                  </a:ext>
+                </a:extLst>
+              </p:cNvPr>
+              <p:cNvSpPr txBox="1">
+                <a:spLocks noRot="1" noChangeAspect="1" noMove="1" noResize="1" noEditPoints="1" noAdjustHandles="1" noChangeArrowheads="1" noChangeShapeType="1" noTextEdit="1"/>
+              </p:cNvSpPr>
+              <p:nvPr/>
+            </p:nvSpPr>
+            <p:spPr>
+              <a:xfrm>
+                <a:off x="4187686" y="749057"/>
+                <a:ext cx="3650974" cy="830997"/>
+              </a:xfrm>
+              <a:prstGeom prst="rect">
+                <a:avLst/>
+              </a:prstGeom>
+              <a:blipFill>
+                <a:blip r:embed="rId2"/>
+                <a:stretch>
+                  <a:fillRect l="-668" t="-2941" b="-8088"/>
+                </a:stretch>
+              </a:blipFill>
+            </p:spPr>
+            <p:txBody>
+              <a:bodyPr/>
+              <a:lstStyle/>
+              <a:p>
+                <a:r>
+                  <a:rPr lang="en-GB">
+                    <a:noFill/>
+                  </a:rPr>
+                  <a:t> </a:t>
+                </a:r>
+              </a:p>
+            </p:txBody>
+          </p:sp>
+        </mc:Fallback>
+      </mc:AlternateContent>
+      <p:sp>
+        <p:nvSpPr>
+          <p:cNvPr id="25" name="TextBox 24">
+            <a:extLst>
+              <a:ext uri="{FF2B5EF4-FFF2-40B4-BE49-F238E27FC236}">
+                <a16:creationId xmlns:a16="http://schemas.microsoft.com/office/drawing/2014/main" id="{97B3A0B0-28AD-BE18-A89C-CEE128C61414}"/>
+              </a:ext>
+            </a:extLst>
+          </p:cNvPr>
+          <p:cNvSpPr txBox="1"/>
+          <p:nvPr/>
+        </p:nvSpPr>
+        <p:spPr>
+          <a:xfrm>
+            <a:off x="769168" y="6005950"/>
+            <a:ext cx="2982731" cy="338554"/>
+          </a:xfrm>
+          <a:prstGeom prst="rect">
+            <a:avLst/>
+          </a:prstGeom>
+          <a:noFill/>
+        </p:spPr>
+        <p:txBody>
+          <a:bodyPr wrap="square">
+            <a:spAutoFit/>
+          </a:bodyPr>
+          <a:lstStyle/>
+          <a:p>
+            <a:r>
+              <a:rPr lang="en-GB" sz="1600" dirty="0">
+                <a:latin typeface="+mj-lt"/>
+              </a:rPr>
+              <a:t>Efficiency: 349,28 km/kWh</a:t>
+            </a:r>
+            <a:endParaRPr lang="en-GB" sz="1600" b="1" dirty="0">
+              <a:latin typeface="+mj-lt"/>
+            </a:endParaRPr>
+          </a:p>
+        </p:txBody>
+      </p:sp>
+      <p:pic>
+        <p:nvPicPr>
+          <p:cNvPr id="9" name="Picture 8">
+            <a:extLst>
+              <a:ext uri="{FF2B5EF4-FFF2-40B4-BE49-F238E27FC236}">
+                <a16:creationId xmlns:a16="http://schemas.microsoft.com/office/drawing/2014/main" id="{6438077D-9E79-FA13-D5F0-58B344071D14}"/>
+              </a:ext>
+            </a:extLst>
+          </p:cNvPr>
+          <p:cNvPicPr>
+            <a:picLocks noChangeAspect="1"/>
+          </p:cNvPicPr>
+          <p:nvPr/>
+        </p:nvPicPr>
+        <p:blipFill>
+          <a:blip r:embed="rId3">
+            <a:extLst>
+              <a:ext uri="{28A0092B-C50C-407E-A947-70E740481C1C}">
+                <a14:useLocalDpi xmlns:a14="http://schemas.microsoft.com/office/drawing/2010/main" val="0"/>
+              </a:ext>
+            </a:extLst>
+          </a:blip>
+          <a:stretch>
+            <a:fillRect/>
+          </a:stretch>
+        </p:blipFill>
+        <p:spPr>
+          <a:xfrm>
+            <a:off x="4572000" y="1550237"/>
+            <a:ext cx="3170212" cy="2607633"/>
+          </a:xfrm>
+          <a:prstGeom prst="rect">
+            <a:avLst/>
+          </a:prstGeom>
+        </p:spPr>
+      </p:pic>
+      <p:pic>
+        <p:nvPicPr>
+          <p:cNvPr id="11" name="Picture 10">
+            <a:extLst>
+              <a:ext uri="{FF2B5EF4-FFF2-40B4-BE49-F238E27FC236}">
+                <a16:creationId xmlns:a16="http://schemas.microsoft.com/office/drawing/2014/main" id="{03C52C2E-4F09-3F4B-DB23-C0315965004D}"/>
+              </a:ext>
+            </a:extLst>
+          </p:cNvPr>
+          <p:cNvPicPr>
+            <a:picLocks noChangeAspect="1"/>
+          </p:cNvPicPr>
+          <p:nvPr/>
+        </p:nvPicPr>
+        <p:blipFill>
+          <a:blip r:embed="rId4">
+            <a:extLst>
+              <a:ext uri="{28A0092B-C50C-407E-A947-70E740481C1C}">
+                <a14:useLocalDpi xmlns:a14="http://schemas.microsoft.com/office/drawing/2010/main" val="0"/>
+              </a:ext>
+            </a:extLst>
+          </a:blip>
+          <a:stretch>
+            <a:fillRect/>
+          </a:stretch>
+        </p:blipFill>
+        <p:spPr>
+          <a:xfrm>
+            <a:off x="204389" y="3167440"/>
+            <a:ext cx="3489249" cy="2703274"/>
+          </a:xfrm>
+          <a:prstGeom prst="rect">
+            <a:avLst/>
+          </a:prstGeom>
+        </p:spPr>
+      </p:pic>
+      <p:pic>
+        <p:nvPicPr>
+          <p:cNvPr id="13" name="Picture 12">
+            <a:extLst>
+              <a:ext uri="{FF2B5EF4-FFF2-40B4-BE49-F238E27FC236}">
+                <a16:creationId xmlns:a16="http://schemas.microsoft.com/office/drawing/2014/main" id="{549B0669-78FF-9EA5-3064-B0FDD99711A0}"/>
+              </a:ext>
+            </a:extLst>
+          </p:cNvPr>
+          <p:cNvPicPr>
+            <a:picLocks noChangeAspect="1"/>
+          </p:cNvPicPr>
+          <p:nvPr/>
+        </p:nvPicPr>
+        <p:blipFill>
+          <a:blip r:embed="rId5">
+            <a:extLst>
+              <a:ext uri="{28A0092B-C50C-407E-A947-70E740481C1C}">
+                <a14:useLocalDpi xmlns:a14="http://schemas.microsoft.com/office/drawing/2010/main" val="0"/>
+              </a:ext>
+            </a:extLst>
+          </a:blip>
+          <a:stretch>
+            <a:fillRect/>
+          </a:stretch>
+        </p:blipFill>
+        <p:spPr>
+          <a:xfrm>
+            <a:off x="526269" y="689601"/>
+            <a:ext cx="2982732" cy="2332074"/>
+          </a:xfrm>
+          <a:prstGeom prst="rect">
+            <a:avLst/>
+          </a:prstGeom>
+        </p:spPr>
+      </p:pic>
+      <p:pic>
+        <p:nvPicPr>
+          <p:cNvPr id="15" name="Picture 14">
+            <a:extLst>
+              <a:ext uri="{FF2B5EF4-FFF2-40B4-BE49-F238E27FC236}">
+                <a16:creationId xmlns:a16="http://schemas.microsoft.com/office/drawing/2014/main" id="{2FEA2E28-5345-2A77-0198-E236E3153A7D}"/>
+              </a:ext>
+            </a:extLst>
+          </p:cNvPr>
+          <p:cNvPicPr>
+            <a:picLocks noChangeAspect="1"/>
+          </p:cNvPicPr>
+          <p:nvPr/>
+        </p:nvPicPr>
+        <p:blipFill>
+          <a:blip r:embed="rId6">
+            <a:extLst>
+              <a:ext uri="{28A0092B-C50C-407E-A947-70E740481C1C}">
+                <a14:useLocalDpi xmlns:a14="http://schemas.microsoft.com/office/drawing/2010/main" val="0"/>
+              </a:ext>
+            </a:extLst>
+          </a:blip>
+          <a:stretch>
+            <a:fillRect/>
+          </a:stretch>
+        </p:blipFill>
+        <p:spPr>
+          <a:xfrm>
+            <a:off x="4734710" y="4157870"/>
+            <a:ext cx="3098898" cy="2509852"/>
+          </a:xfrm>
+          <a:prstGeom prst="rect">
+            <a:avLst/>
+          </a:prstGeom>
+        </p:spPr>
+      </p:pic>
+      <p:sp>
+        <p:nvSpPr>
+          <p:cNvPr id="16" name="TextBox 15">
+            <a:extLst>
+              <a:ext uri="{FF2B5EF4-FFF2-40B4-BE49-F238E27FC236}">
+                <a16:creationId xmlns:a16="http://schemas.microsoft.com/office/drawing/2014/main" id="{33191E0A-E042-644A-5187-A07EFF82A98C}"/>
+              </a:ext>
+            </a:extLst>
+          </p:cNvPr>
+          <p:cNvSpPr txBox="1"/>
+          <p:nvPr/>
+        </p:nvSpPr>
+        <p:spPr>
+          <a:xfrm>
+            <a:off x="1714814" y="1670972"/>
+            <a:ext cx="468398" cy="369332"/>
+          </a:xfrm>
+          <a:prstGeom prst="rect">
+            <a:avLst/>
+          </a:prstGeom>
+          <a:noFill/>
+        </p:spPr>
+        <p:txBody>
+          <a:bodyPr wrap="none" rtlCol="0">
+            <a:spAutoFit/>
+          </a:bodyPr>
+          <a:lstStyle/>
+          <a:p>
+            <a:r>
+              <a:rPr lang="en-GB" dirty="0" err="1"/>
+              <a:t>cst</a:t>
+            </a:r>
+            <a:endParaRPr lang="en-GB" dirty="0"/>
+          </a:p>
+        </p:txBody>
+      </p:sp>
+      <p:sp>
+        <p:nvSpPr>
+          <p:cNvPr id="18" name="Oval 17">
+            <a:extLst>
+              <a:ext uri="{FF2B5EF4-FFF2-40B4-BE49-F238E27FC236}">
+                <a16:creationId xmlns:a16="http://schemas.microsoft.com/office/drawing/2014/main" id="{ADF8152E-A931-6C69-141A-C971737B4FE7}"/>
+              </a:ext>
+            </a:extLst>
+          </p:cNvPr>
+          <p:cNvSpPr/>
+          <p:nvPr/>
+        </p:nvSpPr>
+        <p:spPr>
+          <a:xfrm>
+            <a:off x="4896678" y="1748085"/>
+            <a:ext cx="2936930" cy="633150"/>
+          </a:xfrm>
+          <a:prstGeom prst="ellipse">
+            <a:avLst/>
+          </a:prstGeom>
+          <a:noFill/>
+          <a:ln>
+            <a:solidFill>
+              <a:srgbClr val="C00000"/>
+            </a:solidFill>
+          </a:ln>
+        </p:spPr>
+        <p:style>
+          <a:lnRef idx="2">
+            <a:schemeClr val="accent1">
+              <a:shade val="15000"/>
+            </a:schemeClr>
+          </a:lnRef>
+          <a:fillRef idx="1">
+            <a:schemeClr val="accent1"/>
+          </a:fillRef>
+          <a:effectRef idx="0">
+            <a:schemeClr val="accent1"/>
+          </a:effectRef>
+          <a:fontRef idx="minor">
+            <a:schemeClr val="lt1"/>
+          </a:fontRef>
+        </p:style>
+        <p:txBody>
+          <a:bodyPr rtlCol="0" anchor="ctr"/>
+          <a:lstStyle/>
+          <a:p>
+            <a:pPr algn="ctr"/>
+            <a:endParaRPr lang="en-GB"/>
+          </a:p>
+        </p:txBody>
+      </p:sp>
+      <p:sp>
+        <p:nvSpPr>
+          <p:cNvPr id="20" name="TextBox 19">
+            <a:extLst>
+              <a:ext uri="{FF2B5EF4-FFF2-40B4-BE49-F238E27FC236}">
+                <a16:creationId xmlns:a16="http://schemas.microsoft.com/office/drawing/2014/main" id="{5FA4F1C1-8384-F354-B90B-6E40C956B428}"/>
+              </a:ext>
+            </a:extLst>
+          </p:cNvPr>
+          <p:cNvSpPr txBox="1"/>
+          <p:nvPr/>
+        </p:nvSpPr>
+        <p:spPr>
+          <a:xfrm>
+            <a:off x="7944678" y="1748085"/>
+            <a:ext cx="961738" cy="584775"/>
+          </a:xfrm>
+          <a:prstGeom prst="rect">
+            <a:avLst/>
+          </a:prstGeom>
+          <a:noFill/>
+        </p:spPr>
+        <p:txBody>
+          <a:bodyPr wrap="none" rtlCol="0">
+            <a:spAutoFit/>
+          </a:bodyPr>
+          <a:lstStyle/>
+          <a:p>
+            <a:r>
+              <a:rPr lang="en-GB" sz="1600" dirty="0">
+                <a:solidFill>
+                  <a:srgbClr val="C00000"/>
+                </a:solidFill>
+              </a:rPr>
+              <a:t>Normal :</a:t>
+            </a:r>
+            <a:br>
+              <a:rPr lang="en-GB" sz="1600" dirty="0">
+                <a:solidFill>
+                  <a:srgbClr val="C00000"/>
+                </a:solidFill>
+              </a:rPr>
+            </a:br>
+            <a:r>
+              <a:rPr lang="en-GB" sz="1600" dirty="0">
+                <a:solidFill>
+                  <a:srgbClr val="C00000"/>
+                </a:solidFill>
+              </a:rPr>
+              <a:t>altitude</a:t>
+            </a:r>
+          </a:p>
+        </p:txBody>
+      </p:sp>
+    </p:spTree>
+    <p:extLst>
+      <p:ext uri="{BB962C8B-B14F-4D97-AF65-F5344CB8AC3E}">
+        <p14:creationId xmlns:p14="http://schemas.microsoft.com/office/powerpoint/2010/main" val="1033694436"/>
+      </p:ext>
+    </p:extLst>
+  </p:cSld>
+  <p:clrMapOvr>
+    <a:masterClrMapping/>
+  </p:clrMapOvr>
+</p:sld>
+</file>
+
+<file path=ppt/slides/slide15.xml><?xml version="1.0" encoding="utf-8"?>
+<p:sld xmlns:a="http://schemas.openxmlformats.org/drawingml/2006/main" xmlns:r="http://schemas.openxmlformats.org/officeDocument/2006/relationships" xmlns:p="http://schemas.openxmlformats.org/presentationml/2006/main">
+  <p:cSld>
+    <p:spTree>
+      <p:nvGrpSpPr>
+        <p:cNvPr id="1" name="">
+          <a:extLst>
+            <a:ext uri="{FF2B5EF4-FFF2-40B4-BE49-F238E27FC236}">
+              <a16:creationId xmlns:a16="http://schemas.microsoft.com/office/drawing/2014/main" id="{9513DE0B-8316-AEC9-1DEA-424396EAADE1}"/>
+            </a:ext>
+          </a:extLst>
+        </p:cNvPr>
+        <p:cNvGrpSpPr/>
+        <p:nvPr/>
+      </p:nvGrpSpPr>
+      <p:grpSpPr>
+        <a:xfrm>
+          <a:off x="0" y="0"/>
+          <a:ext cx="0" cy="0"/>
+          <a:chOff x="0" y="0"/>
+          <a:chExt cx="0" cy="0"/>
+        </a:xfrm>
+      </p:grpSpPr>
+      <p:sp>
+        <p:nvSpPr>
+          <p:cNvPr id="2" name="Title 1">
+            <a:extLst>
+              <a:ext uri="{FF2B5EF4-FFF2-40B4-BE49-F238E27FC236}">
+                <a16:creationId xmlns:a16="http://schemas.microsoft.com/office/drawing/2014/main" id="{ECC397C6-328A-3D46-232F-A2FBFBA9ADB7}"/>
+              </a:ext>
+            </a:extLst>
+          </p:cNvPr>
+          <p:cNvSpPr>
+            <a:spLocks noGrp="1"/>
+          </p:cNvSpPr>
+          <p:nvPr>
+            <p:ph type="title"/>
+          </p:nvPr>
+        </p:nvSpPr>
+        <p:spPr>
+          <a:xfrm>
+            <a:off x="-1" y="1"/>
+            <a:ext cx="8633791" cy="681036"/>
+          </a:xfrm>
+        </p:spPr>
+        <p:txBody>
+          <a:bodyPr/>
+          <a:lstStyle/>
+          <a:p>
+            <a:r>
+              <a:rPr lang="en-GB" dirty="0"/>
+              <a:t>Simulation 2 : Silesia Ring </a:t>
+            </a:r>
+            <a:r>
+              <a:rPr lang="en-GB" dirty="0" err="1"/>
+              <a:t>conduite</a:t>
+            </a:r>
+            <a:r>
+              <a:rPr lang="en-GB" dirty="0"/>
+              <a:t> </a:t>
+            </a:r>
+            <a:r>
+              <a:rPr lang="en-GB" dirty="0" err="1"/>
+              <a:t>optimale</a:t>
+            </a:r>
+            <a:endParaRPr lang="en-GB" dirty="0"/>
+          </a:p>
+        </p:txBody>
+      </p:sp>
+      <p:sp>
+        <p:nvSpPr>
+          <p:cNvPr id="3" name="Date Placeholder 2">
+            <a:extLst>
+              <a:ext uri="{FF2B5EF4-FFF2-40B4-BE49-F238E27FC236}">
+                <a16:creationId xmlns:a16="http://schemas.microsoft.com/office/drawing/2014/main" id="{3BA84B70-5F88-FE42-E250-CA60E80DE730}"/>
+              </a:ext>
+            </a:extLst>
+          </p:cNvPr>
+          <p:cNvSpPr>
+            <a:spLocks noGrp="1"/>
+          </p:cNvSpPr>
+          <p:nvPr>
+            <p:ph type="dt" sz="half" idx="10"/>
+          </p:nvPr>
+        </p:nvSpPr>
+        <p:spPr/>
+        <p:txBody>
+          <a:bodyPr/>
+          <a:lstStyle/>
+          <a:p>
+            <a:fld id="{CA9A9924-1784-4044-A2E4-3606370E1BB6}" type="datetime1">
+              <a:rPr lang="en-GB" smtClean="0"/>
+              <a:t>14/10/2026</a:t>
+            </a:fld>
+            <a:endParaRPr lang="en-GB" dirty="0">
+              <a:latin typeface="Segoe UI Symbol" panose="020B0502040204020203" pitchFamily="34" charset="0"/>
+              <a:ea typeface="Segoe UI Symbol" panose="020B0502040204020203" pitchFamily="34" charset="0"/>
+            </a:endParaRPr>
+          </a:p>
+        </p:txBody>
+      </p:sp>
+      <p:sp>
+        <p:nvSpPr>
+          <p:cNvPr id="4" name="Slide Number Placeholder 3">
+            <a:extLst>
+              <a:ext uri="{FF2B5EF4-FFF2-40B4-BE49-F238E27FC236}">
+                <a16:creationId xmlns:a16="http://schemas.microsoft.com/office/drawing/2014/main" id="{BDDB4654-863A-62BD-EBCF-18C3EB1AF542}"/>
+              </a:ext>
+            </a:extLst>
+          </p:cNvPr>
+          <p:cNvSpPr>
+            <a:spLocks noGrp="1"/>
+          </p:cNvSpPr>
+          <p:nvPr>
+            <p:ph type="sldNum" sz="quarter" idx="4"/>
+          </p:nvPr>
+        </p:nvSpPr>
+        <p:spPr/>
+        <p:txBody>
+          <a:bodyPr/>
+          <a:lstStyle/>
+          <a:p>
+            <a:fld id="{46899FAB-5005-482A-88F2-FE97823A1A33}" type="slidenum">
+              <a:rPr lang="en-GB" smtClean="0"/>
+              <a:pPr/>
+              <a:t>15</a:t>
+            </a:fld>
+            <a:r>
+              <a:rPr lang="en-GB"/>
+              <a:t>/x</a:t>
+            </a:r>
+            <a:endParaRPr lang="en-GB" dirty="0">
+              <a:latin typeface="Segoe UI Symbol" panose="020B0502040204020203" pitchFamily="34" charset="0"/>
+              <a:ea typeface="Segoe UI Symbol" panose="020B0502040204020203" pitchFamily="34" charset="0"/>
+            </a:endParaRPr>
+          </a:p>
+        </p:txBody>
+      </p:sp>
+      <mc:AlternateContent xmlns:mc="http://schemas.openxmlformats.org/markup-compatibility/2006" xmlns:a14="http://schemas.microsoft.com/office/drawing/2010/main">
+        <mc:Choice Requires="a14">
+          <p:sp>
+            <p:nvSpPr>
+              <p:cNvPr id="23" name="TextBox 22">
+                <a:extLst>
+                  <a:ext uri="{FF2B5EF4-FFF2-40B4-BE49-F238E27FC236}">
+                    <a16:creationId xmlns:a16="http://schemas.microsoft.com/office/drawing/2014/main" id="{4CAEB7A3-A6D5-4F03-04E8-EF9693CE8F57}"/>
+                  </a:ext>
+                </a:extLst>
+              </p:cNvPr>
+              <p:cNvSpPr txBox="1"/>
+              <p:nvPr/>
+            </p:nvSpPr>
+            <p:spPr>
+              <a:xfrm>
+                <a:off x="256508" y="2518470"/>
+                <a:ext cx="2835966" cy="646331"/>
+              </a:xfrm>
+              <a:prstGeom prst="rect">
+                <a:avLst/>
+              </a:prstGeom>
+              <a:noFill/>
+            </p:spPr>
+            <p:txBody>
+              <a:bodyPr wrap="square">
+                <a:spAutoFit/>
+              </a:bodyPr>
+              <a:lstStyle/>
+              <a:p>
+                <a:pPr marL="285750" indent="-285750">
+                  <a:buFont typeface="Arial" panose="020B0604020202020204" pitchFamily="34" charset="0"/>
+                  <a:buChar char="•"/>
+                </a:pPr>
+                <a:r>
+                  <a:rPr lang="fr-BE" sz="1200" dirty="0"/>
+                  <a:t>Discrétisation :  </a:t>
+                </a:r>
+                <a14:m>
+                  <m:oMath xmlns:m="http://schemas.openxmlformats.org/officeDocument/2006/math">
+                    <m:r>
+                      <m:rPr>
+                        <m:sty m:val="p"/>
+                      </m:rPr>
+                      <a:rPr lang="fr-BE" sz="1200" i="1" dirty="0" smtClean="0">
+                        <a:latin typeface="Cambria Math" panose="02040503050406030204" pitchFamily="18" charset="0"/>
+                      </a:rPr>
+                      <m:t>Δ</m:t>
+                    </m:r>
+                    <m:r>
+                      <a:rPr lang="fr-BE" sz="1200" i="1" dirty="0" smtClean="0">
+                        <a:latin typeface="Cambria Math" panose="02040503050406030204" pitchFamily="18" charset="0"/>
+                      </a:rPr>
+                      <m:t>𝑥</m:t>
+                    </m:r>
+                    <m:r>
+                      <a:rPr lang="fr-BE" sz="1200" dirty="0">
+                        <a:latin typeface="Cambria Math" panose="02040503050406030204" pitchFamily="18" charset="0"/>
+                      </a:rPr>
+                      <m:t> = </m:t>
+                    </m:r>
+                    <m:r>
+                      <a:rPr lang="fr-BE" sz="1200" b="0" i="1" dirty="0" smtClean="0">
+                        <a:latin typeface="Cambria Math" panose="02040503050406030204" pitchFamily="18" charset="0"/>
+                      </a:rPr>
+                      <m:t>20</m:t>
+                    </m:r>
+                    <m:r>
+                      <m:rPr>
+                        <m:sty m:val="p"/>
+                      </m:rPr>
+                      <a:rPr lang="fr-BE" sz="1200" b="0" i="1" dirty="0" smtClean="0">
+                        <a:latin typeface="Cambria Math" panose="02040503050406030204" pitchFamily="18" charset="0"/>
+                      </a:rPr>
+                      <m:t>m</m:t>
+                    </m:r>
+                  </m:oMath>
+                </a14:m>
+                <a:r>
+                  <a:rPr lang="fr-BE" sz="1200" dirty="0"/>
+                  <a:t> cst</a:t>
+                </a:r>
+              </a:p>
+              <a:p>
+                <a:pPr marL="285750" indent="-285750">
+                  <a:buFont typeface="Arial" panose="020B0604020202020204" pitchFamily="34" charset="0"/>
+                  <a:buChar char="•"/>
+                </a:pPr>
+                <a:r>
+                  <a:rPr lang="fr-BE" sz="1200" dirty="0"/>
+                  <a:t>Pas de pénalisation</a:t>
+                </a:r>
+              </a:p>
+              <a:p>
+                <a:pPr marL="285750" indent="-285750">
+                  <a:buFont typeface="Arial" panose="020B0604020202020204" pitchFamily="34" charset="0"/>
+                  <a:buChar char="•"/>
+                </a:pPr>
+                <a:r>
+                  <a:rPr lang="fr-BE" sz="1200" noProof="0" dirty="0" err="1"/>
+                  <a:t>Altimé</a:t>
+                </a:r>
+                <a:r>
+                  <a:rPr lang="fr-BE" sz="1200" dirty="0"/>
+                  <a:t>trie interpolée du </a:t>
+                </a:r>
+                <a:r>
+                  <a:rPr lang="fr-BE" sz="1200" dirty="0" err="1"/>
+                  <a:t>silesa</a:t>
+                </a:r>
+                <a:r>
+                  <a:rPr lang="fr-BE" sz="1200" dirty="0"/>
+                  <a:t> ring</a:t>
+                </a:r>
+                <a:endParaRPr lang="fr-BE" sz="1200" noProof="0" dirty="0"/>
+              </a:p>
+            </p:txBody>
+          </p:sp>
+        </mc:Choice>
+        <mc:Fallback xmlns="">
+          <p:sp>
+            <p:nvSpPr>
+              <p:cNvPr id="23" name="TextBox 22">
+                <a:extLst>
+                  <a:ext uri="{FF2B5EF4-FFF2-40B4-BE49-F238E27FC236}">
+                    <a16:creationId xmlns:a16="http://schemas.microsoft.com/office/drawing/2014/main" id="{4CAEB7A3-A6D5-4F03-04E8-EF9693CE8F57}"/>
+                  </a:ext>
+                </a:extLst>
+              </p:cNvPr>
+              <p:cNvSpPr txBox="1">
+                <a:spLocks noRot="1" noChangeAspect="1" noMove="1" noResize="1" noEditPoints="1" noAdjustHandles="1" noChangeArrowheads="1" noChangeShapeType="1" noTextEdit="1"/>
+              </p:cNvSpPr>
+              <p:nvPr/>
+            </p:nvSpPr>
+            <p:spPr>
+              <a:xfrm>
+                <a:off x="256508" y="2518470"/>
+                <a:ext cx="2835966" cy="646331"/>
+              </a:xfrm>
+              <a:prstGeom prst="rect">
+                <a:avLst/>
+              </a:prstGeom>
+              <a:blipFill>
+                <a:blip r:embed="rId2"/>
+                <a:stretch>
+                  <a:fillRect t="-943" b="-5660"/>
+                </a:stretch>
+              </a:blipFill>
+            </p:spPr>
+            <p:txBody>
+              <a:bodyPr/>
+              <a:lstStyle/>
+              <a:p>
+                <a:r>
+                  <a:rPr lang="en-GB">
+                    <a:noFill/>
+                  </a:rPr>
+                  <a:t> </a:t>
+                </a:r>
+              </a:p>
+            </p:txBody>
+          </p:sp>
+        </mc:Fallback>
+      </mc:AlternateContent>
+      <p:pic>
+        <p:nvPicPr>
+          <p:cNvPr id="13" name="Picture 12">
+            <a:extLst>
+              <a:ext uri="{FF2B5EF4-FFF2-40B4-BE49-F238E27FC236}">
+                <a16:creationId xmlns:a16="http://schemas.microsoft.com/office/drawing/2014/main" id="{1E072DB5-E8E0-C07D-D023-7C2D6D6BFF24}"/>
+              </a:ext>
+            </a:extLst>
+          </p:cNvPr>
+          <p:cNvPicPr>
+            <a:picLocks noChangeAspect="1"/>
+          </p:cNvPicPr>
+          <p:nvPr/>
+        </p:nvPicPr>
+        <p:blipFill>
+          <a:blip r:embed="rId3">
+            <a:extLst>
+              <a:ext uri="{28A0092B-C50C-407E-A947-70E740481C1C}">
+                <a14:useLocalDpi xmlns:a14="http://schemas.microsoft.com/office/drawing/2010/main" val="0"/>
+              </a:ext>
+            </a:extLst>
+          </a:blip>
+          <a:stretch>
+            <a:fillRect/>
+          </a:stretch>
+        </p:blipFill>
+        <p:spPr>
+          <a:xfrm>
+            <a:off x="526269" y="689601"/>
+            <a:ext cx="2296444" cy="1795494"/>
+          </a:xfrm>
+          <a:prstGeom prst="rect">
+            <a:avLst/>
+          </a:prstGeom>
+        </p:spPr>
+      </p:pic>
+      <p:sp>
+        <p:nvSpPr>
+          <p:cNvPr id="16" name="TextBox 15">
+            <a:extLst>
+              <a:ext uri="{FF2B5EF4-FFF2-40B4-BE49-F238E27FC236}">
+                <a16:creationId xmlns:a16="http://schemas.microsoft.com/office/drawing/2014/main" id="{4A553E17-C33C-7254-DB19-0428EF7F8EE3}"/>
+              </a:ext>
+            </a:extLst>
+          </p:cNvPr>
+          <p:cNvSpPr txBox="1"/>
+          <p:nvPr/>
+        </p:nvSpPr>
+        <p:spPr>
+          <a:xfrm>
+            <a:off x="1377826" y="1402682"/>
+            <a:ext cx="571187" cy="369332"/>
+          </a:xfrm>
+          <a:prstGeom prst="rect">
+            <a:avLst/>
+          </a:prstGeom>
+          <a:noFill/>
+        </p:spPr>
+        <p:txBody>
+          <a:bodyPr wrap="square" rtlCol="0">
+            <a:spAutoFit/>
+          </a:bodyPr>
+          <a:lstStyle/>
+          <a:p>
+            <a:r>
+              <a:rPr lang="en-GB" dirty="0" err="1"/>
+              <a:t>cst</a:t>
+            </a:r>
+            <a:endParaRPr lang="en-GB" dirty="0"/>
+          </a:p>
+        </p:txBody>
+      </p:sp>
+      <p:pic>
+        <p:nvPicPr>
+          <p:cNvPr id="6" name="Picture 5">
+            <a:extLst>
+              <a:ext uri="{FF2B5EF4-FFF2-40B4-BE49-F238E27FC236}">
+                <a16:creationId xmlns:a16="http://schemas.microsoft.com/office/drawing/2014/main" id="{BF08F2BA-1B46-A56D-437F-203FDD6B98E5}"/>
+              </a:ext>
+            </a:extLst>
+          </p:cNvPr>
+          <p:cNvPicPr>
+            <a:picLocks noChangeAspect="1"/>
+          </p:cNvPicPr>
+          <p:nvPr/>
+        </p:nvPicPr>
+        <p:blipFill>
+          <a:blip r:embed="rId4">
+            <a:extLst>
+              <a:ext uri="{28A0092B-C50C-407E-A947-70E740481C1C}">
+                <a14:useLocalDpi xmlns:a14="http://schemas.microsoft.com/office/drawing/2010/main" val="0"/>
+              </a:ext>
+            </a:extLst>
+          </a:blip>
+          <a:stretch>
+            <a:fillRect/>
+          </a:stretch>
+        </p:blipFill>
+        <p:spPr>
+          <a:xfrm>
+            <a:off x="5108757" y="715410"/>
+            <a:ext cx="2808428" cy="1895268"/>
+          </a:xfrm>
+          <a:prstGeom prst="rect">
+            <a:avLst/>
+          </a:prstGeom>
+        </p:spPr>
+      </p:pic>
+      <p:pic>
+        <p:nvPicPr>
+          <p:cNvPr id="8" name="Picture 7">
+            <a:extLst>
+              <a:ext uri="{FF2B5EF4-FFF2-40B4-BE49-F238E27FC236}">
+                <a16:creationId xmlns:a16="http://schemas.microsoft.com/office/drawing/2014/main" id="{EAE26D5E-D017-6DF8-9466-4E3B419948B4}"/>
+              </a:ext>
+            </a:extLst>
+          </p:cNvPr>
+          <p:cNvPicPr>
+            <a:picLocks noChangeAspect="1"/>
+          </p:cNvPicPr>
+          <p:nvPr/>
+        </p:nvPicPr>
+        <p:blipFill>
+          <a:blip r:embed="rId5">
+            <a:extLst>
+              <a:ext uri="{28A0092B-C50C-407E-A947-70E740481C1C}">
+                <a14:useLocalDpi xmlns:a14="http://schemas.microsoft.com/office/drawing/2010/main" val="0"/>
+              </a:ext>
+            </a:extLst>
+          </a:blip>
+          <a:stretch>
+            <a:fillRect/>
+          </a:stretch>
+        </p:blipFill>
+        <p:spPr>
+          <a:xfrm>
+            <a:off x="5149934" y="2610678"/>
+            <a:ext cx="2767251" cy="2137764"/>
+          </a:xfrm>
+          <a:prstGeom prst="rect">
+            <a:avLst/>
+          </a:prstGeom>
+        </p:spPr>
+      </p:pic>
+      <p:pic>
+        <p:nvPicPr>
+          <p:cNvPr id="12" name="Picture 11">
+            <a:extLst>
+              <a:ext uri="{FF2B5EF4-FFF2-40B4-BE49-F238E27FC236}">
+                <a16:creationId xmlns:a16="http://schemas.microsoft.com/office/drawing/2014/main" id="{86C5F7A5-E6D8-6718-A92F-2F6D60528A18}"/>
+              </a:ext>
+            </a:extLst>
+          </p:cNvPr>
+          <p:cNvPicPr>
+            <a:picLocks noChangeAspect="1"/>
+          </p:cNvPicPr>
+          <p:nvPr/>
+        </p:nvPicPr>
+        <p:blipFill>
+          <a:blip r:embed="rId6">
+            <a:extLst>
+              <a:ext uri="{28A0092B-C50C-407E-A947-70E740481C1C}">
+                <a14:useLocalDpi xmlns:a14="http://schemas.microsoft.com/office/drawing/2010/main" val="0"/>
+              </a:ext>
+            </a:extLst>
+          </a:blip>
+          <a:stretch>
+            <a:fillRect/>
+          </a:stretch>
+        </p:blipFill>
+        <p:spPr>
+          <a:xfrm>
+            <a:off x="5233619" y="4714910"/>
+            <a:ext cx="2683566" cy="1947393"/>
+          </a:xfrm>
+          <a:prstGeom prst="rect">
+            <a:avLst/>
+          </a:prstGeom>
+        </p:spPr>
+      </p:pic>
+      <p:sp>
+        <p:nvSpPr>
+          <p:cNvPr id="17" name="Rectangle 16">
+            <a:extLst>
+              <a:ext uri="{FF2B5EF4-FFF2-40B4-BE49-F238E27FC236}">
+                <a16:creationId xmlns:a16="http://schemas.microsoft.com/office/drawing/2014/main" id="{2637BC6E-E259-C5B1-2C42-B9C99933D0A0}"/>
+              </a:ext>
+            </a:extLst>
+          </p:cNvPr>
+          <p:cNvSpPr/>
+          <p:nvPr/>
+        </p:nvSpPr>
+        <p:spPr>
+          <a:xfrm>
+            <a:off x="6254115" y="849630"/>
+            <a:ext cx="765810" cy="5513715"/>
+          </a:xfrm>
+          <a:prstGeom prst="rect">
+            <a:avLst/>
+          </a:prstGeom>
+          <a:noFill/>
+          <a:ln w="28575">
+            <a:solidFill>
+              <a:srgbClr val="C00000"/>
+            </a:solidFill>
+          </a:ln>
+        </p:spPr>
+        <p:style>
+          <a:lnRef idx="2">
+            <a:schemeClr val="accent1">
+              <a:shade val="15000"/>
+            </a:schemeClr>
+          </a:lnRef>
+          <a:fillRef idx="1">
+            <a:schemeClr val="accent1"/>
+          </a:fillRef>
+          <a:effectRef idx="0">
+            <a:schemeClr val="accent1"/>
+          </a:effectRef>
+          <a:fontRef idx="minor">
+            <a:schemeClr val="lt1"/>
+          </a:fontRef>
+        </p:style>
+        <p:txBody>
+          <a:bodyPr rtlCol="0" anchor="ctr"/>
+          <a:lstStyle/>
+          <a:p>
+            <a:pPr algn="ctr"/>
+            <a:endParaRPr lang="en-GB"/>
+          </a:p>
+        </p:txBody>
+      </p:sp>
+      <p:pic>
+        <p:nvPicPr>
+          <p:cNvPr id="7" name="Picture 6">
+            <a:extLst>
+              <a:ext uri="{FF2B5EF4-FFF2-40B4-BE49-F238E27FC236}">
+                <a16:creationId xmlns:a16="http://schemas.microsoft.com/office/drawing/2014/main" id="{85FD8A5B-7B6A-91D2-7A1F-2AFE6A3C5FD5}"/>
+              </a:ext>
+            </a:extLst>
+          </p:cNvPr>
+          <p:cNvPicPr>
+            <a:picLocks noChangeAspect="1"/>
+          </p:cNvPicPr>
+          <p:nvPr/>
+        </p:nvPicPr>
+        <p:blipFill>
+          <a:blip r:embed="rId7"/>
+          <a:stretch>
+            <a:fillRect/>
+          </a:stretch>
+        </p:blipFill>
+        <p:spPr>
+          <a:xfrm>
+            <a:off x="131355" y="3679560"/>
+            <a:ext cx="3300155" cy="1632225"/>
+          </a:xfrm>
+          <a:prstGeom prst="rect">
+            <a:avLst/>
+          </a:prstGeom>
+        </p:spPr>
+      </p:pic>
+      <p:sp>
+        <p:nvSpPr>
+          <p:cNvPr id="9" name="Rectangle 8">
+            <a:extLst>
+              <a:ext uri="{FF2B5EF4-FFF2-40B4-BE49-F238E27FC236}">
+                <a16:creationId xmlns:a16="http://schemas.microsoft.com/office/drawing/2014/main" id="{84D3EB68-038A-6676-0A04-D1BEF8D0F034}"/>
+              </a:ext>
+            </a:extLst>
+          </p:cNvPr>
+          <p:cNvSpPr/>
+          <p:nvPr/>
+        </p:nvSpPr>
+        <p:spPr>
+          <a:xfrm>
+            <a:off x="2498034" y="4582388"/>
+            <a:ext cx="45719" cy="265043"/>
+          </a:xfrm>
+          <a:prstGeom prst="rect">
+            <a:avLst/>
+          </a:prstGeom>
+          <a:solidFill>
+            <a:schemeClr val="tx1"/>
+          </a:solidFill>
+          <a:ln>
+            <a:solidFill>
+              <a:schemeClr val="tx1"/>
+            </a:solidFill>
+          </a:ln>
+        </p:spPr>
+        <p:style>
+          <a:lnRef idx="2">
+            <a:schemeClr val="accent1">
+              <a:shade val="15000"/>
+            </a:schemeClr>
+          </a:lnRef>
+          <a:fillRef idx="1">
+            <a:schemeClr val="accent1"/>
+          </a:fillRef>
+          <a:effectRef idx="0">
+            <a:schemeClr val="accent1"/>
+          </a:effectRef>
+          <a:fontRef idx="minor">
+            <a:schemeClr val="lt1"/>
+          </a:fontRef>
+        </p:style>
+        <p:txBody>
+          <a:bodyPr rtlCol="0" anchor="ctr"/>
+          <a:lstStyle/>
+          <a:p>
+            <a:pPr algn="ctr"/>
+            <a:endParaRPr lang="en-GB"/>
+          </a:p>
+        </p:txBody>
+      </p:sp>
+      <p:sp>
+        <p:nvSpPr>
+          <p:cNvPr id="10" name="TextBox 9">
+            <a:extLst>
+              <a:ext uri="{FF2B5EF4-FFF2-40B4-BE49-F238E27FC236}">
+                <a16:creationId xmlns:a16="http://schemas.microsoft.com/office/drawing/2014/main" id="{7053529F-A819-BF68-02BA-E1DD0BBCE822}"/>
+              </a:ext>
+            </a:extLst>
+          </p:cNvPr>
+          <p:cNvSpPr txBox="1"/>
+          <p:nvPr/>
+        </p:nvSpPr>
+        <p:spPr>
+          <a:xfrm>
+            <a:off x="1066392" y="5455318"/>
+            <a:ext cx="2909001" cy="369332"/>
+          </a:xfrm>
+          <a:prstGeom prst="rect">
+            <a:avLst/>
+          </a:prstGeom>
+          <a:noFill/>
+        </p:spPr>
+        <p:txBody>
+          <a:bodyPr wrap="none" rtlCol="0">
+            <a:spAutoFit/>
+          </a:bodyPr>
+          <a:lstStyle/>
+          <a:p>
+            <a:r>
+              <a:rPr lang="en-GB" dirty="0"/>
+              <a:t>Start/Finish (dans </a:t>
+            </a:r>
+            <a:r>
+              <a:rPr lang="en-GB" dirty="0" err="1"/>
+              <a:t>mes</a:t>
+            </a:r>
+            <a:r>
+              <a:rPr lang="en-GB" dirty="0"/>
+              <a:t> sim)</a:t>
+            </a:r>
+          </a:p>
+        </p:txBody>
+      </p:sp>
+      <p:cxnSp>
+        <p:nvCxnSpPr>
+          <p:cNvPr id="14" name="Straight Arrow Connector 13">
+            <a:extLst>
+              <a:ext uri="{FF2B5EF4-FFF2-40B4-BE49-F238E27FC236}">
+                <a16:creationId xmlns:a16="http://schemas.microsoft.com/office/drawing/2014/main" id="{FFCF33BF-96E7-94C7-E207-CBCC9FE9CBEF}"/>
+              </a:ext>
+            </a:extLst>
+          </p:cNvPr>
+          <p:cNvCxnSpPr>
+            <a:stCxn id="10" idx="0"/>
+          </p:cNvCxnSpPr>
+          <p:nvPr/>
+        </p:nvCxnSpPr>
+        <p:spPr>
+          <a:xfrm flipV="1">
+            <a:off x="2520893" y="4930140"/>
+            <a:ext cx="22860" cy="525178"/>
+          </a:xfrm>
+          <a:prstGeom prst="straightConnector1">
+            <a:avLst/>
+          </a:prstGeom>
+          <a:ln>
+            <a:tailEnd type="triangle"/>
+          </a:ln>
+        </p:spPr>
+        <p:style>
+          <a:lnRef idx="2">
+            <a:schemeClr val="accent1"/>
+          </a:lnRef>
+          <a:fillRef idx="0">
+            <a:schemeClr val="accent1"/>
+          </a:fillRef>
+          <a:effectRef idx="1">
+            <a:schemeClr val="accent1"/>
+          </a:effectRef>
+          <a:fontRef idx="minor">
+            <a:schemeClr val="tx1"/>
+          </a:fontRef>
+        </p:style>
+      </p:cxnSp>
+    </p:spTree>
+    <p:extLst>
+      <p:ext uri="{BB962C8B-B14F-4D97-AF65-F5344CB8AC3E}">
+        <p14:creationId xmlns:p14="http://schemas.microsoft.com/office/powerpoint/2010/main" val="535517151"/>
+      </p:ext>
+    </p:extLst>
+  </p:cSld>
+  <p:clrMapOvr>
+    <a:masterClrMapping/>
+  </p:clrMapOvr>
+</p:sld>
+</file>
+
+<file path=ppt/slides/slide16.xml><?xml version="1.0" encoding="utf-8"?>
 <p:sld xmlns:a="http://schemas.openxmlformats.org/drawingml/2006/main" xmlns:r="http://schemas.openxmlformats.org/officeDocument/2006/relationships" xmlns:p="http://schemas.openxmlformats.org/presentationml/2006/main">
   <p:cSld>
     <p:spTree>
@@ -6000,6 +7438,630 @@
           <p:cNvPr id="2" name="Title 1">
             <a:extLst>
               <a:ext uri="{FF2B5EF4-FFF2-40B4-BE49-F238E27FC236}">
+                <a16:creationId xmlns:a16="http://schemas.microsoft.com/office/drawing/2014/main" id="{D77D1D71-48B2-4BE2-772C-DEC9FEA8AB31}"/>
+              </a:ext>
+            </a:extLst>
+          </p:cNvPr>
+          <p:cNvSpPr>
+            <a:spLocks noGrp="1"/>
+          </p:cNvSpPr>
+          <p:nvPr>
+            <p:ph type="title"/>
+          </p:nvPr>
+        </p:nvSpPr>
+        <p:spPr>
+          <a:xfrm>
+            <a:off x="-1" y="1"/>
+            <a:ext cx="8302488" cy="681036"/>
+          </a:xfrm>
+        </p:spPr>
+        <p:txBody>
+          <a:bodyPr/>
+          <a:lstStyle/>
+          <a:p>
+            <a:r>
+              <a:rPr lang="fr-BE" dirty="0"/>
+              <a:t>B</a:t>
+            </a:r>
+            <a:r>
+              <a:rPr lang="fr-BE" noProof="0" dirty="0" err="1"/>
+              <a:t>reakdown</a:t>
+            </a:r>
+            <a:r>
+              <a:rPr lang="fr-BE" noProof="0" dirty="0"/>
+              <a:t> consommation (travail), utile ?</a:t>
+            </a:r>
+          </a:p>
+        </p:txBody>
+      </p:sp>
+      <p:sp>
+        <p:nvSpPr>
+          <p:cNvPr id="3" name="Date Placeholder 2">
+            <a:extLst>
+              <a:ext uri="{FF2B5EF4-FFF2-40B4-BE49-F238E27FC236}">
+                <a16:creationId xmlns:a16="http://schemas.microsoft.com/office/drawing/2014/main" id="{A497D3F2-7FA5-B6A9-F294-72A12BD83DA4}"/>
+              </a:ext>
+            </a:extLst>
+          </p:cNvPr>
+          <p:cNvSpPr>
+            <a:spLocks noGrp="1"/>
+          </p:cNvSpPr>
+          <p:nvPr>
+            <p:ph type="dt" sz="half" idx="10"/>
+          </p:nvPr>
+        </p:nvSpPr>
+        <p:spPr/>
+        <p:txBody>
+          <a:bodyPr/>
+          <a:lstStyle/>
+          <a:p>
+            <a:fld id="{CA9A9924-1784-4044-A2E4-3606370E1BB6}" type="datetime1">
+              <a:rPr lang="fr-BE" noProof="0" smtClean="0"/>
+              <a:t>14-10-26</a:t>
+            </a:fld>
+            <a:endParaRPr lang="fr-BE" noProof="0" dirty="0">
+              <a:latin typeface="Segoe UI Symbol" panose="020B0502040204020203" pitchFamily="34" charset="0"/>
+              <a:ea typeface="Segoe UI Symbol" panose="020B0502040204020203" pitchFamily="34" charset="0"/>
+            </a:endParaRPr>
+          </a:p>
+        </p:txBody>
+      </p:sp>
+      <p:sp>
+        <p:nvSpPr>
+          <p:cNvPr id="4" name="Slide Number Placeholder 3">
+            <a:extLst>
+              <a:ext uri="{FF2B5EF4-FFF2-40B4-BE49-F238E27FC236}">
+                <a16:creationId xmlns:a16="http://schemas.microsoft.com/office/drawing/2014/main" id="{E7C6373F-9321-6C21-F0CD-F5FC6C7A52AB}"/>
+              </a:ext>
+            </a:extLst>
+          </p:cNvPr>
+          <p:cNvSpPr>
+            <a:spLocks noGrp="1"/>
+          </p:cNvSpPr>
+          <p:nvPr>
+            <p:ph type="sldNum" sz="quarter" idx="4"/>
+          </p:nvPr>
+        </p:nvSpPr>
+        <p:spPr/>
+        <p:txBody>
+          <a:bodyPr/>
+          <a:lstStyle/>
+          <a:p>
+            <a:fld id="{46899FAB-5005-482A-88F2-FE97823A1A33}" type="slidenum">
+              <a:rPr lang="fr-BE" noProof="0" smtClean="0"/>
+              <a:pPr/>
+              <a:t>16</a:t>
+            </a:fld>
+            <a:r>
+              <a:rPr lang="fr-BE" noProof="0" dirty="0"/>
+              <a:t>/x</a:t>
+            </a:r>
+            <a:endParaRPr lang="fr-BE" noProof="0" dirty="0">
+              <a:latin typeface="Segoe UI Symbol" panose="020B0502040204020203" pitchFamily="34" charset="0"/>
+              <a:ea typeface="Segoe UI Symbol" panose="020B0502040204020203" pitchFamily="34" charset="0"/>
+            </a:endParaRPr>
+          </a:p>
+        </p:txBody>
+      </p:sp>
+      <p:sp>
+        <p:nvSpPr>
+          <p:cNvPr id="5" name="TextBox 4">
+            <a:extLst>
+              <a:ext uri="{FF2B5EF4-FFF2-40B4-BE49-F238E27FC236}">
+                <a16:creationId xmlns:a16="http://schemas.microsoft.com/office/drawing/2014/main" id="{A2F2A111-3C44-87C0-1730-EF3FD5570C16}"/>
+              </a:ext>
+            </a:extLst>
+          </p:cNvPr>
+          <p:cNvSpPr txBox="1"/>
+          <p:nvPr/>
+        </p:nvSpPr>
+        <p:spPr>
+          <a:xfrm>
+            <a:off x="874643" y="5274365"/>
+            <a:ext cx="7958012" cy="923330"/>
+          </a:xfrm>
+          <a:prstGeom prst="rect">
+            <a:avLst/>
+          </a:prstGeom>
+          <a:noFill/>
+        </p:spPr>
+        <p:txBody>
+          <a:bodyPr wrap="none" rtlCol="0">
+            <a:spAutoFit/>
+          </a:bodyPr>
+          <a:lstStyle/>
+          <a:p>
+            <a:r>
+              <a:rPr lang="en-GB" dirty="0"/>
+              <a:t>Travail </a:t>
+            </a:r>
+            <a:r>
+              <a:rPr lang="en-GB" dirty="0" err="1"/>
+              <a:t>inertie</a:t>
+            </a:r>
+            <a:r>
+              <a:rPr lang="en-GB" dirty="0"/>
+              <a:t> ~0 car </a:t>
+            </a:r>
+            <a:r>
+              <a:rPr lang="en-GB" dirty="0" err="1"/>
+              <a:t>accélération</a:t>
+            </a:r>
+            <a:r>
+              <a:rPr lang="en-GB" dirty="0"/>
+              <a:t> -&gt; W&gt;0, coast -&gt; W&lt;0  </a:t>
+            </a:r>
+          </a:p>
+          <a:p>
+            <a:r>
+              <a:rPr lang="en-GB" dirty="0"/>
+              <a:t>idem pour </a:t>
+            </a:r>
+            <a:r>
+              <a:rPr lang="en-GB" dirty="0" err="1"/>
+              <a:t>gravité</a:t>
+            </a:r>
+            <a:endParaRPr lang="en-GB" dirty="0"/>
+          </a:p>
+          <a:p>
+            <a:r>
+              <a:rPr lang="en-GB" dirty="0" err="1"/>
+              <a:t>Probablement</a:t>
+            </a:r>
+            <a:r>
+              <a:rPr lang="en-GB" dirty="0"/>
+              <a:t> moyen </a:t>
+            </a:r>
+            <a:r>
+              <a:rPr lang="en-GB" dirty="0" err="1"/>
+              <a:t>d’améliorer</a:t>
+            </a:r>
+            <a:r>
+              <a:rPr lang="en-GB" dirty="0"/>
+              <a:t>, </a:t>
+            </a:r>
+            <a:r>
+              <a:rPr lang="en-GB" dirty="0" err="1"/>
+              <a:t>mais</a:t>
+            </a:r>
+            <a:r>
+              <a:rPr lang="en-GB" dirty="0"/>
+              <a:t> est-</a:t>
+            </a:r>
+            <a:r>
+              <a:rPr lang="en-GB" dirty="0" err="1"/>
+              <a:t>ce</a:t>
+            </a:r>
+            <a:r>
+              <a:rPr lang="en-GB" dirty="0"/>
+              <a:t> utile ? Sensitivities est </a:t>
+            </a:r>
+            <a:r>
+              <a:rPr lang="en-GB" dirty="0" err="1"/>
+              <a:t>meilleur</a:t>
+            </a:r>
+            <a:endParaRPr lang="en-GB" dirty="0"/>
+          </a:p>
+        </p:txBody>
+      </p:sp>
+      <p:pic>
+        <p:nvPicPr>
+          <p:cNvPr id="10" name="Content Placeholder 9">
+            <a:extLst>
+              <a:ext uri="{FF2B5EF4-FFF2-40B4-BE49-F238E27FC236}">
+                <a16:creationId xmlns:a16="http://schemas.microsoft.com/office/drawing/2014/main" id="{5CE78269-4BB6-0C11-2AD3-FFC3F8702931}"/>
+              </a:ext>
+            </a:extLst>
+          </p:cNvPr>
+          <p:cNvPicPr>
+            <a:picLocks noGrp="1" noChangeAspect="1"/>
+          </p:cNvPicPr>
+          <p:nvPr>
+            <p:ph idx="1"/>
+          </p:nvPr>
+        </p:nvPicPr>
+        <p:blipFill>
+          <a:blip r:embed="rId2">
+            <a:extLst>
+              <a:ext uri="{28A0092B-C50C-407E-A947-70E740481C1C}">
+                <a14:useLocalDpi xmlns:a14="http://schemas.microsoft.com/office/drawing/2010/main" val="0"/>
+              </a:ext>
+            </a:extLst>
+          </a:blip>
+          <a:stretch>
+            <a:fillRect/>
+          </a:stretch>
+        </p:blipFill>
+        <p:spPr>
+          <a:xfrm>
+            <a:off x="1392582" y="1459795"/>
+            <a:ext cx="5902740" cy="3662737"/>
+          </a:xfrm>
+          <a:prstGeom prst="rect">
+            <a:avLst/>
+          </a:prstGeom>
+        </p:spPr>
+      </p:pic>
+    </p:spTree>
+    <p:extLst>
+      <p:ext uri="{BB962C8B-B14F-4D97-AF65-F5344CB8AC3E}">
+        <p14:creationId xmlns:p14="http://schemas.microsoft.com/office/powerpoint/2010/main" val="794231053"/>
+      </p:ext>
+    </p:extLst>
+  </p:cSld>
+  <p:clrMapOvr>
+    <a:masterClrMapping/>
+  </p:clrMapOvr>
+</p:sld>
+</file>
+
+<file path=ppt/slides/slide17.xml><?xml version="1.0" encoding="utf-8"?>
+<p:sld xmlns:a="http://schemas.openxmlformats.org/drawingml/2006/main" xmlns:r="http://schemas.openxmlformats.org/officeDocument/2006/relationships" xmlns:p="http://schemas.openxmlformats.org/presentationml/2006/main">
+  <p:cSld>
+    <p:spTree>
+      <p:nvGrpSpPr>
+        <p:cNvPr id="1" name="">
+          <a:extLst>
+            <a:ext uri="{FF2B5EF4-FFF2-40B4-BE49-F238E27FC236}">
+              <a16:creationId xmlns:a16="http://schemas.microsoft.com/office/drawing/2014/main" id="{3450CC31-B859-98D0-9AB2-3B11BA103C65}"/>
+            </a:ext>
+          </a:extLst>
+        </p:cNvPr>
+        <p:cNvGrpSpPr/>
+        <p:nvPr/>
+      </p:nvGrpSpPr>
+      <p:grpSpPr>
+        <a:xfrm>
+          <a:off x="0" y="0"/>
+          <a:ext cx="0" cy="0"/>
+          <a:chOff x="0" y="0"/>
+          <a:chExt cx="0" cy="0"/>
+        </a:xfrm>
+      </p:grpSpPr>
+      <p:sp>
+        <p:nvSpPr>
+          <p:cNvPr id="2" name="Title 1">
+            <a:extLst>
+              <a:ext uri="{FF2B5EF4-FFF2-40B4-BE49-F238E27FC236}">
+                <a16:creationId xmlns:a16="http://schemas.microsoft.com/office/drawing/2014/main" id="{875E8834-6B39-314C-5F37-EF0A1C91FBB1}"/>
+              </a:ext>
+            </a:extLst>
+          </p:cNvPr>
+          <p:cNvSpPr>
+            <a:spLocks noGrp="1"/>
+          </p:cNvSpPr>
+          <p:nvPr>
+            <p:ph type="title"/>
+          </p:nvPr>
+        </p:nvSpPr>
+        <p:spPr/>
+        <p:txBody>
+          <a:bodyPr/>
+          <a:lstStyle/>
+          <a:p>
+            <a:r>
+              <a:rPr lang="fr-BE" noProof="0" dirty="0" err="1"/>
+              <a:t>Outline</a:t>
+            </a:r>
+            <a:endParaRPr lang="fr-BE" noProof="0" dirty="0"/>
+          </a:p>
+        </p:txBody>
+      </p:sp>
+      <p:sp>
+        <p:nvSpPr>
+          <p:cNvPr id="3" name="Date Placeholder 2">
+            <a:extLst>
+              <a:ext uri="{FF2B5EF4-FFF2-40B4-BE49-F238E27FC236}">
+                <a16:creationId xmlns:a16="http://schemas.microsoft.com/office/drawing/2014/main" id="{84BA17C8-132D-85CF-EE62-4C05A298325C}"/>
+              </a:ext>
+            </a:extLst>
+          </p:cNvPr>
+          <p:cNvSpPr>
+            <a:spLocks noGrp="1"/>
+          </p:cNvSpPr>
+          <p:nvPr>
+            <p:ph type="dt" sz="half" idx="10"/>
+          </p:nvPr>
+        </p:nvSpPr>
+        <p:spPr/>
+        <p:txBody>
+          <a:bodyPr/>
+          <a:lstStyle/>
+          <a:p>
+            <a:fld id="{CA9A9924-1784-4044-A2E4-3606370E1BB6}" type="datetime1">
+              <a:rPr lang="fr-BE" noProof="0" smtClean="0"/>
+              <a:t>14-10-26</a:t>
+            </a:fld>
+            <a:endParaRPr lang="fr-BE" noProof="0" dirty="0">
+              <a:latin typeface="Segoe UI Symbol" panose="020B0502040204020203" pitchFamily="34" charset="0"/>
+              <a:ea typeface="Segoe UI Symbol" panose="020B0502040204020203" pitchFamily="34" charset="0"/>
+            </a:endParaRPr>
+          </a:p>
+        </p:txBody>
+      </p:sp>
+      <p:sp>
+        <p:nvSpPr>
+          <p:cNvPr id="4" name="Slide Number Placeholder 3">
+            <a:extLst>
+              <a:ext uri="{FF2B5EF4-FFF2-40B4-BE49-F238E27FC236}">
+                <a16:creationId xmlns:a16="http://schemas.microsoft.com/office/drawing/2014/main" id="{3C037697-C321-8267-DB87-4DF56EBCDA52}"/>
+              </a:ext>
+            </a:extLst>
+          </p:cNvPr>
+          <p:cNvSpPr>
+            <a:spLocks noGrp="1"/>
+          </p:cNvSpPr>
+          <p:nvPr>
+            <p:ph type="sldNum" sz="quarter" idx="4"/>
+          </p:nvPr>
+        </p:nvSpPr>
+        <p:spPr/>
+        <p:txBody>
+          <a:bodyPr/>
+          <a:lstStyle/>
+          <a:p>
+            <a:fld id="{46899FAB-5005-482A-88F2-FE97823A1A33}" type="slidenum">
+              <a:rPr lang="fr-BE" noProof="0" smtClean="0"/>
+              <a:pPr/>
+              <a:t>17</a:t>
+            </a:fld>
+            <a:r>
+              <a:rPr lang="fr-BE" noProof="0" dirty="0"/>
+              <a:t>/x</a:t>
+            </a:r>
+            <a:endParaRPr lang="fr-BE" noProof="0" dirty="0">
+              <a:latin typeface="Segoe UI Symbol" panose="020B0502040204020203" pitchFamily="34" charset="0"/>
+              <a:ea typeface="Segoe UI Symbol" panose="020B0502040204020203" pitchFamily="34" charset="0"/>
+            </a:endParaRPr>
+          </a:p>
+        </p:txBody>
+      </p:sp>
+      <p:sp>
+        <p:nvSpPr>
+          <p:cNvPr id="5" name="Content Placeholder 4">
+            <a:extLst>
+              <a:ext uri="{FF2B5EF4-FFF2-40B4-BE49-F238E27FC236}">
+                <a16:creationId xmlns:a16="http://schemas.microsoft.com/office/drawing/2014/main" id="{06567602-9970-6EE6-BB8E-5B5942E08DE8}"/>
+              </a:ext>
+            </a:extLst>
+          </p:cNvPr>
+          <p:cNvSpPr>
+            <a:spLocks noGrp="1"/>
+          </p:cNvSpPr>
+          <p:nvPr>
+            <p:ph idx="1"/>
+          </p:nvPr>
+        </p:nvSpPr>
+        <p:spPr>
+          <a:xfrm>
+            <a:off x="584809" y="1851545"/>
+            <a:ext cx="7552026" cy="3816482"/>
+          </a:xfrm>
+        </p:spPr>
+        <p:txBody>
+          <a:bodyPr>
+            <a:normAutofit/>
+          </a:bodyPr>
+          <a:lstStyle/>
+          <a:p>
+            <a:r>
+              <a:rPr lang="fr-BE" sz="2800" noProof="0" dirty="0">
+                <a:solidFill>
+                  <a:schemeClr val="bg2">
+                    <a:lumMod val="75000"/>
+                  </a:schemeClr>
+                </a:solidFill>
+              </a:rPr>
+              <a:t>Pourquoi ?</a:t>
+            </a:r>
+          </a:p>
+          <a:p>
+            <a:r>
+              <a:rPr lang="en-GB" sz="2800" dirty="0">
+                <a:solidFill>
+                  <a:schemeClr val="bg2">
+                    <a:lumMod val="75000"/>
+                  </a:schemeClr>
+                </a:solidFill>
+              </a:rPr>
+              <a:t>How it works ?</a:t>
+            </a:r>
+            <a:r>
+              <a:rPr lang="en-GB" sz="2800" dirty="0" err="1">
+                <a:solidFill>
+                  <a:schemeClr val="bg2">
+                    <a:lumMod val="75000"/>
+                  </a:schemeClr>
+                </a:solidFill>
+              </a:rPr>
+              <a:t>Calculateur</a:t>
+            </a:r>
+            <a:r>
+              <a:rPr lang="en-GB" sz="2800" dirty="0">
+                <a:solidFill>
+                  <a:schemeClr val="bg2">
+                    <a:lumMod val="75000"/>
+                  </a:schemeClr>
+                </a:solidFill>
+              </a:rPr>
+              <a:t> de consommation </a:t>
+            </a:r>
+          </a:p>
+          <a:p>
+            <a:r>
+              <a:rPr lang="fr-BE" sz="2800" noProof="0" dirty="0">
+                <a:solidFill>
+                  <a:schemeClr val="bg2">
+                    <a:lumMod val="75000"/>
+                  </a:schemeClr>
+                </a:solidFill>
+              </a:rPr>
+              <a:t>Résultats </a:t>
+            </a:r>
+            <a:r>
+              <a:rPr lang="fr-BE" sz="2800" dirty="0">
+                <a:solidFill>
+                  <a:schemeClr val="bg2">
+                    <a:lumMod val="75000"/>
+                  </a:schemeClr>
+                </a:solidFill>
+              </a:rPr>
+              <a:t>rendement mot. cst</a:t>
+            </a:r>
+            <a:endParaRPr lang="fr-BE" sz="2800" noProof="0" dirty="0">
+              <a:solidFill>
+                <a:schemeClr val="bg2">
+                  <a:lumMod val="75000"/>
+                </a:schemeClr>
+              </a:solidFill>
+            </a:endParaRPr>
+          </a:p>
+          <a:p>
+            <a:r>
+              <a:rPr lang="fr-BE" sz="2800" dirty="0"/>
+              <a:t>Résultats rendement mot. non cst</a:t>
+            </a:r>
+            <a:endParaRPr lang="fr-BE" sz="2800" noProof="0" dirty="0"/>
+          </a:p>
+          <a:p>
+            <a:r>
+              <a:rPr lang="fr-BE" sz="2800" noProof="0" dirty="0">
+                <a:solidFill>
+                  <a:schemeClr val="bg2">
+                    <a:lumMod val="75000"/>
+                  </a:schemeClr>
+                </a:solidFill>
+              </a:rPr>
+              <a:t>Calcul de </a:t>
+            </a:r>
+            <a:r>
+              <a:rPr lang="fr-BE" sz="2800" noProof="0" dirty="0" err="1">
+                <a:solidFill>
+                  <a:schemeClr val="bg2">
+                    <a:lumMod val="75000"/>
+                  </a:schemeClr>
+                </a:solidFill>
+              </a:rPr>
+              <a:t>sensitivities</a:t>
+            </a:r>
+            <a:endParaRPr lang="fr-BE" sz="2800" noProof="0" dirty="0">
+              <a:solidFill>
+                <a:schemeClr val="bg2">
+                  <a:lumMod val="75000"/>
+                </a:schemeClr>
+              </a:solidFill>
+            </a:endParaRPr>
+          </a:p>
+          <a:p>
+            <a:r>
+              <a:rPr lang="fr-BE" sz="2800" noProof="0" dirty="0">
+                <a:solidFill>
+                  <a:schemeClr val="bg2">
+                    <a:lumMod val="75000"/>
+                  </a:schemeClr>
+                </a:solidFill>
+              </a:rPr>
+              <a:t>Mass vs </a:t>
+            </a:r>
+            <a:r>
+              <a:rPr lang="fr-BE" sz="2800" noProof="0" dirty="0" err="1">
+                <a:solidFill>
+                  <a:schemeClr val="bg2">
+                    <a:lumMod val="75000"/>
+                  </a:schemeClr>
+                </a:solidFill>
+              </a:rPr>
+              <a:t>SCx</a:t>
+            </a:r>
+            <a:r>
+              <a:rPr lang="fr-BE" sz="2800" noProof="0" dirty="0">
+                <a:solidFill>
+                  <a:schemeClr val="bg2">
+                    <a:lumMod val="75000"/>
+                  </a:schemeClr>
+                </a:solidFill>
+              </a:rPr>
+              <a:t> </a:t>
+            </a:r>
+            <a:r>
+              <a:rPr lang="fr-BE" sz="2800" noProof="0" dirty="0" err="1">
+                <a:solidFill>
+                  <a:schemeClr val="bg2">
+                    <a:lumMod val="75000"/>
+                  </a:schemeClr>
+                </a:solidFill>
+              </a:rPr>
+              <a:t>tradeoff</a:t>
+            </a:r>
+            <a:r>
+              <a:rPr lang="fr-BE" sz="2800" noProof="0" dirty="0">
+                <a:solidFill>
+                  <a:schemeClr val="bg2">
+                    <a:lumMod val="75000"/>
+                  </a:schemeClr>
+                </a:solidFill>
+              </a:rPr>
+              <a:t> </a:t>
+            </a:r>
+          </a:p>
+          <a:p>
+            <a:r>
+              <a:rPr lang="fr-BE" sz="2800" dirty="0">
+                <a:solidFill>
+                  <a:schemeClr val="bg2">
+                    <a:lumMod val="75000"/>
+                  </a:schemeClr>
+                </a:solidFill>
+              </a:rPr>
+              <a:t>Conclusions : directions de développement</a:t>
+            </a:r>
+          </a:p>
+          <a:p>
+            <a:endParaRPr lang="fr-BE" sz="2800" noProof="0" dirty="0">
+              <a:solidFill>
+                <a:schemeClr val="bg2">
+                  <a:lumMod val="75000"/>
+                </a:schemeClr>
+              </a:solidFill>
+            </a:endParaRPr>
+          </a:p>
+        </p:txBody>
+      </p:sp>
+    </p:spTree>
+    <p:extLst>
+      <p:ext uri="{BB962C8B-B14F-4D97-AF65-F5344CB8AC3E}">
+        <p14:creationId xmlns:p14="http://schemas.microsoft.com/office/powerpoint/2010/main" val="2708691893"/>
+      </p:ext>
+    </p:extLst>
+  </p:cSld>
+  <p:clrMapOvr>
+    <a:masterClrMapping/>
+  </p:clrMapOvr>
+</p:sld>
+</file>
+
+<file path=ppt/slides/slide18.xml><?xml version="1.0" encoding="utf-8"?>
+<p:sld xmlns:a="http://schemas.openxmlformats.org/drawingml/2006/main" xmlns:r="http://schemas.openxmlformats.org/officeDocument/2006/relationships" xmlns:p="http://schemas.openxmlformats.org/presentationml/2006/main">
+  <p:cSld>
+    <p:spTree>
+      <p:nvGrpSpPr>
+        <p:cNvPr id="1" name=""/>
+        <p:cNvGrpSpPr/>
+        <p:nvPr/>
+      </p:nvGrpSpPr>
+      <p:grpSpPr>
+        <a:xfrm>
+          <a:off x="0" y="0"/>
+          <a:ext cx="0" cy="0"/>
+          <a:chOff x="0" y="0"/>
+          <a:chExt cx="0" cy="0"/>
+        </a:xfrm>
+      </p:grpSpPr>
+      <p:sp>
+        <p:nvSpPr>
+          <p:cNvPr id="2" name="Title 1">
+            <a:extLst>
+              <a:ext uri="{FF2B5EF4-FFF2-40B4-BE49-F238E27FC236}">
                 <a16:creationId xmlns:a16="http://schemas.microsoft.com/office/drawing/2014/main" id="{E3A1ADD9-C38C-9D10-2383-D3ABAFC595DB}"/>
               </a:ext>
             </a:extLst>
@@ -6112,7 +8174,7 @@
             <a:fld id="{46899FAB-5005-482A-88F2-FE97823A1A33}" type="slidenum">
               <a:rPr lang="fr-BE" noProof="0" smtClean="0"/>
               <a:pPr/>
-              <a:t>14</a:t>
+              <a:t>18</a:t>
             </a:fld>
             <a:r>
               <a:rPr lang="fr-BE" noProof="0" dirty="0"/>
@@ -6545,286 +8607,7 @@
 </p:sld>
 </file>
 
-<file path=ppt/slides/slide15.xml><?xml version="1.0" encoding="utf-8"?>
-<p:sld xmlns:a="http://schemas.openxmlformats.org/drawingml/2006/main" xmlns:r="http://schemas.openxmlformats.org/officeDocument/2006/relationships" xmlns:p="http://schemas.openxmlformats.org/presentationml/2006/main">
-  <p:cSld>
-    <p:spTree>
-      <p:nvGrpSpPr>
-        <p:cNvPr id="1" name=""/>
-        <p:cNvGrpSpPr/>
-        <p:nvPr/>
-      </p:nvGrpSpPr>
-      <p:grpSpPr>
-        <a:xfrm>
-          <a:off x="0" y="0"/>
-          <a:ext cx="0" cy="0"/>
-          <a:chOff x="0" y="0"/>
-          <a:chExt cx="0" cy="0"/>
-        </a:xfrm>
-      </p:grpSpPr>
-      <p:sp>
-        <p:nvSpPr>
-          <p:cNvPr id="2" name="Title 1">
-            <a:extLst>
-              <a:ext uri="{FF2B5EF4-FFF2-40B4-BE49-F238E27FC236}">
-                <a16:creationId xmlns:a16="http://schemas.microsoft.com/office/drawing/2014/main" id="{D77D1D71-48B2-4BE2-772C-DEC9FEA8AB31}"/>
-              </a:ext>
-            </a:extLst>
-          </p:cNvPr>
-          <p:cNvSpPr>
-            <a:spLocks noGrp="1"/>
-          </p:cNvSpPr>
-          <p:nvPr>
-            <p:ph type="title"/>
-          </p:nvPr>
-        </p:nvSpPr>
-        <p:spPr>
-          <a:xfrm>
-            <a:off x="-1" y="1"/>
-            <a:ext cx="8302488" cy="681036"/>
-          </a:xfrm>
-        </p:spPr>
-        <p:txBody>
-          <a:bodyPr/>
-          <a:lstStyle/>
-          <a:p>
-            <a:r>
-              <a:rPr lang="fr-BE" dirty="0"/>
-              <a:t>B</a:t>
-            </a:r>
-            <a:r>
-              <a:rPr lang="fr-BE" noProof="0" dirty="0" err="1"/>
-              <a:t>reakdown</a:t>
-            </a:r>
-            <a:r>
-              <a:rPr lang="fr-BE" noProof="0" dirty="0"/>
-              <a:t> consommation (travail), utile ?</a:t>
-            </a:r>
-          </a:p>
-        </p:txBody>
-      </p:sp>
-      <p:sp>
-        <p:nvSpPr>
-          <p:cNvPr id="3" name="Date Placeholder 2">
-            <a:extLst>
-              <a:ext uri="{FF2B5EF4-FFF2-40B4-BE49-F238E27FC236}">
-                <a16:creationId xmlns:a16="http://schemas.microsoft.com/office/drawing/2014/main" id="{A497D3F2-7FA5-B6A9-F294-72A12BD83DA4}"/>
-              </a:ext>
-            </a:extLst>
-          </p:cNvPr>
-          <p:cNvSpPr>
-            <a:spLocks noGrp="1"/>
-          </p:cNvSpPr>
-          <p:nvPr>
-            <p:ph type="dt" sz="half" idx="10"/>
-          </p:nvPr>
-        </p:nvSpPr>
-        <p:spPr/>
-        <p:txBody>
-          <a:bodyPr/>
-          <a:lstStyle/>
-          <a:p>
-            <a:fld id="{CA9A9924-1784-4044-A2E4-3606370E1BB6}" type="datetime1">
-              <a:rPr lang="fr-BE" noProof="0" smtClean="0"/>
-              <a:t>14-10-26</a:t>
-            </a:fld>
-            <a:endParaRPr lang="fr-BE" noProof="0" dirty="0">
-              <a:latin typeface="Segoe UI Symbol" panose="020B0502040204020203" pitchFamily="34" charset="0"/>
-              <a:ea typeface="Segoe UI Symbol" panose="020B0502040204020203" pitchFamily="34" charset="0"/>
-            </a:endParaRPr>
-          </a:p>
-        </p:txBody>
-      </p:sp>
-      <p:sp>
-        <p:nvSpPr>
-          <p:cNvPr id="4" name="Slide Number Placeholder 3">
-            <a:extLst>
-              <a:ext uri="{FF2B5EF4-FFF2-40B4-BE49-F238E27FC236}">
-                <a16:creationId xmlns:a16="http://schemas.microsoft.com/office/drawing/2014/main" id="{E7C6373F-9321-6C21-F0CD-F5FC6C7A52AB}"/>
-              </a:ext>
-            </a:extLst>
-          </p:cNvPr>
-          <p:cNvSpPr>
-            <a:spLocks noGrp="1"/>
-          </p:cNvSpPr>
-          <p:nvPr>
-            <p:ph type="sldNum" sz="quarter" idx="4"/>
-          </p:nvPr>
-        </p:nvSpPr>
-        <p:spPr/>
-        <p:txBody>
-          <a:bodyPr/>
-          <a:lstStyle/>
-          <a:p>
-            <a:fld id="{46899FAB-5005-482A-88F2-FE97823A1A33}" type="slidenum">
-              <a:rPr lang="fr-BE" noProof="0" smtClean="0"/>
-              <a:pPr/>
-              <a:t>15</a:t>
-            </a:fld>
-            <a:r>
-              <a:rPr lang="fr-BE" noProof="0" dirty="0"/>
-              <a:t>/x</a:t>
-            </a:r>
-            <a:endParaRPr lang="fr-BE" noProof="0" dirty="0">
-              <a:latin typeface="Segoe UI Symbol" panose="020B0502040204020203" pitchFamily="34" charset="0"/>
-              <a:ea typeface="Segoe UI Symbol" panose="020B0502040204020203" pitchFamily="34" charset="0"/>
-            </a:endParaRPr>
-          </a:p>
-        </p:txBody>
-      </p:sp>
-      <p:pic>
-        <p:nvPicPr>
-          <p:cNvPr id="7" name="Content Placeholder 6">
-            <a:extLst>
-              <a:ext uri="{FF2B5EF4-FFF2-40B4-BE49-F238E27FC236}">
-                <a16:creationId xmlns:a16="http://schemas.microsoft.com/office/drawing/2014/main" id="{D39BD101-6FDA-6DD9-18CB-AF8C28AB958D}"/>
-              </a:ext>
-            </a:extLst>
-          </p:cNvPr>
-          <p:cNvPicPr>
-            <a:picLocks noGrp="1" noChangeAspect="1"/>
-          </p:cNvPicPr>
-          <p:nvPr>
-            <p:ph idx="1"/>
-          </p:nvPr>
-        </p:nvPicPr>
-        <p:blipFill>
-          <a:blip r:embed="rId2">
-            <a:extLst>
-              <a:ext uri="{28A0092B-C50C-407E-A947-70E740481C1C}">
-                <a14:useLocalDpi xmlns:a14="http://schemas.microsoft.com/office/drawing/2010/main" val="0"/>
-              </a:ext>
-            </a:extLst>
-          </a:blip>
-          <a:stretch>
-            <a:fillRect/>
-          </a:stretch>
-        </p:blipFill>
-        <p:spPr>
-          <a:xfrm>
-            <a:off x="1202498" y="1029100"/>
-            <a:ext cx="6254212" cy="3880831"/>
-          </a:xfrm>
-          <a:prstGeom prst="rect">
-            <a:avLst/>
-          </a:prstGeom>
-        </p:spPr>
-      </p:pic>
-      <p:sp>
-        <p:nvSpPr>
-          <p:cNvPr id="5" name="TextBox 4">
-            <a:extLst>
-              <a:ext uri="{FF2B5EF4-FFF2-40B4-BE49-F238E27FC236}">
-                <a16:creationId xmlns:a16="http://schemas.microsoft.com/office/drawing/2014/main" id="{A2F2A111-3C44-87C0-1730-EF3FD5570C16}"/>
-              </a:ext>
-            </a:extLst>
-          </p:cNvPr>
-          <p:cNvSpPr txBox="1"/>
-          <p:nvPr/>
-        </p:nvSpPr>
-        <p:spPr>
-          <a:xfrm>
-            <a:off x="874643" y="5274365"/>
-            <a:ext cx="7958012" cy="923330"/>
-          </a:xfrm>
-          <a:prstGeom prst="rect">
-            <a:avLst/>
-          </a:prstGeom>
-          <a:noFill/>
-        </p:spPr>
-        <p:txBody>
-          <a:bodyPr wrap="none" rtlCol="0">
-            <a:spAutoFit/>
-          </a:bodyPr>
-          <a:lstStyle/>
-          <a:p>
-            <a:r>
-              <a:rPr lang="en-GB" dirty="0"/>
-              <a:t>Travail </a:t>
-            </a:r>
-            <a:r>
-              <a:rPr lang="en-GB" dirty="0" err="1"/>
-              <a:t>inertie</a:t>
-            </a:r>
-            <a:r>
-              <a:rPr lang="en-GB" dirty="0"/>
-              <a:t> ~0 car </a:t>
-            </a:r>
-            <a:r>
-              <a:rPr lang="en-GB" dirty="0" err="1"/>
-              <a:t>accélération</a:t>
-            </a:r>
-            <a:r>
-              <a:rPr lang="en-GB" dirty="0"/>
-              <a:t> -&gt; W&gt;0, coast -&gt; W&lt;0  </a:t>
-            </a:r>
-          </a:p>
-          <a:p>
-            <a:r>
-              <a:rPr lang="en-GB" dirty="0"/>
-              <a:t>idem pour </a:t>
-            </a:r>
-            <a:r>
-              <a:rPr lang="en-GB" dirty="0" err="1"/>
-              <a:t>gravité</a:t>
-            </a:r>
-            <a:endParaRPr lang="en-GB" dirty="0"/>
-          </a:p>
-          <a:p>
-            <a:r>
-              <a:rPr lang="en-GB" dirty="0" err="1"/>
-              <a:t>Probablement</a:t>
-            </a:r>
-            <a:r>
-              <a:rPr lang="en-GB" dirty="0"/>
-              <a:t> moyen </a:t>
-            </a:r>
-            <a:r>
-              <a:rPr lang="en-GB" dirty="0" err="1"/>
-              <a:t>d’améliorer</a:t>
-            </a:r>
-            <a:r>
-              <a:rPr lang="en-GB" dirty="0"/>
-              <a:t>, </a:t>
-            </a:r>
-            <a:r>
-              <a:rPr lang="en-GB" dirty="0" err="1"/>
-              <a:t>mais</a:t>
-            </a:r>
-            <a:r>
-              <a:rPr lang="en-GB" dirty="0"/>
-              <a:t> est-</a:t>
-            </a:r>
-            <a:r>
-              <a:rPr lang="en-GB" dirty="0" err="1"/>
-              <a:t>ce</a:t>
-            </a:r>
-            <a:r>
-              <a:rPr lang="en-GB" dirty="0"/>
-              <a:t> utile ? Sensitivities est </a:t>
-            </a:r>
-            <a:r>
-              <a:rPr lang="en-GB" dirty="0" err="1"/>
-              <a:t>meilleur</a:t>
-            </a:r>
-            <a:endParaRPr lang="en-GB" dirty="0"/>
-          </a:p>
-        </p:txBody>
-      </p:sp>
-    </p:spTree>
-    <p:extLst>
-      <p:ext uri="{BB962C8B-B14F-4D97-AF65-F5344CB8AC3E}">
-        <p14:creationId xmlns:p14="http://schemas.microsoft.com/office/powerpoint/2010/main" val="794231053"/>
-      </p:ext>
-    </p:extLst>
-  </p:cSld>
-  <p:clrMapOvr>
-    <a:masterClrMapping/>
-  </p:clrMapOvr>
-</p:sld>
-</file>
-
-<file path=ppt/slides/slide16.xml><?xml version="1.0" encoding="utf-8"?>
+<file path=ppt/slides/slide19.xml><?xml version="1.0" encoding="utf-8"?>
 <p:sld xmlns:a="http://schemas.openxmlformats.org/drawingml/2006/main" xmlns:r="http://schemas.openxmlformats.org/officeDocument/2006/relationships" xmlns:p="http://schemas.openxmlformats.org/presentationml/2006/main">
   <p:cSld>
     <p:spTree>
@@ -6832,7 +8615,7 @@
         <p:cNvPr id="1" name="">
           <a:extLst>
             <a:ext uri="{FF2B5EF4-FFF2-40B4-BE49-F238E27FC236}">
-              <a16:creationId xmlns:a16="http://schemas.microsoft.com/office/drawing/2014/main" id="{3450CC31-B859-98D0-9AB2-3B11BA103C65}"/>
+              <a16:creationId xmlns:a16="http://schemas.microsoft.com/office/drawing/2014/main" id="{7EFC39B8-A970-06AB-DB1E-9E211E9B5B64}"/>
             </a:ext>
           </a:extLst>
         </p:cNvPr>
@@ -6852,7 +8635,7 @@
           <p:cNvPr id="2" name="Title 1">
             <a:extLst>
               <a:ext uri="{FF2B5EF4-FFF2-40B4-BE49-F238E27FC236}">
-                <a16:creationId xmlns:a16="http://schemas.microsoft.com/office/drawing/2014/main" id="{875E8834-6B39-314C-5F37-EF0A1C91FBB1}"/>
+                <a16:creationId xmlns:a16="http://schemas.microsoft.com/office/drawing/2014/main" id="{CD23BE3A-1410-633A-D0C5-3175607F696D}"/>
               </a:ext>
             </a:extLst>
           </p:cNvPr>
@@ -6863,14 +8646,19 @@
             <p:ph type="title"/>
           </p:nvPr>
         </p:nvSpPr>
-        <p:spPr/>
+        <p:spPr>
+          <a:xfrm>
+            <a:off x="0" y="1"/>
+            <a:ext cx="6274904" cy="681036"/>
+          </a:xfrm>
+        </p:spPr>
         <p:txBody>
           <a:bodyPr/>
           <a:lstStyle/>
           <a:p>
             <a:r>
-              <a:rPr lang="fr-BE" noProof="0" dirty="0" err="1"/>
-              <a:t>Outline</a:t>
+              <a:rPr lang="fr-BE" dirty="0"/>
+              <a:t>Conduite optimale : résultat</a:t>
             </a:r>
             <a:endParaRPr lang="fr-BE" noProof="0" dirty="0"/>
           </a:p>
@@ -6881,7 +8669,7 @@
           <p:cNvPr id="3" name="Date Placeholder 2">
             <a:extLst>
               <a:ext uri="{FF2B5EF4-FFF2-40B4-BE49-F238E27FC236}">
-                <a16:creationId xmlns:a16="http://schemas.microsoft.com/office/drawing/2014/main" id="{84BA17C8-132D-85CF-EE62-4C05A298325C}"/>
+                <a16:creationId xmlns:a16="http://schemas.microsoft.com/office/drawing/2014/main" id="{286713A2-4AB2-7052-70EA-0FD14902A456}"/>
               </a:ext>
             </a:extLst>
           </p:cNvPr>
@@ -6913,7 +8701,7 @@
           <p:cNvPr id="4" name="Slide Number Placeholder 3">
             <a:extLst>
               <a:ext uri="{FF2B5EF4-FFF2-40B4-BE49-F238E27FC236}">
-                <a16:creationId xmlns:a16="http://schemas.microsoft.com/office/drawing/2014/main" id="{3C037697-C321-8267-DB87-4DF56EBCDA52}"/>
+                <a16:creationId xmlns:a16="http://schemas.microsoft.com/office/drawing/2014/main" id="{166C4375-A7D0-411B-E1FF-94E799AC75F0}"/>
               </a:ext>
             </a:extLst>
           </p:cNvPr>
@@ -6932,7 +8720,7 @@
             <a:fld id="{46899FAB-5005-482A-88F2-FE97823A1A33}" type="slidenum">
               <a:rPr lang="fr-BE" noProof="0" smtClean="0"/>
               <a:pPr/>
-              <a:t>16</a:t>
+              <a:t>19</a:t>
             </a:fld>
             <a:r>
               <a:rPr lang="fr-BE" noProof="0" dirty="0"/>
@@ -6947,534 +8735,10 @@
       </p:sp>
       <p:sp>
         <p:nvSpPr>
-          <p:cNvPr id="5" name="Content Placeholder 4">
+          <p:cNvPr id="8" name="TextBox 7">
             <a:extLst>
               <a:ext uri="{FF2B5EF4-FFF2-40B4-BE49-F238E27FC236}">
-                <a16:creationId xmlns:a16="http://schemas.microsoft.com/office/drawing/2014/main" id="{06567602-9970-6EE6-BB8E-5B5942E08DE8}"/>
-              </a:ext>
-            </a:extLst>
-          </p:cNvPr>
-          <p:cNvSpPr>
-            <a:spLocks noGrp="1"/>
-          </p:cNvSpPr>
-          <p:nvPr>
-            <p:ph idx="1"/>
-          </p:nvPr>
-        </p:nvSpPr>
-        <p:spPr>
-          <a:xfrm>
-            <a:off x="584809" y="1851545"/>
-            <a:ext cx="7552026" cy="3816482"/>
-          </a:xfrm>
-        </p:spPr>
-        <p:txBody>
-          <a:bodyPr>
-            <a:normAutofit/>
-          </a:bodyPr>
-          <a:lstStyle/>
-          <a:p>
-            <a:r>
-              <a:rPr lang="fr-BE" sz="2800" noProof="0" dirty="0">
-                <a:solidFill>
-                  <a:schemeClr val="bg2">
-                    <a:lumMod val="75000"/>
-                  </a:schemeClr>
-                </a:solidFill>
-              </a:rPr>
-              <a:t>Pourquoi ?</a:t>
-            </a:r>
-          </a:p>
-          <a:p>
-            <a:r>
-              <a:rPr lang="en-GB" sz="2800" dirty="0">
-                <a:solidFill>
-                  <a:schemeClr val="bg2">
-                    <a:lumMod val="75000"/>
-                  </a:schemeClr>
-                </a:solidFill>
-              </a:rPr>
-              <a:t>How it works ?</a:t>
-            </a:r>
-            <a:r>
-              <a:rPr lang="en-GB" sz="2800" dirty="0" err="1">
-                <a:solidFill>
-                  <a:schemeClr val="bg2">
-                    <a:lumMod val="75000"/>
-                  </a:schemeClr>
-                </a:solidFill>
-              </a:rPr>
-              <a:t>Calculateur</a:t>
-            </a:r>
-            <a:r>
-              <a:rPr lang="en-GB" sz="2800" dirty="0">
-                <a:solidFill>
-                  <a:schemeClr val="bg2">
-                    <a:lumMod val="75000"/>
-                  </a:schemeClr>
-                </a:solidFill>
-              </a:rPr>
-              <a:t> de consommation </a:t>
-            </a:r>
-          </a:p>
-          <a:p>
-            <a:r>
-              <a:rPr lang="fr-BE" sz="2800" noProof="0" dirty="0">
-                <a:solidFill>
-                  <a:schemeClr val="bg2">
-                    <a:lumMod val="75000"/>
-                  </a:schemeClr>
-                </a:solidFill>
-              </a:rPr>
-              <a:t>Résultats </a:t>
-            </a:r>
-            <a:r>
-              <a:rPr lang="fr-BE" sz="2800" dirty="0">
-                <a:solidFill>
-                  <a:schemeClr val="bg2">
-                    <a:lumMod val="75000"/>
-                  </a:schemeClr>
-                </a:solidFill>
-              </a:rPr>
-              <a:t>rendement mot. non cst</a:t>
-            </a:r>
-            <a:r>
-              <a:rPr lang="fr-BE" sz="2800" noProof="0" dirty="0">
-                <a:solidFill>
-                  <a:schemeClr val="bg2">
-                    <a:lumMod val="75000"/>
-                  </a:schemeClr>
-                </a:solidFill>
-              </a:rPr>
-              <a:t> (07/10/26) </a:t>
-            </a:r>
-          </a:p>
-          <a:p>
-            <a:r>
-              <a:rPr lang="fr-BE" sz="2800" dirty="0"/>
-              <a:t>Résultats rendement mot. cst (07/10/26) </a:t>
-            </a:r>
-            <a:endParaRPr lang="fr-BE" sz="2800" noProof="0" dirty="0"/>
-          </a:p>
-          <a:p>
-            <a:r>
-              <a:rPr lang="fr-BE" sz="2800" noProof="0" dirty="0">
-                <a:solidFill>
-                  <a:schemeClr val="bg2">
-                    <a:lumMod val="75000"/>
-                  </a:schemeClr>
-                </a:solidFill>
-              </a:rPr>
-              <a:t>Calcul de </a:t>
-            </a:r>
-            <a:r>
-              <a:rPr lang="fr-BE" sz="2800" noProof="0" dirty="0" err="1">
-                <a:solidFill>
-                  <a:schemeClr val="bg2">
-                    <a:lumMod val="75000"/>
-                  </a:schemeClr>
-                </a:solidFill>
-              </a:rPr>
-              <a:t>sensitivities</a:t>
-            </a:r>
-            <a:endParaRPr lang="fr-BE" sz="2800" noProof="0" dirty="0">
-              <a:solidFill>
-                <a:schemeClr val="bg2">
-                  <a:lumMod val="75000"/>
-                </a:schemeClr>
-              </a:solidFill>
-            </a:endParaRPr>
-          </a:p>
-          <a:p>
-            <a:r>
-              <a:rPr lang="fr-BE" sz="2800" noProof="0" dirty="0">
-                <a:solidFill>
-                  <a:schemeClr val="bg2">
-                    <a:lumMod val="75000"/>
-                  </a:schemeClr>
-                </a:solidFill>
-              </a:rPr>
-              <a:t>Mass vs </a:t>
-            </a:r>
-            <a:r>
-              <a:rPr lang="fr-BE" sz="2800" noProof="0" dirty="0" err="1">
-                <a:solidFill>
-                  <a:schemeClr val="bg2">
-                    <a:lumMod val="75000"/>
-                  </a:schemeClr>
-                </a:solidFill>
-              </a:rPr>
-              <a:t>SCx</a:t>
-            </a:r>
-            <a:r>
-              <a:rPr lang="fr-BE" sz="2800" noProof="0" dirty="0">
-                <a:solidFill>
-                  <a:schemeClr val="bg2">
-                    <a:lumMod val="75000"/>
-                  </a:schemeClr>
-                </a:solidFill>
-              </a:rPr>
-              <a:t> </a:t>
-            </a:r>
-            <a:r>
-              <a:rPr lang="fr-BE" sz="2800" noProof="0" dirty="0" err="1">
-                <a:solidFill>
-                  <a:schemeClr val="bg2">
-                    <a:lumMod val="75000"/>
-                  </a:schemeClr>
-                </a:solidFill>
-              </a:rPr>
-              <a:t>tradeoff</a:t>
-            </a:r>
-            <a:r>
-              <a:rPr lang="fr-BE" sz="2800" noProof="0" dirty="0">
-                <a:solidFill>
-                  <a:schemeClr val="bg2">
-                    <a:lumMod val="75000"/>
-                  </a:schemeClr>
-                </a:solidFill>
-              </a:rPr>
-              <a:t> </a:t>
-            </a:r>
-          </a:p>
-          <a:p>
-            <a:r>
-              <a:rPr lang="fr-BE" sz="2800" dirty="0">
-                <a:solidFill>
-                  <a:schemeClr val="bg2">
-                    <a:lumMod val="75000"/>
-                  </a:schemeClr>
-                </a:solidFill>
-              </a:rPr>
-              <a:t>Conclusions : directions de développement</a:t>
-            </a:r>
-          </a:p>
-          <a:p>
-            <a:endParaRPr lang="fr-BE" sz="2800" noProof="0" dirty="0">
-              <a:solidFill>
-                <a:schemeClr val="bg2">
-                  <a:lumMod val="75000"/>
-                </a:schemeClr>
-              </a:solidFill>
-            </a:endParaRPr>
-          </a:p>
-        </p:txBody>
-      </p:sp>
-    </p:spTree>
-    <p:extLst>
-      <p:ext uri="{BB962C8B-B14F-4D97-AF65-F5344CB8AC3E}">
-        <p14:creationId xmlns:p14="http://schemas.microsoft.com/office/powerpoint/2010/main" val="2708691893"/>
-      </p:ext>
-    </p:extLst>
-  </p:cSld>
-  <p:clrMapOvr>
-    <a:masterClrMapping/>
-  </p:clrMapOvr>
-</p:sld>
-</file>
-
-<file path=ppt/slides/slide17.xml><?xml version="1.0" encoding="utf-8"?>
-<p:sld xmlns:a="http://schemas.openxmlformats.org/drawingml/2006/main" xmlns:r="http://schemas.openxmlformats.org/officeDocument/2006/relationships" xmlns:p="http://schemas.openxmlformats.org/presentationml/2006/main">
-  <p:cSld>
-    <p:spTree>
-      <p:nvGrpSpPr>
-        <p:cNvPr id="1" name="">
-          <a:extLst>
-            <a:ext uri="{FF2B5EF4-FFF2-40B4-BE49-F238E27FC236}">
-              <a16:creationId xmlns:a16="http://schemas.microsoft.com/office/drawing/2014/main" id="{74397233-9C1B-9359-DE3B-F7AFC63DD56B}"/>
-            </a:ext>
-          </a:extLst>
-        </p:cNvPr>
-        <p:cNvGrpSpPr/>
-        <p:nvPr/>
-      </p:nvGrpSpPr>
-      <p:grpSpPr>
-        <a:xfrm>
-          <a:off x="0" y="0"/>
-          <a:ext cx="0" cy="0"/>
-          <a:chOff x="0" y="0"/>
-          <a:chExt cx="0" cy="0"/>
-        </a:xfrm>
-      </p:grpSpPr>
-      <p:sp>
-        <p:nvSpPr>
-          <p:cNvPr id="2" name="Title 1">
-            <a:extLst>
-              <a:ext uri="{FF2B5EF4-FFF2-40B4-BE49-F238E27FC236}">
-                <a16:creationId xmlns:a16="http://schemas.microsoft.com/office/drawing/2014/main" id="{0FD018E5-57BA-0905-4F7D-D1447C55304E}"/>
-              </a:ext>
-            </a:extLst>
-          </p:cNvPr>
-          <p:cNvSpPr>
-            <a:spLocks noGrp="1"/>
-          </p:cNvSpPr>
-          <p:nvPr>
-            <p:ph type="title"/>
-          </p:nvPr>
-        </p:nvSpPr>
-        <p:spPr>
-          <a:xfrm>
-            <a:off x="0" y="1"/>
-            <a:ext cx="7772400" cy="681036"/>
-          </a:xfrm>
-        </p:spPr>
-        <p:txBody>
-          <a:bodyPr/>
-          <a:lstStyle/>
-          <a:p>
-            <a:r>
-              <a:rPr lang="en-GB" dirty="0"/>
-              <a:t>Simulation 2 : </a:t>
-            </a:r>
-            <a:r>
-              <a:rPr lang="en-GB" dirty="0" err="1"/>
-              <a:t>altimétrie</a:t>
-            </a:r>
-            <a:r>
-              <a:rPr lang="en-GB" dirty="0"/>
-              <a:t> Silesia ring</a:t>
-            </a:r>
-          </a:p>
-        </p:txBody>
-      </p:sp>
-      <p:sp>
-        <p:nvSpPr>
-          <p:cNvPr id="3" name="Date Placeholder 2">
-            <a:extLst>
-              <a:ext uri="{FF2B5EF4-FFF2-40B4-BE49-F238E27FC236}">
-                <a16:creationId xmlns:a16="http://schemas.microsoft.com/office/drawing/2014/main" id="{379DBBE6-B9D4-AACB-F06C-4DA2977D6459}"/>
-              </a:ext>
-            </a:extLst>
-          </p:cNvPr>
-          <p:cNvSpPr>
-            <a:spLocks noGrp="1"/>
-          </p:cNvSpPr>
-          <p:nvPr>
-            <p:ph type="dt" sz="half" idx="10"/>
-          </p:nvPr>
-        </p:nvSpPr>
-        <p:spPr/>
-        <p:txBody>
-          <a:bodyPr/>
-          <a:lstStyle/>
-          <a:p>
-            <a:fld id="{CA9A9924-1784-4044-A2E4-3606370E1BB6}" type="datetime1">
-              <a:rPr lang="en-GB" smtClean="0"/>
-              <a:t>14/10/2026</a:t>
-            </a:fld>
-            <a:endParaRPr lang="en-GB" dirty="0">
-              <a:latin typeface="Segoe UI Symbol" panose="020B0502040204020203" pitchFamily="34" charset="0"/>
-              <a:ea typeface="Segoe UI Symbol" panose="020B0502040204020203" pitchFamily="34" charset="0"/>
-            </a:endParaRPr>
-          </a:p>
-        </p:txBody>
-      </p:sp>
-      <p:sp>
-        <p:nvSpPr>
-          <p:cNvPr id="4" name="Slide Number Placeholder 3">
-            <a:extLst>
-              <a:ext uri="{FF2B5EF4-FFF2-40B4-BE49-F238E27FC236}">
-                <a16:creationId xmlns:a16="http://schemas.microsoft.com/office/drawing/2014/main" id="{9A930B7E-3BA7-6416-A361-71B06A33B78A}"/>
-              </a:ext>
-            </a:extLst>
-          </p:cNvPr>
-          <p:cNvSpPr>
-            <a:spLocks noGrp="1"/>
-          </p:cNvSpPr>
-          <p:nvPr>
-            <p:ph type="sldNum" sz="quarter" idx="4"/>
-          </p:nvPr>
-        </p:nvSpPr>
-        <p:spPr/>
-        <p:txBody>
-          <a:bodyPr/>
-          <a:lstStyle/>
-          <a:p>
-            <a:fld id="{46899FAB-5005-482A-88F2-FE97823A1A33}" type="slidenum">
-              <a:rPr lang="en-GB" smtClean="0"/>
-              <a:pPr/>
-              <a:t>17</a:t>
-            </a:fld>
-            <a:r>
-              <a:rPr lang="en-GB"/>
-              <a:t>/x</a:t>
-            </a:r>
-            <a:endParaRPr lang="en-GB" dirty="0">
-              <a:latin typeface="Segoe UI Symbol" panose="020B0502040204020203" pitchFamily="34" charset="0"/>
-              <a:ea typeface="Segoe UI Symbol" panose="020B0502040204020203" pitchFamily="34" charset="0"/>
-            </a:endParaRPr>
-          </a:p>
-        </p:txBody>
-      </p:sp>
-      <mc:AlternateContent xmlns:mc="http://schemas.openxmlformats.org/markup-compatibility/2006" xmlns:a14="http://schemas.microsoft.com/office/drawing/2010/main">
-        <mc:Choice Requires="a14">
-          <p:sp>
-            <p:nvSpPr>
-              <p:cNvPr id="23" name="TextBox 22">
-                <a:extLst>
-                  <a:ext uri="{FF2B5EF4-FFF2-40B4-BE49-F238E27FC236}">
-                    <a16:creationId xmlns:a16="http://schemas.microsoft.com/office/drawing/2014/main" id="{084E8625-68A2-59BE-C8AD-F71116465A21}"/>
-                  </a:ext>
-                </a:extLst>
-              </p:cNvPr>
-              <p:cNvSpPr txBox="1"/>
-              <p:nvPr/>
-            </p:nvSpPr>
-            <p:spPr>
-              <a:xfrm>
-                <a:off x="4187686" y="749057"/>
-                <a:ext cx="3650974" cy="830997"/>
-              </a:xfrm>
-              <a:prstGeom prst="rect">
-                <a:avLst/>
-              </a:prstGeom>
-              <a:noFill/>
-            </p:spPr>
-            <p:txBody>
-              <a:bodyPr wrap="square">
-                <a:spAutoFit/>
-              </a:bodyPr>
-              <a:lstStyle/>
-              <a:p>
-                <a:pPr marL="285750" indent="-285750">
-                  <a:buFont typeface="Arial" panose="020B0604020202020204" pitchFamily="34" charset="0"/>
-                  <a:buChar char="•"/>
-                </a:pPr>
-                <a:r>
-                  <a:rPr lang="fr-BE" sz="1600" dirty="0"/>
-                  <a:t>Discrétisation :  </a:t>
-                </a:r>
-                <a14:m>
-                  <m:oMath xmlns:m="http://schemas.openxmlformats.org/officeDocument/2006/math">
-                    <m:r>
-                      <m:rPr>
-                        <m:sty m:val="p"/>
-                      </m:rPr>
-                      <a:rPr lang="fr-BE" sz="1600" i="1" dirty="0">
-                        <a:latin typeface="Cambria Math" panose="02040503050406030204" pitchFamily="18" charset="0"/>
-                      </a:rPr>
-                      <m:t>Δ</m:t>
-                    </m:r>
-                    <m:r>
-                      <a:rPr lang="fr-BE" sz="1600" i="1" dirty="0">
-                        <a:latin typeface="Cambria Math" panose="02040503050406030204" pitchFamily="18" charset="0"/>
-                      </a:rPr>
-                      <m:t>𝑥</m:t>
-                    </m:r>
-                    <m:r>
-                      <a:rPr lang="fr-BE" sz="1600" dirty="0">
-                        <a:latin typeface="Cambria Math" panose="02040503050406030204" pitchFamily="18" charset="0"/>
-                      </a:rPr>
-                      <m:t> = </m:t>
-                    </m:r>
-                    <m:r>
-                      <a:rPr lang="fr-BE" sz="1600" b="0" i="1" dirty="0" smtClean="0">
-                        <a:latin typeface="Cambria Math" panose="02040503050406030204" pitchFamily="18" charset="0"/>
-                      </a:rPr>
-                      <m:t>50</m:t>
-                    </m:r>
-                    <m:r>
-                      <m:rPr>
-                        <m:sty m:val="p"/>
-                      </m:rPr>
-                      <a:rPr lang="fr-BE" sz="1600" b="0" i="1" dirty="0" smtClean="0">
-                        <a:latin typeface="Cambria Math" panose="02040503050406030204" pitchFamily="18" charset="0"/>
-                      </a:rPr>
-                      <m:t>m</m:t>
-                    </m:r>
-                  </m:oMath>
-                </a14:m>
-                <a:r>
-                  <a:rPr lang="fr-BE" sz="1600" dirty="0"/>
-                  <a:t> cst</a:t>
-                </a:r>
-              </a:p>
-              <a:p>
-                <a:pPr marL="285750" indent="-285750">
-                  <a:buFont typeface="Arial" panose="020B0604020202020204" pitchFamily="34" charset="0"/>
-                  <a:buChar char="•"/>
-                </a:pPr>
-                <a:r>
-                  <a:rPr lang="fr-BE" sz="1600" dirty="0"/>
-                  <a:t>Pas de pénalisation</a:t>
-                </a:r>
-              </a:p>
-              <a:p>
-                <a:pPr marL="285750" indent="-285750">
-                  <a:buFont typeface="Arial" panose="020B0604020202020204" pitchFamily="34" charset="0"/>
-                  <a:buChar char="•"/>
-                </a:pPr>
-                <a:r>
-                  <a:rPr lang="fr-BE" sz="1600" noProof="0" dirty="0" err="1"/>
-                  <a:t>Altimé</a:t>
-                </a:r>
-                <a:r>
-                  <a:rPr lang="fr-BE" sz="1600" dirty="0"/>
-                  <a:t>trie interpolée du </a:t>
-                </a:r>
-                <a:r>
-                  <a:rPr lang="fr-BE" sz="1600" dirty="0" err="1"/>
-                  <a:t>silesa</a:t>
-                </a:r>
-                <a:r>
-                  <a:rPr lang="fr-BE" sz="1600" dirty="0"/>
-                  <a:t> ring</a:t>
-                </a:r>
-                <a:endParaRPr lang="fr-BE" sz="1600" noProof="0" dirty="0"/>
-              </a:p>
-            </p:txBody>
-          </p:sp>
-        </mc:Choice>
-        <mc:Fallback xmlns="">
-          <p:sp>
-            <p:nvSpPr>
-              <p:cNvPr id="23" name="TextBox 22">
-                <a:extLst>
-                  <a:ext uri="{FF2B5EF4-FFF2-40B4-BE49-F238E27FC236}">
-                    <a16:creationId xmlns:a16="http://schemas.microsoft.com/office/drawing/2014/main" id="{084E8625-68A2-59BE-C8AD-F71116465A21}"/>
-                  </a:ext>
-                </a:extLst>
-              </p:cNvPr>
-              <p:cNvSpPr txBox="1">
-                <a:spLocks noRot="1" noChangeAspect="1" noMove="1" noResize="1" noEditPoints="1" noAdjustHandles="1" noChangeArrowheads="1" noChangeShapeType="1" noTextEdit="1"/>
-              </p:cNvSpPr>
-              <p:nvPr/>
-            </p:nvSpPr>
-            <p:spPr>
-              <a:xfrm>
-                <a:off x="4187686" y="749057"/>
-                <a:ext cx="3650974" cy="830997"/>
-              </a:xfrm>
-              <a:prstGeom prst="rect">
-                <a:avLst/>
-              </a:prstGeom>
-              <a:blipFill>
-                <a:blip r:embed="rId2"/>
-                <a:stretch>
-                  <a:fillRect l="-668" t="-2941" b="-8088"/>
-                </a:stretch>
-              </a:blipFill>
-            </p:spPr>
-            <p:txBody>
-              <a:bodyPr/>
-              <a:lstStyle/>
-              <a:p>
-                <a:r>
-                  <a:rPr lang="en-GB">
-                    <a:noFill/>
-                  </a:rPr>
-                  <a:t> </a:t>
-                </a:r>
-              </a:p>
-            </p:txBody>
-          </p:sp>
-        </mc:Fallback>
-      </mc:AlternateContent>
-      <p:sp>
-        <p:nvSpPr>
-          <p:cNvPr id="25" name="TextBox 24">
-            <a:extLst>
-              <a:ext uri="{FF2B5EF4-FFF2-40B4-BE49-F238E27FC236}">
-                <a16:creationId xmlns:a16="http://schemas.microsoft.com/office/drawing/2014/main" id="{97B3A0B0-28AD-BE18-A89C-CEE128C61414}"/>
+                <a16:creationId xmlns:a16="http://schemas.microsoft.com/office/drawing/2014/main" id="{541B17F5-7EFB-E03C-43CF-918B8A889AF1}"/>
               </a:ext>
             </a:extLst>
           </p:cNvPr>
@@ -7483,8 +8747,8 @@
         </p:nvSpPr>
         <p:spPr>
           <a:xfrm>
-            <a:off x="769168" y="6005950"/>
-            <a:ext cx="2982731" cy="338554"/>
+            <a:off x="5642907" y="1073278"/>
+            <a:ext cx="2887317" cy="369332"/>
           </a:xfrm>
           <a:prstGeom prst="rect">
             <a:avLst/>
@@ -7497,24 +8761,20 @@
           </a:bodyPr>
           <a:lstStyle/>
           <a:p>
-            <a:r>
-              <a:rPr lang="en-GB" sz="1600" dirty="0">
-                <a:latin typeface="+mj-lt"/>
-              </a:rPr>
-              <a:t>Efficiency: 349,28 km/kWh</a:t>
-            </a:r>
-            <a:endParaRPr lang="en-GB" sz="1600" b="1" dirty="0">
-              <a:latin typeface="+mj-lt"/>
-            </a:endParaRPr>
+            <a:pPr algn="ctr"/>
+            <a:r>
+              <a:rPr lang="en-GB" dirty="0"/>
+              <a:t>Efficiency: 330.81 km/kWh</a:t>
+            </a:r>
           </a:p>
         </p:txBody>
       </p:sp>
       <p:pic>
         <p:nvPicPr>
-          <p:cNvPr id="9" name="Picture 8">
+          <p:cNvPr id="15" name="Picture 14">
             <a:extLst>
               <a:ext uri="{FF2B5EF4-FFF2-40B4-BE49-F238E27FC236}">
-                <a16:creationId xmlns:a16="http://schemas.microsoft.com/office/drawing/2014/main" id="{6438077D-9E79-FA13-D5F0-58B344071D14}"/>
+                <a16:creationId xmlns:a16="http://schemas.microsoft.com/office/drawing/2014/main" id="{6F19E0A6-190E-42ED-B8C0-7B759DE1442F}"/>
               </a:ext>
             </a:extLst>
           </p:cNvPr>
@@ -7524,7 +8784,7 @@
           <p:nvPr/>
         </p:nvPicPr>
         <p:blipFill>
-          <a:blip r:embed="rId3">
+          <a:blip r:embed="rId2">
             <a:extLst>
               <a:ext uri="{28A0092B-C50C-407E-A947-70E740481C1C}">
                 <a14:useLocalDpi xmlns:a14="http://schemas.microsoft.com/office/drawing/2010/main" val="0"/>
@@ -7537,1325 +8797,18 @@
         </p:blipFill>
         <p:spPr>
           <a:xfrm>
-            <a:off x="4572000" y="1550237"/>
-            <a:ext cx="3170212" cy="2607633"/>
+            <a:off x="1600666" y="1668148"/>
+            <a:ext cx="4674238" cy="3844758"/>
           </a:xfrm>
           <a:prstGeom prst="rect">
             <a:avLst/>
           </a:prstGeom>
         </p:spPr>
       </p:pic>
-      <p:pic>
-        <p:nvPicPr>
-          <p:cNvPr id="11" name="Picture 10">
-            <a:extLst>
-              <a:ext uri="{FF2B5EF4-FFF2-40B4-BE49-F238E27FC236}">
-                <a16:creationId xmlns:a16="http://schemas.microsoft.com/office/drawing/2014/main" id="{03C52C2E-4F09-3F4B-DB23-C0315965004D}"/>
-              </a:ext>
-            </a:extLst>
-          </p:cNvPr>
-          <p:cNvPicPr>
-            <a:picLocks noChangeAspect="1"/>
-          </p:cNvPicPr>
-          <p:nvPr/>
-        </p:nvPicPr>
-        <p:blipFill>
-          <a:blip r:embed="rId4">
-            <a:extLst>
-              <a:ext uri="{28A0092B-C50C-407E-A947-70E740481C1C}">
-                <a14:useLocalDpi xmlns:a14="http://schemas.microsoft.com/office/drawing/2010/main" val="0"/>
-              </a:ext>
-            </a:extLst>
-          </a:blip>
-          <a:stretch>
-            <a:fillRect/>
-          </a:stretch>
-        </p:blipFill>
-        <p:spPr>
-          <a:xfrm>
-            <a:off x="204389" y="3167440"/>
-            <a:ext cx="3489249" cy="2703274"/>
-          </a:xfrm>
-          <a:prstGeom prst="rect">
-            <a:avLst/>
-          </a:prstGeom>
-        </p:spPr>
-      </p:pic>
-      <p:pic>
-        <p:nvPicPr>
-          <p:cNvPr id="13" name="Picture 12">
-            <a:extLst>
-              <a:ext uri="{FF2B5EF4-FFF2-40B4-BE49-F238E27FC236}">
-                <a16:creationId xmlns:a16="http://schemas.microsoft.com/office/drawing/2014/main" id="{549B0669-78FF-9EA5-3064-B0FDD99711A0}"/>
-              </a:ext>
-            </a:extLst>
-          </p:cNvPr>
-          <p:cNvPicPr>
-            <a:picLocks noChangeAspect="1"/>
-          </p:cNvPicPr>
-          <p:nvPr/>
-        </p:nvPicPr>
-        <p:blipFill>
-          <a:blip r:embed="rId5">
-            <a:extLst>
-              <a:ext uri="{28A0092B-C50C-407E-A947-70E740481C1C}">
-                <a14:useLocalDpi xmlns:a14="http://schemas.microsoft.com/office/drawing/2010/main" val="0"/>
-              </a:ext>
-            </a:extLst>
-          </a:blip>
-          <a:stretch>
-            <a:fillRect/>
-          </a:stretch>
-        </p:blipFill>
-        <p:spPr>
-          <a:xfrm>
-            <a:off x="526269" y="689601"/>
-            <a:ext cx="2982732" cy="2332074"/>
-          </a:xfrm>
-          <a:prstGeom prst="rect">
-            <a:avLst/>
-          </a:prstGeom>
-        </p:spPr>
-      </p:pic>
-      <p:pic>
-        <p:nvPicPr>
-          <p:cNvPr id="15" name="Picture 14">
-            <a:extLst>
-              <a:ext uri="{FF2B5EF4-FFF2-40B4-BE49-F238E27FC236}">
-                <a16:creationId xmlns:a16="http://schemas.microsoft.com/office/drawing/2014/main" id="{2FEA2E28-5345-2A77-0198-E236E3153A7D}"/>
-              </a:ext>
-            </a:extLst>
-          </p:cNvPr>
-          <p:cNvPicPr>
-            <a:picLocks noChangeAspect="1"/>
-          </p:cNvPicPr>
-          <p:nvPr/>
-        </p:nvPicPr>
-        <p:blipFill>
-          <a:blip r:embed="rId6">
-            <a:extLst>
-              <a:ext uri="{28A0092B-C50C-407E-A947-70E740481C1C}">
-                <a14:useLocalDpi xmlns:a14="http://schemas.microsoft.com/office/drawing/2010/main" val="0"/>
-              </a:ext>
-            </a:extLst>
-          </a:blip>
-          <a:stretch>
-            <a:fillRect/>
-          </a:stretch>
-        </p:blipFill>
-        <p:spPr>
-          <a:xfrm>
-            <a:off x="4734710" y="4157870"/>
-            <a:ext cx="3098898" cy="2509852"/>
-          </a:xfrm>
-          <a:prstGeom prst="rect">
-            <a:avLst/>
-          </a:prstGeom>
-        </p:spPr>
-      </p:pic>
-      <p:sp>
-        <p:nvSpPr>
-          <p:cNvPr id="16" name="TextBox 15">
-            <a:extLst>
-              <a:ext uri="{FF2B5EF4-FFF2-40B4-BE49-F238E27FC236}">
-                <a16:creationId xmlns:a16="http://schemas.microsoft.com/office/drawing/2014/main" id="{33191E0A-E042-644A-5187-A07EFF82A98C}"/>
-              </a:ext>
-            </a:extLst>
-          </p:cNvPr>
-          <p:cNvSpPr txBox="1"/>
-          <p:nvPr/>
-        </p:nvSpPr>
-        <p:spPr>
-          <a:xfrm>
-            <a:off x="1714814" y="1670972"/>
-            <a:ext cx="468398" cy="369332"/>
-          </a:xfrm>
-          <a:prstGeom prst="rect">
-            <a:avLst/>
-          </a:prstGeom>
-          <a:noFill/>
-        </p:spPr>
-        <p:txBody>
-          <a:bodyPr wrap="none" rtlCol="0">
-            <a:spAutoFit/>
-          </a:bodyPr>
-          <a:lstStyle/>
-          <a:p>
-            <a:r>
-              <a:rPr lang="en-GB" dirty="0" err="1"/>
-              <a:t>cst</a:t>
-            </a:r>
-            <a:endParaRPr lang="en-GB" dirty="0"/>
-          </a:p>
-        </p:txBody>
-      </p:sp>
-      <p:sp>
-        <p:nvSpPr>
-          <p:cNvPr id="18" name="Oval 17">
-            <a:extLst>
-              <a:ext uri="{FF2B5EF4-FFF2-40B4-BE49-F238E27FC236}">
-                <a16:creationId xmlns:a16="http://schemas.microsoft.com/office/drawing/2014/main" id="{ADF8152E-A931-6C69-141A-C971737B4FE7}"/>
-              </a:ext>
-            </a:extLst>
-          </p:cNvPr>
-          <p:cNvSpPr/>
-          <p:nvPr/>
-        </p:nvSpPr>
-        <p:spPr>
-          <a:xfrm>
-            <a:off x="4896678" y="1748085"/>
-            <a:ext cx="2936930" cy="633150"/>
-          </a:xfrm>
-          <a:prstGeom prst="ellipse">
-            <a:avLst/>
-          </a:prstGeom>
-          <a:noFill/>
-          <a:ln>
-            <a:solidFill>
-              <a:srgbClr val="C00000"/>
-            </a:solidFill>
-          </a:ln>
-        </p:spPr>
-        <p:style>
-          <a:lnRef idx="2">
-            <a:schemeClr val="accent1">
-              <a:shade val="15000"/>
-            </a:schemeClr>
-          </a:lnRef>
-          <a:fillRef idx="1">
-            <a:schemeClr val="accent1"/>
-          </a:fillRef>
-          <a:effectRef idx="0">
-            <a:schemeClr val="accent1"/>
-          </a:effectRef>
-          <a:fontRef idx="minor">
-            <a:schemeClr val="lt1"/>
-          </a:fontRef>
-        </p:style>
-        <p:txBody>
-          <a:bodyPr rtlCol="0" anchor="ctr"/>
-          <a:lstStyle/>
-          <a:p>
-            <a:pPr algn="ctr"/>
-            <a:endParaRPr lang="en-GB"/>
-          </a:p>
-        </p:txBody>
-      </p:sp>
-      <p:sp>
-        <p:nvSpPr>
-          <p:cNvPr id="20" name="TextBox 19">
-            <a:extLst>
-              <a:ext uri="{FF2B5EF4-FFF2-40B4-BE49-F238E27FC236}">
-                <a16:creationId xmlns:a16="http://schemas.microsoft.com/office/drawing/2014/main" id="{5FA4F1C1-8384-F354-B90B-6E40C956B428}"/>
-              </a:ext>
-            </a:extLst>
-          </p:cNvPr>
-          <p:cNvSpPr txBox="1"/>
-          <p:nvPr/>
-        </p:nvSpPr>
-        <p:spPr>
-          <a:xfrm>
-            <a:off x="7944678" y="1748085"/>
-            <a:ext cx="961738" cy="584775"/>
-          </a:xfrm>
-          <a:prstGeom prst="rect">
-            <a:avLst/>
-          </a:prstGeom>
-          <a:noFill/>
-        </p:spPr>
-        <p:txBody>
-          <a:bodyPr wrap="none" rtlCol="0">
-            <a:spAutoFit/>
-          </a:bodyPr>
-          <a:lstStyle/>
-          <a:p>
-            <a:r>
-              <a:rPr lang="en-GB" sz="1600" dirty="0">
-                <a:solidFill>
-                  <a:srgbClr val="C00000"/>
-                </a:solidFill>
-              </a:rPr>
-              <a:t>Normal :</a:t>
-            </a:r>
-            <a:br>
-              <a:rPr lang="en-GB" sz="1600" dirty="0">
-                <a:solidFill>
-                  <a:srgbClr val="C00000"/>
-                </a:solidFill>
-              </a:rPr>
-            </a:br>
-            <a:r>
-              <a:rPr lang="en-GB" sz="1600" dirty="0">
-                <a:solidFill>
-                  <a:srgbClr val="C00000"/>
-                </a:solidFill>
-              </a:rPr>
-              <a:t>altitude</a:t>
-            </a:r>
-          </a:p>
-        </p:txBody>
-      </p:sp>
     </p:spTree>
     <p:extLst>
       <p:ext uri="{BB962C8B-B14F-4D97-AF65-F5344CB8AC3E}">
-        <p14:creationId xmlns:p14="http://schemas.microsoft.com/office/powerpoint/2010/main" val="1033694436"/>
-      </p:ext>
-    </p:extLst>
-  </p:cSld>
-  <p:clrMapOvr>
-    <a:masterClrMapping/>
-  </p:clrMapOvr>
-</p:sld>
-</file>
-
-<file path=ppt/slides/slide18.xml><?xml version="1.0" encoding="utf-8"?>
-<p:sld xmlns:a="http://schemas.openxmlformats.org/drawingml/2006/main" xmlns:r="http://schemas.openxmlformats.org/officeDocument/2006/relationships" xmlns:p="http://schemas.openxmlformats.org/presentationml/2006/main">
-  <p:cSld>
-    <p:spTree>
-      <p:nvGrpSpPr>
-        <p:cNvPr id="1" name="">
-          <a:extLst>
-            <a:ext uri="{FF2B5EF4-FFF2-40B4-BE49-F238E27FC236}">
-              <a16:creationId xmlns:a16="http://schemas.microsoft.com/office/drawing/2014/main" id="{9513DE0B-8316-AEC9-1DEA-424396EAADE1}"/>
-            </a:ext>
-          </a:extLst>
-        </p:cNvPr>
-        <p:cNvGrpSpPr/>
-        <p:nvPr/>
-      </p:nvGrpSpPr>
-      <p:grpSpPr>
-        <a:xfrm>
-          <a:off x="0" y="0"/>
-          <a:ext cx="0" cy="0"/>
-          <a:chOff x="0" y="0"/>
-          <a:chExt cx="0" cy="0"/>
-        </a:xfrm>
-      </p:grpSpPr>
-      <p:sp>
-        <p:nvSpPr>
-          <p:cNvPr id="2" name="Title 1">
-            <a:extLst>
-              <a:ext uri="{FF2B5EF4-FFF2-40B4-BE49-F238E27FC236}">
-                <a16:creationId xmlns:a16="http://schemas.microsoft.com/office/drawing/2014/main" id="{ECC397C6-328A-3D46-232F-A2FBFBA9ADB7}"/>
-              </a:ext>
-            </a:extLst>
-          </p:cNvPr>
-          <p:cNvSpPr>
-            <a:spLocks noGrp="1"/>
-          </p:cNvSpPr>
-          <p:nvPr>
-            <p:ph type="title"/>
-          </p:nvPr>
-        </p:nvSpPr>
-        <p:spPr>
-          <a:xfrm>
-            <a:off x="-1" y="1"/>
-            <a:ext cx="8633791" cy="681036"/>
-          </a:xfrm>
-        </p:spPr>
-        <p:txBody>
-          <a:bodyPr/>
-          <a:lstStyle/>
-          <a:p>
-            <a:r>
-              <a:rPr lang="en-GB" dirty="0"/>
-              <a:t>Simulation 2 : Silesia Ring </a:t>
-            </a:r>
-            <a:r>
-              <a:rPr lang="en-GB" dirty="0" err="1"/>
-              <a:t>conduite</a:t>
-            </a:r>
-            <a:r>
-              <a:rPr lang="en-GB" dirty="0"/>
-              <a:t> </a:t>
-            </a:r>
-            <a:r>
-              <a:rPr lang="en-GB" dirty="0" err="1"/>
-              <a:t>optimale</a:t>
-            </a:r>
-            <a:endParaRPr lang="en-GB" dirty="0"/>
-          </a:p>
-        </p:txBody>
-      </p:sp>
-      <p:sp>
-        <p:nvSpPr>
-          <p:cNvPr id="3" name="Date Placeholder 2">
-            <a:extLst>
-              <a:ext uri="{FF2B5EF4-FFF2-40B4-BE49-F238E27FC236}">
-                <a16:creationId xmlns:a16="http://schemas.microsoft.com/office/drawing/2014/main" id="{3BA84B70-5F88-FE42-E250-CA60E80DE730}"/>
-              </a:ext>
-            </a:extLst>
-          </p:cNvPr>
-          <p:cNvSpPr>
-            <a:spLocks noGrp="1"/>
-          </p:cNvSpPr>
-          <p:nvPr>
-            <p:ph type="dt" sz="half" idx="10"/>
-          </p:nvPr>
-        </p:nvSpPr>
-        <p:spPr/>
-        <p:txBody>
-          <a:bodyPr/>
-          <a:lstStyle/>
-          <a:p>
-            <a:fld id="{CA9A9924-1784-4044-A2E4-3606370E1BB6}" type="datetime1">
-              <a:rPr lang="en-GB" smtClean="0"/>
-              <a:t>14/10/2026</a:t>
-            </a:fld>
-            <a:endParaRPr lang="en-GB" dirty="0">
-              <a:latin typeface="Segoe UI Symbol" panose="020B0502040204020203" pitchFamily="34" charset="0"/>
-              <a:ea typeface="Segoe UI Symbol" panose="020B0502040204020203" pitchFamily="34" charset="0"/>
-            </a:endParaRPr>
-          </a:p>
-        </p:txBody>
-      </p:sp>
-      <p:sp>
-        <p:nvSpPr>
-          <p:cNvPr id="4" name="Slide Number Placeholder 3">
-            <a:extLst>
-              <a:ext uri="{FF2B5EF4-FFF2-40B4-BE49-F238E27FC236}">
-                <a16:creationId xmlns:a16="http://schemas.microsoft.com/office/drawing/2014/main" id="{BDDB4654-863A-62BD-EBCF-18C3EB1AF542}"/>
-              </a:ext>
-            </a:extLst>
-          </p:cNvPr>
-          <p:cNvSpPr>
-            <a:spLocks noGrp="1"/>
-          </p:cNvSpPr>
-          <p:nvPr>
-            <p:ph type="sldNum" sz="quarter" idx="4"/>
-          </p:nvPr>
-        </p:nvSpPr>
-        <p:spPr/>
-        <p:txBody>
-          <a:bodyPr/>
-          <a:lstStyle/>
-          <a:p>
-            <a:fld id="{46899FAB-5005-482A-88F2-FE97823A1A33}" type="slidenum">
-              <a:rPr lang="en-GB" smtClean="0"/>
-              <a:pPr/>
-              <a:t>18</a:t>
-            </a:fld>
-            <a:r>
-              <a:rPr lang="en-GB"/>
-              <a:t>/x</a:t>
-            </a:r>
-            <a:endParaRPr lang="en-GB" dirty="0">
-              <a:latin typeface="Segoe UI Symbol" panose="020B0502040204020203" pitchFamily="34" charset="0"/>
-              <a:ea typeface="Segoe UI Symbol" panose="020B0502040204020203" pitchFamily="34" charset="0"/>
-            </a:endParaRPr>
-          </a:p>
-        </p:txBody>
-      </p:sp>
-      <mc:AlternateContent xmlns:mc="http://schemas.openxmlformats.org/markup-compatibility/2006" xmlns:a14="http://schemas.microsoft.com/office/drawing/2010/main">
-        <mc:Choice Requires="a14">
-          <p:sp>
-            <p:nvSpPr>
-              <p:cNvPr id="23" name="TextBox 22">
-                <a:extLst>
-                  <a:ext uri="{FF2B5EF4-FFF2-40B4-BE49-F238E27FC236}">
-                    <a16:creationId xmlns:a16="http://schemas.microsoft.com/office/drawing/2014/main" id="{4CAEB7A3-A6D5-4F03-04E8-EF9693CE8F57}"/>
-                  </a:ext>
-                </a:extLst>
-              </p:cNvPr>
-              <p:cNvSpPr txBox="1"/>
-              <p:nvPr/>
-            </p:nvSpPr>
-            <p:spPr>
-              <a:xfrm>
-                <a:off x="256508" y="2518470"/>
-                <a:ext cx="2835966" cy="646331"/>
-              </a:xfrm>
-              <a:prstGeom prst="rect">
-                <a:avLst/>
-              </a:prstGeom>
-              <a:noFill/>
-            </p:spPr>
-            <p:txBody>
-              <a:bodyPr wrap="square">
-                <a:spAutoFit/>
-              </a:bodyPr>
-              <a:lstStyle/>
-              <a:p>
-                <a:pPr marL="285750" indent="-285750">
-                  <a:buFont typeface="Arial" panose="020B0604020202020204" pitchFamily="34" charset="0"/>
-                  <a:buChar char="•"/>
-                </a:pPr>
-                <a:r>
-                  <a:rPr lang="fr-BE" sz="1200" dirty="0"/>
-                  <a:t>Discrétisation :  </a:t>
-                </a:r>
-                <a14:m>
-                  <m:oMath xmlns:m="http://schemas.openxmlformats.org/officeDocument/2006/math">
-                    <m:r>
-                      <m:rPr>
-                        <m:sty m:val="p"/>
-                      </m:rPr>
-                      <a:rPr lang="fr-BE" sz="1200" i="1" dirty="0" smtClean="0">
-                        <a:latin typeface="Cambria Math" panose="02040503050406030204" pitchFamily="18" charset="0"/>
-                      </a:rPr>
-                      <m:t>Δ</m:t>
-                    </m:r>
-                    <m:r>
-                      <a:rPr lang="fr-BE" sz="1200" i="1" dirty="0" smtClean="0">
-                        <a:latin typeface="Cambria Math" panose="02040503050406030204" pitchFamily="18" charset="0"/>
-                      </a:rPr>
-                      <m:t>𝑥</m:t>
-                    </m:r>
-                    <m:r>
-                      <a:rPr lang="fr-BE" sz="1200" dirty="0">
-                        <a:latin typeface="Cambria Math" panose="02040503050406030204" pitchFamily="18" charset="0"/>
-                      </a:rPr>
-                      <m:t> = </m:t>
-                    </m:r>
-                    <m:r>
-                      <a:rPr lang="fr-BE" sz="1200" b="0" i="1" dirty="0" smtClean="0">
-                        <a:latin typeface="Cambria Math" panose="02040503050406030204" pitchFamily="18" charset="0"/>
-                      </a:rPr>
-                      <m:t>20</m:t>
-                    </m:r>
-                    <m:r>
-                      <m:rPr>
-                        <m:sty m:val="p"/>
-                      </m:rPr>
-                      <a:rPr lang="fr-BE" sz="1200" b="0" i="1" dirty="0" smtClean="0">
-                        <a:latin typeface="Cambria Math" panose="02040503050406030204" pitchFamily="18" charset="0"/>
-                      </a:rPr>
-                      <m:t>m</m:t>
-                    </m:r>
-                  </m:oMath>
-                </a14:m>
-                <a:r>
-                  <a:rPr lang="fr-BE" sz="1200" dirty="0"/>
-                  <a:t> cst</a:t>
-                </a:r>
-              </a:p>
-              <a:p>
-                <a:pPr marL="285750" indent="-285750">
-                  <a:buFont typeface="Arial" panose="020B0604020202020204" pitchFamily="34" charset="0"/>
-                  <a:buChar char="•"/>
-                </a:pPr>
-                <a:r>
-                  <a:rPr lang="fr-BE" sz="1200" dirty="0"/>
-                  <a:t>Pas de pénalisation</a:t>
-                </a:r>
-              </a:p>
-              <a:p>
-                <a:pPr marL="285750" indent="-285750">
-                  <a:buFont typeface="Arial" panose="020B0604020202020204" pitchFamily="34" charset="0"/>
-                  <a:buChar char="•"/>
-                </a:pPr>
-                <a:r>
-                  <a:rPr lang="fr-BE" sz="1200" noProof="0" dirty="0" err="1"/>
-                  <a:t>Altimé</a:t>
-                </a:r>
-                <a:r>
-                  <a:rPr lang="fr-BE" sz="1200" dirty="0"/>
-                  <a:t>trie interpolée du </a:t>
-                </a:r>
-                <a:r>
-                  <a:rPr lang="fr-BE" sz="1200" dirty="0" err="1"/>
-                  <a:t>silesa</a:t>
-                </a:r>
-                <a:r>
-                  <a:rPr lang="fr-BE" sz="1200" dirty="0"/>
-                  <a:t> ring</a:t>
-                </a:r>
-                <a:endParaRPr lang="fr-BE" sz="1200" noProof="0" dirty="0"/>
-              </a:p>
-            </p:txBody>
-          </p:sp>
-        </mc:Choice>
-        <mc:Fallback xmlns="">
-          <p:sp>
-            <p:nvSpPr>
-              <p:cNvPr id="23" name="TextBox 22">
-                <a:extLst>
-                  <a:ext uri="{FF2B5EF4-FFF2-40B4-BE49-F238E27FC236}">
-                    <a16:creationId xmlns:a16="http://schemas.microsoft.com/office/drawing/2014/main" id="{4CAEB7A3-A6D5-4F03-04E8-EF9693CE8F57}"/>
-                  </a:ext>
-                </a:extLst>
-              </p:cNvPr>
-              <p:cNvSpPr txBox="1">
-                <a:spLocks noRot="1" noChangeAspect="1" noMove="1" noResize="1" noEditPoints="1" noAdjustHandles="1" noChangeArrowheads="1" noChangeShapeType="1" noTextEdit="1"/>
-              </p:cNvSpPr>
-              <p:nvPr/>
-            </p:nvSpPr>
-            <p:spPr>
-              <a:xfrm>
-                <a:off x="256508" y="2518470"/>
-                <a:ext cx="2835966" cy="646331"/>
-              </a:xfrm>
-              <a:prstGeom prst="rect">
-                <a:avLst/>
-              </a:prstGeom>
-              <a:blipFill>
-                <a:blip r:embed="rId2"/>
-                <a:stretch>
-                  <a:fillRect t="-943" b="-5660"/>
-                </a:stretch>
-              </a:blipFill>
-            </p:spPr>
-            <p:txBody>
-              <a:bodyPr/>
-              <a:lstStyle/>
-              <a:p>
-                <a:r>
-                  <a:rPr lang="en-GB">
-                    <a:noFill/>
-                  </a:rPr>
-                  <a:t> </a:t>
-                </a:r>
-              </a:p>
-            </p:txBody>
-          </p:sp>
-        </mc:Fallback>
-      </mc:AlternateContent>
-      <p:pic>
-        <p:nvPicPr>
-          <p:cNvPr id="13" name="Picture 12">
-            <a:extLst>
-              <a:ext uri="{FF2B5EF4-FFF2-40B4-BE49-F238E27FC236}">
-                <a16:creationId xmlns:a16="http://schemas.microsoft.com/office/drawing/2014/main" id="{1E072DB5-E8E0-C07D-D023-7C2D6D6BFF24}"/>
-              </a:ext>
-            </a:extLst>
-          </p:cNvPr>
-          <p:cNvPicPr>
-            <a:picLocks noChangeAspect="1"/>
-          </p:cNvPicPr>
-          <p:nvPr/>
-        </p:nvPicPr>
-        <p:blipFill>
-          <a:blip r:embed="rId3">
-            <a:extLst>
-              <a:ext uri="{28A0092B-C50C-407E-A947-70E740481C1C}">
-                <a14:useLocalDpi xmlns:a14="http://schemas.microsoft.com/office/drawing/2010/main" val="0"/>
-              </a:ext>
-            </a:extLst>
-          </a:blip>
-          <a:stretch>
-            <a:fillRect/>
-          </a:stretch>
-        </p:blipFill>
-        <p:spPr>
-          <a:xfrm>
-            <a:off x="526269" y="689601"/>
-            <a:ext cx="2296444" cy="1795494"/>
-          </a:xfrm>
-          <a:prstGeom prst="rect">
-            <a:avLst/>
-          </a:prstGeom>
-        </p:spPr>
-      </p:pic>
-      <p:sp>
-        <p:nvSpPr>
-          <p:cNvPr id="16" name="TextBox 15">
-            <a:extLst>
-              <a:ext uri="{FF2B5EF4-FFF2-40B4-BE49-F238E27FC236}">
-                <a16:creationId xmlns:a16="http://schemas.microsoft.com/office/drawing/2014/main" id="{4A553E17-C33C-7254-DB19-0428EF7F8EE3}"/>
-              </a:ext>
-            </a:extLst>
-          </p:cNvPr>
-          <p:cNvSpPr txBox="1"/>
-          <p:nvPr/>
-        </p:nvSpPr>
-        <p:spPr>
-          <a:xfrm>
-            <a:off x="1377826" y="1402682"/>
-            <a:ext cx="571187" cy="369332"/>
-          </a:xfrm>
-          <a:prstGeom prst="rect">
-            <a:avLst/>
-          </a:prstGeom>
-          <a:noFill/>
-        </p:spPr>
-        <p:txBody>
-          <a:bodyPr wrap="square" rtlCol="0">
-            <a:spAutoFit/>
-          </a:bodyPr>
-          <a:lstStyle/>
-          <a:p>
-            <a:r>
-              <a:rPr lang="en-GB" dirty="0" err="1"/>
-              <a:t>cst</a:t>
-            </a:r>
-            <a:endParaRPr lang="en-GB" dirty="0"/>
-          </a:p>
-        </p:txBody>
-      </p:sp>
-      <p:pic>
-        <p:nvPicPr>
-          <p:cNvPr id="6" name="Picture 5">
-            <a:extLst>
-              <a:ext uri="{FF2B5EF4-FFF2-40B4-BE49-F238E27FC236}">
-                <a16:creationId xmlns:a16="http://schemas.microsoft.com/office/drawing/2014/main" id="{BF08F2BA-1B46-A56D-437F-203FDD6B98E5}"/>
-              </a:ext>
-            </a:extLst>
-          </p:cNvPr>
-          <p:cNvPicPr>
-            <a:picLocks noChangeAspect="1"/>
-          </p:cNvPicPr>
-          <p:nvPr/>
-        </p:nvPicPr>
-        <p:blipFill>
-          <a:blip r:embed="rId4">
-            <a:extLst>
-              <a:ext uri="{28A0092B-C50C-407E-A947-70E740481C1C}">
-                <a14:useLocalDpi xmlns:a14="http://schemas.microsoft.com/office/drawing/2010/main" val="0"/>
-              </a:ext>
-            </a:extLst>
-          </a:blip>
-          <a:stretch>
-            <a:fillRect/>
-          </a:stretch>
-        </p:blipFill>
-        <p:spPr>
-          <a:xfrm>
-            <a:off x="5108757" y="715410"/>
-            <a:ext cx="2808428" cy="1895268"/>
-          </a:xfrm>
-          <a:prstGeom prst="rect">
-            <a:avLst/>
-          </a:prstGeom>
-        </p:spPr>
-      </p:pic>
-      <p:pic>
-        <p:nvPicPr>
-          <p:cNvPr id="8" name="Picture 7">
-            <a:extLst>
-              <a:ext uri="{FF2B5EF4-FFF2-40B4-BE49-F238E27FC236}">
-                <a16:creationId xmlns:a16="http://schemas.microsoft.com/office/drawing/2014/main" id="{EAE26D5E-D017-6DF8-9466-4E3B419948B4}"/>
-              </a:ext>
-            </a:extLst>
-          </p:cNvPr>
-          <p:cNvPicPr>
-            <a:picLocks noChangeAspect="1"/>
-          </p:cNvPicPr>
-          <p:nvPr/>
-        </p:nvPicPr>
-        <p:blipFill>
-          <a:blip r:embed="rId5">
-            <a:extLst>
-              <a:ext uri="{28A0092B-C50C-407E-A947-70E740481C1C}">
-                <a14:useLocalDpi xmlns:a14="http://schemas.microsoft.com/office/drawing/2010/main" val="0"/>
-              </a:ext>
-            </a:extLst>
-          </a:blip>
-          <a:stretch>
-            <a:fillRect/>
-          </a:stretch>
-        </p:blipFill>
-        <p:spPr>
-          <a:xfrm>
-            <a:off x="5149934" y="2610678"/>
-            <a:ext cx="2767251" cy="2137764"/>
-          </a:xfrm>
-          <a:prstGeom prst="rect">
-            <a:avLst/>
-          </a:prstGeom>
-        </p:spPr>
-      </p:pic>
-      <p:pic>
-        <p:nvPicPr>
-          <p:cNvPr id="12" name="Picture 11">
-            <a:extLst>
-              <a:ext uri="{FF2B5EF4-FFF2-40B4-BE49-F238E27FC236}">
-                <a16:creationId xmlns:a16="http://schemas.microsoft.com/office/drawing/2014/main" id="{86C5F7A5-E6D8-6718-A92F-2F6D60528A18}"/>
-              </a:ext>
-            </a:extLst>
-          </p:cNvPr>
-          <p:cNvPicPr>
-            <a:picLocks noChangeAspect="1"/>
-          </p:cNvPicPr>
-          <p:nvPr/>
-        </p:nvPicPr>
-        <p:blipFill>
-          <a:blip r:embed="rId6">
-            <a:extLst>
-              <a:ext uri="{28A0092B-C50C-407E-A947-70E740481C1C}">
-                <a14:useLocalDpi xmlns:a14="http://schemas.microsoft.com/office/drawing/2010/main" val="0"/>
-              </a:ext>
-            </a:extLst>
-          </a:blip>
-          <a:stretch>
-            <a:fillRect/>
-          </a:stretch>
-        </p:blipFill>
-        <p:spPr>
-          <a:xfrm>
-            <a:off x="5233619" y="4714910"/>
-            <a:ext cx="2683566" cy="1947393"/>
-          </a:xfrm>
-          <a:prstGeom prst="rect">
-            <a:avLst/>
-          </a:prstGeom>
-        </p:spPr>
-      </p:pic>
-      <p:sp>
-        <p:nvSpPr>
-          <p:cNvPr id="17" name="Rectangle 16">
-            <a:extLst>
-              <a:ext uri="{FF2B5EF4-FFF2-40B4-BE49-F238E27FC236}">
-                <a16:creationId xmlns:a16="http://schemas.microsoft.com/office/drawing/2014/main" id="{2637BC6E-E259-C5B1-2C42-B9C99933D0A0}"/>
-              </a:ext>
-            </a:extLst>
-          </p:cNvPr>
-          <p:cNvSpPr/>
-          <p:nvPr/>
-        </p:nvSpPr>
-        <p:spPr>
-          <a:xfrm>
-            <a:off x="6254115" y="849630"/>
-            <a:ext cx="765810" cy="5513715"/>
-          </a:xfrm>
-          <a:prstGeom prst="rect">
-            <a:avLst/>
-          </a:prstGeom>
-          <a:noFill/>
-          <a:ln w="28575">
-            <a:solidFill>
-              <a:srgbClr val="C00000"/>
-            </a:solidFill>
-          </a:ln>
-        </p:spPr>
-        <p:style>
-          <a:lnRef idx="2">
-            <a:schemeClr val="accent1">
-              <a:shade val="15000"/>
-            </a:schemeClr>
-          </a:lnRef>
-          <a:fillRef idx="1">
-            <a:schemeClr val="accent1"/>
-          </a:fillRef>
-          <a:effectRef idx="0">
-            <a:schemeClr val="accent1"/>
-          </a:effectRef>
-          <a:fontRef idx="minor">
-            <a:schemeClr val="lt1"/>
-          </a:fontRef>
-        </p:style>
-        <p:txBody>
-          <a:bodyPr rtlCol="0" anchor="ctr"/>
-          <a:lstStyle/>
-          <a:p>
-            <a:pPr algn="ctr"/>
-            <a:endParaRPr lang="en-GB"/>
-          </a:p>
-        </p:txBody>
-      </p:sp>
-      <p:pic>
-        <p:nvPicPr>
-          <p:cNvPr id="7" name="Picture 6">
-            <a:extLst>
-              <a:ext uri="{FF2B5EF4-FFF2-40B4-BE49-F238E27FC236}">
-                <a16:creationId xmlns:a16="http://schemas.microsoft.com/office/drawing/2014/main" id="{85FD8A5B-7B6A-91D2-7A1F-2AFE6A3C5FD5}"/>
-              </a:ext>
-            </a:extLst>
-          </p:cNvPr>
-          <p:cNvPicPr>
-            <a:picLocks noChangeAspect="1"/>
-          </p:cNvPicPr>
-          <p:nvPr/>
-        </p:nvPicPr>
-        <p:blipFill>
-          <a:blip r:embed="rId7"/>
-          <a:stretch>
-            <a:fillRect/>
-          </a:stretch>
-        </p:blipFill>
-        <p:spPr>
-          <a:xfrm>
-            <a:off x="131355" y="3679560"/>
-            <a:ext cx="3300155" cy="1632225"/>
-          </a:xfrm>
-          <a:prstGeom prst="rect">
-            <a:avLst/>
-          </a:prstGeom>
-        </p:spPr>
-      </p:pic>
-      <p:sp>
-        <p:nvSpPr>
-          <p:cNvPr id="9" name="Rectangle 8">
-            <a:extLst>
-              <a:ext uri="{FF2B5EF4-FFF2-40B4-BE49-F238E27FC236}">
-                <a16:creationId xmlns:a16="http://schemas.microsoft.com/office/drawing/2014/main" id="{84D3EB68-038A-6676-0A04-D1BEF8D0F034}"/>
-              </a:ext>
-            </a:extLst>
-          </p:cNvPr>
-          <p:cNvSpPr/>
-          <p:nvPr/>
-        </p:nvSpPr>
-        <p:spPr>
-          <a:xfrm>
-            <a:off x="2498034" y="4582388"/>
-            <a:ext cx="45719" cy="265043"/>
-          </a:xfrm>
-          <a:prstGeom prst="rect">
-            <a:avLst/>
-          </a:prstGeom>
-          <a:solidFill>
-            <a:schemeClr val="tx1"/>
-          </a:solidFill>
-          <a:ln>
-            <a:solidFill>
-              <a:schemeClr val="tx1"/>
-            </a:solidFill>
-          </a:ln>
-        </p:spPr>
-        <p:style>
-          <a:lnRef idx="2">
-            <a:schemeClr val="accent1">
-              <a:shade val="15000"/>
-            </a:schemeClr>
-          </a:lnRef>
-          <a:fillRef idx="1">
-            <a:schemeClr val="accent1"/>
-          </a:fillRef>
-          <a:effectRef idx="0">
-            <a:schemeClr val="accent1"/>
-          </a:effectRef>
-          <a:fontRef idx="minor">
-            <a:schemeClr val="lt1"/>
-          </a:fontRef>
-        </p:style>
-        <p:txBody>
-          <a:bodyPr rtlCol="0" anchor="ctr"/>
-          <a:lstStyle/>
-          <a:p>
-            <a:pPr algn="ctr"/>
-            <a:endParaRPr lang="en-GB"/>
-          </a:p>
-        </p:txBody>
-      </p:sp>
-      <p:sp>
-        <p:nvSpPr>
-          <p:cNvPr id="10" name="TextBox 9">
-            <a:extLst>
-              <a:ext uri="{FF2B5EF4-FFF2-40B4-BE49-F238E27FC236}">
-                <a16:creationId xmlns:a16="http://schemas.microsoft.com/office/drawing/2014/main" id="{7053529F-A819-BF68-02BA-E1DD0BBCE822}"/>
-              </a:ext>
-            </a:extLst>
-          </p:cNvPr>
-          <p:cNvSpPr txBox="1"/>
-          <p:nvPr/>
-        </p:nvSpPr>
-        <p:spPr>
-          <a:xfrm>
-            <a:off x="1066392" y="5455318"/>
-            <a:ext cx="2909001" cy="369332"/>
-          </a:xfrm>
-          <a:prstGeom prst="rect">
-            <a:avLst/>
-          </a:prstGeom>
-          <a:noFill/>
-        </p:spPr>
-        <p:txBody>
-          <a:bodyPr wrap="none" rtlCol="0">
-            <a:spAutoFit/>
-          </a:bodyPr>
-          <a:lstStyle/>
-          <a:p>
-            <a:r>
-              <a:rPr lang="en-GB" dirty="0"/>
-              <a:t>Start/Finish (dans </a:t>
-            </a:r>
-            <a:r>
-              <a:rPr lang="en-GB" dirty="0" err="1"/>
-              <a:t>mes</a:t>
-            </a:r>
-            <a:r>
-              <a:rPr lang="en-GB" dirty="0"/>
-              <a:t> sim)</a:t>
-            </a:r>
-          </a:p>
-        </p:txBody>
-      </p:sp>
-      <p:cxnSp>
-        <p:nvCxnSpPr>
-          <p:cNvPr id="14" name="Straight Arrow Connector 13">
-            <a:extLst>
-              <a:ext uri="{FF2B5EF4-FFF2-40B4-BE49-F238E27FC236}">
-                <a16:creationId xmlns:a16="http://schemas.microsoft.com/office/drawing/2014/main" id="{FFCF33BF-96E7-94C7-E207-CBCC9FE9CBEF}"/>
-              </a:ext>
-            </a:extLst>
-          </p:cNvPr>
-          <p:cNvCxnSpPr>
-            <a:stCxn id="10" idx="0"/>
-          </p:cNvCxnSpPr>
-          <p:nvPr/>
-        </p:nvCxnSpPr>
-        <p:spPr>
-          <a:xfrm flipV="1">
-            <a:off x="2520893" y="4930140"/>
-            <a:ext cx="22860" cy="525178"/>
-          </a:xfrm>
-          <a:prstGeom prst="straightConnector1">
-            <a:avLst/>
-          </a:prstGeom>
-          <a:ln>
-            <a:tailEnd type="triangle"/>
-          </a:ln>
-        </p:spPr>
-        <p:style>
-          <a:lnRef idx="2">
-            <a:schemeClr val="accent1"/>
-          </a:lnRef>
-          <a:fillRef idx="0">
-            <a:schemeClr val="accent1"/>
-          </a:fillRef>
-          <a:effectRef idx="1">
-            <a:schemeClr val="accent1"/>
-          </a:effectRef>
-          <a:fontRef idx="minor">
-            <a:schemeClr val="tx1"/>
-          </a:fontRef>
-        </p:style>
-      </p:cxnSp>
-    </p:spTree>
-    <p:extLst>
-      <p:ext uri="{BB962C8B-B14F-4D97-AF65-F5344CB8AC3E}">
-        <p14:creationId xmlns:p14="http://schemas.microsoft.com/office/powerpoint/2010/main" val="535517151"/>
-      </p:ext>
-    </p:extLst>
-  </p:cSld>
-  <p:clrMapOvr>
-    <a:masterClrMapping/>
-  </p:clrMapOvr>
-</p:sld>
-</file>
-
-<file path=ppt/slides/slide19.xml><?xml version="1.0" encoding="utf-8"?>
-<p:sld xmlns:a="http://schemas.openxmlformats.org/drawingml/2006/main" xmlns:r="http://schemas.openxmlformats.org/officeDocument/2006/relationships" xmlns:p="http://schemas.openxmlformats.org/presentationml/2006/main">
-  <p:cSld>
-    <p:spTree>
-      <p:nvGrpSpPr>
-        <p:cNvPr id="1" name="">
-          <a:extLst>
-            <a:ext uri="{FF2B5EF4-FFF2-40B4-BE49-F238E27FC236}">
-              <a16:creationId xmlns:a16="http://schemas.microsoft.com/office/drawing/2014/main" id="{229F504E-1C06-21FB-C268-1A4EB340D3B0}"/>
-            </a:ext>
-          </a:extLst>
-        </p:cNvPr>
-        <p:cNvGrpSpPr/>
-        <p:nvPr/>
-      </p:nvGrpSpPr>
-      <p:grpSpPr>
-        <a:xfrm>
-          <a:off x="0" y="0"/>
-          <a:ext cx="0" cy="0"/>
-          <a:chOff x="0" y="0"/>
-          <a:chExt cx="0" cy="0"/>
-        </a:xfrm>
-      </p:grpSpPr>
-      <p:sp>
-        <p:nvSpPr>
-          <p:cNvPr id="2" name="Title 1">
-            <a:extLst>
-              <a:ext uri="{FF2B5EF4-FFF2-40B4-BE49-F238E27FC236}">
-                <a16:creationId xmlns:a16="http://schemas.microsoft.com/office/drawing/2014/main" id="{DE40D544-31D3-FC4F-CC62-D4D86AFC2518}"/>
-              </a:ext>
-            </a:extLst>
-          </p:cNvPr>
-          <p:cNvSpPr>
-            <a:spLocks noGrp="1"/>
-          </p:cNvSpPr>
-          <p:nvPr>
-            <p:ph type="title"/>
-          </p:nvPr>
-        </p:nvSpPr>
-        <p:spPr/>
-        <p:txBody>
-          <a:bodyPr/>
-          <a:lstStyle/>
-          <a:p>
-            <a:r>
-              <a:rPr lang="fr-BE" noProof="0" dirty="0" err="1"/>
-              <a:t>Outline</a:t>
-            </a:r>
-            <a:endParaRPr lang="fr-BE" noProof="0" dirty="0"/>
-          </a:p>
-        </p:txBody>
-      </p:sp>
-      <p:sp>
-        <p:nvSpPr>
-          <p:cNvPr id="3" name="Date Placeholder 2">
-            <a:extLst>
-              <a:ext uri="{FF2B5EF4-FFF2-40B4-BE49-F238E27FC236}">
-                <a16:creationId xmlns:a16="http://schemas.microsoft.com/office/drawing/2014/main" id="{4D8AE045-A4F1-F12C-DBC3-C48897E1A5F6}"/>
-              </a:ext>
-            </a:extLst>
-          </p:cNvPr>
-          <p:cNvSpPr>
-            <a:spLocks noGrp="1"/>
-          </p:cNvSpPr>
-          <p:nvPr>
-            <p:ph type="dt" sz="half" idx="10"/>
-          </p:nvPr>
-        </p:nvSpPr>
-        <p:spPr/>
-        <p:txBody>
-          <a:bodyPr/>
-          <a:lstStyle/>
-          <a:p>
-            <a:fld id="{CA9A9924-1784-4044-A2E4-3606370E1BB6}" type="datetime1">
-              <a:rPr lang="fr-BE" noProof="0" smtClean="0"/>
-              <a:t>14-10-26</a:t>
-            </a:fld>
-            <a:endParaRPr lang="fr-BE" noProof="0" dirty="0">
-              <a:latin typeface="Segoe UI Symbol" panose="020B0502040204020203" pitchFamily="34" charset="0"/>
-              <a:ea typeface="Segoe UI Symbol" panose="020B0502040204020203" pitchFamily="34" charset="0"/>
-            </a:endParaRPr>
-          </a:p>
-        </p:txBody>
-      </p:sp>
-      <p:sp>
-        <p:nvSpPr>
-          <p:cNvPr id="4" name="Slide Number Placeholder 3">
-            <a:extLst>
-              <a:ext uri="{FF2B5EF4-FFF2-40B4-BE49-F238E27FC236}">
-                <a16:creationId xmlns:a16="http://schemas.microsoft.com/office/drawing/2014/main" id="{39356ED3-07D9-1336-9FF3-FC1CCF2EB7DB}"/>
-              </a:ext>
-            </a:extLst>
-          </p:cNvPr>
-          <p:cNvSpPr>
-            <a:spLocks noGrp="1"/>
-          </p:cNvSpPr>
-          <p:nvPr>
-            <p:ph type="sldNum" sz="quarter" idx="4"/>
-          </p:nvPr>
-        </p:nvSpPr>
-        <p:spPr/>
-        <p:txBody>
-          <a:bodyPr/>
-          <a:lstStyle/>
-          <a:p>
-            <a:fld id="{46899FAB-5005-482A-88F2-FE97823A1A33}" type="slidenum">
-              <a:rPr lang="fr-BE" noProof="0" smtClean="0"/>
-              <a:pPr/>
-              <a:t>19</a:t>
-            </a:fld>
-            <a:r>
-              <a:rPr lang="fr-BE" noProof="0" dirty="0"/>
-              <a:t>/x</a:t>
-            </a:r>
-            <a:endParaRPr lang="fr-BE" noProof="0" dirty="0">
-              <a:latin typeface="Segoe UI Symbol" panose="020B0502040204020203" pitchFamily="34" charset="0"/>
-              <a:ea typeface="Segoe UI Symbol" panose="020B0502040204020203" pitchFamily="34" charset="0"/>
-            </a:endParaRPr>
-          </a:p>
-        </p:txBody>
-      </p:sp>
-      <p:sp>
-        <p:nvSpPr>
-          <p:cNvPr id="5" name="Content Placeholder 4">
-            <a:extLst>
-              <a:ext uri="{FF2B5EF4-FFF2-40B4-BE49-F238E27FC236}">
-                <a16:creationId xmlns:a16="http://schemas.microsoft.com/office/drawing/2014/main" id="{AEEE4E75-E193-F2D0-D9DB-25FFAFFF8747}"/>
-              </a:ext>
-            </a:extLst>
-          </p:cNvPr>
-          <p:cNvSpPr>
-            <a:spLocks noGrp="1"/>
-          </p:cNvSpPr>
-          <p:nvPr>
-            <p:ph idx="1"/>
-          </p:nvPr>
-        </p:nvSpPr>
-        <p:spPr>
-          <a:xfrm>
-            <a:off x="584809" y="1851545"/>
-            <a:ext cx="7552026" cy="3816482"/>
-          </a:xfrm>
-        </p:spPr>
-        <p:txBody>
-          <a:bodyPr>
-            <a:normAutofit/>
-          </a:bodyPr>
-          <a:lstStyle/>
-          <a:p>
-            <a:r>
-              <a:rPr lang="fr-BE" sz="2800" noProof="0" dirty="0">
-                <a:solidFill>
-                  <a:schemeClr val="bg2">
-                    <a:lumMod val="75000"/>
-                  </a:schemeClr>
-                </a:solidFill>
-              </a:rPr>
-              <a:t>Pourquoi ?</a:t>
-            </a:r>
-          </a:p>
-          <a:p>
-            <a:r>
-              <a:rPr lang="en-GB" sz="2800" dirty="0">
-                <a:solidFill>
-                  <a:schemeClr val="bg2">
-                    <a:lumMod val="75000"/>
-                  </a:schemeClr>
-                </a:solidFill>
-              </a:rPr>
-              <a:t>How it works ?</a:t>
-            </a:r>
-            <a:r>
-              <a:rPr lang="en-GB" sz="2800" dirty="0" err="1">
-                <a:solidFill>
-                  <a:schemeClr val="bg2">
-                    <a:lumMod val="75000"/>
-                  </a:schemeClr>
-                </a:solidFill>
-              </a:rPr>
-              <a:t>Calculateur</a:t>
-            </a:r>
-            <a:r>
-              <a:rPr lang="en-GB" sz="2800" dirty="0">
-                <a:solidFill>
-                  <a:schemeClr val="bg2">
-                    <a:lumMod val="75000"/>
-                  </a:schemeClr>
-                </a:solidFill>
-              </a:rPr>
-              <a:t> de consommation </a:t>
-            </a:r>
-          </a:p>
-          <a:p>
-            <a:r>
-              <a:rPr lang="fr-BE" sz="2800" noProof="0" dirty="0">
-                <a:solidFill>
-                  <a:schemeClr val="bg2">
-                    <a:lumMod val="75000"/>
-                  </a:schemeClr>
-                </a:solidFill>
-              </a:rPr>
-              <a:t>Résultats </a:t>
-            </a:r>
-            <a:r>
-              <a:rPr lang="fr-BE" sz="2800" dirty="0">
-                <a:solidFill>
-                  <a:schemeClr val="bg2">
-                    <a:lumMod val="75000"/>
-                  </a:schemeClr>
-                </a:solidFill>
-              </a:rPr>
-              <a:t>rendement mot. non cst</a:t>
-            </a:r>
-            <a:r>
-              <a:rPr lang="fr-BE" sz="2800" noProof="0" dirty="0">
-                <a:solidFill>
-                  <a:schemeClr val="bg2">
-                    <a:lumMod val="75000"/>
-                  </a:schemeClr>
-                </a:solidFill>
-              </a:rPr>
-              <a:t> (07/10/26) </a:t>
-            </a:r>
-          </a:p>
-          <a:p>
-            <a:r>
-              <a:rPr lang="fr-BE" sz="2800" dirty="0">
-                <a:solidFill>
-                  <a:schemeClr val="bg2">
-                    <a:lumMod val="75000"/>
-                  </a:schemeClr>
-                </a:solidFill>
-              </a:rPr>
-              <a:t>Résultats rendement mot. cst (07/10/26) </a:t>
-            </a:r>
-            <a:endParaRPr lang="fr-BE" sz="2800" noProof="0" dirty="0">
-              <a:solidFill>
-                <a:schemeClr val="bg2">
-                  <a:lumMod val="75000"/>
-                </a:schemeClr>
-              </a:solidFill>
-            </a:endParaRPr>
-          </a:p>
-          <a:p>
-            <a:r>
-              <a:rPr lang="fr-BE" sz="2800" noProof="0" dirty="0"/>
-              <a:t>Calcul de </a:t>
-            </a:r>
-            <a:r>
-              <a:rPr lang="fr-BE" sz="2800" noProof="0" dirty="0" err="1"/>
-              <a:t>sensitivities</a:t>
-            </a:r>
-            <a:endParaRPr lang="fr-BE" sz="2800" noProof="0" dirty="0"/>
-          </a:p>
-          <a:p>
-            <a:r>
-              <a:rPr lang="fr-BE" sz="2800" noProof="0" dirty="0">
-                <a:solidFill>
-                  <a:schemeClr val="bg2">
-                    <a:lumMod val="75000"/>
-                  </a:schemeClr>
-                </a:solidFill>
-              </a:rPr>
-              <a:t>Mass vs </a:t>
-            </a:r>
-            <a:r>
-              <a:rPr lang="fr-BE" sz="2800" noProof="0" dirty="0" err="1">
-                <a:solidFill>
-                  <a:schemeClr val="bg2">
-                    <a:lumMod val="75000"/>
-                  </a:schemeClr>
-                </a:solidFill>
-              </a:rPr>
-              <a:t>SCx</a:t>
-            </a:r>
-            <a:r>
-              <a:rPr lang="fr-BE" sz="2800" noProof="0" dirty="0">
-                <a:solidFill>
-                  <a:schemeClr val="bg2">
-                    <a:lumMod val="75000"/>
-                  </a:schemeClr>
-                </a:solidFill>
-              </a:rPr>
-              <a:t> </a:t>
-            </a:r>
-            <a:r>
-              <a:rPr lang="fr-BE" sz="2800" noProof="0" dirty="0" err="1">
-                <a:solidFill>
-                  <a:schemeClr val="bg2">
-                    <a:lumMod val="75000"/>
-                  </a:schemeClr>
-                </a:solidFill>
-              </a:rPr>
-              <a:t>tradeoff</a:t>
-            </a:r>
-            <a:r>
-              <a:rPr lang="fr-BE" sz="2800" noProof="0" dirty="0">
-                <a:solidFill>
-                  <a:schemeClr val="bg2">
-                    <a:lumMod val="75000"/>
-                  </a:schemeClr>
-                </a:solidFill>
-              </a:rPr>
-              <a:t> </a:t>
-            </a:r>
-          </a:p>
-          <a:p>
-            <a:r>
-              <a:rPr lang="fr-BE" sz="2800" dirty="0">
-                <a:solidFill>
-                  <a:schemeClr val="bg2">
-                    <a:lumMod val="75000"/>
-                  </a:schemeClr>
-                </a:solidFill>
-              </a:rPr>
-              <a:t>Conclusions : directions de développement</a:t>
-            </a:r>
-          </a:p>
-          <a:p>
-            <a:endParaRPr lang="fr-BE" sz="2800" noProof="0" dirty="0">
-              <a:solidFill>
-                <a:schemeClr val="bg2">
-                  <a:lumMod val="75000"/>
-                </a:schemeClr>
-              </a:solidFill>
-            </a:endParaRPr>
-          </a:p>
-        </p:txBody>
-      </p:sp>
-    </p:spTree>
-    <p:extLst>
-      <p:ext uri="{BB962C8B-B14F-4D97-AF65-F5344CB8AC3E}">
-        <p14:creationId xmlns:p14="http://schemas.microsoft.com/office/powerpoint/2010/main" val="3548948553"/>
+        <p14:creationId xmlns:p14="http://schemas.microsoft.com/office/powerpoint/2010/main" val="3769571330"/>
       </p:ext>
     </p:extLst>
   </p:cSld>
@@ -9080,7 +9033,7 @@
                   </a:schemeClr>
                 </a:solidFill>
               </a:rPr>
-              <a:t> (07/10/26) </a:t>
+              <a:t> </a:t>
             </a:r>
           </a:p>
           <a:p>
@@ -9092,7 +9045,7 @@
                   </a:schemeClr>
                 </a:solidFill>
               </a:rPr>
-              <a:t>Résultats rendement mot. cst (07/10/26) </a:t>
+              <a:t>Résultats rendement mot. cst </a:t>
             </a:r>
             <a:endParaRPr lang="fr-BE" sz="2800" noProof="0" dirty="0">
               <a:solidFill>
@@ -9220,6 +9173,348 @@
 </file>
 
 <file path=ppt/slides/slide20.xml><?xml version="1.0" encoding="utf-8"?>
+<p:sld xmlns:a="http://schemas.openxmlformats.org/drawingml/2006/main" xmlns:r="http://schemas.openxmlformats.org/officeDocument/2006/relationships" xmlns:p="http://schemas.openxmlformats.org/presentationml/2006/main">
+  <p:cSld>
+    <p:spTree>
+      <p:nvGrpSpPr>
+        <p:cNvPr id="1" name="">
+          <a:extLst>
+            <a:ext uri="{FF2B5EF4-FFF2-40B4-BE49-F238E27FC236}">
+              <a16:creationId xmlns:a16="http://schemas.microsoft.com/office/drawing/2014/main" id="{229F504E-1C06-21FB-C268-1A4EB340D3B0}"/>
+            </a:ext>
+          </a:extLst>
+        </p:cNvPr>
+        <p:cNvGrpSpPr/>
+        <p:nvPr/>
+      </p:nvGrpSpPr>
+      <p:grpSpPr>
+        <a:xfrm>
+          <a:off x="0" y="0"/>
+          <a:ext cx="0" cy="0"/>
+          <a:chOff x="0" y="0"/>
+          <a:chExt cx="0" cy="0"/>
+        </a:xfrm>
+      </p:grpSpPr>
+      <p:sp>
+        <p:nvSpPr>
+          <p:cNvPr id="2" name="Title 1">
+            <a:extLst>
+              <a:ext uri="{FF2B5EF4-FFF2-40B4-BE49-F238E27FC236}">
+                <a16:creationId xmlns:a16="http://schemas.microsoft.com/office/drawing/2014/main" id="{DE40D544-31D3-FC4F-CC62-D4D86AFC2518}"/>
+              </a:ext>
+            </a:extLst>
+          </p:cNvPr>
+          <p:cNvSpPr>
+            <a:spLocks noGrp="1"/>
+          </p:cNvSpPr>
+          <p:nvPr>
+            <p:ph type="title"/>
+          </p:nvPr>
+        </p:nvSpPr>
+        <p:spPr/>
+        <p:txBody>
+          <a:bodyPr/>
+          <a:lstStyle/>
+          <a:p>
+            <a:r>
+              <a:rPr lang="fr-BE" noProof="0" dirty="0" err="1"/>
+              <a:t>Outline</a:t>
+            </a:r>
+            <a:endParaRPr lang="fr-BE" noProof="0" dirty="0"/>
+          </a:p>
+        </p:txBody>
+      </p:sp>
+      <p:sp>
+        <p:nvSpPr>
+          <p:cNvPr id="3" name="Date Placeholder 2">
+            <a:extLst>
+              <a:ext uri="{FF2B5EF4-FFF2-40B4-BE49-F238E27FC236}">
+                <a16:creationId xmlns:a16="http://schemas.microsoft.com/office/drawing/2014/main" id="{4D8AE045-A4F1-F12C-DBC3-C48897E1A5F6}"/>
+              </a:ext>
+            </a:extLst>
+          </p:cNvPr>
+          <p:cNvSpPr>
+            <a:spLocks noGrp="1"/>
+          </p:cNvSpPr>
+          <p:nvPr>
+            <p:ph type="dt" sz="half" idx="10"/>
+          </p:nvPr>
+        </p:nvSpPr>
+        <p:spPr/>
+        <p:txBody>
+          <a:bodyPr/>
+          <a:lstStyle/>
+          <a:p>
+            <a:fld id="{CA9A9924-1784-4044-A2E4-3606370E1BB6}" type="datetime1">
+              <a:rPr lang="fr-BE" noProof="0" smtClean="0"/>
+              <a:t>14-10-26</a:t>
+            </a:fld>
+            <a:endParaRPr lang="fr-BE" noProof="0" dirty="0">
+              <a:latin typeface="Segoe UI Symbol" panose="020B0502040204020203" pitchFamily="34" charset="0"/>
+              <a:ea typeface="Segoe UI Symbol" panose="020B0502040204020203" pitchFamily="34" charset="0"/>
+            </a:endParaRPr>
+          </a:p>
+        </p:txBody>
+      </p:sp>
+      <p:sp>
+        <p:nvSpPr>
+          <p:cNvPr id="4" name="Slide Number Placeholder 3">
+            <a:extLst>
+              <a:ext uri="{FF2B5EF4-FFF2-40B4-BE49-F238E27FC236}">
+                <a16:creationId xmlns:a16="http://schemas.microsoft.com/office/drawing/2014/main" id="{39356ED3-07D9-1336-9FF3-FC1CCF2EB7DB}"/>
+              </a:ext>
+            </a:extLst>
+          </p:cNvPr>
+          <p:cNvSpPr>
+            <a:spLocks noGrp="1"/>
+          </p:cNvSpPr>
+          <p:nvPr>
+            <p:ph type="sldNum" sz="quarter" idx="4"/>
+          </p:nvPr>
+        </p:nvSpPr>
+        <p:spPr/>
+        <p:txBody>
+          <a:bodyPr/>
+          <a:lstStyle/>
+          <a:p>
+            <a:fld id="{46899FAB-5005-482A-88F2-FE97823A1A33}" type="slidenum">
+              <a:rPr lang="fr-BE" noProof="0" smtClean="0"/>
+              <a:pPr/>
+              <a:t>20</a:t>
+            </a:fld>
+            <a:r>
+              <a:rPr lang="fr-BE" noProof="0" dirty="0"/>
+              <a:t>/x</a:t>
+            </a:r>
+            <a:endParaRPr lang="fr-BE" noProof="0" dirty="0">
+              <a:latin typeface="Segoe UI Symbol" panose="020B0502040204020203" pitchFamily="34" charset="0"/>
+              <a:ea typeface="Segoe UI Symbol" panose="020B0502040204020203" pitchFamily="34" charset="0"/>
+            </a:endParaRPr>
+          </a:p>
+        </p:txBody>
+      </p:sp>
+      <p:sp>
+        <p:nvSpPr>
+          <p:cNvPr id="5" name="Content Placeholder 4">
+            <a:extLst>
+              <a:ext uri="{FF2B5EF4-FFF2-40B4-BE49-F238E27FC236}">
+                <a16:creationId xmlns:a16="http://schemas.microsoft.com/office/drawing/2014/main" id="{AEEE4E75-E193-F2D0-D9DB-25FFAFFF8747}"/>
+              </a:ext>
+            </a:extLst>
+          </p:cNvPr>
+          <p:cNvSpPr>
+            <a:spLocks noGrp="1"/>
+          </p:cNvSpPr>
+          <p:nvPr>
+            <p:ph idx="1"/>
+          </p:nvPr>
+        </p:nvSpPr>
+        <p:spPr>
+          <a:xfrm>
+            <a:off x="584809" y="1851545"/>
+            <a:ext cx="7552026" cy="3816482"/>
+          </a:xfrm>
+        </p:spPr>
+        <p:txBody>
+          <a:bodyPr>
+            <a:normAutofit/>
+          </a:bodyPr>
+          <a:lstStyle/>
+          <a:p>
+            <a:r>
+              <a:rPr lang="fr-BE" sz="2800" noProof="0" dirty="0">
+                <a:solidFill>
+                  <a:schemeClr val="bg2">
+                    <a:lumMod val="75000"/>
+                  </a:schemeClr>
+                </a:solidFill>
+              </a:rPr>
+              <a:t>Pourquoi ?</a:t>
+            </a:r>
+          </a:p>
+          <a:p>
+            <a:r>
+              <a:rPr lang="en-GB" sz="2800" dirty="0">
+                <a:solidFill>
+                  <a:schemeClr val="bg2">
+                    <a:lumMod val="75000"/>
+                  </a:schemeClr>
+                </a:solidFill>
+              </a:rPr>
+              <a:t>How it works ?</a:t>
+            </a:r>
+            <a:r>
+              <a:rPr lang="en-GB" sz="2800" dirty="0" err="1">
+                <a:solidFill>
+                  <a:schemeClr val="bg2">
+                    <a:lumMod val="75000"/>
+                  </a:schemeClr>
+                </a:solidFill>
+              </a:rPr>
+              <a:t>Calculateur</a:t>
+            </a:r>
+            <a:r>
+              <a:rPr lang="en-GB" sz="2800" dirty="0">
+                <a:solidFill>
+                  <a:schemeClr val="bg2">
+                    <a:lumMod val="75000"/>
+                  </a:schemeClr>
+                </a:solidFill>
+              </a:rPr>
+              <a:t> de consommation </a:t>
+            </a:r>
+          </a:p>
+          <a:p>
+            <a:r>
+              <a:rPr lang="fr-BE" sz="2800" noProof="0" dirty="0">
+                <a:solidFill>
+                  <a:schemeClr val="bg2">
+                    <a:lumMod val="75000"/>
+                  </a:schemeClr>
+                </a:solidFill>
+              </a:rPr>
+              <a:t>Résultats </a:t>
+            </a:r>
+            <a:r>
+              <a:rPr lang="fr-BE" sz="2800" dirty="0">
+                <a:solidFill>
+                  <a:schemeClr val="bg2">
+                    <a:lumMod val="75000"/>
+                  </a:schemeClr>
+                </a:solidFill>
+              </a:rPr>
+              <a:t>rendement mot. non cst</a:t>
+            </a:r>
+            <a:r>
+              <a:rPr lang="fr-BE" sz="2800" noProof="0" dirty="0">
+                <a:solidFill>
+                  <a:schemeClr val="bg2">
+                    <a:lumMod val="75000"/>
+                  </a:schemeClr>
+                </a:solidFill>
+              </a:rPr>
+              <a:t> </a:t>
+            </a:r>
+          </a:p>
+          <a:p>
+            <a:r>
+              <a:rPr lang="fr-BE" sz="2800" dirty="0">
+                <a:solidFill>
+                  <a:schemeClr val="bg2">
+                    <a:lumMod val="75000"/>
+                  </a:schemeClr>
+                </a:solidFill>
+              </a:rPr>
+              <a:t>Résultats rendement mot. cst</a:t>
+            </a:r>
+            <a:endParaRPr lang="fr-BE" sz="2800" noProof="0" dirty="0">
+              <a:solidFill>
+                <a:schemeClr val="bg2">
+                  <a:lumMod val="75000"/>
+                </a:schemeClr>
+              </a:solidFill>
+            </a:endParaRPr>
+          </a:p>
+          <a:p>
+            <a:r>
+              <a:rPr lang="fr-BE" sz="2800" noProof="0" dirty="0"/>
+              <a:t>Calcul de </a:t>
+            </a:r>
+            <a:r>
+              <a:rPr lang="fr-BE" sz="2800" noProof="0" dirty="0" err="1"/>
+              <a:t>sensitivities</a:t>
+            </a:r>
+            <a:endParaRPr lang="fr-BE" sz="2800" noProof="0" dirty="0"/>
+          </a:p>
+          <a:p>
+            <a:r>
+              <a:rPr lang="fr-BE" sz="2800" noProof="0" dirty="0">
+                <a:solidFill>
+                  <a:schemeClr val="bg2">
+                    <a:lumMod val="75000"/>
+                  </a:schemeClr>
+                </a:solidFill>
+              </a:rPr>
+              <a:t>Mass vs </a:t>
+            </a:r>
+            <a:r>
+              <a:rPr lang="fr-BE" sz="2800" noProof="0" dirty="0" err="1">
+                <a:solidFill>
+                  <a:schemeClr val="bg2">
+                    <a:lumMod val="75000"/>
+                  </a:schemeClr>
+                </a:solidFill>
+              </a:rPr>
+              <a:t>SCx</a:t>
+            </a:r>
+            <a:r>
+              <a:rPr lang="fr-BE" sz="2800" noProof="0" dirty="0">
+                <a:solidFill>
+                  <a:schemeClr val="bg2">
+                    <a:lumMod val="75000"/>
+                  </a:schemeClr>
+                </a:solidFill>
+              </a:rPr>
+              <a:t> </a:t>
+            </a:r>
+            <a:r>
+              <a:rPr lang="fr-BE" sz="2800" noProof="0" dirty="0" err="1">
+                <a:solidFill>
+                  <a:schemeClr val="bg2">
+                    <a:lumMod val="75000"/>
+                  </a:schemeClr>
+                </a:solidFill>
+              </a:rPr>
+              <a:t>tradeoff</a:t>
+            </a:r>
+            <a:r>
+              <a:rPr lang="fr-BE" sz="2800" noProof="0" dirty="0">
+                <a:solidFill>
+                  <a:schemeClr val="bg2">
+                    <a:lumMod val="75000"/>
+                  </a:schemeClr>
+                </a:solidFill>
+              </a:rPr>
+              <a:t> </a:t>
+            </a:r>
+          </a:p>
+          <a:p>
+            <a:r>
+              <a:rPr lang="fr-BE" sz="2800" dirty="0">
+                <a:solidFill>
+                  <a:schemeClr val="bg2">
+                    <a:lumMod val="75000"/>
+                  </a:schemeClr>
+                </a:solidFill>
+              </a:rPr>
+              <a:t>Conclusions : directions de développement</a:t>
+            </a:r>
+          </a:p>
+          <a:p>
+            <a:endParaRPr lang="fr-BE" sz="2800" noProof="0" dirty="0">
+              <a:solidFill>
+                <a:schemeClr val="bg2">
+                  <a:lumMod val="75000"/>
+                </a:schemeClr>
+              </a:solidFill>
+            </a:endParaRPr>
+          </a:p>
+        </p:txBody>
+      </p:sp>
+    </p:spTree>
+    <p:extLst>
+      <p:ext uri="{BB962C8B-B14F-4D97-AF65-F5344CB8AC3E}">
+        <p14:creationId xmlns:p14="http://schemas.microsoft.com/office/powerpoint/2010/main" val="3548948553"/>
+      </p:ext>
+    </p:extLst>
+  </p:cSld>
+  <p:clrMapOvr>
+    <a:masterClrMapping/>
+  </p:clrMapOvr>
+</p:sld>
+</file>
+
+<file path=ppt/slides/slide21.xml><?xml version="1.0" encoding="utf-8"?>
 <p:sld xmlns:a="http://schemas.openxmlformats.org/drawingml/2006/main" xmlns:r="http://schemas.openxmlformats.org/officeDocument/2006/relationships" xmlns:p="http://schemas.openxmlformats.org/presentationml/2006/main">
   <p:cSld>
     <p:spTree>
@@ -9332,7 +9627,7 @@
             <a:fld id="{46899FAB-5005-482A-88F2-FE97823A1A33}" type="slidenum">
               <a:rPr lang="fr-BE" noProof="0" smtClean="0"/>
               <a:pPr/>
-              <a:t>20</a:t>
+              <a:t>21</a:t>
             </a:fld>
             <a:r>
               <a:rPr lang="fr-BE" noProof="0" dirty="0"/>
@@ -9652,7 +9947,7 @@
 </p:sld>
 </file>
 
-<file path=ppt/slides/slide21.xml><?xml version="1.0" encoding="utf-8"?>
+<file path=ppt/slides/slide22.xml><?xml version="1.0" encoding="utf-8"?>
 <p:sld xmlns:a="http://schemas.openxmlformats.org/drawingml/2006/main" xmlns:r="http://schemas.openxmlformats.org/officeDocument/2006/relationships" xmlns:p="http://schemas.openxmlformats.org/presentationml/2006/main">
   <p:cSld>
     <p:spTree>
@@ -9760,7 +10055,7 @@
             <a:fld id="{46899FAB-5005-482A-88F2-FE97823A1A33}" type="slidenum">
               <a:rPr lang="fr-BE" noProof="0" smtClean="0"/>
               <a:pPr/>
-              <a:t>21</a:t>
+              <a:t>22</a:t>
             </a:fld>
             <a:r>
               <a:rPr lang="fr-BE" noProof="0" dirty="0"/>
@@ -9865,16 +10160,13 @@
               </a:rPr>
               <a:t>rendement mot. non cst</a:t>
             </a:r>
-            <a:r>
-              <a:rPr lang="fr-BE" sz="2800" noProof="0" dirty="0">
-                <a:solidFill>
-                  <a:schemeClr val="bg2">
-                    <a:lumMod val="75000"/>
-                  </a:schemeClr>
-                </a:solidFill>
-              </a:rPr>
-              <a:t> (07/10/26) </a:t>
-            </a:r>
+            <a:endParaRPr lang="fr-BE" sz="2800" noProof="0" dirty="0">
+              <a:solidFill>
+                <a:schemeClr val="bg2">
+                  <a:lumMod val="75000"/>
+                </a:schemeClr>
+              </a:solidFill>
+            </a:endParaRPr>
           </a:p>
           <a:p>
             <a:r>
@@ -9885,7 +10177,7 @@
                   </a:schemeClr>
                 </a:solidFill>
               </a:rPr>
-              <a:t>Résultats rendement mot. cst (07/10/26) </a:t>
+              <a:t>Résultats rendement mot. cst</a:t>
             </a:r>
             <a:endParaRPr lang="fr-BE" sz="2800" noProof="0" dirty="0">
               <a:solidFill>
@@ -9982,7 +10274,7 @@
 </p:sld>
 </file>
 
-<file path=ppt/slides/slide22.xml><?xml version="1.0" encoding="utf-8"?>
+<file path=ppt/slides/slide23.xml><?xml version="1.0" encoding="utf-8"?>
 <p:sld xmlns:a="http://schemas.openxmlformats.org/drawingml/2006/main" xmlns:r="http://schemas.openxmlformats.org/officeDocument/2006/relationships" xmlns:p="http://schemas.openxmlformats.org/presentationml/2006/main">
   <p:cSld>
     <p:spTree>
@@ -10111,7 +10403,7 @@
             <a:fld id="{46899FAB-5005-482A-88F2-FE97823A1A33}" type="slidenum">
               <a:rPr lang="fr-BE" noProof="0" smtClean="0"/>
               <a:pPr/>
-              <a:t>22</a:t>
+              <a:t>23</a:t>
             </a:fld>
             <a:r>
               <a:rPr lang="fr-BE" noProof="0" dirty="0"/>
@@ -10573,7 +10865,7 @@
 </p:sld>
 </file>
 
-<file path=ppt/slides/slide23.xml><?xml version="1.0" encoding="utf-8"?>
+<file path=ppt/slides/slide24.xml><?xml version="1.0" encoding="utf-8"?>
 <p:sld xmlns:a="http://schemas.openxmlformats.org/drawingml/2006/main" xmlns:r="http://schemas.openxmlformats.org/officeDocument/2006/relationships" xmlns:p="http://schemas.openxmlformats.org/presentationml/2006/main">
   <p:cSld>
     <p:spTree>
@@ -10681,7 +10973,7 @@
             <a:fld id="{46899FAB-5005-482A-88F2-FE97823A1A33}" type="slidenum">
               <a:rPr lang="fr-BE" noProof="0" smtClean="0"/>
               <a:pPr/>
-              <a:t>23</a:t>
+              <a:t>24</a:t>
             </a:fld>
             <a:r>
               <a:rPr lang="fr-BE" noProof="0" dirty="0"/>
@@ -10786,16 +11078,13 @@
               </a:rPr>
               <a:t>rendement mot. non cst</a:t>
             </a:r>
-            <a:r>
-              <a:rPr lang="fr-BE" sz="2800" noProof="0" dirty="0">
-                <a:solidFill>
-                  <a:schemeClr val="bg2">
-                    <a:lumMod val="75000"/>
-                  </a:schemeClr>
-                </a:solidFill>
-              </a:rPr>
-              <a:t> (07/10/26) </a:t>
-            </a:r>
+            <a:endParaRPr lang="fr-BE" sz="2800" noProof="0" dirty="0">
+              <a:solidFill>
+                <a:schemeClr val="bg2">
+                  <a:lumMod val="75000"/>
+                </a:schemeClr>
+              </a:solidFill>
+            </a:endParaRPr>
           </a:p>
           <a:p>
             <a:r>
@@ -10806,7 +11095,7 @@
                   </a:schemeClr>
                 </a:solidFill>
               </a:rPr>
-              <a:t>Résultats rendement mot. cst (07/10/26) </a:t>
+              <a:t>Résultats rendement mot. cst</a:t>
             </a:r>
             <a:endParaRPr lang="fr-BE" sz="2800" noProof="0" dirty="0">
               <a:solidFill>
@@ -10927,7 +11216,7 @@
 </p:sld>
 </file>
 
-<file path=ppt/slides/slide24.xml><?xml version="1.0" encoding="utf-8"?>
+<file path=ppt/slides/slide25.xml><?xml version="1.0" encoding="utf-8"?>
 <p:sld xmlns:a="http://schemas.openxmlformats.org/drawingml/2006/main" xmlns:r="http://schemas.openxmlformats.org/officeDocument/2006/relationships" xmlns:p="http://schemas.openxmlformats.org/presentationml/2006/main">
   <p:cSld>
     <p:spTree>
@@ -11028,7 +11317,7 @@
             <a:fld id="{46899FAB-5005-482A-88F2-FE97823A1A33}" type="slidenum">
               <a:rPr lang="fr-BE" noProof="0" smtClean="0"/>
               <a:pPr/>
-              <a:t>24</a:t>
+              <a:t>25</a:t>
             </a:fld>
             <a:r>
               <a:rPr lang="fr-BE" noProof="0" dirty="0"/>
@@ -11305,7 +11594,7 @@
 </p:sld>
 </file>
 
-<file path=ppt/slides/slide25.xml><?xml version="1.0" encoding="utf-8"?>
+<file path=ppt/slides/slide26.xml><?xml version="1.0" encoding="utf-8"?>
 <p:sld xmlns:a="http://schemas.openxmlformats.org/drawingml/2006/main" xmlns:r="http://schemas.openxmlformats.org/officeDocument/2006/relationships" xmlns:p="http://schemas.openxmlformats.org/presentationml/2006/main">
   <p:cSld>
     <p:spTree>
@@ -11413,7 +11702,7 @@
             <a:fld id="{46899FAB-5005-482A-88F2-FE97823A1A33}" type="slidenum">
               <a:rPr lang="fr-BE" noProof="0" smtClean="0"/>
               <a:pPr/>
-              <a:t>25</a:t>
+              <a:t>26</a:t>
             </a:fld>
             <a:r>
               <a:rPr lang="fr-BE" noProof="0" dirty="0"/>
@@ -11662,7 +11951,7 @@
 </p:sld>
 </file>
 
-<file path=ppt/slides/slide26.xml><?xml version="1.0" encoding="utf-8"?>
+<file path=ppt/slides/slide27.xml><?xml version="1.0" encoding="utf-8"?>
 <p:sld xmlns:a="http://schemas.openxmlformats.org/drawingml/2006/main" xmlns:r="http://schemas.openxmlformats.org/officeDocument/2006/relationships" xmlns:p="http://schemas.openxmlformats.org/presentationml/2006/main">
   <p:cSld>
     <p:spTree>
@@ -11764,7 +12053,7 @@
             <a:fld id="{46899FAB-5005-482A-88F2-FE97823A1A33}" type="slidenum">
               <a:rPr lang="en-GB" smtClean="0"/>
               <a:pPr/>
-              <a:t>26</a:t>
+              <a:t>27</a:t>
             </a:fld>
             <a:r>
               <a:rPr lang="en-GB"/>
@@ -12214,7 +12503,7 @@
 </p:sld>
 </file>
 
-<file path=ppt/slides/slide27.xml><?xml version="1.0" encoding="utf-8"?>
+<file path=ppt/slides/slide28.xml><?xml version="1.0" encoding="utf-8"?>
 <p:sld xmlns:a="http://schemas.openxmlformats.org/drawingml/2006/main" xmlns:r="http://schemas.openxmlformats.org/officeDocument/2006/relationships" xmlns:p="http://schemas.openxmlformats.org/presentationml/2006/main" show="0">
   <p:cSld>
     <p:spTree>
@@ -12321,7 +12610,7 @@
             <a:fld id="{46899FAB-5005-482A-88F2-FE97823A1A33}" type="slidenum">
               <a:rPr lang="en-GB" smtClean="0"/>
               <a:pPr/>
-              <a:t>27</a:t>
+              <a:t>28</a:t>
             </a:fld>
             <a:r>
               <a:rPr lang="en-GB"/>
@@ -12347,7 +12636,7 @@
 </p:sld>
 </file>
 
-<file path=ppt/slides/slide28.xml><?xml version="1.0" encoding="utf-8"?>
+<file path=ppt/slides/slide29.xml><?xml version="1.0" encoding="utf-8"?>
 <p:sld xmlns:a="http://schemas.openxmlformats.org/drawingml/2006/main" xmlns:r="http://schemas.openxmlformats.org/officeDocument/2006/relationships" xmlns:p="http://schemas.openxmlformats.org/presentationml/2006/main" show="0">
   <p:cSld>
     <p:spTree>
@@ -12464,7 +12753,7 @@
             <a:fld id="{46899FAB-5005-482A-88F2-FE97823A1A33}" type="slidenum">
               <a:rPr lang="fr-BE" noProof="0" smtClean="0"/>
               <a:pPr/>
-              <a:t>28</a:t>
+              <a:t>29</a:t>
             </a:fld>
             <a:r>
               <a:rPr lang="fr-BE" noProof="0" dirty="0"/>
@@ -12874,7 +13163,255 @@
 </p:sld>
 </file>
 
-<file path=ppt/slides/slide29.xml><?xml version="1.0" encoding="utf-8"?>
+<file path=ppt/slides/slide3.xml><?xml version="1.0" encoding="utf-8"?>
+<p:sld xmlns:a="http://schemas.openxmlformats.org/drawingml/2006/main" xmlns:r="http://schemas.openxmlformats.org/officeDocument/2006/relationships" xmlns:p="http://schemas.openxmlformats.org/presentationml/2006/main">
+  <p:cSld>
+    <p:spTree>
+      <p:nvGrpSpPr>
+        <p:cNvPr id="1" name=""/>
+        <p:cNvGrpSpPr/>
+        <p:nvPr/>
+      </p:nvGrpSpPr>
+      <p:grpSpPr>
+        <a:xfrm>
+          <a:off x="0" y="0"/>
+          <a:ext cx="0" cy="0"/>
+          <a:chOff x="0" y="0"/>
+          <a:chExt cx="0" cy="0"/>
+        </a:xfrm>
+      </p:grpSpPr>
+      <p:sp>
+        <p:nvSpPr>
+          <p:cNvPr id="2" name="Title 1">
+            <a:extLst>
+              <a:ext uri="{FF2B5EF4-FFF2-40B4-BE49-F238E27FC236}">
+                <a16:creationId xmlns:a16="http://schemas.microsoft.com/office/drawing/2014/main" id="{C3EAB61A-241E-2A59-8C78-172416DFD9CE}"/>
+              </a:ext>
+            </a:extLst>
+          </p:cNvPr>
+          <p:cNvSpPr>
+            <a:spLocks noGrp="1"/>
+          </p:cNvSpPr>
+          <p:nvPr>
+            <p:ph type="title"/>
+          </p:nvPr>
+        </p:nvSpPr>
+        <p:spPr>
+          <a:xfrm>
+            <a:off x="0" y="1"/>
+            <a:ext cx="7341704" cy="681036"/>
+          </a:xfrm>
+        </p:spPr>
+        <p:txBody>
+          <a:bodyPr/>
+          <a:lstStyle/>
+          <a:p>
+            <a:r>
+              <a:rPr lang="fr-BE" noProof="0" dirty="0"/>
+              <a:t>Pourquoi modéliser la consommation ? </a:t>
+            </a:r>
+          </a:p>
+        </p:txBody>
+      </p:sp>
+      <p:sp>
+        <p:nvSpPr>
+          <p:cNvPr id="3" name="Date Placeholder 2">
+            <a:extLst>
+              <a:ext uri="{FF2B5EF4-FFF2-40B4-BE49-F238E27FC236}">
+                <a16:creationId xmlns:a16="http://schemas.microsoft.com/office/drawing/2014/main" id="{AB92D011-DCA9-6A96-DF26-2D945CB64C89}"/>
+              </a:ext>
+            </a:extLst>
+          </p:cNvPr>
+          <p:cNvSpPr>
+            <a:spLocks noGrp="1"/>
+          </p:cNvSpPr>
+          <p:nvPr>
+            <p:ph type="dt" sz="half" idx="10"/>
+          </p:nvPr>
+        </p:nvSpPr>
+        <p:spPr/>
+        <p:txBody>
+          <a:bodyPr/>
+          <a:lstStyle/>
+          <a:p>
+            <a:fld id="{CA9A9924-1784-4044-A2E4-3606370E1BB6}" type="datetime1">
+              <a:rPr lang="fr-BE" noProof="0" smtClean="0"/>
+              <a:t>14-10-26</a:t>
+            </a:fld>
+            <a:endParaRPr lang="fr-BE" noProof="0" dirty="0">
+              <a:latin typeface="Segoe UI Symbol" panose="020B0502040204020203" pitchFamily="34" charset="0"/>
+              <a:ea typeface="Segoe UI Symbol" panose="020B0502040204020203" pitchFamily="34" charset="0"/>
+            </a:endParaRPr>
+          </a:p>
+        </p:txBody>
+      </p:sp>
+      <p:sp>
+        <p:nvSpPr>
+          <p:cNvPr id="4" name="Slide Number Placeholder 3">
+            <a:extLst>
+              <a:ext uri="{FF2B5EF4-FFF2-40B4-BE49-F238E27FC236}">
+                <a16:creationId xmlns:a16="http://schemas.microsoft.com/office/drawing/2014/main" id="{7EFE3B01-CF44-97A1-5BA0-7211C90C3AF5}"/>
+              </a:ext>
+            </a:extLst>
+          </p:cNvPr>
+          <p:cNvSpPr>
+            <a:spLocks noGrp="1"/>
+          </p:cNvSpPr>
+          <p:nvPr>
+            <p:ph type="sldNum" sz="quarter" idx="4"/>
+          </p:nvPr>
+        </p:nvSpPr>
+        <p:spPr/>
+        <p:txBody>
+          <a:bodyPr/>
+          <a:lstStyle/>
+          <a:p>
+            <a:fld id="{46899FAB-5005-482A-88F2-FE97823A1A33}" type="slidenum">
+              <a:rPr lang="fr-BE" noProof="0" smtClean="0"/>
+              <a:pPr/>
+              <a:t>3</a:t>
+            </a:fld>
+            <a:r>
+              <a:rPr lang="fr-BE" noProof="0" dirty="0"/>
+              <a:t>/x</a:t>
+            </a:r>
+            <a:endParaRPr lang="fr-BE" noProof="0" dirty="0">
+              <a:latin typeface="Segoe UI Symbol" panose="020B0502040204020203" pitchFamily="34" charset="0"/>
+              <a:ea typeface="Segoe UI Symbol" panose="020B0502040204020203" pitchFamily="34" charset="0"/>
+            </a:endParaRPr>
+          </a:p>
+        </p:txBody>
+      </p:sp>
+      <p:sp>
+        <p:nvSpPr>
+          <p:cNvPr id="5" name="Content Placeholder 4">
+            <a:extLst>
+              <a:ext uri="{FF2B5EF4-FFF2-40B4-BE49-F238E27FC236}">
+                <a16:creationId xmlns:a16="http://schemas.microsoft.com/office/drawing/2014/main" id="{925F3688-C50B-3E98-6569-14DCFF4B1B12}"/>
+              </a:ext>
+            </a:extLst>
+          </p:cNvPr>
+          <p:cNvSpPr>
+            <a:spLocks noGrp="1"/>
+          </p:cNvSpPr>
+          <p:nvPr>
+            <p:ph idx="1"/>
+          </p:nvPr>
+        </p:nvSpPr>
+        <p:spPr>
+          <a:xfrm>
+            <a:off x="601248" y="1261824"/>
+            <a:ext cx="7979536" cy="4502871"/>
+          </a:xfrm>
+        </p:spPr>
+        <p:txBody>
+          <a:bodyPr>
+            <a:normAutofit/>
+          </a:bodyPr>
+          <a:lstStyle/>
+          <a:p>
+            <a:pPr marL="457200" indent="-457200">
+              <a:buFont typeface="+mj-lt"/>
+              <a:buAutoNum type="arabicParenR"/>
+            </a:pPr>
+            <a:r>
+              <a:rPr lang="fr-BE" noProof="0" dirty="0"/>
+              <a:t>Donne des infos sur la direction dans laquelle aller pour améliorer la voiture </a:t>
+            </a:r>
+          </a:p>
+          <a:p>
+            <a:pPr marL="1143000" lvl="1" indent="-457200"/>
+            <a:r>
+              <a:rPr lang="fr-BE" noProof="0" dirty="0"/>
+              <a:t>Quelle amélioration aura le + gros impact ?</a:t>
+            </a:r>
+          </a:p>
+          <a:p>
+            <a:pPr marL="1600200" lvl="2" indent="-457200"/>
+            <a:r>
+              <a:rPr lang="fr-BE" noProof="0" dirty="0"/>
+              <a:t>Doit-on prioriser la réduction de la masse, du Cx, des pertes ?</a:t>
+            </a:r>
+          </a:p>
+          <a:p>
+            <a:pPr marL="1143000" lvl="1" indent="-457200"/>
+            <a:r>
+              <a:rPr lang="fr-BE" noProof="0" dirty="0"/>
+              <a:t>Cartes de </a:t>
+            </a:r>
+            <a:r>
+              <a:rPr lang="fr-BE" noProof="0" dirty="0" err="1"/>
+              <a:t>tradeoff</a:t>
+            </a:r>
+            <a:r>
+              <a:rPr lang="fr-BE" noProof="0" dirty="0"/>
+              <a:t> </a:t>
+            </a:r>
+            <a:r>
+              <a:rPr lang="fr-BE" noProof="0" dirty="0" err="1"/>
+              <a:t>SCx</a:t>
+            </a:r>
+            <a:r>
+              <a:rPr lang="fr-BE" noProof="0" dirty="0"/>
+              <a:t> vs m, …</a:t>
+            </a:r>
+          </a:p>
+          <a:p>
+            <a:pPr marL="1600200" lvl="2" indent="-457200"/>
+            <a:r>
+              <a:rPr lang="fr-BE" noProof="0" dirty="0"/>
+              <a:t>Est-ce une bonne idée d’avoir une coque avec Cx faible mais + lourde ?</a:t>
+            </a:r>
+          </a:p>
+          <a:p>
+            <a:pPr marL="1143000" lvl="1" indent="-457200"/>
+            <a:r>
+              <a:rPr lang="fr-BE" noProof="0" dirty="0"/>
+              <a:t>Déterminer le </a:t>
+            </a:r>
+            <a:r>
+              <a:rPr lang="fr-BE" noProof="0" dirty="0" err="1"/>
+              <a:t>gear</a:t>
+            </a:r>
+            <a:r>
+              <a:rPr lang="fr-BE" noProof="0" dirty="0"/>
+              <a:t> ratio optimal pour utiliser le moteur dans sa plage d’efficience max.</a:t>
+            </a:r>
+          </a:p>
+          <a:p>
+            <a:pPr marL="1143000" lvl="1" indent="-457200"/>
+            <a:r>
+              <a:rPr lang="fr-BE" dirty="0"/>
+              <a:t>…</a:t>
+            </a:r>
+            <a:endParaRPr lang="fr-BE" noProof="0" dirty="0"/>
+          </a:p>
+          <a:p>
+            <a:pPr marL="457200" indent="-457200">
+              <a:buFont typeface="+mj-lt"/>
+              <a:buAutoNum type="arabicParenR"/>
+            </a:pPr>
+            <a:r>
+              <a:rPr lang="fr-BE" noProof="0" dirty="0"/>
+              <a:t>Détermine la conduite optimale pour maximiser l’efficience </a:t>
+            </a:r>
+          </a:p>
+        </p:txBody>
+      </p:sp>
+    </p:spTree>
+    <p:extLst>
+      <p:ext uri="{BB962C8B-B14F-4D97-AF65-F5344CB8AC3E}">
+        <p14:creationId xmlns:p14="http://schemas.microsoft.com/office/powerpoint/2010/main" val="1953940426"/>
+      </p:ext>
+    </p:extLst>
+  </p:cSld>
+  <p:clrMapOvr>
+    <a:masterClrMapping/>
+  </p:clrMapOvr>
+</p:sld>
+</file>
+
+<file path=ppt/slides/slide30.xml><?xml version="1.0" encoding="utf-8"?>
 <p:sld xmlns:a="http://schemas.openxmlformats.org/drawingml/2006/main" xmlns:r="http://schemas.openxmlformats.org/officeDocument/2006/relationships" xmlns:p="http://schemas.openxmlformats.org/presentationml/2006/main" show="0">
   <p:cSld>
     <p:spTree>
@@ -12988,7 +13525,7 @@
             <a:fld id="{46899FAB-5005-482A-88F2-FE97823A1A33}" type="slidenum">
               <a:rPr lang="en-GB" smtClean="0"/>
               <a:pPr/>
-              <a:t>29</a:t>
+              <a:t>30</a:t>
             </a:fld>
             <a:r>
               <a:rPr lang="en-GB"/>
@@ -13111,8 +13648,8 @@
           </a:prstGeom>
         </p:spPr>
       </p:pic>
-      <mc:AlternateContent xmlns:mc="http://schemas.openxmlformats.org/markup-compatibility/2006">
-        <mc:Choice xmlns:a14="http://schemas.microsoft.com/office/drawing/2010/main" Requires="a14">
+      <mc:AlternateContent xmlns:mc="http://schemas.openxmlformats.org/markup-compatibility/2006" xmlns:a14="http://schemas.microsoft.com/office/drawing/2010/main">
+        <mc:Choice Requires="a14">
           <p:sp>
             <p:nvSpPr>
               <p:cNvPr id="23" name="TextBox 22">
@@ -13223,7 +13760,7 @@
             </p:txBody>
           </p:sp>
         </mc:Choice>
-        <mc:Fallback>
+        <mc:Fallback xmlns="">
           <p:sp>
             <p:nvSpPr>
               <p:cNvPr id="23" name="TextBox 22">
@@ -13406,254 +13943,6 @@
 </p:sld>
 </file>
 
-<file path=ppt/slides/slide3.xml><?xml version="1.0" encoding="utf-8"?>
-<p:sld xmlns:a="http://schemas.openxmlformats.org/drawingml/2006/main" xmlns:r="http://schemas.openxmlformats.org/officeDocument/2006/relationships" xmlns:p="http://schemas.openxmlformats.org/presentationml/2006/main">
-  <p:cSld>
-    <p:spTree>
-      <p:nvGrpSpPr>
-        <p:cNvPr id="1" name=""/>
-        <p:cNvGrpSpPr/>
-        <p:nvPr/>
-      </p:nvGrpSpPr>
-      <p:grpSpPr>
-        <a:xfrm>
-          <a:off x="0" y="0"/>
-          <a:ext cx="0" cy="0"/>
-          <a:chOff x="0" y="0"/>
-          <a:chExt cx="0" cy="0"/>
-        </a:xfrm>
-      </p:grpSpPr>
-      <p:sp>
-        <p:nvSpPr>
-          <p:cNvPr id="2" name="Title 1">
-            <a:extLst>
-              <a:ext uri="{FF2B5EF4-FFF2-40B4-BE49-F238E27FC236}">
-                <a16:creationId xmlns:a16="http://schemas.microsoft.com/office/drawing/2014/main" id="{C3EAB61A-241E-2A59-8C78-172416DFD9CE}"/>
-              </a:ext>
-            </a:extLst>
-          </p:cNvPr>
-          <p:cNvSpPr>
-            <a:spLocks noGrp="1"/>
-          </p:cNvSpPr>
-          <p:nvPr>
-            <p:ph type="title"/>
-          </p:nvPr>
-        </p:nvSpPr>
-        <p:spPr>
-          <a:xfrm>
-            <a:off x="0" y="1"/>
-            <a:ext cx="7341704" cy="681036"/>
-          </a:xfrm>
-        </p:spPr>
-        <p:txBody>
-          <a:bodyPr/>
-          <a:lstStyle/>
-          <a:p>
-            <a:r>
-              <a:rPr lang="fr-BE" noProof="0" dirty="0"/>
-              <a:t>Pourquoi modéliser la consommation ? </a:t>
-            </a:r>
-          </a:p>
-        </p:txBody>
-      </p:sp>
-      <p:sp>
-        <p:nvSpPr>
-          <p:cNvPr id="3" name="Date Placeholder 2">
-            <a:extLst>
-              <a:ext uri="{FF2B5EF4-FFF2-40B4-BE49-F238E27FC236}">
-                <a16:creationId xmlns:a16="http://schemas.microsoft.com/office/drawing/2014/main" id="{AB92D011-DCA9-6A96-DF26-2D945CB64C89}"/>
-              </a:ext>
-            </a:extLst>
-          </p:cNvPr>
-          <p:cNvSpPr>
-            <a:spLocks noGrp="1"/>
-          </p:cNvSpPr>
-          <p:nvPr>
-            <p:ph type="dt" sz="half" idx="10"/>
-          </p:nvPr>
-        </p:nvSpPr>
-        <p:spPr/>
-        <p:txBody>
-          <a:bodyPr/>
-          <a:lstStyle/>
-          <a:p>
-            <a:fld id="{CA9A9924-1784-4044-A2E4-3606370E1BB6}" type="datetime1">
-              <a:rPr lang="fr-BE" noProof="0" smtClean="0"/>
-              <a:t>14-10-26</a:t>
-            </a:fld>
-            <a:endParaRPr lang="fr-BE" noProof="0" dirty="0">
-              <a:latin typeface="Segoe UI Symbol" panose="020B0502040204020203" pitchFamily="34" charset="0"/>
-              <a:ea typeface="Segoe UI Symbol" panose="020B0502040204020203" pitchFamily="34" charset="0"/>
-            </a:endParaRPr>
-          </a:p>
-        </p:txBody>
-      </p:sp>
-      <p:sp>
-        <p:nvSpPr>
-          <p:cNvPr id="4" name="Slide Number Placeholder 3">
-            <a:extLst>
-              <a:ext uri="{FF2B5EF4-FFF2-40B4-BE49-F238E27FC236}">
-                <a16:creationId xmlns:a16="http://schemas.microsoft.com/office/drawing/2014/main" id="{7EFE3B01-CF44-97A1-5BA0-7211C90C3AF5}"/>
-              </a:ext>
-            </a:extLst>
-          </p:cNvPr>
-          <p:cNvSpPr>
-            <a:spLocks noGrp="1"/>
-          </p:cNvSpPr>
-          <p:nvPr>
-            <p:ph type="sldNum" sz="quarter" idx="4"/>
-          </p:nvPr>
-        </p:nvSpPr>
-        <p:spPr/>
-        <p:txBody>
-          <a:bodyPr/>
-          <a:lstStyle/>
-          <a:p>
-            <a:fld id="{46899FAB-5005-482A-88F2-FE97823A1A33}" type="slidenum">
-              <a:rPr lang="fr-BE" noProof="0" smtClean="0"/>
-              <a:pPr/>
-              <a:t>3</a:t>
-            </a:fld>
-            <a:r>
-              <a:rPr lang="fr-BE" noProof="0" dirty="0"/>
-              <a:t>/x</a:t>
-            </a:r>
-            <a:endParaRPr lang="fr-BE" noProof="0" dirty="0">
-              <a:latin typeface="Segoe UI Symbol" panose="020B0502040204020203" pitchFamily="34" charset="0"/>
-              <a:ea typeface="Segoe UI Symbol" panose="020B0502040204020203" pitchFamily="34" charset="0"/>
-            </a:endParaRPr>
-          </a:p>
-        </p:txBody>
-      </p:sp>
-      <p:sp>
-        <p:nvSpPr>
-          <p:cNvPr id="5" name="Content Placeholder 4">
-            <a:extLst>
-              <a:ext uri="{FF2B5EF4-FFF2-40B4-BE49-F238E27FC236}">
-                <a16:creationId xmlns:a16="http://schemas.microsoft.com/office/drawing/2014/main" id="{925F3688-C50B-3E98-6569-14DCFF4B1B12}"/>
-              </a:ext>
-            </a:extLst>
-          </p:cNvPr>
-          <p:cNvSpPr>
-            <a:spLocks noGrp="1"/>
-          </p:cNvSpPr>
-          <p:nvPr>
-            <p:ph idx="1"/>
-          </p:nvPr>
-        </p:nvSpPr>
-        <p:spPr>
-          <a:xfrm>
-            <a:off x="601248" y="1261824"/>
-            <a:ext cx="7979536" cy="4502871"/>
-          </a:xfrm>
-        </p:spPr>
-        <p:txBody>
-          <a:bodyPr>
-            <a:normAutofit/>
-          </a:bodyPr>
-          <a:lstStyle/>
-          <a:p>
-            <a:pPr marL="457200" indent="-457200">
-              <a:buFont typeface="+mj-lt"/>
-              <a:buAutoNum type="arabicParenR"/>
-            </a:pPr>
-            <a:r>
-              <a:rPr lang="fr-BE" noProof="0" dirty="0"/>
-              <a:t>Donne des infos sur la direction dans laquelle aller pour améliorer la voiture </a:t>
-            </a:r>
-          </a:p>
-          <a:p>
-            <a:pPr marL="1143000" lvl="1" indent="-457200"/>
-            <a:r>
-              <a:rPr lang="fr-BE" noProof="0" dirty="0"/>
-              <a:t>Quelle amélioration aura le + gros impact ?</a:t>
-            </a:r>
-          </a:p>
-          <a:p>
-            <a:pPr marL="1600200" lvl="2" indent="-457200"/>
-            <a:r>
-              <a:rPr lang="fr-BE" noProof="0" dirty="0"/>
-              <a:t>Doit-on prioriser la réduction de la masse, du Cx, des pertes ?</a:t>
-            </a:r>
-          </a:p>
-          <a:p>
-            <a:pPr marL="1143000" lvl="1" indent="-457200"/>
-            <a:r>
-              <a:rPr lang="fr-BE" noProof="0" dirty="0"/>
-              <a:t>Cartes de </a:t>
-            </a:r>
-            <a:r>
-              <a:rPr lang="fr-BE" noProof="0" dirty="0" err="1"/>
-              <a:t>tradeoff</a:t>
-            </a:r>
-            <a:r>
-              <a:rPr lang="fr-BE" noProof="0" dirty="0"/>
-              <a:t> </a:t>
-            </a:r>
-            <a:r>
-              <a:rPr lang="fr-BE" noProof="0" dirty="0" err="1"/>
-              <a:t>SCx</a:t>
-            </a:r>
-            <a:r>
-              <a:rPr lang="fr-BE" noProof="0" dirty="0"/>
-              <a:t> vs m, …</a:t>
-            </a:r>
-          </a:p>
-          <a:p>
-            <a:pPr marL="1600200" lvl="2" indent="-457200"/>
-            <a:r>
-              <a:rPr lang="fr-BE" noProof="0" dirty="0"/>
-              <a:t>Est-ce une bonne idée d’avoir une coque avec Cx faible mais + lourde ?</a:t>
-            </a:r>
-          </a:p>
-          <a:p>
-            <a:pPr marL="1143000" lvl="1" indent="-457200"/>
-            <a:r>
-              <a:rPr lang="fr-BE" noProof="0" dirty="0"/>
-              <a:t>Déterminer le </a:t>
-            </a:r>
-            <a:r>
-              <a:rPr lang="fr-BE" noProof="0" dirty="0" err="1"/>
-              <a:t>gear</a:t>
-            </a:r>
-            <a:r>
-              <a:rPr lang="fr-BE" noProof="0" dirty="0"/>
-              <a:t> ratio optimal pour utiliser le moteur dans sa plage d’efficience max.</a:t>
-            </a:r>
-          </a:p>
-          <a:p>
-            <a:pPr marL="1143000" lvl="1" indent="-457200"/>
-            <a:r>
-              <a:rPr lang="fr-BE" dirty="0"/>
-              <a:t>…</a:t>
-            </a:r>
-            <a:endParaRPr lang="fr-BE" noProof="0" dirty="0"/>
-          </a:p>
-          <a:p>
-            <a:pPr marL="457200" indent="-457200">
-              <a:buFont typeface="+mj-lt"/>
-              <a:buAutoNum type="arabicParenR"/>
-            </a:pPr>
-            <a:r>
-              <a:rPr lang="fr-BE" noProof="0" dirty="0"/>
-              <a:t>Détermine la conduite optimale pour maximiser l’efficience </a:t>
-            </a:r>
-          </a:p>
-        </p:txBody>
-      </p:sp>
-    </p:spTree>
-    <p:extLst>
-      <p:ext uri="{BB962C8B-B14F-4D97-AF65-F5344CB8AC3E}">
-        <p14:creationId xmlns:p14="http://schemas.microsoft.com/office/powerpoint/2010/main" val="1953940426"/>
-      </p:ext>
-    </p:extLst>
-  </p:cSld>
-  <p:clrMapOvr>
-    <a:masterClrMapping/>
-  </p:clrMapOvr>
-</p:sld>
-</file>
-
 <file path=ppt/slides/slide4.xml><?xml version="1.0" encoding="utf-8"?>
 <p:sld xmlns:a="http://schemas.openxmlformats.org/drawingml/2006/main" xmlns:r="http://schemas.openxmlformats.org/officeDocument/2006/relationships" xmlns:p="http://schemas.openxmlformats.org/presentationml/2006/main">
   <p:cSld>
@@ -13849,16 +14138,13 @@
               </a:rPr>
               <a:t>rendement mot. non cst</a:t>
             </a:r>
-            <a:r>
-              <a:rPr lang="fr-BE" sz="2800" noProof="0" dirty="0">
-                <a:solidFill>
-                  <a:schemeClr val="bg2">
-                    <a:lumMod val="75000"/>
-                  </a:schemeClr>
-                </a:solidFill>
-              </a:rPr>
-              <a:t> (07/10/26) </a:t>
-            </a:r>
+            <a:endParaRPr lang="fr-BE" sz="2800" noProof="0" dirty="0">
+              <a:solidFill>
+                <a:schemeClr val="bg2">
+                  <a:lumMod val="75000"/>
+                </a:schemeClr>
+              </a:solidFill>
+            </a:endParaRPr>
           </a:p>
           <a:p>
             <a:r>
@@ -13869,15 +14155,8 @@
                   </a:schemeClr>
                 </a:solidFill>
               </a:rPr>
-              <a:t>Résultats rendement mot. cst (07/10/26) </a:t>
-            </a:r>
-            <a:endParaRPr lang="fr-BE" sz="2800" noProof="0" dirty="0">
-              <a:solidFill>
-                <a:schemeClr val="bg2">
-                  <a:lumMod val="75000"/>
-                </a:schemeClr>
-              </a:solidFill>
-            </a:endParaRPr>
+              <a:t>Résultats rendement mot. cst </a:t>
+            </a:r>
           </a:p>
           <a:p>
             <a:r>
